--- a/Slides/Module 06 React Hook Patterns.pptx
+++ b/Slides/Module 06 React Hook Patterns.pptx
@@ -6858,7 +6858,7 @@
             </a:pPr>
             <a:r>
               <a:rPr lang="en-US" sz="2800" dirty="0"/>
-              <a:t>Adeel Bhutta, Rob Simmons and Mitch Wand</a:t>
+              <a:t>Adeel Bhutta and Mitch Wand</a:t>
             </a:r>
           </a:p>
           <a:p>
@@ -30291,7 +30291,7 @@
 </file>
 
 <file path=ppt/slides/slide36.xml><?xml version="1.0" encoding="utf-8"?>
-<p:sld xmlns:a="http://schemas.openxmlformats.org/drawingml/2006/main" xmlns:r="http://schemas.openxmlformats.org/officeDocument/2006/relationships" xmlns:p="http://schemas.openxmlformats.org/presentationml/2006/main" show="0">
+<p:sld xmlns:a="http://schemas.openxmlformats.org/drawingml/2006/main" xmlns:r="http://schemas.openxmlformats.org/officeDocument/2006/relationships" xmlns:p="http://schemas.openxmlformats.org/presentationml/2006/main">
   <p:cSld>
     <p:spTree>
       <p:nvGrpSpPr>
@@ -33832,8 +33832,8 @@
         </p:nvGrpSpPr>
         <p:grpSpPr>
           <a:xfrm>
-            <a:off x="1010798" y="4953968"/>
-            <a:ext cx="2797629" cy="1380023"/>
+            <a:off x="1096824" y="5283042"/>
+            <a:ext cx="2797629" cy="1016157"/>
             <a:chOff x="1687285" y="5076030"/>
             <a:chExt cx="2797629" cy="1380023"/>
           </a:xfrm>

--- a/Slides/Module 06 React Hook Patterns.pptx
+++ b/Slides/Module 06 React Hook Patterns.pptx
@@ -362,6 +362,7 @@
 <file path=ppt/revisionInfo.xml><?xml version="1.0" encoding="utf-8"?>
 <p1510:revInfo xmlns:a="http://schemas.openxmlformats.org/drawingml/2006/main" xmlns:r="http://schemas.openxmlformats.org/officeDocument/2006/relationships" xmlns:p1510="http://schemas.microsoft.com/office/powerpoint/2015/10/main">
   <p1510:revLst>
+    <p1510:client id="{D3C33F09-918A-4894-B5A7-A18AE278568D}" v="1" dt="2026-09-20T13:50:56.736"/>
     <p1510:client id="{D93C61A9-D69A-4A79-AD92-8D941EE6A321}" v="1" dt="2026-09-19T19:07:03.945"/>
   </p1510:revLst>
 </p1510:revInfo>
@@ -372,7 +373,7 @@
   <pc:docChgLst>
     <pc:chgData name="Mitchell Wand" userId="de9b44c55c049659" providerId="LiveId" clId="{7A9D5940-B2CC-47DD-AF5E-71219F1A1E26}"/>
     <pc:docChg chg="undo custSel delSld modSld">
-      <pc:chgData name="Mitchell Wand" userId="de9b44c55c049659" providerId="LiveId" clId="{7A9D5940-B2CC-47DD-AF5E-71219F1A1E26}" dt="2026-09-19T20:32:02.920" v="440" actId="478"/>
+      <pc:chgData name="Mitchell Wand" userId="de9b44c55c049659" providerId="LiveId" clId="{7A9D5940-B2CC-47DD-AF5E-71219F1A1E26}" dt="2026-09-20T14:03:12.380" v="557" actId="20577"/>
       <pc:docMkLst>
         <pc:docMk/>
       </pc:docMkLst>
@@ -410,6 +411,60 @@
             <pc:docMk/>
             <pc:sldMk cId="4258496440" sldId="435"/>
             <ac:spMk id="2" creationId="{F36CBF10-47EB-5698-46CA-B43A120B4EE2}"/>
+          </ac:spMkLst>
+        </pc:spChg>
+      </pc:sldChg>
+      <pc:sldChg chg="addSp delSp modSp mod delAnim modNotesTx">
+        <pc:chgData name="Mitchell Wand" userId="de9b44c55c049659" providerId="LiveId" clId="{7A9D5940-B2CC-47DD-AF5E-71219F1A1E26}" dt="2026-09-20T14:03:12.380" v="557" actId="20577"/>
+        <pc:sldMkLst>
+          <pc:docMk/>
+          <pc:sldMk cId="1941355569" sldId="437"/>
+        </pc:sldMkLst>
+        <pc:spChg chg="mod">
+          <ac:chgData name="Mitchell Wand" userId="de9b44c55c049659" providerId="LiveId" clId="{7A9D5940-B2CC-47DD-AF5E-71219F1A1E26}" dt="2026-09-20T13:59:47.182" v="543" actId="20577"/>
+          <ac:spMkLst>
+            <pc:docMk/>
+            <pc:sldMk cId="1941355569" sldId="437"/>
+            <ac:spMk id="2" creationId="{3C1DD608-AEB0-9074-0AD4-FC4C0901DADC}"/>
+          </ac:spMkLst>
+        </pc:spChg>
+        <pc:picChg chg="add mod">
+          <ac:chgData name="Mitchell Wand" userId="de9b44c55c049659" providerId="LiveId" clId="{7A9D5940-B2CC-47DD-AF5E-71219F1A1E26}" dt="2026-09-20T13:59:34.943" v="539" actId="27614"/>
+          <ac:picMkLst>
+            <pc:docMk/>
+            <pc:sldMk cId="1941355569" sldId="437"/>
+            <ac:picMk id="5" creationId="{FDC161F5-9355-5C32-07A8-05AD79375F18}"/>
+          </ac:picMkLst>
+        </pc:picChg>
+        <pc:picChg chg="del">
+          <ac:chgData name="Mitchell Wand" userId="de9b44c55c049659" providerId="LiveId" clId="{7A9D5940-B2CC-47DD-AF5E-71219F1A1E26}" dt="2026-09-20T13:59:18.126" v="536" actId="478"/>
+          <ac:picMkLst>
+            <pc:docMk/>
+            <pc:sldMk cId="1941355569" sldId="437"/>
+            <ac:picMk id="12" creationId="{E4A5DC3F-DA64-F3F4-C259-D31E218E9593}"/>
+          </ac:picMkLst>
+        </pc:picChg>
+        <pc:picChg chg="del">
+          <ac:chgData name="Mitchell Wand" userId="de9b44c55c049659" providerId="LiveId" clId="{7A9D5940-B2CC-47DD-AF5E-71219F1A1E26}" dt="2026-09-20T13:59:10.382" v="535" actId="478"/>
+          <ac:picMkLst>
+            <pc:docMk/>
+            <pc:sldMk cId="1941355569" sldId="437"/>
+            <ac:picMk id="14" creationId="{F547D154-4707-10B5-D8F5-17477BA742A7}"/>
+          </ac:picMkLst>
+        </pc:picChg>
+      </pc:sldChg>
+      <pc:sldChg chg="addSp modSp mod modNotesTx">
+        <pc:chgData name="Mitchell Wand" userId="de9b44c55c049659" providerId="LiveId" clId="{7A9D5940-B2CC-47DD-AF5E-71219F1A1E26}" dt="2026-09-20T13:52:31.831" v="534" actId="1076"/>
+        <pc:sldMkLst>
+          <pc:docMk/>
+          <pc:sldMk cId="3621453889" sldId="438"/>
+        </pc:sldMkLst>
+        <pc:spChg chg="add mod">
+          <ac:chgData name="Mitchell Wand" userId="de9b44c55c049659" providerId="LiveId" clId="{7A9D5940-B2CC-47DD-AF5E-71219F1A1E26}" dt="2026-09-20T13:52:31.831" v="534" actId="1076"/>
+          <ac:spMkLst>
+            <pc:docMk/>
+            <pc:sldMk cId="3621453889" sldId="438"/>
+            <ac:spMk id="4" creationId="{03E3430A-DEE0-A14C-8CC7-555676C2A374}"/>
           </ac:spMkLst>
         </pc:spChg>
       </pc:sldChg>
@@ -1294,7 +1349,15 @@
           <a:p>
             <a:r>
               <a:rPr lang="en-US" dirty="0"/>
-              <a:t>&lt;explain slide, or demo &amp; explain as you go&gt;</a:t>
+              <a:t>&lt;explain slide, or demo &amp; explain as you go&gt;  Open the console by saying F12 (on Windows) or </a:t>
+            </a:r>
+            <a:r>
+              <a:rPr lang="en-US" dirty="0" err="1"/>
+              <a:t>Cmd</a:t>
+            </a:r>
+            <a:r>
+              <a:rPr lang="en-US" dirty="0"/>
+              <a:t>-Option-J (on Mac)</a:t>
             </a:r>
           </a:p>
         </p:txBody>
@@ -1593,19 +1656,19 @@
           <a:p>
             <a:r>
               <a:rPr lang="en-US" dirty="0"/>
-              <a:t>Here we've hit Reload.  Observe that effects #1, 2N, 3A, and 3B are run.</a:t>
+              <a:t>Here we've hit Reload.  Observe that effects #1, 2J, 3A, and 3B are run.</a:t>
             </a:r>
           </a:p>
           <a:p>
             <a:r>
               <a:rPr lang="en-US" dirty="0"/>
-              <a:t>Then we clicked 'n'.</a:t>
+              <a:t>Then we clicked ‘J'.</a:t>
             </a:r>
           </a:p>
           <a:p>
             <a:r>
               <a:rPr lang="en-US" dirty="0"/>
-              <a:t>We will need to run 2N, 3A, and 3B again.  So first, the cleanups for 2N, 3A, and 3B are run, and then 2N, 3A, and 3B are run.</a:t>
+              <a:t>We will need to run 2J, 3A, and 3B again.  So first, the cleanups for 2J, 3A, and 3B are run, and then 2J, 3A, and 3B are run.</a:t>
             </a:r>
           </a:p>
           <a:p>
@@ -1623,7 +1686,15 @@
           <a:p>
             <a:r>
               <a:rPr lang="en-US" dirty="0"/>
-              <a:t>What about useEffect #1, which is only run on the first render.  We could create an example that would demonstrate that, but it would take more effort to create and explain than it would be worth </a:t>
+              <a:t>What about useEffect #1, which is only run on the </a:t>
+            </a:r>
+            <a:r>
+              <a:rPr lang="en-US"/>
+              <a:t>first render?  </a:t>
+            </a:r>
+            <a:r>
+              <a:rPr lang="en-US" dirty="0"/>
+              <a:t>We could create an example that would demonstrate that, but it would take more effort to create and explain than it would be worth </a:t>
             </a:r>
             <a:r>
               <a:rPr lang="en-US" dirty="0">
@@ -4431,7 +4502,7 @@
           <a:p>
             <a:fld id="{07C7BFD4-467E-4EDE-93EA-052F5B39A4E5}" type="datetime1">
               <a:rPr lang="en-US" smtClean="0"/>
-              <a:t>9/19/2026</a:t>
+              <a:t>9/20/2026</a:t>
             </a:fld>
             <a:endParaRPr lang="en-US"/>
           </a:p>
@@ -5891,7 +5962,7 @@
           </a:ln>
           <a:extLst>
             <a:ext uri="{C572A759-6A51-4108-AA02-DFA0A04FC94B}">
-              <ma14:wrappingTextBoxFlag xmlns:ma14="http://schemas.microsoft.com/office/mac/drawingml/2011/main" xmlns:a14="http://schemas.microsoft.com/office/drawing/2010/main" xmlns:m="http://schemas.openxmlformats.org/officeDocument/2006/math" xmlns="" val="1"/>
+              <ma14:wrappingTextBoxFlag xmlns="" xmlns:m="http://schemas.openxmlformats.org/officeDocument/2006/math" xmlns:a14="http://schemas.microsoft.com/office/drawing/2010/main" xmlns:ma14="http://schemas.microsoft.com/office/mac/drawingml/2011/main" val="1"/>
             </a:ext>
           </a:extLst>
         </p:spPr>
@@ -6002,7 +6073,7 @@
           </a:ln>
           <a:extLst>
             <a:ext uri="{C572A759-6A51-4108-AA02-DFA0A04FC94B}">
-              <ma14:wrappingTextBoxFlag xmlns:ma14="http://schemas.microsoft.com/office/mac/drawingml/2011/main" xmlns:a14="http://schemas.microsoft.com/office/drawing/2010/main" xmlns:m="http://schemas.openxmlformats.org/officeDocument/2006/math" xmlns="" val="1"/>
+              <ma14:wrappingTextBoxFlag xmlns="" xmlns:m="http://schemas.openxmlformats.org/officeDocument/2006/math" xmlns:a14="http://schemas.microsoft.com/office/drawing/2010/main" xmlns:ma14="http://schemas.microsoft.com/office/mac/drawingml/2011/main" val="1"/>
             </a:ext>
           </a:extLst>
         </p:spPr>
@@ -6893,7 +6964,7 @@
           </a:prstGeom>
           <a:extLst>
             <a:ext uri="{C572A759-6A51-4108-AA02-DFA0A04FC94B}">
-              <ma14:wrappingTextBoxFlag xmlns:ma14="http://schemas.microsoft.com/office/mac/drawingml/2011/main" xmlns:a14="http://schemas.microsoft.com/office/drawing/2010/main" xmlns:m="http://schemas.openxmlformats.org/officeDocument/2006/math" xmlns="" val="1"/>
+              <ma14:wrappingTextBoxFlag xmlns="" xmlns:m="http://schemas.openxmlformats.org/officeDocument/2006/math" xmlns:a14="http://schemas.microsoft.com/office/drawing/2010/main" xmlns:ma14="http://schemas.microsoft.com/office/mac/drawingml/2011/main" val="1"/>
             </a:ext>
           </a:extLst>
         </p:spPr>
@@ -6928,7 +6999,7 @@
           </a:ln>
           <a:extLst>
             <a:ext uri="{C572A759-6A51-4108-AA02-DFA0A04FC94B}">
-              <ma14:wrappingTextBoxFlag xmlns:ma14="http://schemas.microsoft.com/office/mac/drawingml/2011/main" xmlns:a14="http://schemas.microsoft.com/office/drawing/2010/main" xmlns:m="http://schemas.openxmlformats.org/officeDocument/2006/math" xmlns="" val="1"/>
+              <ma14:wrappingTextBoxFlag xmlns="" xmlns:m="http://schemas.openxmlformats.org/officeDocument/2006/math" xmlns:a14="http://schemas.microsoft.com/office/drawing/2010/main" xmlns:ma14="http://schemas.microsoft.com/office/mac/drawingml/2011/main" val="1"/>
             </a:ext>
           </a:extLst>
         </p:spPr>
@@ -13391,6 +13462,89 @@
           </a:prstGeom>
         </p:spPr>
       </p:pic>
+      <p:sp>
+        <p:nvSpPr>
+          <p:cNvPr id="4" name="Rectangle: Rounded Corners 3">
+            <a:extLst>
+              <a:ext uri="{FF2B5EF4-FFF2-40B4-BE49-F238E27FC236}">
+                <a16:creationId xmlns:a16="http://schemas.microsoft.com/office/drawing/2014/main" id="{03E3430A-DEE0-A14C-8CC7-555676C2A374}"/>
+              </a:ext>
+            </a:extLst>
+          </p:cNvPr>
+          <p:cNvSpPr/>
+          <p:nvPr/>
+        </p:nvSpPr>
+        <p:spPr>
+          <a:xfrm>
+            <a:off x="2422358" y="5999054"/>
+            <a:ext cx="4001543" cy="1328021"/>
+          </a:xfrm>
+          <a:prstGeom prst="roundRect">
+            <a:avLst/>
+          </a:prstGeom>
+          <a:solidFill>
+            <a:schemeClr val="accent5">
+              <a:lumMod val="20000"/>
+              <a:lumOff val="80000"/>
+            </a:schemeClr>
+          </a:solidFill>
+          <a:ln w="12700" cap="flat">
+            <a:solidFill>
+              <a:schemeClr val="accent1"/>
+            </a:solidFill>
+            <a:prstDash val="solid"/>
+            <a:miter lim="800000"/>
+          </a:ln>
+          <a:effectLst/>
+          <a:sp3d/>
+        </p:spPr>
+        <p:style>
+          <a:lnRef idx="0">
+            <a:scrgbClr r="0" g="0" b="0"/>
+          </a:lnRef>
+          <a:fillRef idx="0">
+            <a:scrgbClr r="0" g="0" b="0"/>
+          </a:fillRef>
+          <a:effectRef idx="0">
+            <a:scrgbClr r="0" g="0" b="0"/>
+          </a:effectRef>
+          <a:fontRef idx="none"/>
+        </p:style>
+        <p:txBody>
+          <a:bodyPr rot="0" spcFirstLastPara="1" vertOverflow="overflow" horzOverflow="overflow" vert="horz" wrap="square" lIns="45719" tIns="45719" rIns="45719" bIns="45719" numCol="1" spcCol="38100" rtlCol="0" anchor="ctr">
+            <a:spAutoFit/>
+          </a:bodyPr>
+          <a:lstStyle/>
+          <a:p>
+            <a:r>
+              <a:rPr lang="en-US" sz="2400" dirty="0"/>
+              <a:t>Open the console by pressing F12 (on Windows) or </a:t>
+            </a:r>
+            <a:r>
+              <a:rPr lang="en-US" sz="2400" dirty="0" err="1"/>
+              <a:t>Cmd</a:t>
+            </a:r>
+            <a:r>
+              <a:rPr lang="en-US" sz="2400" dirty="0"/>
+              <a:t>-Option-J (on Mac)</a:t>
+            </a:r>
+            <a:endParaRPr kumimoji="0" lang="en-US" sz="2400" b="0" i="0" u="none" strike="noStrike" cap="none" spc="0" normalizeH="0" baseline="0" dirty="0">
+              <a:ln>
+                <a:noFill/>
+              </a:ln>
+              <a:solidFill>
+                <a:srgbClr val="000000"/>
+              </a:solidFill>
+              <a:effectLst/>
+              <a:uFillTx/>
+              <a:latin typeface="+mn-lt"/>
+              <a:ea typeface="+mn-ea"/>
+              <a:cs typeface="+mn-cs"/>
+              <a:sym typeface="Calibri"/>
+            </a:endParaRPr>
+          </a:p>
+        </p:txBody>
+      </p:sp>
     </p:spTree>
     <p:extLst>
       <p:ext uri="{BB962C8B-B14F-4D97-AF65-F5344CB8AC3E}">
@@ -15279,7 +15433,10 @@
           <a:bodyPr/>
           <a:lstStyle/>
           <a:p>
-            <a:endParaRPr lang="en-US"/>
+            <a:r>
+              <a:rPr lang="en-US" dirty="0"/>
+              <a:t>Demo</a:t>
+            </a:r>
           </a:p>
         </p:txBody>
       </p:sp>
@@ -15314,10 +15471,10 @@
       </p:sp>
       <p:pic>
         <p:nvPicPr>
-          <p:cNvPr id="12" name="Picture 11">
+          <p:cNvPr id="5" name="Picture 4" descr="The image shows a code editor screen with a React component, displaying the execution of a `useEffect` hook with cleanup logic, including variables `i` and `j` that control the rendering and cleanup of additional effects.&#10;&#10;AI-generated content may be incorrect.">
             <a:extLst>
               <a:ext uri="{FF2B5EF4-FFF2-40B4-BE49-F238E27FC236}">
-                <a16:creationId xmlns:a16="http://schemas.microsoft.com/office/drawing/2014/main" id="{E4A5DC3F-DA64-F3F4-C259-D31E218E9593}"/>
+                <a16:creationId xmlns:a16="http://schemas.microsoft.com/office/drawing/2014/main" id="{FDC161F5-9355-5C32-07A8-05AD79375F18}"/>
               </a:ext>
             </a:extLst>
           </p:cNvPr>
@@ -15334,38 +15491,8 @@
         </p:blipFill>
         <p:spPr>
           <a:xfrm>
-            <a:off x="496288" y="1640022"/>
-            <a:ext cx="11437088" cy="2618322"/>
-          </a:xfrm>
-          <a:prstGeom prst="rect">
-            <a:avLst/>
-          </a:prstGeom>
-        </p:spPr>
-      </p:pic>
-      <p:pic>
-        <p:nvPicPr>
-          <p:cNvPr id="14" name="Picture 13">
-            <a:extLst>
-              <a:ext uri="{FF2B5EF4-FFF2-40B4-BE49-F238E27FC236}">
-                <a16:creationId xmlns:a16="http://schemas.microsoft.com/office/drawing/2014/main" id="{F547D154-4707-10B5-D8F5-17477BA742A7}"/>
-              </a:ext>
-            </a:extLst>
-          </p:cNvPr>
-          <p:cNvPicPr>
-            <a:picLocks noChangeAspect="1"/>
-          </p:cNvPicPr>
-          <p:nvPr/>
-        </p:nvPicPr>
-        <p:blipFill>
-          <a:blip r:embed="rId4"/>
-          <a:stretch>
-            <a:fillRect/>
-          </a:stretch>
-        </p:blipFill>
-        <p:spPr>
-          <a:xfrm>
-            <a:off x="377456" y="1640022"/>
-            <a:ext cx="11555920" cy="4429098"/>
+            <a:off x="838200" y="1562158"/>
+            <a:ext cx="11774543" cy="5830114"/>
           </a:xfrm>
           <a:prstGeom prst="rect">
             <a:avLst/>
@@ -15383,129 +15510,6 @@
     <a:masterClrMapping/>
   </p:clrMapOvr>
   <p:transition spd="med"/>
-  <p:timing>
-    <p:tnLst>
-      <p:par>
-        <p:cTn id="1" dur="indefinite" restart="never" nodeType="tmRoot">
-          <p:childTnLst>
-            <p:seq concurrent="1" nextAc="seek">
-              <p:cTn id="2" dur="indefinite" nodeType="mainSeq">
-                <p:childTnLst>
-                  <p:par>
-                    <p:cTn id="3" fill="hold">
-                      <p:stCondLst>
-                        <p:cond delay="indefinite"/>
-                        <p:cond evt="onBegin" delay="0">
-                          <p:tn val="2"/>
-                        </p:cond>
-                      </p:stCondLst>
-                      <p:childTnLst>
-                        <p:par>
-                          <p:cTn id="4" fill="hold">
-                            <p:stCondLst>
-                              <p:cond delay="0"/>
-                            </p:stCondLst>
-                            <p:childTnLst>
-                              <p:par>
-                                <p:cTn id="5" presetID="1" presetClass="entr" presetSubtype="0" fill="hold" nodeType="withEffect">
-                                  <p:stCondLst>
-                                    <p:cond delay="0"/>
-                                  </p:stCondLst>
-                                  <p:childTnLst>
-                                    <p:set>
-                                      <p:cBhvr>
-                                        <p:cTn id="6" dur="1" fill="hold">
-                                          <p:stCondLst>
-                                            <p:cond delay="0"/>
-                                          </p:stCondLst>
-                                        </p:cTn>
-                                        <p:tgtEl>
-                                          <p:spTgt spid="12"/>
-                                        </p:tgtEl>
-                                        <p:attrNameLst>
-                                          <p:attrName>style.visibility</p:attrName>
-                                        </p:attrNameLst>
-                                      </p:cBhvr>
-                                      <p:to>
-                                        <p:strVal val="visible"/>
-                                      </p:to>
-                                    </p:set>
-                                  </p:childTnLst>
-                                </p:cTn>
-                              </p:par>
-                            </p:childTnLst>
-                          </p:cTn>
-                        </p:par>
-                      </p:childTnLst>
-                    </p:cTn>
-                  </p:par>
-                  <p:par>
-                    <p:cTn id="7" fill="hold">
-                      <p:stCondLst>
-                        <p:cond delay="indefinite"/>
-                      </p:stCondLst>
-                      <p:childTnLst>
-                        <p:par>
-                          <p:cTn id="8" fill="hold">
-                            <p:stCondLst>
-                              <p:cond delay="0"/>
-                            </p:stCondLst>
-                            <p:childTnLst>
-                              <p:par>
-                                <p:cTn id="9" presetID="1" presetClass="entr" presetSubtype="0" fill="hold" nodeType="clickEffect">
-                                  <p:stCondLst>
-                                    <p:cond delay="0"/>
-                                  </p:stCondLst>
-                                  <p:childTnLst>
-                                    <p:set>
-                                      <p:cBhvr>
-                                        <p:cTn id="10" dur="1" fill="hold">
-                                          <p:stCondLst>
-                                            <p:cond delay="0"/>
-                                          </p:stCondLst>
-                                        </p:cTn>
-                                        <p:tgtEl>
-                                          <p:spTgt spid="14"/>
-                                        </p:tgtEl>
-                                        <p:attrNameLst>
-                                          <p:attrName>style.visibility</p:attrName>
-                                        </p:attrNameLst>
-                                      </p:cBhvr>
-                                      <p:to>
-                                        <p:strVal val="visible"/>
-                                      </p:to>
-                                    </p:set>
-                                  </p:childTnLst>
-                                </p:cTn>
-                              </p:par>
-                            </p:childTnLst>
-                          </p:cTn>
-                        </p:par>
-                      </p:childTnLst>
-                    </p:cTn>
-                  </p:par>
-                </p:childTnLst>
-              </p:cTn>
-              <p:prevCondLst>
-                <p:cond evt="onPrev" delay="0">
-                  <p:tgtEl>
-                    <p:sldTgt/>
-                  </p:tgtEl>
-                </p:cond>
-              </p:prevCondLst>
-              <p:nextCondLst>
-                <p:cond evt="onNext" delay="0">
-                  <p:tgtEl>
-                    <p:sldTgt/>
-                  </p:tgtEl>
-                </p:cond>
-              </p:nextCondLst>
-            </p:seq>
-          </p:childTnLst>
-        </p:cTn>
-      </p:par>
-    </p:tnLst>
-  </p:timing>
 </p:sld>
 </file>
 
@@ -24697,7 +24701,7 @@
           </a:prstGeom>
           <a:extLst>
             <a:ext uri="{C572A759-6A51-4108-AA02-DFA0A04FC94B}">
-              <ma14:wrappingTextBoxFlag xmlns:ma14="http://schemas.microsoft.com/office/mac/drawingml/2011/main" xmlns:a14="http://schemas.microsoft.com/office/drawing/2010/main" xmlns:m="http://schemas.openxmlformats.org/officeDocument/2006/math" xmlns="" val="1"/>
+              <ma14:wrappingTextBoxFlag xmlns="" xmlns:m="http://schemas.openxmlformats.org/officeDocument/2006/math" xmlns:a14="http://schemas.microsoft.com/office/drawing/2010/main" xmlns:ma14="http://schemas.microsoft.com/office/mac/drawingml/2011/main" val="1"/>
             </a:ext>
           </a:extLst>
         </p:spPr>
@@ -24738,7 +24742,7 @@
           </a:ln>
           <a:extLst>
             <a:ext uri="{C572A759-6A51-4108-AA02-DFA0A04FC94B}">
-              <ma14:wrappingTextBoxFlag xmlns:ma14="http://schemas.microsoft.com/office/mac/drawingml/2011/main" xmlns:a14="http://schemas.microsoft.com/office/drawing/2010/main" xmlns:m="http://schemas.openxmlformats.org/officeDocument/2006/math" xmlns="" val="1"/>
+              <ma14:wrappingTextBoxFlag xmlns="" xmlns:m="http://schemas.openxmlformats.org/officeDocument/2006/math" xmlns:a14="http://schemas.microsoft.com/office/drawing/2010/main" xmlns:ma14="http://schemas.microsoft.com/office/mac/drawingml/2011/main" val="1"/>
             </a:ext>
           </a:extLst>
         </p:spPr>
@@ -25028,7 +25032,7 @@
             <a:effectLst/>
             <a:extLst>
               <a:ext uri="{C572A759-6A51-4108-AA02-DFA0A04FC94B}">
-                <ma14:wrappingTextBoxFlag xmlns:ma14="http://schemas.microsoft.com/office/mac/drawingml/2011/main" xmlns:a14="http://schemas.microsoft.com/office/drawing/2010/main" xmlns:m="http://schemas.openxmlformats.org/officeDocument/2006/math" xmlns="" val="1"/>
+                <ma14:wrappingTextBoxFlag xmlns="" xmlns:m="http://schemas.openxmlformats.org/officeDocument/2006/math" xmlns:a14="http://schemas.microsoft.com/office/drawing/2010/main" xmlns:ma14="http://schemas.microsoft.com/office/mac/drawingml/2011/main" val="1"/>
               </a:ext>
             </a:extLst>
           </p:spPr>
@@ -25368,7 +25372,7 @@
           </a:prstGeom>
           <a:extLst>
             <a:ext uri="{C572A759-6A51-4108-AA02-DFA0A04FC94B}">
-              <ma14:wrappingTextBoxFlag xmlns:ma14="http://schemas.microsoft.com/office/mac/drawingml/2011/main" xmlns:a14="http://schemas.microsoft.com/office/drawing/2010/main" xmlns:m="http://schemas.openxmlformats.org/officeDocument/2006/math" xmlns="" val="1"/>
+              <ma14:wrappingTextBoxFlag xmlns="" xmlns:m="http://schemas.openxmlformats.org/officeDocument/2006/math" xmlns:a14="http://schemas.microsoft.com/office/drawing/2010/main" xmlns:ma14="http://schemas.microsoft.com/office/mac/drawingml/2011/main" val="1"/>
             </a:ext>
           </a:extLst>
         </p:spPr>
@@ -26127,7 +26131,7 @@
           </a:ln>
           <a:extLst>
             <a:ext uri="{C572A759-6A51-4108-AA02-DFA0A04FC94B}">
-              <ma14:wrappingTextBoxFlag xmlns:ma14="http://schemas.microsoft.com/office/mac/drawingml/2011/main" xmlns:a14="http://schemas.microsoft.com/office/drawing/2010/main" xmlns:m="http://schemas.openxmlformats.org/officeDocument/2006/math" xmlns="" val="1"/>
+              <ma14:wrappingTextBoxFlag xmlns="" xmlns:m="http://schemas.openxmlformats.org/officeDocument/2006/math" xmlns:a14="http://schemas.microsoft.com/office/drawing/2010/main" xmlns:ma14="http://schemas.microsoft.com/office/mac/drawingml/2011/main" val="1"/>
             </a:ext>
           </a:extLst>
         </p:spPr>
@@ -31055,7 +31059,7 @@
           </a:prstGeom>
           <a:extLst>
             <a:ext uri="{C572A759-6A51-4108-AA02-DFA0A04FC94B}">
-              <ma14:wrappingTextBoxFlag xmlns="" xmlns:m="http://schemas.openxmlformats.org/officeDocument/2006/math" xmlns:a14="http://schemas.microsoft.com/office/drawing/2010/main" xmlns:ma14="http://schemas.microsoft.com/office/mac/drawingml/2011/main" val="1"/>
+              <ma14:wrappingTextBoxFlag xmlns:ma14="http://schemas.microsoft.com/office/mac/drawingml/2011/main" xmlns:a14="http://schemas.microsoft.com/office/drawing/2010/main" xmlns:m="http://schemas.openxmlformats.org/officeDocument/2006/math" xmlns="" val="1"/>
             </a:ext>
           </a:extLst>
         </p:spPr>

--- a/Slides/Module 06 React Hook Patterns.pptx
+++ b/Slides/Module 06 React Hook Patterns.pptx
@@ -5,7 +5,7 @@
     <p:sldMasterId id="2147483648" r:id="rId1"/>
   </p:sldMasterIdLst>
   <p:notesMasterIdLst>
-    <p:notesMasterId r:id="rId44"/>
+    <p:notesMasterId r:id="rId46"/>
   </p:notesMasterIdLst>
   <p:sldIdLst>
     <p:sldId id="404" r:id="rId2"/>
@@ -31,25 +31,27 @@
     <p:sldId id="545" r:id="rId22"/>
     <p:sldId id="539" r:id="rId23"/>
     <p:sldId id="421" r:id="rId24"/>
-    <p:sldId id="443" r:id="rId25"/>
-    <p:sldId id="444" r:id="rId26"/>
-    <p:sldId id="445" r:id="rId27"/>
-    <p:sldId id="449" r:id="rId28"/>
-    <p:sldId id="447" r:id="rId29"/>
-    <p:sldId id="276" r:id="rId30"/>
-    <p:sldId id="277" r:id="rId31"/>
-    <p:sldId id="544" r:id="rId32"/>
-    <p:sldId id="555" r:id="rId33"/>
-    <p:sldId id="546" r:id="rId34"/>
-    <p:sldId id="547" r:id="rId35"/>
-    <p:sldId id="548" r:id="rId36"/>
-    <p:sldId id="557" r:id="rId37"/>
-    <p:sldId id="540" r:id="rId38"/>
-    <p:sldId id="288" r:id="rId39"/>
-    <p:sldId id="537" r:id="rId40"/>
-    <p:sldId id="552" r:id="rId41"/>
-    <p:sldId id="553" r:id="rId42"/>
-    <p:sldId id="425" r:id="rId43"/>
+    <p:sldId id="442" r:id="rId25"/>
+    <p:sldId id="424" r:id="rId26"/>
+    <p:sldId id="443" r:id="rId27"/>
+    <p:sldId id="444" r:id="rId28"/>
+    <p:sldId id="445" r:id="rId29"/>
+    <p:sldId id="449" r:id="rId30"/>
+    <p:sldId id="447" r:id="rId31"/>
+    <p:sldId id="276" r:id="rId32"/>
+    <p:sldId id="277" r:id="rId33"/>
+    <p:sldId id="544" r:id="rId34"/>
+    <p:sldId id="555" r:id="rId35"/>
+    <p:sldId id="546" r:id="rId36"/>
+    <p:sldId id="547" r:id="rId37"/>
+    <p:sldId id="548" r:id="rId38"/>
+    <p:sldId id="557" r:id="rId39"/>
+    <p:sldId id="540" r:id="rId40"/>
+    <p:sldId id="288" r:id="rId41"/>
+    <p:sldId id="537" r:id="rId42"/>
+    <p:sldId id="552" r:id="rId43"/>
+    <p:sldId id="553" r:id="rId44"/>
+    <p:sldId id="425" r:id="rId45"/>
   </p:sldIdLst>
   <p:sldSz cx="12192000" cy="6858000"/>
   <p:notesSz cx="6858000" cy="9144000"/>
@@ -362,7 +364,7 @@
 <file path=ppt/revisionInfo.xml><?xml version="1.0" encoding="utf-8"?>
 <p1510:revInfo xmlns:a="http://schemas.openxmlformats.org/drawingml/2006/main" xmlns:r="http://schemas.openxmlformats.org/officeDocument/2006/relationships" xmlns:p1510="http://schemas.microsoft.com/office/powerpoint/2015/10/main">
   <p1510:revLst>
-    <p1510:client id="{D3C33F09-918A-4894-B5A7-A18AE278568D}" v="1" dt="2026-09-20T13:50:56.736"/>
+    <p1510:client id="{D3C33F09-918A-4894-B5A7-A18AE278568D}" v="4" dt="2026-09-20T17:21:33.290"/>
     <p1510:client id="{D93C61A9-D69A-4A79-AD92-8D941EE6A321}" v="1" dt="2026-09-19T19:07:03.945"/>
   </p1510:revLst>
 </p1510:revInfo>
@@ -372,17 +374,41 @@
 <pc:chgInfo xmlns:a="http://schemas.openxmlformats.org/drawingml/2006/main" xmlns:r="http://schemas.openxmlformats.org/officeDocument/2006/relationships" xmlns:ac="http://schemas.microsoft.com/office/drawing/2013/main/command" xmlns:pc="http://schemas.microsoft.com/office/powerpoint/2013/main/command">
   <pc:docChgLst>
     <pc:chgData name="Mitchell Wand" userId="de9b44c55c049659" providerId="LiveId" clId="{7A9D5940-B2CC-47DD-AF5E-71219F1A1E26}"/>
-    <pc:docChg chg="undo custSel delSld modSld">
-      <pc:chgData name="Mitchell Wand" userId="de9b44c55c049659" providerId="LiveId" clId="{7A9D5940-B2CC-47DD-AF5E-71219F1A1E26}" dt="2026-09-20T14:03:12.380" v="557" actId="20577"/>
+    <pc:docChg chg="undo custSel addSld delSld modSld">
+      <pc:chgData name="Mitchell Wand" userId="de9b44c55c049659" providerId="LiveId" clId="{7A9D5940-B2CC-47DD-AF5E-71219F1A1E26}" dt="2026-09-20T17:21:33.290" v="646"/>
       <pc:docMkLst>
         <pc:docMk/>
       </pc:docMkLst>
-      <pc:sldChg chg="del">
-        <pc:chgData name="Mitchell Wand" userId="de9b44c55c049659" providerId="LiveId" clId="{7A9D5940-B2CC-47DD-AF5E-71219F1A1E26}" dt="2026-09-19T19:39:04.908" v="208" actId="2696"/>
+      <pc:sldChg chg="addSp delSp modSp add del mod">
+        <pc:chgData name="Mitchell Wand" userId="de9b44c55c049659" providerId="LiveId" clId="{7A9D5940-B2CC-47DD-AF5E-71219F1A1E26}" dt="2026-09-20T14:50:54.593" v="641" actId="6549"/>
         <pc:sldMkLst>
           <pc:docMk/>
           <pc:sldMk cId="3886866829" sldId="424"/>
         </pc:sldMkLst>
+        <pc:spChg chg="del mod">
+          <ac:chgData name="Mitchell Wand" userId="de9b44c55c049659" providerId="LiveId" clId="{7A9D5940-B2CC-47DD-AF5E-71219F1A1E26}" dt="2026-09-20T14:38:40.092" v="571"/>
+          <ac:spMkLst>
+            <pc:docMk/>
+            <pc:sldMk cId="3886866829" sldId="424"/>
+            <ac:spMk id="4" creationId="{9C19FF8C-A42C-CC34-EA75-79137BA17575}"/>
+          </ac:spMkLst>
+        </pc:spChg>
+        <pc:spChg chg="mod">
+          <ac:chgData name="Mitchell Wand" userId="de9b44c55c049659" providerId="LiveId" clId="{7A9D5940-B2CC-47DD-AF5E-71219F1A1E26}" dt="2026-09-20T14:50:54.593" v="641" actId="6549"/>
+          <ac:spMkLst>
+            <pc:docMk/>
+            <pc:sldMk cId="3886866829" sldId="424"/>
+            <ac:spMk id="5" creationId="{71476609-2237-3E45-225B-93A1772E4FA5}"/>
+          </ac:spMkLst>
+        </pc:spChg>
+        <pc:spChg chg="add mod">
+          <ac:chgData name="Mitchell Wand" userId="de9b44c55c049659" providerId="LiveId" clId="{7A9D5940-B2CC-47DD-AF5E-71219F1A1E26}" dt="2026-09-20T14:49:52.514" v="582" actId="13926"/>
+          <ac:spMkLst>
+            <pc:docMk/>
+            <pc:sldMk cId="3886866829" sldId="424"/>
+            <ac:spMk id="7" creationId="{C7BA1FD0-8731-F029-4755-1F4349482CD1}"/>
+          </ac:spMkLst>
+        </pc:spChg>
       </pc:sldChg>
       <pc:sldChg chg="addSp modSp mod">
         <pc:chgData name="Mitchell Wand" userId="de9b44c55c049659" providerId="LiveId" clId="{7A9D5940-B2CC-47DD-AF5E-71219F1A1E26}" dt="2026-09-19T19:03:46.266" v="58" actId="1076"/>
@@ -468,14 +494,22 @@
           </ac:spMkLst>
         </pc:spChg>
       </pc:sldChg>
-      <pc:sldChg chg="modSp del mod">
-        <pc:chgData name="Mitchell Wand" userId="de9b44c55c049659" providerId="LiveId" clId="{7A9D5940-B2CC-47DD-AF5E-71219F1A1E26}" dt="2026-09-19T19:39:41.388" v="209" actId="2696"/>
+      <pc:sldChg chg="modSp add del mod">
+        <pc:chgData name="Mitchell Wand" userId="de9b44c55c049659" providerId="LiveId" clId="{7A9D5940-B2CC-47DD-AF5E-71219F1A1E26}" dt="2026-09-20T14:58:39.251" v="643" actId="20577"/>
         <pc:sldMkLst>
           <pc:docMk/>
           <pc:sldMk cId="2139498976" sldId="442"/>
         </pc:sldMkLst>
         <pc:spChg chg="mod">
-          <ac:chgData name="Mitchell Wand" userId="de9b44c55c049659" providerId="LiveId" clId="{7A9D5940-B2CC-47DD-AF5E-71219F1A1E26}" dt="2026-09-19T19:07:54.168" v="196" actId="14100"/>
+          <ac:chgData name="Mitchell Wand" userId="de9b44c55c049659" providerId="LiveId" clId="{7A9D5940-B2CC-47DD-AF5E-71219F1A1E26}" dt="2026-09-20T14:58:39.251" v="643" actId="20577"/>
+          <ac:spMkLst>
+            <pc:docMk/>
+            <pc:sldMk cId="2139498976" sldId="442"/>
+            <ac:spMk id="3" creationId="{03FE4563-AF59-FD3C-5A90-9A8E5AA00999}"/>
+          </ac:spMkLst>
+        </pc:spChg>
+        <pc:spChg chg="mod">
+          <ac:chgData name="Mitchell Wand" userId="de9b44c55c049659" providerId="LiveId" clId="{7A9D5940-B2CC-47DD-AF5E-71219F1A1E26}" dt="2026-09-20T14:25:53.499" v="568" actId="14100"/>
           <ac:spMkLst>
             <pc:docMk/>
             <pc:sldMk cId="2139498976" sldId="442"/>
@@ -484,7 +518,7 @@
         </pc:spChg>
       </pc:sldChg>
       <pc:sldChg chg="modSp mod">
-        <pc:chgData name="Mitchell Wand" userId="de9b44c55c049659" providerId="LiveId" clId="{7A9D5940-B2CC-47DD-AF5E-71219F1A1E26}" dt="2026-09-19T19:39:53.310" v="216" actId="20577"/>
+        <pc:chgData name="Mitchell Wand" userId="de9b44c55c049659" providerId="LiveId" clId="{7A9D5940-B2CC-47DD-AF5E-71219F1A1E26}" dt="2026-09-20T17:21:33.290" v="646"/>
         <pc:sldMkLst>
           <pc:docMk/>
           <pc:sldMk cId="1365940729" sldId="443"/>
@@ -497,13 +531,59 @@
             <ac:spMk id="2" creationId="{2840AEED-0AC0-B463-F5F5-C37BCE1E4173}"/>
           </ac:spMkLst>
         </pc:spChg>
+        <pc:spChg chg="mod">
+          <ac:chgData name="Mitchell Wand" userId="de9b44c55c049659" providerId="LiveId" clId="{7A9D5940-B2CC-47DD-AF5E-71219F1A1E26}" dt="2026-09-20T17:21:33.290" v="646"/>
+          <ac:spMkLst>
+            <pc:docMk/>
+            <pc:sldMk cId="1365940729" sldId="443"/>
+            <ac:spMk id="5" creationId="{F9EE0529-3E67-D3E3-3725-EE5BD7DD0CB6}"/>
+          </ac:spMkLst>
+        </pc:spChg>
       </pc:sldChg>
-      <pc:sldChg chg="modNotesTx">
-        <pc:chgData name="Mitchell Wand" userId="de9b44c55c049659" providerId="LiveId" clId="{7A9D5940-B2CC-47DD-AF5E-71219F1A1E26}" dt="2026-09-19T19:42:49.757" v="424" actId="20577"/>
+      <pc:sldChg chg="modSp modNotesTx">
+        <pc:chgData name="Mitchell Wand" userId="de9b44c55c049659" providerId="LiveId" clId="{7A9D5940-B2CC-47DD-AF5E-71219F1A1E26}" dt="2026-09-20T17:21:33.290" v="646"/>
         <pc:sldMkLst>
           <pc:docMk/>
           <pc:sldMk cId="3284592360" sldId="445"/>
         </pc:sldMkLst>
+        <pc:spChg chg="mod">
+          <ac:chgData name="Mitchell Wand" userId="de9b44c55c049659" providerId="LiveId" clId="{7A9D5940-B2CC-47DD-AF5E-71219F1A1E26}" dt="2026-09-20T17:21:33.290" v="646"/>
+          <ac:spMkLst>
+            <pc:docMk/>
+            <pc:sldMk cId="3284592360" sldId="445"/>
+            <ac:spMk id="7" creationId="{17C9C9FE-FD83-3831-CB99-ED1B49EF6630}"/>
+          </ac:spMkLst>
+        </pc:spChg>
+      </pc:sldChg>
+      <pc:sldChg chg="modSp">
+        <pc:chgData name="Mitchell Wand" userId="de9b44c55c049659" providerId="LiveId" clId="{7A9D5940-B2CC-47DD-AF5E-71219F1A1E26}" dt="2026-09-20T17:21:33.290" v="646"/>
+        <pc:sldMkLst>
+          <pc:docMk/>
+          <pc:sldMk cId="3549269080" sldId="447"/>
+        </pc:sldMkLst>
+        <pc:spChg chg="mod">
+          <ac:chgData name="Mitchell Wand" userId="de9b44c55c049659" providerId="LiveId" clId="{7A9D5940-B2CC-47DD-AF5E-71219F1A1E26}" dt="2026-09-20T17:21:33.290" v="646"/>
+          <ac:spMkLst>
+            <pc:docMk/>
+            <pc:sldMk cId="3549269080" sldId="447"/>
+            <ac:spMk id="7" creationId="{17C9C9FE-FD83-3831-CB99-ED1B49EF6630}"/>
+          </ac:spMkLst>
+        </pc:spChg>
+      </pc:sldChg>
+      <pc:sldChg chg="modSp">
+        <pc:chgData name="Mitchell Wand" userId="de9b44c55c049659" providerId="LiveId" clId="{7A9D5940-B2CC-47DD-AF5E-71219F1A1E26}" dt="2026-09-20T17:21:33.290" v="646"/>
+        <pc:sldMkLst>
+          <pc:docMk/>
+          <pc:sldMk cId="4174240328" sldId="449"/>
+        </pc:sldMkLst>
+        <pc:spChg chg="mod">
+          <ac:chgData name="Mitchell Wand" userId="de9b44c55c049659" providerId="LiveId" clId="{7A9D5940-B2CC-47DD-AF5E-71219F1A1E26}" dt="2026-09-20T17:21:33.290" v="646"/>
+          <ac:spMkLst>
+            <pc:docMk/>
+            <pc:sldMk cId="4174240328" sldId="449"/>
+            <ac:spMk id="7" creationId="{17C9C9FE-FD83-3831-CB99-ED1B49EF6630}"/>
+          </ac:spMkLst>
+        </pc:spChg>
       </pc:sldChg>
       <pc:sldChg chg="modSp mod modAnim">
         <pc:chgData name="Mitchell Wand" userId="de9b44c55c049659" providerId="LiveId" clId="{7A9D5940-B2CC-47DD-AF5E-71219F1A1E26}" dt="2026-09-19T19:07:03.945" v="188"/>
@@ -519,6 +599,20 @@
             <ac:spMk id="5" creationId="{4DC5EBFE-4304-926D-7C37-E632C04A3753}"/>
           </ac:spMkLst>
         </pc:spChg>
+      </pc:sldChg>
+      <pc:sldChg chg="mod modShow">
+        <pc:chgData name="Mitchell Wand" userId="de9b44c55c049659" providerId="LiveId" clId="{7A9D5940-B2CC-47DD-AF5E-71219F1A1E26}" dt="2026-09-20T14:59:46.017" v="644" actId="34476"/>
+        <pc:sldMkLst>
+          <pc:docMk/>
+          <pc:sldMk cId="1565374079" sldId="546"/>
+        </pc:sldMkLst>
+      </pc:sldChg>
+      <pc:sldChg chg="mod modShow">
+        <pc:chgData name="Mitchell Wand" userId="de9b44c55c049659" providerId="LiveId" clId="{7A9D5940-B2CC-47DD-AF5E-71219F1A1E26}" dt="2026-09-20T15:00:50.792" v="645" actId="34476"/>
+        <pc:sldMkLst>
+          <pc:docMk/>
+          <pc:sldMk cId="3696486306" sldId="547"/>
+        </pc:sldMkLst>
       </pc:sldChg>
       <pc:sldChg chg="delSp mod">
         <pc:chgData name="Mitchell Wand" userId="de9b44c55c049659" providerId="LiveId" clId="{7A9D5940-B2CC-47DD-AF5E-71219F1A1E26}" dt="2026-09-19T20:32:02.920" v="440" actId="478"/>
@@ -2109,6 +2203,13 @@
             <a:ext cx="6096000" cy="3429000"/>
           </a:xfrm>
         </p:spPr>
+        <p:txBody>
+          <a:bodyPr/>
+          <a:lstStyle/>
+          <a:p>
+            <a:endParaRPr lang="en-US"/>
+          </a:p>
+        </p:txBody>
       </p:sp>
       <p:sp>
         <p:nvSpPr>
@@ -2127,6 +2228,161 @@
           <a:p>
             <a:r>
               <a:rPr lang="en-US" dirty="0"/>
+              <a:t>Here’s our old friend </a:t>
+            </a:r>
+            <a:r>
+              <a:rPr lang="en-US" dirty="0" err="1"/>
+              <a:t>ClockDisplay</a:t>
+            </a:r>
+            <a:r>
+              <a:rPr lang="en-US" dirty="0"/>
+              <a:t>, but this time using </a:t>
+            </a:r>
+            <a:r>
+              <a:rPr lang="en-US" dirty="0" err="1"/>
+              <a:t>useClock</a:t>
+            </a:r>
+            <a:r>
+              <a:rPr lang="en-US" dirty="0"/>
+              <a:t>.  We take advantage of the fact that </a:t>
+            </a:r>
+            <a:r>
+              <a:rPr lang="en-US" dirty="0" err="1"/>
+              <a:t>useClock</a:t>
+            </a:r>
+            <a:r>
+              <a:rPr lang="en-US" dirty="0"/>
+              <a:t> returns the clock so that we can refer to </a:t>
+            </a:r>
+            <a:r>
+              <a:rPr lang="en-US" dirty="0" err="1"/>
+              <a:t>clock.nListeners</a:t>
+            </a:r>
+            <a:r>
+              <a:rPr lang="en-US" dirty="0"/>
+              <a:t>, (or start and stop the clock, if that affordance is available) from the client.   </a:t>
+            </a:r>
+          </a:p>
+          <a:p>
+            <a:endParaRPr lang="en-US" dirty="0"/>
+          </a:p>
+          <a:p>
+            <a:r>
+              <a:rPr lang="en-US" dirty="0"/>
+              <a:t>/** this para only applies if we get starting and stopping working </a:t>
+            </a:r>
+          </a:p>
+          <a:p>
+            <a:r>
+              <a:rPr lang="en-US" dirty="0"/>
+              <a:t>Note that if we have several components (as in </a:t>
+            </a:r>
+            <a:r>
+              <a:rPr lang="en-US" dirty="0" err="1"/>
+              <a:t>ArrayOfClocksApp</a:t>
+            </a:r>
+            <a:r>
+              <a:rPr lang="en-US" dirty="0"/>
+              <a:t>), stopping or starting the clock in one component will start or stop it in all of them.</a:t>
+            </a:r>
+          </a:p>
+          <a:p>
+            <a:r>
+              <a:rPr lang="en-US" dirty="0"/>
+              <a:t>*/</a:t>
+            </a:r>
+          </a:p>
+          <a:p>
+            <a:endParaRPr lang="en-US" dirty="0"/>
+          </a:p>
+          <a:p>
+            <a:r>
+              <a:rPr lang="en-US" dirty="0"/>
+              <a:t>More complicated hooks might return more complicated objects.  For example, </a:t>
+            </a:r>
+            <a:r>
+              <a:rPr lang="en-US" dirty="0" err="1"/>
+              <a:t>covey.town</a:t>
+            </a:r>
+            <a:r>
+              <a:rPr lang="en-US" dirty="0"/>
+              <a:t> makes extensive use of a hook called </a:t>
+            </a:r>
+            <a:r>
+              <a:rPr lang="en-US" dirty="0" err="1"/>
+              <a:t>useTown</a:t>
+            </a:r>
+            <a:r>
+              <a:rPr lang="en-US" dirty="0"/>
+              <a:t> that returns the town in which some component is running.</a:t>
+            </a:r>
+          </a:p>
+        </p:txBody>
+      </p:sp>
+    </p:spTree>
+    <p:extLst>
+      <p:ext uri="{BB962C8B-B14F-4D97-AF65-F5344CB8AC3E}">
+        <p14:creationId xmlns:p14="http://schemas.microsoft.com/office/powerpoint/2010/main" val="3737499629"/>
+      </p:ext>
+    </p:extLst>
+  </p:cSld>
+  <p:clrMapOvr>
+    <a:masterClrMapping/>
+  </p:clrMapOvr>
+</p:notes>
+</file>
+
+<file path=ppt/notesSlides/notesSlide23.xml><?xml version="1.0" encoding="utf-8"?>
+<p:notes xmlns:a="http://schemas.openxmlformats.org/drawingml/2006/main" xmlns:r="http://schemas.openxmlformats.org/officeDocument/2006/relationships" xmlns:p="http://schemas.openxmlformats.org/presentationml/2006/main">
+  <p:cSld>
+    <p:spTree>
+      <p:nvGrpSpPr>
+        <p:cNvPr id="1" name=""/>
+        <p:cNvGrpSpPr/>
+        <p:nvPr/>
+      </p:nvGrpSpPr>
+      <p:grpSpPr>
+        <a:xfrm>
+          <a:off x="0" y="0"/>
+          <a:ext cx="0" cy="0"/>
+          <a:chOff x="0" y="0"/>
+          <a:chExt cx="0" cy="0"/>
+        </a:xfrm>
+      </p:grpSpPr>
+      <p:sp>
+        <p:nvSpPr>
+          <p:cNvPr id="2" name="Slide Image Placeholder 1"/>
+          <p:cNvSpPr>
+            <a:spLocks noGrp="1" noRot="1" noChangeAspect="1"/>
+          </p:cNvSpPr>
+          <p:nvPr>
+            <p:ph type="sldImg"/>
+          </p:nvPr>
+        </p:nvSpPr>
+        <p:spPr>
+          <a:xfrm>
+            <a:off x="381000" y="685800"/>
+            <a:ext cx="6096000" cy="3429000"/>
+          </a:xfrm>
+        </p:spPr>
+      </p:sp>
+      <p:sp>
+        <p:nvSpPr>
+          <p:cNvPr id="3" name="Notes Placeholder 2"/>
+          <p:cNvSpPr>
+            <a:spLocks noGrp="1"/>
+          </p:cNvSpPr>
+          <p:nvPr>
+            <p:ph type="body" idx="1"/>
+          </p:nvPr>
+        </p:nvSpPr>
+        <p:spPr/>
+        <p:txBody>
+          <a:bodyPr/>
+          <a:lstStyle/>
+          <a:p>
+            <a:r>
+              <a:rPr lang="en-US" dirty="0"/>
               <a:t>The business logic typically consist of the basic hooks (</a:t>
             </a:r>
             <a:r>
@@ -2169,7 +2425,7 @@
 </p:notes>
 </file>
 
-<file path=ppt/notesSlides/notesSlide23.xml><?xml version="1.0" encoding="utf-8"?>
+<file path=ppt/notesSlides/notesSlide24.xml><?xml version="1.0" encoding="utf-8"?>
 <p:notes xmlns:a="http://schemas.openxmlformats.org/drawingml/2006/main" xmlns:r="http://schemas.openxmlformats.org/officeDocument/2006/relationships" xmlns:p="http://schemas.openxmlformats.org/presentationml/2006/main">
   <p:cSld>
     <p:spTree>
@@ -2253,82 +2509,6 @@
     <p:extLst>
       <p:ext uri="{BB962C8B-B14F-4D97-AF65-F5344CB8AC3E}">
         <p14:creationId xmlns:p14="http://schemas.microsoft.com/office/powerpoint/2010/main" val="1530624716"/>
-      </p:ext>
-    </p:extLst>
-  </p:cSld>
-  <p:clrMapOvr>
-    <a:masterClrMapping/>
-  </p:clrMapOvr>
-</p:notes>
-</file>
-
-<file path=ppt/notesSlides/notesSlide24.xml><?xml version="1.0" encoding="utf-8"?>
-<p:notes xmlns:a="http://schemas.openxmlformats.org/drawingml/2006/main" xmlns:r="http://schemas.openxmlformats.org/officeDocument/2006/relationships" xmlns:p="http://schemas.openxmlformats.org/presentationml/2006/main">
-  <p:cSld>
-    <p:spTree>
-      <p:nvGrpSpPr>
-        <p:cNvPr id="1" name=""/>
-        <p:cNvGrpSpPr/>
-        <p:nvPr/>
-      </p:nvGrpSpPr>
-      <p:grpSpPr>
-        <a:xfrm>
-          <a:off x="0" y="0"/>
-          <a:ext cx="0" cy="0"/>
-          <a:chOff x="0" y="0"/>
-          <a:chExt cx="0" cy="0"/>
-        </a:xfrm>
-      </p:grpSpPr>
-      <p:sp>
-        <p:nvSpPr>
-          <p:cNvPr id="2" name="Slide Image Placeholder 1"/>
-          <p:cNvSpPr>
-            <a:spLocks noGrp="1" noRot="1" noChangeAspect="1"/>
-          </p:cNvSpPr>
-          <p:nvPr>
-            <p:ph type="sldImg"/>
-          </p:nvPr>
-        </p:nvSpPr>
-        <p:spPr>
-          <a:xfrm>
-            <a:off x="381000" y="685800"/>
-            <a:ext cx="6096000" cy="3429000"/>
-          </a:xfrm>
-        </p:spPr>
-        <p:txBody>
-          <a:bodyPr/>
-          <a:lstStyle/>
-          <a:p>
-            <a:endParaRPr lang="en-US"/>
-          </a:p>
-        </p:txBody>
-      </p:sp>
-      <p:sp>
-        <p:nvSpPr>
-          <p:cNvPr id="3" name="Notes Placeholder 2"/>
-          <p:cNvSpPr>
-            <a:spLocks noGrp="1"/>
-          </p:cNvSpPr>
-          <p:nvPr>
-            <p:ph type="body" idx="1"/>
-          </p:nvPr>
-        </p:nvSpPr>
-        <p:spPr/>
-        <p:txBody>
-          <a:bodyPr/>
-          <a:lstStyle/>
-          <a:p>
-            <a:r>
-              <a:rPr lang="en-US" dirty="0"/>
-              <a:t>That is the end of Module 8, Part 1.   In Part 2, we'll talk about how one could use automated testing on components of React and similar systems.</a:t>
-            </a:r>
-          </a:p>
-        </p:txBody>
-      </p:sp>
-    </p:spTree>
-    <p:extLst>
-      <p:ext uri="{BB962C8B-B14F-4D97-AF65-F5344CB8AC3E}">
-        <p14:creationId xmlns:p14="http://schemas.microsoft.com/office/powerpoint/2010/main" val="1634834818"/>
       </p:ext>
     </p:extLst>
   </p:cSld>
@@ -2394,13 +2574,9 @@
           <a:bodyPr/>
           <a:lstStyle/>
           <a:p>
-            <a:pPr marL="0" indent="0">
-              <a:buFontTx/>
-              <a:buNone/>
-            </a:pPr>
             <a:r>
               <a:rPr lang="en-US" dirty="0"/>
-              <a:t>&lt;read slide&gt;</a:t>
+              <a:t>That is the end of Module 8, Part 1.   In Part 2, we'll talk about how one could use automated testing on components of React and similar systems.</a:t>
             </a:r>
           </a:p>
         </p:txBody>
@@ -2408,7 +2584,7 @@
     </p:spTree>
     <p:extLst>
       <p:ext uri="{BB962C8B-B14F-4D97-AF65-F5344CB8AC3E}">
-        <p14:creationId xmlns:p14="http://schemas.microsoft.com/office/powerpoint/2010/main" val="758788065"/>
+        <p14:creationId xmlns:p14="http://schemas.microsoft.com/office/powerpoint/2010/main" val="1634834818"/>
       </p:ext>
     </p:extLst>
   </p:cSld>
@@ -2474,34 +2650,13 @@
           <a:bodyPr/>
           <a:lstStyle/>
           <a:p>
+            <a:pPr marL="0" indent="0">
+              <a:buFontTx/>
+              <a:buNone/>
+            </a:pPr>
             <a:r>
               <a:rPr lang="en-US" dirty="0"/>
-              <a:t>The effect is inside the custom hook. It makes a call to a async function that connects to the REST service.</a:t>
-            </a:r>
-          </a:p>
-          <a:p>
-            <a:endParaRPr lang="en-US" dirty="0"/>
-          </a:p>
-          <a:p>
-            <a:r>
-              <a:rPr lang="en-US" dirty="0"/>
-              <a:t>The effect does not run on every render, but only when the variables in the dependency array change.</a:t>
-            </a:r>
-          </a:p>
-          <a:p>
-            <a:endParaRPr lang="en-US" dirty="0"/>
-          </a:p>
-          <a:p>
-            <a:r>
-              <a:rPr lang="en-US" dirty="0"/>
-              <a:t>Notice the catch block with fetchData(). Ask why is it written that way?</a:t>
-            </a:r>
-            <a:br>
-              <a:rPr lang="en-US" dirty="0"/>
-            </a:br>
-            <a:r>
-              <a:rPr lang="en-US" dirty="0"/>
-              <a:t>- because fetchData() returns a promise.</a:t>
+              <a:t>&lt;read slide&gt;</a:t>
             </a:r>
           </a:p>
         </p:txBody>
@@ -2509,7 +2664,7 @@
     </p:spTree>
     <p:extLst>
       <p:ext uri="{BB962C8B-B14F-4D97-AF65-F5344CB8AC3E}">
-        <p14:creationId xmlns:p14="http://schemas.microsoft.com/office/powerpoint/2010/main" val="3542214749"/>
+        <p14:creationId xmlns:p14="http://schemas.microsoft.com/office/powerpoint/2010/main" val="758788065"/>
       </p:ext>
     </p:extLst>
   </p:cSld>
@@ -2575,23 +2730,34 @@
           <a:bodyPr/>
           <a:lstStyle/>
           <a:p>
-            <a:pPr marL="171450" indent="-171450">
-              <a:buFontTx/>
-              <a:buChar char="-"/>
-            </a:pPr>
             <a:r>
               <a:rPr lang="en-US" dirty="0"/>
-              <a:t>This is the function that actually calls the REST API</a:t>
-            </a:r>
-          </a:p>
-          <a:p>
-            <a:pPr marL="171450" indent="-171450">
-              <a:buFontTx/>
-              <a:buChar char="-"/>
-            </a:pPr>
+              <a:t>The effect is inside the custom hook. It makes a call to a async function that connects to the REST service.</a:t>
+            </a:r>
+          </a:p>
+          <a:p>
+            <a:endParaRPr lang="en-US" dirty="0"/>
+          </a:p>
+          <a:p>
             <a:r>
               <a:rPr lang="en-US" dirty="0"/>
-              <a:t>This is the same function that was called from the useEffect in the custom hook</a:t>
+              <a:t>The effect does not run on every render, but only when the variables in the dependency array change.</a:t>
+            </a:r>
+          </a:p>
+          <a:p>
+            <a:endParaRPr lang="en-US" dirty="0"/>
+          </a:p>
+          <a:p>
+            <a:r>
+              <a:rPr lang="en-US" dirty="0"/>
+              <a:t>Notice the catch block with fetchData(). Ask why is it written that way?</a:t>
+            </a:r>
+            <a:br>
+              <a:rPr lang="en-US" dirty="0"/>
+            </a:br>
+            <a:r>
+              <a:rPr lang="en-US" dirty="0"/>
+              <a:t>- because fetchData() returns a promise.</a:t>
             </a:r>
           </a:p>
         </p:txBody>
@@ -2599,7 +2765,7 @@
     </p:spTree>
     <p:extLst>
       <p:ext uri="{BB962C8B-B14F-4D97-AF65-F5344CB8AC3E}">
-        <p14:creationId xmlns:p14="http://schemas.microsoft.com/office/powerpoint/2010/main" val="2191211556"/>
+        <p14:creationId xmlns:p14="http://schemas.microsoft.com/office/powerpoint/2010/main" val="3542214749"/>
       </p:ext>
     </p:extLst>
   </p:cSld>
@@ -2665,15 +2831,23 @@
           <a:bodyPr/>
           <a:lstStyle/>
           <a:p>
+            <a:pPr marL="171450" indent="-171450">
+              <a:buFontTx/>
+              <a:buChar char="-"/>
+            </a:pPr>
             <a:r>
               <a:rPr lang="en-US" dirty="0"/>
-              <a:t>- The example shows a snippet from the component that uses the custom hook.</a:t>
-            </a:r>
-          </a:p>
-          <a:p>
+              <a:t>This is the function that actually calls the REST API</a:t>
+            </a:r>
+          </a:p>
+          <a:p>
+            <a:pPr marL="171450" indent="-171450">
+              <a:buFontTx/>
+              <a:buChar char="-"/>
+            </a:pPr>
             <a:r>
               <a:rPr lang="en-US" dirty="0"/>
-              <a:t>- The custom hook defines the effect that calls the REST service for answers.</a:t>
+              <a:t>This is the same function that was called from the useEffect in the custom hook</a:t>
             </a:r>
           </a:p>
         </p:txBody>
@@ -2681,7 +2855,7 @@
     </p:spTree>
     <p:extLst>
       <p:ext uri="{BB962C8B-B14F-4D97-AF65-F5344CB8AC3E}">
-        <p14:creationId xmlns:p14="http://schemas.microsoft.com/office/powerpoint/2010/main" val="369799696"/>
+        <p14:creationId xmlns:p14="http://schemas.microsoft.com/office/powerpoint/2010/main" val="2191211556"/>
       </p:ext>
     </p:extLst>
   </p:cSld>
@@ -2696,13 +2870,7 @@
   <p:cSld>
     <p:spTree>
       <p:nvGrpSpPr>
-        <p:cNvPr id="1" name="">
-          <a:extLst>
-            <a:ext uri="{FF2B5EF4-FFF2-40B4-BE49-F238E27FC236}">
-              <a16:creationId xmlns:a16="http://schemas.microsoft.com/office/drawing/2014/main" id="{A48CCEA0-C5EF-49E8-5CCD-E952F8CADC27}"/>
-            </a:ext>
-          </a:extLst>
-        </p:cNvPr>
+        <p:cNvPr id="1" name=""/>
         <p:cNvGrpSpPr/>
         <p:nvPr/>
       </p:nvGrpSpPr>
@@ -2716,13 +2884,7 @@
       </p:grpSpPr>
       <p:sp>
         <p:nvSpPr>
-          <p:cNvPr id="2" name="Slide Image Placeholder 1">
-            <a:extLst>
-              <a:ext uri="{FF2B5EF4-FFF2-40B4-BE49-F238E27FC236}">
-                <a16:creationId xmlns:a16="http://schemas.microsoft.com/office/drawing/2014/main" id="{26DD8E81-A5CE-DCC2-8AA2-4ABD0E8B18D6}"/>
-              </a:ext>
-            </a:extLst>
-          </p:cNvPr>
+          <p:cNvPr id="2" name="Slide Image Placeholder 1"/>
           <p:cNvSpPr>
             <a:spLocks noGrp="1" noRot="1" noChangeAspect="1"/>
           </p:cNvSpPr>
@@ -2746,13 +2908,7 @@
       </p:sp>
       <p:sp>
         <p:nvSpPr>
-          <p:cNvPr id="3" name="Notes Placeholder 2">
-            <a:extLst>
-              <a:ext uri="{FF2B5EF4-FFF2-40B4-BE49-F238E27FC236}">
-                <a16:creationId xmlns:a16="http://schemas.microsoft.com/office/drawing/2014/main" id="{A0C81290-BAB5-46D0-8D20-A6C9A0722A56}"/>
-              </a:ext>
-            </a:extLst>
-          </p:cNvPr>
+          <p:cNvPr id="3" name="Notes Placeholder 2"/>
           <p:cNvSpPr>
             <a:spLocks noGrp="1"/>
           </p:cNvSpPr>
@@ -2767,7 +2923,13 @@
           <a:p>
             <a:r>
               <a:rPr lang="en-US" dirty="0"/>
-              <a:t>&lt;read slide&gt;</a:t>
+              <a:t>- The example shows a snippet from the component that uses the custom hook.</a:t>
+            </a:r>
+          </a:p>
+          <a:p>
+            <a:r>
+              <a:rPr lang="en-US" dirty="0"/>
+              <a:t>- The custom hook defines the effect that calls the REST service for answers.</a:t>
             </a:r>
           </a:p>
         </p:txBody>
@@ -2775,7 +2937,7 @@
     </p:spTree>
     <p:extLst>
       <p:ext uri="{BB962C8B-B14F-4D97-AF65-F5344CB8AC3E}">
-        <p14:creationId xmlns:p14="http://schemas.microsoft.com/office/powerpoint/2010/main" val="1797852976"/>
+        <p14:creationId xmlns:p14="http://schemas.microsoft.com/office/powerpoint/2010/main" val="369799696"/>
       </p:ext>
     </p:extLst>
   </p:cSld>
@@ -2875,7 +3037,13 @@
   <p:cSld>
     <p:spTree>
       <p:nvGrpSpPr>
-        <p:cNvPr id="1" name=""/>
+        <p:cNvPr id="1" name="">
+          <a:extLst>
+            <a:ext uri="{FF2B5EF4-FFF2-40B4-BE49-F238E27FC236}">
+              <a16:creationId xmlns:a16="http://schemas.microsoft.com/office/drawing/2014/main" id="{A48CCEA0-C5EF-49E8-5CCD-E952F8CADC27}"/>
+            </a:ext>
+          </a:extLst>
+        </p:cNvPr>
         <p:cNvGrpSpPr/>
         <p:nvPr/>
       </p:nvGrpSpPr>
@@ -2889,7 +3057,13 @@
       </p:grpSpPr>
       <p:sp>
         <p:nvSpPr>
-          <p:cNvPr id="2" name="Slide Image Placeholder 1"/>
+          <p:cNvPr id="2" name="Slide Image Placeholder 1">
+            <a:extLst>
+              <a:ext uri="{FF2B5EF4-FFF2-40B4-BE49-F238E27FC236}">
+                <a16:creationId xmlns:a16="http://schemas.microsoft.com/office/drawing/2014/main" id="{26DD8E81-A5CE-DCC2-8AA2-4ABD0E8B18D6}"/>
+              </a:ext>
+            </a:extLst>
+          </p:cNvPr>
           <p:cNvSpPr>
             <a:spLocks noGrp="1" noRot="1" noChangeAspect="1"/>
           </p:cNvSpPr>
@@ -2913,7 +3087,13 @@
       </p:sp>
       <p:sp>
         <p:nvSpPr>
-          <p:cNvPr id="3" name="Notes Placeholder 2"/>
+          <p:cNvPr id="3" name="Notes Placeholder 2">
+            <a:extLst>
+              <a:ext uri="{FF2B5EF4-FFF2-40B4-BE49-F238E27FC236}">
+                <a16:creationId xmlns:a16="http://schemas.microsoft.com/office/drawing/2014/main" id="{A0C81290-BAB5-46D0-8D20-A6C9A0722A56}"/>
+              </a:ext>
+            </a:extLst>
+          </p:cNvPr>
           <p:cNvSpPr>
             <a:spLocks noGrp="1"/>
           </p:cNvSpPr>
@@ -2928,32 +3108,7 @@
           <a:p>
             <a:r>
               <a:rPr lang="en-US" dirty="0"/>
-              <a:t>We can test React components by building a test double for the react system. The test double render </a:t>
-            </a:r>
-            <a:r>
-              <a:rPr lang="en-US" dirty="0" err="1"/>
-              <a:t>scomponents</a:t>
-            </a:r>
-            <a:r>
-              <a:rPr lang="en-US" dirty="0"/>
-              <a:t> into a "virtual </a:t>
-            </a:r>
-            <a:r>
-              <a:rPr lang="en-US" dirty="0" err="1"/>
-              <a:t>dom</a:t>
-            </a:r>
-            <a:r>
-              <a:rPr lang="en-US" dirty="0"/>
-              <a:t>" just like the browser's DOM.  We can interact with the test by firing events just like a user would, and then we should be able to inspect the virtual DOM to see what happened.</a:t>
-            </a:r>
-          </a:p>
-          <a:p>
-            <a:endParaRPr lang="en-US" dirty="0"/>
-          </a:p>
-          <a:p>
-            <a:r>
-              <a:rPr lang="en-US" dirty="0"/>
-              <a:t>This can all be done using a package called "testing-library", which is compatible not only with React and Jest, but with many UI libraries and testing frameworks.</a:t>
+              <a:t>&lt;read slide&gt;</a:t>
             </a:r>
           </a:p>
         </p:txBody>
@@ -2961,7 +3116,7 @@
     </p:spTree>
     <p:extLst>
       <p:ext uri="{BB962C8B-B14F-4D97-AF65-F5344CB8AC3E}">
-        <p14:creationId xmlns:p14="http://schemas.microsoft.com/office/powerpoint/2010/main" val="1433288861"/>
+        <p14:creationId xmlns:p14="http://schemas.microsoft.com/office/powerpoint/2010/main" val="1797852976"/>
       </p:ext>
     </p:extLst>
   </p:cSld>
@@ -3028,6 +3183,107 @@
           <a:lstStyle/>
           <a:p>
             <a:r>
+              <a:rPr lang="en-US" dirty="0"/>
+              <a:t>We can test React components by building a test double for the react system. The test double render </a:t>
+            </a:r>
+            <a:r>
+              <a:rPr lang="en-US" dirty="0" err="1"/>
+              <a:t>scomponents</a:t>
+            </a:r>
+            <a:r>
+              <a:rPr lang="en-US" dirty="0"/>
+              <a:t> into a "virtual </a:t>
+            </a:r>
+            <a:r>
+              <a:rPr lang="en-US" dirty="0" err="1"/>
+              <a:t>dom</a:t>
+            </a:r>
+            <a:r>
+              <a:rPr lang="en-US" dirty="0"/>
+              <a:t>" just like the browser's DOM.  We can interact with the test by firing events just like a user would, and then we should be able to inspect the virtual DOM to see what happened.</a:t>
+            </a:r>
+          </a:p>
+          <a:p>
+            <a:endParaRPr lang="en-US" dirty="0"/>
+          </a:p>
+          <a:p>
+            <a:r>
+              <a:rPr lang="en-US" dirty="0"/>
+              <a:t>This can all be done using a package called "testing-library", which is compatible not only with React and Jest, but with many UI libraries and testing frameworks.</a:t>
+            </a:r>
+          </a:p>
+        </p:txBody>
+      </p:sp>
+    </p:spTree>
+    <p:extLst>
+      <p:ext uri="{BB962C8B-B14F-4D97-AF65-F5344CB8AC3E}">
+        <p14:creationId xmlns:p14="http://schemas.microsoft.com/office/powerpoint/2010/main" val="1433288861"/>
+      </p:ext>
+    </p:extLst>
+  </p:cSld>
+  <p:clrMapOvr>
+    <a:masterClrMapping/>
+  </p:clrMapOvr>
+</p:notes>
+</file>
+
+<file path=ppt/notesSlides/notesSlide32.xml><?xml version="1.0" encoding="utf-8"?>
+<p:notes xmlns:a="http://schemas.openxmlformats.org/drawingml/2006/main" xmlns:r="http://schemas.openxmlformats.org/officeDocument/2006/relationships" xmlns:p="http://schemas.openxmlformats.org/presentationml/2006/main">
+  <p:cSld>
+    <p:spTree>
+      <p:nvGrpSpPr>
+        <p:cNvPr id="1" name=""/>
+        <p:cNvGrpSpPr/>
+        <p:nvPr/>
+      </p:nvGrpSpPr>
+      <p:grpSpPr>
+        <a:xfrm>
+          <a:off x="0" y="0"/>
+          <a:ext cx="0" cy="0"/>
+          <a:chOff x="0" y="0"/>
+          <a:chExt cx="0" cy="0"/>
+        </a:xfrm>
+      </p:grpSpPr>
+      <p:sp>
+        <p:nvSpPr>
+          <p:cNvPr id="2" name="Slide Image Placeholder 1"/>
+          <p:cNvSpPr>
+            <a:spLocks noGrp="1" noRot="1" noChangeAspect="1"/>
+          </p:cNvSpPr>
+          <p:nvPr>
+            <p:ph type="sldImg"/>
+          </p:nvPr>
+        </p:nvSpPr>
+        <p:spPr>
+          <a:xfrm>
+            <a:off x="381000" y="685800"/>
+            <a:ext cx="6096000" cy="3429000"/>
+          </a:xfrm>
+        </p:spPr>
+        <p:txBody>
+          <a:bodyPr/>
+          <a:lstStyle/>
+          <a:p>
+            <a:endParaRPr lang="en-US"/>
+          </a:p>
+        </p:txBody>
+      </p:sp>
+      <p:sp>
+        <p:nvSpPr>
+          <p:cNvPr id="3" name="Notes Placeholder 2"/>
+          <p:cNvSpPr>
+            <a:spLocks noGrp="1"/>
+          </p:cNvSpPr>
+          <p:nvPr>
+            <p:ph type="body" idx="1"/>
+          </p:nvPr>
+        </p:nvSpPr>
+        <p:spPr/>
+        <p:txBody>
+          <a:bodyPr/>
+          <a:lstStyle/>
+          <a:p>
+            <a:r>
               <a:rPr lang="en-US" b="0" i="0" dirty="0">
                 <a:solidFill>
                   <a:srgbClr val="5C5962"/>
@@ -3293,7 +3549,7 @@
           <a:p>
             <a:fld id="{07937F07-1250-4CCE-B198-1B2887014F41}" type="slidenum">
               <a:rPr lang="en-US" smtClean="0"/>
-              <a:t>39</a:t>
+              <a:t>41</a:t>
             </a:fld>
             <a:endParaRPr lang="en-US"/>
           </a:p>
@@ -3312,7 +3568,7 @@
 </p:notes>
 </file>
 
-<file path=ppt/notesSlides/notesSlide32.xml><?xml version="1.0" encoding="utf-8"?>
+<file path=ppt/notesSlides/notesSlide33.xml><?xml version="1.0" encoding="utf-8"?>
 <p:notes xmlns:a="http://schemas.openxmlformats.org/drawingml/2006/main" xmlns:r="http://schemas.openxmlformats.org/officeDocument/2006/relationships" xmlns:p="http://schemas.openxmlformats.org/presentationml/2006/main">
   <p:cSld>
     <p:spTree>
@@ -3403,7 +3659,7 @@
 </p:notes>
 </file>
 
-<file path=ppt/notesSlides/notesSlide33.xml><?xml version="1.0" encoding="utf-8"?>
+<file path=ppt/notesSlides/notesSlide34.xml><?xml version="1.0" encoding="utf-8"?>
 <p:notes xmlns:a="http://schemas.openxmlformats.org/drawingml/2006/main" xmlns:r="http://schemas.openxmlformats.org/officeDocument/2006/relationships" xmlns:p="http://schemas.openxmlformats.org/presentationml/2006/main">
   <p:cSld>
     <p:spTree>
@@ -3487,7 +3743,7 @@
 </p:notes>
 </file>
 
-<file path=ppt/notesSlides/notesSlide34.xml><?xml version="1.0" encoding="utf-8"?>
+<file path=ppt/notesSlides/notesSlide35.xml><?xml version="1.0" encoding="utf-8"?>
 <p:notes xmlns:a="http://schemas.openxmlformats.org/drawingml/2006/main" xmlns:r="http://schemas.openxmlformats.org/officeDocument/2006/relationships" xmlns:p="http://schemas.openxmlformats.org/presentationml/2006/main">
   <p:cSld>
     <p:spTree>
@@ -5962,7 +6218,7 @@
           </a:ln>
           <a:extLst>
             <a:ext uri="{C572A759-6A51-4108-AA02-DFA0A04FC94B}">
-              <ma14:wrappingTextBoxFlag xmlns="" xmlns:m="http://schemas.openxmlformats.org/officeDocument/2006/math" xmlns:a14="http://schemas.microsoft.com/office/drawing/2010/main" xmlns:ma14="http://schemas.microsoft.com/office/mac/drawingml/2011/main" val="1"/>
+              <ma14:wrappingTextBoxFlag xmlns:ma14="http://schemas.microsoft.com/office/mac/drawingml/2011/main" xmlns:a14="http://schemas.microsoft.com/office/drawing/2010/main" xmlns:m="http://schemas.openxmlformats.org/officeDocument/2006/math" xmlns="" val="1"/>
             </a:ext>
           </a:extLst>
         </p:spPr>
@@ -6073,7 +6329,7 @@
           </a:ln>
           <a:extLst>
             <a:ext uri="{C572A759-6A51-4108-AA02-DFA0A04FC94B}">
-              <ma14:wrappingTextBoxFlag xmlns="" xmlns:m="http://schemas.openxmlformats.org/officeDocument/2006/math" xmlns:a14="http://schemas.microsoft.com/office/drawing/2010/main" xmlns:ma14="http://schemas.microsoft.com/office/mac/drawingml/2011/main" val="1"/>
+              <ma14:wrappingTextBoxFlag xmlns:ma14="http://schemas.microsoft.com/office/mac/drawingml/2011/main" xmlns:a14="http://schemas.microsoft.com/office/drawing/2010/main" xmlns:m="http://schemas.openxmlformats.org/officeDocument/2006/math" xmlns="" val="1"/>
             </a:ext>
           </a:extLst>
         </p:spPr>
@@ -6964,7 +7220,7 @@
           </a:prstGeom>
           <a:extLst>
             <a:ext uri="{C572A759-6A51-4108-AA02-DFA0A04FC94B}">
-              <ma14:wrappingTextBoxFlag xmlns="" xmlns:m="http://schemas.openxmlformats.org/officeDocument/2006/math" xmlns:a14="http://schemas.microsoft.com/office/drawing/2010/main" xmlns:ma14="http://schemas.microsoft.com/office/mac/drawingml/2011/main" val="1"/>
+              <ma14:wrappingTextBoxFlag xmlns:ma14="http://schemas.microsoft.com/office/mac/drawingml/2011/main" xmlns:a14="http://schemas.microsoft.com/office/drawing/2010/main" xmlns:m="http://schemas.openxmlformats.org/officeDocument/2006/math" xmlns="" val="1"/>
             </a:ext>
           </a:extLst>
         </p:spPr>
@@ -6999,7 +7255,7 @@
           </a:ln>
           <a:extLst>
             <a:ext uri="{C572A759-6A51-4108-AA02-DFA0A04FC94B}">
-              <ma14:wrappingTextBoxFlag xmlns="" xmlns:m="http://schemas.openxmlformats.org/officeDocument/2006/math" xmlns:a14="http://schemas.microsoft.com/office/drawing/2010/main" xmlns:ma14="http://schemas.microsoft.com/office/mac/drawingml/2011/main" val="1"/>
+              <ma14:wrappingTextBoxFlag xmlns:ma14="http://schemas.microsoft.com/office/mac/drawingml/2011/main" xmlns:a14="http://schemas.microsoft.com/office/drawing/2010/main" xmlns:m="http://schemas.openxmlformats.org/officeDocument/2006/math" xmlns="" val="1"/>
             </a:ext>
           </a:extLst>
         </p:spPr>
@@ -17736,6 +17992,3578 @@
       </p:grpSpPr>
       <p:sp>
         <p:nvSpPr>
+          <p:cNvPr id="5" name="Title 4">
+            <a:extLst>
+              <a:ext uri="{FF2B5EF4-FFF2-40B4-BE49-F238E27FC236}">
+                <a16:creationId xmlns:a16="http://schemas.microsoft.com/office/drawing/2014/main" id="{0A516187-8E7F-1AFA-DEC3-356B82A2FC2E}"/>
+              </a:ext>
+            </a:extLst>
+          </p:cNvPr>
+          <p:cNvSpPr>
+            <a:spLocks noGrp="1"/>
+          </p:cNvSpPr>
+          <p:nvPr>
+            <p:ph type="title"/>
+          </p:nvPr>
+        </p:nvSpPr>
+        <p:spPr/>
+        <p:txBody>
+          <a:bodyPr/>
+          <a:lstStyle/>
+          <a:p>
+            <a:r>
+              <a:rPr lang="en-US" dirty="0"/>
+              <a:t>Example: </a:t>
+            </a:r>
+            <a:r>
+              <a:rPr lang="en-US" dirty="0" err="1"/>
+              <a:t>useClock</a:t>
+            </a:r>
+            <a:endParaRPr lang="en-US" dirty="0"/>
+          </a:p>
+        </p:txBody>
+      </p:sp>
+      <p:sp>
+        <p:nvSpPr>
+          <p:cNvPr id="4" name="Slide Number Placeholder 3">
+            <a:extLst>
+              <a:ext uri="{FF2B5EF4-FFF2-40B4-BE49-F238E27FC236}">
+                <a16:creationId xmlns:a16="http://schemas.microsoft.com/office/drawing/2014/main" id="{70B8467F-F4A0-45BB-A845-66F6FFA3CE4A}"/>
+              </a:ext>
+            </a:extLst>
+          </p:cNvPr>
+          <p:cNvSpPr>
+            <a:spLocks noGrp="1"/>
+          </p:cNvSpPr>
+          <p:nvPr>
+            <p:ph type="sldNum" sz="quarter" idx="2"/>
+          </p:nvPr>
+        </p:nvSpPr>
+        <p:spPr/>
+        <p:txBody>
+          <a:bodyPr/>
+          <a:lstStyle/>
+          <a:p>
+            <a:pPr marL="0" marR="0" lvl="0" indent="0" algn="r" defTabSz="914400" rtl="0" eaLnBrk="1" fontAlgn="auto" latinLnBrk="0" hangingPunct="0">
+              <a:lnSpc>
+                <a:spcPct val="100000"/>
+              </a:lnSpc>
+              <a:spcBef>
+                <a:spcPts val="0"/>
+              </a:spcBef>
+              <a:spcAft>
+                <a:spcPts val="0"/>
+              </a:spcAft>
+              <a:buClrTx/>
+              <a:buSzTx/>
+              <a:buFontTx/>
+              <a:buNone/>
+              <a:tabLst/>
+              <a:defRPr/>
+            </a:pPr>
+            <a:fld id="{86CB4B4D-7CA3-9044-876B-883B54F8677D}" type="slidenum">
+              <a:rPr kumimoji="0" lang="en-US" sz="1200" b="0" i="0" u="none" strike="noStrike" kern="0" cap="none" spc="0" normalizeH="0" baseline="0" noProof="0" smtClean="0">
+                <a:ln>
+                  <a:noFill/>
+                </a:ln>
+                <a:solidFill>
+                  <a:srgbClr val="888888"/>
+                </a:solidFill>
+                <a:effectLst/>
+                <a:uLnTx/>
+                <a:uFillTx/>
+                <a:latin typeface="Calibri"/>
+                <a:ea typeface="Calibri"/>
+                <a:cs typeface="Calibri"/>
+                <a:sym typeface="Calibri"/>
+              </a:rPr>
+              <a:pPr marL="0" marR="0" lvl="0" indent="0" algn="r" defTabSz="914400" rtl="0" eaLnBrk="1" fontAlgn="auto" latinLnBrk="0" hangingPunct="0">
+                <a:lnSpc>
+                  <a:spcPct val="100000"/>
+                </a:lnSpc>
+                <a:spcBef>
+                  <a:spcPts val="0"/>
+                </a:spcBef>
+                <a:spcAft>
+                  <a:spcPts val="0"/>
+                </a:spcAft>
+                <a:buClrTx/>
+                <a:buSzTx/>
+                <a:buFontTx/>
+                <a:buNone/>
+                <a:tabLst/>
+                <a:defRPr/>
+              </a:pPr>
+              <a:t>24</a:t>
+            </a:fld>
+            <a:endParaRPr kumimoji="0" lang="en-US" sz="1200" b="0" i="0" u="none" strike="noStrike" kern="0" cap="none" spc="0" normalizeH="0" baseline="0" noProof="0">
+              <a:ln>
+                <a:noFill/>
+              </a:ln>
+              <a:solidFill>
+                <a:srgbClr val="888888"/>
+              </a:solidFill>
+              <a:effectLst/>
+              <a:uLnTx/>
+              <a:uFillTx/>
+              <a:latin typeface="Calibri"/>
+              <a:ea typeface="Calibri"/>
+              <a:cs typeface="Calibri"/>
+              <a:sym typeface="Calibri"/>
+            </a:endParaRPr>
+          </a:p>
+        </p:txBody>
+      </p:sp>
+      <p:sp>
+        <p:nvSpPr>
+          <p:cNvPr id="3" name="TextBox 2">
+            <a:extLst>
+              <a:ext uri="{FF2B5EF4-FFF2-40B4-BE49-F238E27FC236}">
+                <a16:creationId xmlns:a16="http://schemas.microsoft.com/office/drawing/2014/main" id="{03FE4563-AF59-FD3C-5A90-9A8E5AA00999}"/>
+              </a:ext>
+            </a:extLst>
+          </p:cNvPr>
+          <p:cNvSpPr txBox="1"/>
+          <p:nvPr/>
+        </p:nvSpPr>
+        <p:spPr>
+          <a:xfrm>
+            <a:off x="838200" y="1325563"/>
+            <a:ext cx="10653215" cy="6021135"/>
+          </a:xfrm>
+          <a:prstGeom prst="rect">
+            <a:avLst/>
+          </a:prstGeom>
+          <a:noFill/>
+          <a:ln w="12700" cap="flat">
+            <a:noFill/>
+            <a:miter lim="400000"/>
+          </a:ln>
+          <a:effectLst/>
+          <a:sp3d/>
+        </p:spPr>
+        <p:style>
+          <a:lnRef idx="0">
+            <a:scrgbClr r="0" g="0" b="0"/>
+          </a:lnRef>
+          <a:fillRef idx="0">
+            <a:scrgbClr r="0" g="0" b="0"/>
+          </a:fillRef>
+          <a:effectRef idx="0">
+            <a:scrgbClr r="0" g="0" b="0"/>
+          </a:effectRef>
+          <a:fontRef idx="none"/>
+        </p:style>
+        <p:txBody>
+          <a:bodyPr wrap="square">
+            <a:spAutoFit/>
+          </a:bodyPr>
+          <a:lstStyle/>
+          <a:p>
+            <a:pPr>
+              <a:lnSpc>
+                <a:spcPct val="113095"/>
+              </a:lnSpc>
+              <a:buNone/>
+            </a:pPr>
+            <a:r>
+              <a:rPr lang="en-US" sz="1800" b="0" dirty="0">
+                <a:solidFill>
+                  <a:srgbClr val="0000FF"/>
+                </a:solidFill>
+                <a:effectLst/>
+                <a:latin typeface="Consolas" panose="020B0609020204030204" pitchFamily="49" charset="0"/>
+              </a:rPr>
+              <a:t>import</a:t>
+            </a:r>
+            <a:r>
+              <a:rPr lang="en-US" sz="1800" b="0" dirty="0">
+                <a:solidFill>
+                  <a:srgbClr val="000000"/>
+                </a:solidFill>
+                <a:effectLst/>
+                <a:latin typeface="Consolas" panose="020B0609020204030204" pitchFamily="49" charset="0"/>
+              </a:rPr>
+              <a:t> { </a:t>
+            </a:r>
+            <a:r>
+              <a:rPr lang="en-US" sz="1800" b="0" dirty="0" err="1">
+                <a:solidFill>
+                  <a:srgbClr val="000000"/>
+                </a:solidFill>
+                <a:effectLst/>
+                <a:latin typeface="Consolas" panose="020B0609020204030204" pitchFamily="49" charset="0"/>
+              </a:rPr>
+              <a:t>useEffect</a:t>
+            </a:r>
+            <a:r>
+              <a:rPr lang="en-US" sz="1800" b="0" dirty="0">
+                <a:solidFill>
+                  <a:srgbClr val="000000"/>
+                </a:solidFill>
+                <a:effectLst/>
+                <a:latin typeface="Consolas" panose="020B0609020204030204" pitchFamily="49" charset="0"/>
+              </a:rPr>
+              <a:t> } </a:t>
+            </a:r>
+            <a:r>
+              <a:rPr lang="en-US" sz="1800" b="0" dirty="0">
+                <a:solidFill>
+                  <a:srgbClr val="0000FF"/>
+                </a:solidFill>
+                <a:effectLst/>
+                <a:latin typeface="Consolas" panose="020B0609020204030204" pitchFamily="49" charset="0"/>
+              </a:rPr>
+              <a:t>from</a:t>
+            </a:r>
+            <a:r>
+              <a:rPr lang="en-US" sz="1800" b="0" dirty="0">
+                <a:solidFill>
+                  <a:srgbClr val="000000"/>
+                </a:solidFill>
+                <a:effectLst/>
+                <a:latin typeface="Consolas" panose="020B0609020204030204" pitchFamily="49" charset="0"/>
+              </a:rPr>
+              <a:t> </a:t>
+            </a:r>
+            <a:r>
+              <a:rPr lang="en-US" sz="1800" b="0" dirty="0">
+                <a:solidFill>
+                  <a:srgbClr val="A31515"/>
+                </a:solidFill>
+                <a:effectLst/>
+                <a:latin typeface="Consolas" panose="020B0609020204030204" pitchFamily="49" charset="0"/>
+              </a:rPr>
+              <a:t>"react"</a:t>
+            </a:r>
+            <a:r>
+              <a:rPr lang="en-US" sz="1800" b="0" dirty="0">
+                <a:solidFill>
+                  <a:srgbClr val="000000"/>
+                </a:solidFill>
+                <a:effectLst/>
+                <a:latin typeface="Consolas" panose="020B0609020204030204" pitchFamily="49" charset="0"/>
+              </a:rPr>
+              <a:t>;</a:t>
+            </a:r>
+          </a:p>
+          <a:p>
+            <a:pPr>
+              <a:lnSpc>
+                <a:spcPct val="113095"/>
+              </a:lnSpc>
+              <a:buNone/>
+            </a:pPr>
+            <a:r>
+              <a:rPr lang="en-US" sz="1800" b="0" dirty="0">
+                <a:solidFill>
+                  <a:srgbClr val="0000FF"/>
+                </a:solidFill>
+                <a:effectLst/>
+                <a:latin typeface="Consolas" panose="020B0609020204030204" pitchFamily="49" charset="0"/>
+              </a:rPr>
+              <a:t>import</a:t>
+            </a:r>
+            <a:r>
+              <a:rPr lang="en-US" sz="1800" b="0" dirty="0">
+                <a:solidFill>
+                  <a:srgbClr val="000000"/>
+                </a:solidFill>
+                <a:effectLst/>
+                <a:latin typeface="Consolas" panose="020B0609020204030204" pitchFamily="49" charset="0"/>
+              </a:rPr>
+              <a:t> Ticker </a:t>
+            </a:r>
+            <a:r>
+              <a:rPr lang="en-US" sz="1800" b="0" dirty="0">
+                <a:solidFill>
+                  <a:srgbClr val="0000FF"/>
+                </a:solidFill>
+                <a:effectLst/>
+                <a:latin typeface="Consolas" panose="020B0609020204030204" pitchFamily="49" charset="0"/>
+              </a:rPr>
+              <a:t>from</a:t>
+            </a:r>
+            <a:r>
+              <a:rPr lang="en-US" sz="1800" b="0" dirty="0">
+                <a:solidFill>
+                  <a:srgbClr val="000000"/>
+                </a:solidFill>
+                <a:effectLst/>
+                <a:latin typeface="Consolas" panose="020B0609020204030204" pitchFamily="49" charset="0"/>
+              </a:rPr>
+              <a:t> </a:t>
+            </a:r>
+            <a:r>
+              <a:rPr lang="en-US" sz="1800" b="0" dirty="0">
+                <a:solidFill>
+                  <a:srgbClr val="A31515"/>
+                </a:solidFill>
+                <a:effectLst/>
+                <a:latin typeface="Consolas" panose="020B0609020204030204" pitchFamily="49" charset="0"/>
+              </a:rPr>
+              <a:t>"../Classes/Ticker"</a:t>
+            </a:r>
+            <a:r>
+              <a:rPr lang="en-US" sz="1800" b="0" dirty="0">
+                <a:solidFill>
+                  <a:srgbClr val="000000"/>
+                </a:solidFill>
+                <a:effectLst/>
+                <a:latin typeface="Consolas" panose="020B0609020204030204" pitchFamily="49" charset="0"/>
+              </a:rPr>
+              <a:t>;</a:t>
+            </a:r>
+          </a:p>
+          <a:p>
+            <a:pPr>
+              <a:lnSpc>
+                <a:spcPct val="113095"/>
+              </a:lnSpc>
+              <a:buNone/>
+            </a:pPr>
+            <a:r>
+              <a:rPr lang="en-US" sz="1800" b="0" dirty="0">
+                <a:solidFill>
+                  <a:srgbClr val="0000FF"/>
+                </a:solidFill>
+                <a:effectLst/>
+                <a:latin typeface="Consolas" panose="020B0609020204030204" pitchFamily="49" charset="0"/>
+              </a:rPr>
+              <a:t>import</a:t>
+            </a:r>
+            <a:r>
+              <a:rPr lang="en-US" sz="1800" b="0" dirty="0">
+                <a:solidFill>
+                  <a:srgbClr val="000000"/>
+                </a:solidFill>
+                <a:effectLst/>
+                <a:latin typeface="Consolas" panose="020B0609020204030204" pitchFamily="49" charset="0"/>
+              </a:rPr>
+              <a:t> { </a:t>
+            </a:r>
+            <a:r>
+              <a:rPr lang="en-US" sz="1800" b="0" dirty="0">
+                <a:solidFill>
+                  <a:srgbClr val="0000FF"/>
+                </a:solidFill>
+                <a:effectLst/>
+                <a:latin typeface="Consolas" panose="020B0609020204030204" pitchFamily="49" charset="0"/>
+              </a:rPr>
+              <a:t>type</a:t>
+            </a:r>
+            <a:r>
+              <a:rPr lang="en-US" sz="1800" b="0" dirty="0">
+                <a:solidFill>
+                  <a:srgbClr val="000000"/>
+                </a:solidFill>
+                <a:effectLst/>
+                <a:latin typeface="Consolas" panose="020B0609020204030204" pitchFamily="49" charset="0"/>
+              </a:rPr>
+              <a:t> </a:t>
+            </a:r>
+            <a:r>
+              <a:rPr lang="en-US" sz="1800" b="0" dirty="0" err="1">
+                <a:solidFill>
+                  <a:srgbClr val="000000"/>
+                </a:solidFill>
+                <a:effectLst/>
+                <a:latin typeface="Consolas" panose="020B0609020204030204" pitchFamily="49" charset="0"/>
+              </a:rPr>
+              <a:t>ITicker</a:t>
+            </a:r>
+            <a:r>
+              <a:rPr lang="en-US" sz="1800" b="0" dirty="0">
+                <a:solidFill>
+                  <a:srgbClr val="000000"/>
+                </a:solidFill>
+                <a:effectLst/>
+                <a:latin typeface="Consolas" panose="020B0609020204030204" pitchFamily="49" charset="0"/>
+              </a:rPr>
+              <a:t> } </a:t>
+            </a:r>
+            <a:r>
+              <a:rPr lang="en-US" sz="1800" b="0" dirty="0">
+                <a:solidFill>
+                  <a:srgbClr val="0000FF"/>
+                </a:solidFill>
+                <a:effectLst/>
+                <a:latin typeface="Consolas" panose="020B0609020204030204" pitchFamily="49" charset="0"/>
+              </a:rPr>
+              <a:t>from</a:t>
+            </a:r>
+            <a:r>
+              <a:rPr lang="en-US" sz="1800" b="0" dirty="0">
+                <a:solidFill>
+                  <a:srgbClr val="000000"/>
+                </a:solidFill>
+                <a:effectLst/>
+                <a:latin typeface="Consolas" panose="020B0609020204030204" pitchFamily="49" charset="0"/>
+              </a:rPr>
+              <a:t> </a:t>
+            </a:r>
+            <a:r>
+              <a:rPr lang="en-US" sz="1800" b="0" dirty="0">
+                <a:solidFill>
+                  <a:srgbClr val="A31515"/>
+                </a:solidFill>
+                <a:effectLst/>
+                <a:latin typeface="Consolas" panose="020B0609020204030204" pitchFamily="49" charset="0"/>
+              </a:rPr>
+              <a:t>"../types"</a:t>
+            </a:r>
+            <a:r>
+              <a:rPr lang="en-US" sz="1800" b="0" dirty="0">
+                <a:solidFill>
+                  <a:srgbClr val="000000"/>
+                </a:solidFill>
+                <a:effectLst/>
+                <a:latin typeface="Consolas" panose="020B0609020204030204" pitchFamily="49" charset="0"/>
+              </a:rPr>
+              <a:t>;</a:t>
+            </a:r>
+          </a:p>
+          <a:p>
+            <a:pPr>
+              <a:lnSpc>
+                <a:spcPct val="113095"/>
+              </a:lnSpc>
+              <a:buNone/>
+            </a:pPr>
+            <a:br>
+              <a:rPr lang="en-US" sz="1800" b="0" dirty="0">
+                <a:solidFill>
+                  <a:srgbClr val="000000"/>
+                </a:solidFill>
+                <a:effectLst/>
+                <a:latin typeface="Consolas" panose="020B0609020204030204" pitchFamily="49" charset="0"/>
+              </a:rPr>
+            </a:br>
+            <a:endParaRPr lang="en-US" sz="1800" b="0" dirty="0">
+              <a:solidFill>
+                <a:srgbClr val="000000"/>
+              </a:solidFill>
+              <a:effectLst/>
+              <a:latin typeface="Consolas" panose="020B0609020204030204" pitchFamily="49" charset="0"/>
+            </a:endParaRPr>
+          </a:p>
+          <a:p>
+            <a:pPr>
+              <a:lnSpc>
+                <a:spcPct val="113095"/>
+              </a:lnSpc>
+              <a:buNone/>
+            </a:pPr>
+            <a:r>
+              <a:rPr lang="en-US" sz="1800" b="0" dirty="0">
+                <a:solidFill>
+                  <a:srgbClr val="008000"/>
+                </a:solidFill>
+                <a:effectLst/>
+                <a:latin typeface="Consolas" panose="020B0609020204030204" pitchFamily="49" charset="0"/>
+              </a:rPr>
+              <a:t>// takes a listener function as an argument</a:t>
+            </a:r>
+            <a:endParaRPr lang="en-US" sz="1800" b="0" dirty="0">
+              <a:solidFill>
+                <a:srgbClr val="000000"/>
+              </a:solidFill>
+              <a:effectLst/>
+              <a:latin typeface="Consolas" panose="020B0609020204030204" pitchFamily="49" charset="0"/>
+            </a:endParaRPr>
+          </a:p>
+          <a:p>
+            <a:pPr>
+              <a:lnSpc>
+                <a:spcPct val="113095"/>
+              </a:lnSpc>
+              <a:buNone/>
+            </a:pPr>
+            <a:r>
+              <a:rPr lang="en-US" sz="1800" b="0" dirty="0">
+                <a:solidFill>
+                  <a:srgbClr val="008000"/>
+                </a:solidFill>
+                <a:effectLst/>
+                <a:latin typeface="Consolas" panose="020B0609020204030204" pitchFamily="49" charset="0"/>
+              </a:rPr>
+              <a:t>// returns the clock object</a:t>
+            </a:r>
+            <a:endParaRPr lang="en-US" sz="1800" b="0" dirty="0">
+              <a:solidFill>
+                <a:srgbClr val="000000"/>
+              </a:solidFill>
+              <a:effectLst/>
+              <a:latin typeface="Consolas" panose="020B0609020204030204" pitchFamily="49" charset="0"/>
+            </a:endParaRPr>
+          </a:p>
+          <a:p>
+            <a:pPr>
+              <a:lnSpc>
+                <a:spcPct val="113095"/>
+              </a:lnSpc>
+              <a:buNone/>
+            </a:pPr>
+            <a:r>
+              <a:rPr lang="en-US" sz="1800" b="0" dirty="0">
+                <a:solidFill>
+                  <a:srgbClr val="0000FF"/>
+                </a:solidFill>
+                <a:effectLst/>
+                <a:latin typeface="Consolas" panose="020B0609020204030204" pitchFamily="49" charset="0"/>
+              </a:rPr>
+              <a:t>export</a:t>
+            </a:r>
+            <a:r>
+              <a:rPr lang="en-US" sz="1800" b="0" dirty="0">
+                <a:solidFill>
+                  <a:srgbClr val="000000"/>
+                </a:solidFill>
+                <a:effectLst/>
+                <a:latin typeface="Consolas" panose="020B0609020204030204" pitchFamily="49" charset="0"/>
+              </a:rPr>
+              <a:t> </a:t>
+            </a:r>
+            <a:r>
+              <a:rPr lang="en-US" sz="1800" b="0" dirty="0">
+                <a:solidFill>
+                  <a:srgbClr val="0000FF"/>
+                </a:solidFill>
+                <a:effectLst/>
+                <a:latin typeface="Consolas" panose="020B0609020204030204" pitchFamily="49" charset="0"/>
+              </a:rPr>
+              <a:t>function</a:t>
+            </a:r>
+            <a:r>
+              <a:rPr lang="en-US" sz="1800" b="0" dirty="0">
+                <a:solidFill>
+                  <a:srgbClr val="000000"/>
+                </a:solidFill>
+                <a:effectLst/>
+                <a:latin typeface="Consolas" panose="020B0609020204030204" pitchFamily="49" charset="0"/>
+              </a:rPr>
+              <a:t> </a:t>
+            </a:r>
+            <a:r>
+              <a:rPr lang="en-US" sz="1800" b="0" dirty="0" err="1">
+                <a:solidFill>
+                  <a:srgbClr val="000000"/>
+                </a:solidFill>
+                <a:effectLst/>
+                <a:latin typeface="Consolas" panose="020B0609020204030204" pitchFamily="49" charset="0"/>
+              </a:rPr>
+              <a:t>useClock</a:t>
+            </a:r>
+            <a:r>
+              <a:rPr lang="en-US" sz="1800" b="0" dirty="0">
+                <a:solidFill>
+                  <a:srgbClr val="000000"/>
+                </a:solidFill>
+                <a:effectLst/>
+                <a:latin typeface="Consolas" panose="020B0609020204030204" pitchFamily="49" charset="0"/>
+              </a:rPr>
+              <a:t>(listener1: () </a:t>
+            </a:r>
+            <a:r>
+              <a:rPr lang="en-US" sz="1800" b="0" dirty="0">
+                <a:solidFill>
+                  <a:srgbClr val="0000FF"/>
+                </a:solidFill>
+                <a:effectLst/>
+                <a:latin typeface="Consolas" panose="020B0609020204030204" pitchFamily="49" charset="0"/>
+              </a:rPr>
+              <a:t>=&gt;</a:t>
+            </a:r>
+            <a:r>
+              <a:rPr lang="en-US" sz="1800" b="0" dirty="0">
+                <a:solidFill>
+                  <a:srgbClr val="000000"/>
+                </a:solidFill>
+                <a:effectLst/>
+                <a:latin typeface="Consolas" panose="020B0609020204030204" pitchFamily="49" charset="0"/>
+              </a:rPr>
+              <a:t> void): </a:t>
+            </a:r>
+            <a:r>
+              <a:rPr lang="en-US" sz="1800" b="0" dirty="0" err="1">
+                <a:solidFill>
+                  <a:srgbClr val="000000"/>
+                </a:solidFill>
+                <a:effectLst/>
+                <a:latin typeface="Consolas" panose="020B0609020204030204" pitchFamily="49" charset="0"/>
+              </a:rPr>
+              <a:t>ITicker</a:t>
+            </a:r>
+            <a:r>
+              <a:rPr lang="en-US" sz="1800" b="0" dirty="0">
+                <a:solidFill>
+                  <a:srgbClr val="000000"/>
+                </a:solidFill>
+                <a:effectLst/>
+                <a:latin typeface="Consolas" panose="020B0609020204030204" pitchFamily="49" charset="0"/>
+              </a:rPr>
+              <a:t> {</a:t>
+            </a:r>
+          </a:p>
+          <a:p>
+            <a:pPr>
+              <a:lnSpc>
+                <a:spcPct val="113095"/>
+              </a:lnSpc>
+              <a:buNone/>
+            </a:pPr>
+            <a:r>
+              <a:rPr lang="en-US" sz="1800" b="0" dirty="0">
+                <a:solidFill>
+                  <a:srgbClr val="000000"/>
+                </a:solidFill>
+                <a:effectLst/>
+                <a:latin typeface="Consolas" panose="020B0609020204030204" pitchFamily="49" charset="0"/>
+              </a:rPr>
+              <a:t>  </a:t>
+            </a:r>
+            <a:r>
+              <a:rPr lang="en-US" sz="1800" b="0" dirty="0">
+                <a:solidFill>
+                  <a:srgbClr val="0000FF"/>
+                </a:solidFill>
+                <a:effectLst/>
+                <a:latin typeface="Consolas" panose="020B0609020204030204" pitchFamily="49" charset="0"/>
+              </a:rPr>
+              <a:t>const</a:t>
+            </a:r>
+            <a:r>
+              <a:rPr lang="en-US" sz="1800" b="0" dirty="0">
+                <a:solidFill>
+                  <a:srgbClr val="000000"/>
+                </a:solidFill>
+                <a:effectLst/>
+                <a:latin typeface="Consolas" panose="020B0609020204030204" pitchFamily="49" charset="0"/>
+              </a:rPr>
+              <a:t> clock = </a:t>
+            </a:r>
+            <a:r>
+              <a:rPr lang="en-US" sz="1800" b="0" dirty="0">
+                <a:solidFill>
+                  <a:srgbClr val="0000FF"/>
+                </a:solidFill>
+                <a:effectLst/>
+                <a:latin typeface="Consolas" panose="020B0609020204030204" pitchFamily="49" charset="0"/>
+              </a:rPr>
+              <a:t>new</a:t>
+            </a:r>
+            <a:r>
+              <a:rPr lang="en-US" sz="1800" b="0" dirty="0">
+                <a:solidFill>
+                  <a:srgbClr val="000000"/>
+                </a:solidFill>
+                <a:effectLst/>
+                <a:latin typeface="Consolas" panose="020B0609020204030204" pitchFamily="49" charset="0"/>
+              </a:rPr>
+              <a:t> Ticker(</a:t>
+            </a:r>
+            <a:r>
+              <a:rPr lang="en-US" sz="1800" b="0" dirty="0">
+                <a:solidFill>
+                  <a:srgbClr val="098658"/>
+                </a:solidFill>
+                <a:effectLst/>
+                <a:latin typeface="Consolas" panose="020B0609020204030204" pitchFamily="49" charset="0"/>
+              </a:rPr>
+              <a:t>1000</a:t>
+            </a:r>
+            <a:r>
+              <a:rPr lang="en-US" sz="1800" b="0" dirty="0">
+                <a:solidFill>
+                  <a:srgbClr val="000000"/>
+                </a:solidFill>
+                <a:effectLst/>
+                <a:latin typeface="Consolas" panose="020B0609020204030204" pitchFamily="49" charset="0"/>
+              </a:rPr>
+              <a:t>);</a:t>
+            </a:r>
+          </a:p>
+          <a:p>
+            <a:pPr>
+              <a:lnSpc>
+                <a:spcPct val="113095"/>
+              </a:lnSpc>
+              <a:buNone/>
+            </a:pPr>
+            <a:r>
+              <a:rPr lang="en-US" sz="1800" b="0" dirty="0">
+                <a:solidFill>
+                  <a:srgbClr val="000000"/>
+                </a:solidFill>
+                <a:effectLst/>
+                <a:latin typeface="Consolas" panose="020B0609020204030204" pitchFamily="49" charset="0"/>
+              </a:rPr>
+              <a:t>  </a:t>
+            </a:r>
+            <a:r>
+              <a:rPr lang="en-US" sz="1800" b="0" dirty="0" err="1">
+                <a:solidFill>
+                  <a:srgbClr val="000000"/>
+                </a:solidFill>
+                <a:effectLst/>
+                <a:latin typeface="Consolas" panose="020B0609020204030204" pitchFamily="49" charset="0"/>
+              </a:rPr>
+              <a:t>useEffect</a:t>
+            </a:r>
+            <a:r>
+              <a:rPr lang="en-US" sz="1800" b="0" dirty="0">
+                <a:solidFill>
+                  <a:srgbClr val="000000"/>
+                </a:solidFill>
+                <a:effectLst/>
+                <a:latin typeface="Consolas" panose="020B0609020204030204" pitchFamily="49" charset="0"/>
+              </a:rPr>
+              <a:t>(() </a:t>
+            </a:r>
+            <a:r>
+              <a:rPr lang="en-US" sz="1800" b="0" dirty="0">
+                <a:solidFill>
+                  <a:srgbClr val="0000FF"/>
+                </a:solidFill>
+                <a:effectLst/>
+                <a:latin typeface="Consolas" panose="020B0609020204030204" pitchFamily="49" charset="0"/>
+              </a:rPr>
+              <a:t>=&gt;</a:t>
+            </a:r>
+            <a:r>
+              <a:rPr lang="en-US" sz="1800" b="0" dirty="0">
+                <a:solidFill>
+                  <a:srgbClr val="000000"/>
+                </a:solidFill>
+                <a:effectLst/>
+                <a:latin typeface="Consolas" panose="020B0609020204030204" pitchFamily="49" charset="0"/>
+              </a:rPr>
+              <a:t> {</a:t>
+            </a:r>
+          </a:p>
+          <a:p>
+            <a:pPr>
+              <a:lnSpc>
+                <a:spcPct val="113095"/>
+              </a:lnSpc>
+              <a:buNone/>
+            </a:pPr>
+            <a:r>
+              <a:rPr lang="en-US" sz="1800" b="0" dirty="0">
+                <a:solidFill>
+                  <a:srgbClr val="000000"/>
+                </a:solidFill>
+                <a:effectLst/>
+                <a:latin typeface="Consolas" panose="020B0609020204030204" pitchFamily="49" charset="0"/>
+              </a:rPr>
+              <a:t>    </a:t>
+            </a:r>
+            <a:r>
+              <a:rPr lang="en-US" sz="1800" b="0" dirty="0" err="1">
+                <a:solidFill>
+                  <a:srgbClr val="000000"/>
+                </a:solidFill>
+                <a:effectLst/>
+                <a:latin typeface="Consolas" panose="020B0609020204030204" pitchFamily="49" charset="0"/>
+              </a:rPr>
+              <a:t>clock.addListener</a:t>
+            </a:r>
+            <a:r>
+              <a:rPr lang="en-US" sz="1800" b="0" dirty="0">
+                <a:solidFill>
+                  <a:srgbClr val="000000"/>
+                </a:solidFill>
+                <a:effectLst/>
+                <a:latin typeface="Consolas" panose="020B0609020204030204" pitchFamily="49" charset="0"/>
+              </a:rPr>
+              <a:t>(listener1);</a:t>
+            </a:r>
+          </a:p>
+          <a:p>
+            <a:pPr>
+              <a:lnSpc>
+                <a:spcPct val="113095"/>
+              </a:lnSpc>
+              <a:buNone/>
+            </a:pPr>
+            <a:r>
+              <a:rPr lang="en-US" sz="1800" b="0" dirty="0">
+                <a:solidFill>
+                  <a:srgbClr val="000000"/>
+                </a:solidFill>
+                <a:effectLst/>
+                <a:latin typeface="Consolas" panose="020B0609020204030204" pitchFamily="49" charset="0"/>
+              </a:rPr>
+              <a:t>    </a:t>
+            </a:r>
+            <a:r>
+              <a:rPr lang="en-US" sz="1800" b="0" dirty="0">
+                <a:solidFill>
+                  <a:srgbClr val="0000FF"/>
+                </a:solidFill>
+                <a:effectLst/>
+                <a:latin typeface="Consolas" panose="020B0609020204030204" pitchFamily="49" charset="0"/>
+              </a:rPr>
+              <a:t>return</a:t>
+            </a:r>
+            <a:r>
+              <a:rPr lang="en-US" sz="1800" b="0" dirty="0">
+                <a:solidFill>
+                  <a:srgbClr val="000000"/>
+                </a:solidFill>
+                <a:effectLst/>
+                <a:latin typeface="Consolas" panose="020B0609020204030204" pitchFamily="49" charset="0"/>
+              </a:rPr>
+              <a:t> () </a:t>
+            </a:r>
+            <a:r>
+              <a:rPr lang="en-US" sz="1800" b="0" dirty="0">
+                <a:solidFill>
+                  <a:srgbClr val="0000FF"/>
+                </a:solidFill>
+                <a:effectLst/>
+                <a:latin typeface="Consolas" panose="020B0609020204030204" pitchFamily="49" charset="0"/>
+              </a:rPr>
+              <a:t>=&gt;</a:t>
+            </a:r>
+            <a:r>
+              <a:rPr lang="en-US" sz="1800" b="0" dirty="0">
+                <a:solidFill>
+                  <a:srgbClr val="000000"/>
+                </a:solidFill>
+                <a:effectLst/>
+                <a:latin typeface="Consolas" panose="020B0609020204030204" pitchFamily="49" charset="0"/>
+              </a:rPr>
+              <a:t> {</a:t>
+            </a:r>
+          </a:p>
+          <a:p>
+            <a:pPr>
+              <a:lnSpc>
+                <a:spcPct val="113095"/>
+              </a:lnSpc>
+              <a:buNone/>
+            </a:pPr>
+            <a:r>
+              <a:rPr lang="en-US" sz="1800" b="0" dirty="0">
+                <a:solidFill>
+                  <a:srgbClr val="000000"/>
+                </a:solidFill>
+                <a:effectLst/>
+                <a:latin typeface="Consolas" panose="020B0609020204030204" pitchFamily="49" charset="0"/>
+              </a:rPr>
+              <a:t>      </a:t>
+            </a:r>
+            <a:r>
+              <a:rPr lang="en-US" sz="1800" b="0" dirty="0" err="1">
+                <a:solidFill>
+                  <a:srgbClr val="000000"/>
+                </a:solidFill>
+                <a:effectLst/>
+                <a:latin typeface="Consolas" panose="020B0609020204030204" pitchFamily="49" charset="0"/>
+              </a:rPr>
+              <a:t>clock.removeListener</a:t>
+            </a:r>
+            <a:r>
+              <a:rPr lang="en-US" sz="1800" b="0" dirty="0">
+                <a:solidFill>
+                  <a:srgbClr val="000000"/>
+                </a:solidFill>
+                <a:effectLst/>
+                <a:latin typeface="Consolas" panose="020B0609020204030204" pitchFamily="49" charset="0"/>
+              </a:rPr>
+              <a:t>(listener1);</a:t>
+            </a:r>
+          </a:p>
+          <a:p>
+            <a:pPr>
+              <a:lnSpc>
+                <a:spcPct val="113095"/>
+              </a:lnSpc>
+              <a:buNone/>
+            </a:pPr>
+            <a:r>
+              <a:rPr lang="en-US" sz="1800" b="0" dirty="0">
+                <a:solidFill>
+                  <a:srgbClr val="000000"/>
+                </a:solidFill>
+                <a:effectLst/>
+                <a:latin typeface="Consolas" panose="020B0609020204030204" pitchFamily="49" charset="0"/>
+              </a:rPr>
+              <a:t>    };</a:t>
+            </a:r>
+          </a:p>
+          <a:p>
+            <a:pPr>
+              <a:lnSpc>
+                <a:spcPct val="113095"/>
+              </a:lnSpc>
+              <a:buNone/>
+            </a:pPr>
+            <a:r>
+              <a:rPr lang="en-US" sz="1800" b="0" dirty="0">
+                <a:solidFill>
+                  <a:srgbClr val="000000"/>
+                </a:solidFill>
+                <a:effectLst/>
+                <a:latin typeface="Consolas" panose="020B0609020204030204" pitchFamily="49" charset="0"/>
+              </a:rPr>
+              <a:t>  }, []);</a:t>
+            </a:r>
+          </a:p>
+          <a:p>
+            <a:pPr>
+              <a:lnSpc>
+                <a:spcPct val="113095"/>
+              </a:lnSpc>
+              <a:buNone/>
+            </a:pPr>
+            <a:r>
+              <a:rPr lang="en-US" sz="1800" b="0" dirty="0">
+                <a:solidFill>
+                  <a:srgbClr val="000000"/>
+                </a:solidFill>
+                <a:effectLst/>
+                <a:latin typeface="Consolas" panose="020B0609020204030204" pitchFamily="49" charset="0"/>
+              </a:rPr>
+              <a:t>  </a:t>
+            </a:r>
+            <a:r>
+              <a:rPr lang="en-US" sz="1800" b="0" dirty="0">
+                <a:solidFill>
+                  <a:srgbClr val="0000FF"/>
+                </a:solidFill>
+                <a:effectLst/>
+                <a:highlight>
+                  <a:srgbClr val="FFFF00"/>
+                </a:highlight>
+                <a:latin typeface="Consolas" panose="020B0609020204030204" pitchFamily="49" charset="0"/>
+              </a:rPr>
+              <a:t>return</a:t>
+            </a:r>
+            <a:r>
+              <a:rPr lang="en-US" sz="1800" b="0" dirty="0">
+                <a:solidFill>
+                  <a:srgbClr val="000000"/>
+                </a:solidFill>
+                <a:effectLst/>
+                <a:highlight>
+                  <a:srgbClr val="FFFF00"/>
+                </a:highlight>
+                <a:latin typeface="Consolas" panose="020B0609020204030204" pitchFamily="49" charset="0"/>
+              </a:rPr>
+              <a:t> clock</a:t>
+            </a:r>
+            <a:r>
+              <a:rPr lang="en-US" sz="1800" b="0" dirty="0">
+                <a:solidFill>
+                  <a:srgbClr val="000000"/>
+                </a:solidFill>
+                <a:effectLst/>
+                <a:latin typeface="Consolas" panose="020B0609020204030204" pitchFamily="49" charset="0"/>
+              </a:rPr>
+              <a:t>;</a:t>
+            </a:r>
+          </a:p>
+          <a:p>
+            <a:pPr>
+              <a:lnSpc>
+                <a:spcPct val="113095"/>
+              </a:lnSpc>
+              <a:buNone/>
+            </a:pPr>
+            <a:r>
+              <a:rPr lang="en-US" sz="1800" b="0" dirty="0">
+                <a:solidFill>
+                  <a:srgbClr val="000000"/>
+                </a:solidFill>
+                <a:effectLst/>
+                <a:latin typeface="Consolas" panose="020B0609020204030204" pitchFamily="49" charset="0"/>
+              </a:rPr>
+              <a:t>}</a:t>
+            </a:r>
+          </a:p>
+          <a:p>
+            <a:pPr>
+              <a:lnSpc>
+                <a:spcPct val="113095"/>
+              </a:lnSpc>
+              <a:buNone/>
+            </a:pPr>
+            <a:br>
+              <a:rPr lang="en-US" sz="1800" b="0" dirty="0">
+                <a:solidFill>
+                  <a:srgbClr val="000000"/>
+                </a:solidFill>
+                <a:effectLst/>
+                <a:latin typeface="Consolas" panose="020B0609020204030204" pitchFamily="49" charset="0"/>
+              </a:rPr>
+            </a:br>
+            <a:endParaRPr lang="en-US" sz="1800" b="0" dirty="0">
+              <a:solidFill>
+                <a:srgbClr val="000000"/>
+              </a:solidFill>
+              <a:effectLst/>
+              <a:latin typeface="Consolas" panose="020B0609020204030204" pitchFamily="49" charset="0"/>
+            </a:endParaRPr>
+          </a:p>
+        </p:txBody>
+      </p:sp>
+      <p:sp>
+        <p:nvSpPr>
+          <p:cNvPr id="7" name="Rectangle: Rounded Corners 6">
+            <a:extLst>
+              <a:ext uri="{FF2B5EF4-FFF2-40B4-BE49-F238E27FC236}">
+                <a16:creationId xmlns:a16="http://schemas.microsoft.com/office/drawing/2014/main" id="{3BB2A20B-EA8D-6A18-AAE1-5B63675B5391}"/>
+              </a:ext>
+            </a:extLst>
+          </p:cNvPr>
+          <p:cNvSpPr/>
+          <p:nvPr/>
+        </p:nvSpPr>
+        <p:spPr>
+          <a:xfrm>
+            <a:off x="6891454" y="482380"/>
+            <a:ext cx="4599961" cy="601981"/>
+          </a:xfrm>
+          <a:prstGeom prst="roundRect">
+            <a:avLst/>
+          </a:prstGeom>
+          <a:solidFill>
+            <a:schemeClr val="accent6">
+              <a:lumMod val="20000"/>
+              <a:lumOff val="80000"/>
+            </a:schemeClr>
+          </a:solidFill>
+          <a:ln>
+            <a:solidFill>
+              <a:srgbClr val="0070C0"/>
+            </a:solidFill>
+          </a:ln>
+        </p:spPr>
+        <p:style>
+          <a:lnRef idx="2">
+            <a:schemeClr val="accent1">
+              <a:shade val="50000"/>
+            </a:schemeClr>
+          </a:lnRef>
+          <a:fillRef idx="1">
+            <a:schemeClr val="accent1"/>
+          </a:fillRef>
+          <a:effectRef idx="0">
+            <a:schemeClr val="accent1"/>
+          </a:effectRef>
+          <a:fontRef idx="minor">
+            <a:schemeClr val="lt1"/>
+          </a:fontRef>
+        </p:style>
+        <p:txBody>
+          <a:bodyPr rtlCol="0" anchor="ctr"/>
+          <a:lstStyle/>
+          <a:p>
+            <a:pPr marL="0" marR="0" lvl="0" indent="0" algn="ctr" defTabSz="914400" rtl="0" eaLnBrk="1" fontAlgn="auto" latinLnBrk="0" hangingPunct="0">
+              <a:lnSpc>
+                <a:spcPct val="100000"/>
+              </a:lnSpc>
+              <a:spcBef>
+                <a:spcPts val="0"/>
+              </a:spcBef>
+              <a:spcAft>
+                <a:spcPts val="0"/>
+              </a:spcAft>
+              <a:buClrTx/>
+              <a:buSzTx/>
+              <a:buFontTx/>
+              <a:buNone/>
+              <a:tabLst/>
+              <a:defRPr/>
+            </a:pPr>
+            <a:r>
+              <a:rPr kumimoji="0" lang="en-US" sz="2400" b="0" i="0" u="none" strike="noStrike" kern="0" cap="none" spc="0" normalizeH="0" baseline="0" noProof="0" dirty="0" err="1">
+                <a:ln>
+                  <a:noFill/>
+                </a:ln>
+                <a:solidFill>
+                  <a:srgbClr val="000000"/>
+                </a:solidFill>
+                <a:effectLst/>
+                <a:uLnTx/>
+                <a:uFillTx/>
+                <a:latin typeface="Calibri"/>
+                <a:ea typeface="Calibri"/>
+                <a:cs typeface="Calibri"/>
+                <a:sym typeface="Calibri"/>
+              </a:rPr>
+              <a:t>Src</a:t>
+            </a:r>
+            <a:r>
+              <a:rPr kumimoji="0" lang="en-US" sz="2400" b="0" i="0" u="none" strike="noStrike" kern="0" cap="none" spc="0" normalizeH="0" baseline="0" noProof="0" dirty="0">
+                <a:ln>
+                  <a:noFill/>
+                </a:ln>
+                <a:solidFill>
+                  <a:srgbClr val="000000"/>
+                </a:solidFill>
+                <a:effectLst/>
+                <a:uLnTx/>
+                <a:uFillTx/>
+                <a:latin typeface="Calibri"/>
+                <a:ea typeface="Calibri"/>
+                <a:cs typeface="Calibri"/>
+                <a:sym typeface="Calibri"/>
+              </a:rPr>
+              <a:t>/Shared/Hooks/</a:t>
+            </a:r>
+            <a:r>
+              <a:rPr kumimoji="0" lang="en-US" sz="2400" b="0" i="0" u="none" strike="noStrike" kern="0" cap="none" spc="0" normalizeH="0" baseline="0" noProof="0" dirty="0" err="1">
+                <a:ln>
+                  <a:noFill/>
+                </a:ln>
+                <a:solidFill>
+                  <a:srgbClr val="000000"/>
+                </a:solidFill>
+                <a:effectLst/>
+                <a:uLnTx/>
+                <a:uFillTx/>
+                <a:latin typeface="Calibri"/>
+                <a:ea typeface="Calibri"/>
+                <a:cs typeface="Calibri"/>
+                <a:sym typeface="Calibri"/>
+              </a:rPr>
+              <a:t>useClock.ts</a:t>
+            </a:r>
+            <a:endParaRPr kumimoji="0" lang="en-US" sz="2400" b="0" i="0" u="none" strike="noStrike" kern="0" cap="none" spc="0" normalizeH="0" baseline="0" noProof="0" dirty="0">
+              <a:ln>
+                <a:noFill/>
+              </a:ln>
+              <a:solidFill>
+                <a:srgbClr val="000000"/>
+              </a:solidFill>
+              <a:effectLst/>
+              <a:uLnTx/>
+              <a:uFillTx/>
+              <a:latin typeface="Calibri"/>
+              <a:ea typeface="Calibri"/>
+              <a:cs typeface="Calibri"/>
+              <a:sym typeface="Calibri"/>
+            </a:endParaRPr>
+          </a:p>
+        </p:txBody>
+      </p:sp>
+    </p:spTree>
+    <p:extLst>
+      <p:ext uri="{BB962C8B-B14F-4D97-AF65-F5344CB8AC3E}">
+        <p14:creationId xmlns:p14="http://schemas.microsoft.com/office/powerpoint/2010/main" val="2139498976"/>
+      </p:ext>
+    </p:extLst>
+  </p:cSld>
+  <p:clrMapOvr>
+    <a:masterClrMapping/>
+  </p:clrMapOvr>
+  <p:transition spd="med"/>
+</p:sld>
+</file>
+
+<file path=ppt/slides/slide25.xml><?xml version="1.0" encoding="utf-8"?>
+<p:sld xmlns:a="http://schemas.openxmlformats.org/drawingml/2006/main" xmlns:r="http://schemas.openxmlformats.org/officeDocument/2006/relationships" xmlns:p="http://schemas.openxmlformats.org/presentationml/2006/main">
+  <p:cSld>
+    <p:spTree>
+      <p:nvGrpSpPr>
+        <p:cNvPr id="1" name=""/>
+        <p:cNvGrpSpPr/>
+        <p:nvPr/>
+      </p:nvGrpSpPr>
+      <p:grpSpPr>
+        <a:xfrm>
+          <a:off x="0" y="0"/>
+          <a:ext cx="0" cy="0"/>
+          <a:chOff x="0" y="0"/>
+          <a:chExt cx="0" cy="0"/>
+        </a:xfrm>
+      </p:grpSpPr>
+      <p:sp>
+        <p:nvSpPr>
+          <p:cNvPr id="2" name="Title 1">
+            <a:extLst>
+              <a:ext uri="{FF2B5EF4-FFF2-40B4-BE49-F238E27FC236}">
+                <a16:creationId xmlns:a16="http://schemas.microsoft.com/office/drawing/2014/main" id="{9A405F36-2BCE-424A-097C-E22D0214BD0F}"/>
+              </a:ext>
+            </a:extLst>
+          </p:cNvPr>
+          <p:cNvSpPr>
+            <a:spLocks noGrp="1"/>
+          </p:cNvSpPr>
+          <p:nvPr>
+            <p:ph type="title"/>
+          </p:nvPr>
+        </p:nvSpPr>
+        <p:spPr/>
+        <p:txBody>
+          <a:bodyPr/>
+          <a:lstStyle/>
+          <a:p>
+            <a:r>
+              <a:rPr lang="en-US" dirty="0"/>
+              <a:t>Using </a:t>
+            </a:r>
+            <a:r>
+              <a:rPr lang="en-US" dirty="0" err="1"/>
+              <a:t>useClock</a:t>
+            </a:r>
+            <a:endParaRPr lang="en-US" dirty="0"/>
+          </a:p>
+        </p:txBody>
+      </p:sp>
+      <p:sp>
+        <p:nvSpPr>
+          <p:cNvPr id="3" name="Slide Number Placeholder 2">
+            <a:extLst>
+              <a:ext uri="{FF2B5EF4-FFF2-40B4-BE49-F238E27FC236}">
+                <a16:creationId xmlns:a16="http://schemas.microsoft.com/office/drawing/2014/main" id="{E161624F-6F64-7188-14CE-27F5868AF190}"/>
+              </a:ext>
+            </a:extLst>
+          </p:cNvPr>
+          <p:cNvSpPr>
+            <a:spLocks noGrp="1"/>
+          </p:cNvSpPr>
+          <p:nvPr>
+            <p:ph type="sldNum" sz="quarter" idx="2"/>
+          </p:nvPr>
+        </p:nvSpPr>
+        <p:spPr/>
+        <p:txBody>
+          <a:bodyPr/>
+          <a:lstStyle/>
+          <a:p>
+            <a:fld id="{86CB4B4D-7CA3-9044-876B-883B54F8677D}" type="slidenum">
+              <a:rPr lang="en-US" smtClean="0"/>
+              <a:t>25</a:t>
+            </a:fld>
+            <a:endParaRPr lang="en-US"/>
+          </a:p>
+        </p:txBody>
+      </p:sp>
+      <p:sp>
+        <p:nvSpPr>
+          <p:cNvPr id="5" name="Rectangle: Rounded Corners 4">
+            <a:extLst>
+              <a:ext uri="{FF2B5EF4-FFF2-40B4-BE49-F238E27FC236}">
+                <a16:creationId xmlns:a16="http://schemas.microsoft.com/office/drawing/2014/main" id="{71476609-2237-3E45-225B-93A1772E4FA5}"/>
+              </a:ext>
+            </a:extLst>
+          </p:cNvPr>
+          <p:cNvSpPr/>
+          <p:nvPr/>
+        </p:nvSpPr>
+        <p:spPr>
+          <a:xfrm>
+            <a:off x="3922776" y="157400"/>
+            <a:ext cx="7863653" cy="601981"/>
+          </a:xfrm>
+          <a:prstGeom prst="roundRect">
+            <a:avLst/>
+          </a:prstGeom>
+          <a:solidFill>
+            <a:schemeClr val="accent6">
+              <a:lumMod val="20000"/>
+              <a:lumOff val="80000"/>
+            </a:schemeClr>
+          </a:solidFill>
+          <a:ln>
+            <a:solidFill>
+              <a:srgbClr val="0070C0"/>
+            </a:solidFill>
+          </a:ln>
+        </p:spPr>
+        <p:style>
+          <a:lnRef idx="2">
+            <a:schemeClr val="accent1">
+              <a:shade val="50000"/>
+            </a:schemeClr>
+          </a:lnRef>
+          <a:fillRef idx="1">
+            <a:schemeClr val="accent1"/>
+          </a:fillRef>
+          <a:effectRef idx="0">
+            <a:schemeClr val="accent1"/>
+          </a:effectRef>
+          <a:fontRef idx="minor">
+            <a:schemeClr val="lt1"/>
+          </a:fontRef>
+        </p:style>
+        <p:txBody>
+          <a:bodyPr rtlCol="0" anchor="ctr"/>
+          <a:lstStyle/>
+          <a:p>
+            <a:pPr algn="ctr"/>
+            <a:r>
+              <a:rPr lang="en-US" sz="2400" dirty="0" err="1">
+                <a:solidFill>
+                  <a:schemeClr val="tx1"/>
+                </a:solidFill>
+              </a:rPr>
+              <a:t>src</a:t>
+            </a:r>
+            <a:r>
+              <a:rPr lang="en-US" sz="2400" dirty="0">
+                <a:solidFill>
+                  <a:schemeClr val="tx1"/>
+                </a:solidFill>
+              </a:rPr>
+              <a:t>/Examples/</a:t>
+            </a:r>
+            <a:r>
+              <a:rPr lang="en-US" sz="2400" dirty="0" err="1">
+                <a:solidFill>
+                  <a:schemeClr val="tx1"/>
+                </a:solidFill>
+              </a:rPr>
+              <a:t>SimpleClockDisplayWithUseClock.tsx</a:t>
+            </a:r>
+            <a:endParaRPr lang="en-US" sz="2400" dirty="0">
+              <a:solidFill>
+                <a:schemeClr val="tx1"/>
+              </a:solidFill>
+            </a:endParaRPr>
+          </a:p>
+        </p:txBody>
+      </p:sp>
+      <p:sp>
+        <p:nvSpPr>
+          <p:cNvPr id="7" name="TextBox 6">
+            <a:extLst>
+              <a:ext uri="{FF2B5EF4-FFF2-40B4-BE49-F238E27FC236}">
+                <a16:creationId xmlns:a16="http://schemas.microsoft.com/office/drawing/2014/main" id="{C7BA1FD0-8731-F029-4755-1F4349482CD1}"/>
+              </a:ext>
+            </a:extLst>
+          </p:cNvPr>
+          <p:cNvSpPr txBox="1"/>
+          <p:nvPr/>
+        </p:nvSpPr>
+        <p:spPr>
+          <a:xfrm>
+            <a:off x="838200" y="1402757"/>
+            <a:ext cx="9565888" cy="6407716"/>
+          </a:xfrm>
+          <a:prstGeom prst="rect">
+            <a:avLst/>
+          </a:prstGeom>
+          <a:noFill/>
+          <a:ln w="12700" cap="flat">
+            <a:noFill/>
+            <a:miter lim="400000"/>
+          </a:ln>
+          <a:effectLst/>
+          <a:sp3d/>
+        </p:spPr>
+        <p:style>
+          <a:lnRef idx="0">
+            <a:scrgbClr r="0" g="0" b="0"/>
+          </a:lnRef>
+          <a:fillRef idx="0">
+            <a:scrgbClr r="0" g="0" b="0"/>
+          </a:fillRef>
+          <a:effectRef idx="0">
+            <a:scrgbClr r="0" g="0" b="0"/>
+          </a:effectRef>
+          <a:fontRef idx="none"/>
+        </p:style>
+        <p:txBody>
+          <a:bodyPr wrap="square">
+            <a:spAutoFit/>
+          </a:bodyPr>
+          <a:lstStyle/>
+          <a:p>
+            <a:pPr>
+              <a:lnSpc>
+                <a:spcPct val="113095"/>
+              </a:lnSpc>
+              <a:buNone/>
+            </a:pPr>
+            <a:r>
+              <a:rPr lang="en-US" sz="1400" b="0" dirty="0">
+                <a:solidFill>
+                  <a:srgbClr val="0000FF"/>
+                </a:solidFill>
+                <a:effectLst/>
+                <a:latin typeface="Consolas" panose="020B0609020204030204" pitchFamily="49" charset="0"/>
+              </a:rPr>
+              <a:t>import</a:t>
+            </a:r>
+            <a:r>
+              <a:rPr lang="en-US" sz="1400" b="0" dirty="0">
+                <a:solidFill>
+                  <a:srgbClr val="000000"/>
+                </a:solidFill>
+                <a:effectLst/>
+                <a:latin typeface="Consolas" panose="020B0609020204030204" pitchFamily="49" charset="0"/>
+              </a:rPr>
+              <a:t> { </a:t>
+            </a:r>
+            <a:r>
+              <a:rPr lang="en-US" sz="1400" b="0" dirty="0" err="1">
+                <a:solidFill>
+                  <a:srgbClr val="000000"/>
+                </a:solidFill>
+                <a:effectLst/>
+                <a:latin typeface="Consolas" panose="020B0609020204030204" pitchFamily="49" charset="0"/>
+              </a:rPr>
+              <a:t>useState</a:t>
+            </a:r>
+            <a:r>
+              <a:rPr lang="en-US" sz="1400" b="0" dirty="0">
+                <a:solidFill>
+                  <a:srgbClr val="000000"/>
+                </a:solidFill>
+                <a:effectLst/>
+                <a:latin typeface="Consolas" panose="020B0609020204030204" pitchFamily="49" charset="0"/>
+              </a:rPr>
+              <a:t> } </a:t>
+            </a:r>
+            <a:r>
+              <a:rPr lang="en-US" sz="1400" b="0" dirty="0">
+                <a:solidFill>
+                  <a:srgbClr val="0000FF"/>
+                </a:solidFill>
+                <a:effectLst/>
+                <a:latin typeface="Consolas" panose="020B0609020204030204" pitchFamily="49" charset="0"/>
+              </a:rPr>
+              <a:t>from</a:t>
+            </a:r>
+            <a:r>
+              <a:rPr lang="en-US" sz="1400" b="0" dirty="0">
+                <a:solidFill>
+                  <a:srgbClr val="000000"/>
+                </a:solidFill>
+                <a:effectLst/>
+                <a:latin typeface="Consolas" panose="020B0609020204030204" pitchFamily="49" charset="0"/>
+              </a:rPr>
+              <a:t> </a:t>
+            </a:r>
+            <a:r>
+              <a:rPr lang="en-US" sz="1400" b="0" dirty="0">
+                <a:solidFill>
+                  <a:srgbClr val="A31515"/>
+                </a:solidFill>
+                <a:effectLst/>
+                <a:latin typeface="Consolas" panose="020B0609020204030204" pitchFamily="49" charset="0"/>
+              </a:rPr>
+              <a:t>"react"</a:t>
+            </a:r>
+            <a:r>
+              <a:rPr lang="en-US" sz="1400" b="0" dirty="0">
+                <a:solidFill>
+                  <a:srgbClr val="000000"/>
+                </a:solidFill>
+                <a:effectLst/>
+                <a:latin typeface="Consolas" panose="020B0609020204030204" pitchFamily="49" charset="0"/>
+              </a:rPr>
+              <a:t>;</a:t>
+            </a:r>
+          </a:p>
+          <a:p>
+            <a:pPr>
+              <a:lnSpc>
+                <a:spcPct val="113095"/>
+              </a:lnSpc>
+              <a:buNone/>
+            </a:pPr>
+            <a:r>
+              <a:rPr lang="en-US" sz="1400" b="0" dirty="0">
+                <a:solidFill>
+                  <a:srgbClr val="0000FF"/>
+                </a:solidFill>
+                <a:effectLst/>
+                <a:latin typeface="Consolas" panose="020B0609020204030204" pitchFamily="49" charset="0"/>
+              </a:rPr>
+              <a:t>import</a:t>
+            </a:r>
+            <a:r>
+              <a:rPr lang="en-US" sz="1400" b="0" dirty="0">
+                <a:solidFill>
+                  <a:srgbClr val="000000"/>
+                </a:solidFill>
+                <a:effectLst/>
+                <a:latin typeface="Consolas" panose="020B0609020204030204" pitchFamily="49" charset="0"/>
+              </a:rPr>
+              <a:t> { </a:t>
+            </a:r>
+            <a:r>
+              <a:rPr lang="en-US" sz="1400" b="0" dirty="0">
+                <a:solidFill>
+                  <a:srgbClr val="0000FF"/>
+                </a:solidFill>
+                <a:effectLst/>
+                <a:latin typeface="Consolas" panose="020B0609020204030204" pitchFamily="49" charset="0"/>
+              </a:rPr>
+              <a:t>type</a:t>
+            </a:r>
+            <a:r>
+              <a:rPr lang="en-US" sz="1400" b="0" dirty="0">
+                <a:solidFill>
+                  <a:srgbClr val="000000"/>
+                </a:solidFill>
+                <a:effectLst/>
+                <a:latin typeface="Consolas" panose="020B0609020204030204" pitchFamily="49" charset="0"/>
+              </a:rPr>
+              <a:t> ClockDisplayProps } </a:t>
+            </a:r>
+            <a:r>
+              <a:rPr lang="en-US" sz="1400" b="0" dirty="0">
+                <a:solidFill>
+                  <a:srgbClr val="0000FF"/>
+                </a:solidFill>
+                <a:effectLst/>
+                <a:latin typeface="Consolas" panose="020B0609020204030204" pitchFamily="49" charset="0"/>
+              </a:rPr>
+              <a:t>from</a:t>
+            </a:r>
+            <a:r>
+              <a:rPr lang="en-US" sz="1400" b="0" dirty="0">
+                <a:solidFill>
+                  <a:srgbClr val="000000"/>
+                </a:solidFill>
+                <a:effectLst/>
+                <a:latin typeface="Consolas" panose="020B0609020204030204" pitchFamily="49" charset="0"/>
+              </a:rPr>
+              <a:t> </a:t>
+            </a:r>
+            <a:r>
+              <a:rPr lang="en-US" sz="1400" b="0" dirty="0">
+                <a:solidFill>
+                  <a:srgbClr val="A31515"/>
+                </a:solidFill>
+                <a:effectLst/>
+                <a:latin typeface="Consolas" panose="020B0609020204030204" pitchFamily="49" charset="0"/>
+              </a:rPr>
+              <a:t>"../Shared/types"</a:t>
+            </a:r>
+            <a:r>
+              <a:rPr lang="en-US" sz="1400" b="0" dirty="0">
+                <a:solidFill>
+                  <a:srgbClr val="000000"/>
+                </a:solidFill>
+                <a:effectLst/>
+                <a:latin typeface="Consolas" panose="020B0609020204030204" pitchFamily="49" charset="0"/>
+              </a:rPr>
+              <a:t>;</a:t>
+            </a:r>
+          </a:p>
+          <a:p>
+            <a:pPr>
+              <a:lnSpc>
+                <a:spcPct val="113095"/>
+              </a:lnSpc>
+              <a:buNone/>
+            </a:pPr>
+            <a:r>
+              <a:rPr lang="en-US" sz="1400" b="0" dirty="0">
+                <a:solidFill>
+                  <a:srgbClr val="0000FF"/>
+                </a:solidFill>
+                <a:effectLst/>
+                <a:latin typeface="Consolas" panose="020B0609020204030204" pitchFamily="49" charset="0"/>
+              </a:rPr>
+              <a:t>import</a:t>
+            </a:r>
+            <a:r>
+              <a:rPr lang="en-US" sz="1400" b="0" dirty="0">
+                <a:solidFill>
+                  <a:srgbClr val="000000"/>
+                </a:solidFill>
+                <a:effectLst/>
+                <a:latin typeface="Consolas" panose="020B0609020204030204" pitchFamily="49" charset="0"/>
+              </a:rPr>
+              <a:t> { </a:t>
+            </a:r>
+            <a:r>
+              <a:rPr lang="en-US" sz="1400" b="0" dirty="0">
+                <a:solidFill>
+                  <a:srgbClr val="0000FF"/>
+                </a:solidFill>
+                <a:effectLst/>
+                <a:latin typeface="Consolas" panose="020B0609020204030204" pitchFamily="49" charset="0"/>
+              </a:rPr>
+              <a:t>type</a:t>
+            </a:r>
+            <a:r>
+              <a:rPr lang="en-US" sz="1400" b="0" dirty="0">
+                <a:solidFill>
+                  <a:srgbClr val="000000"/>
+                </a:solidFill>
+                <a:effectLst/>
+                <a:latin typeface="Consolas" panose="020B0609020204030204" pitchFamily="49" charset="0"/>
+              </a:rPr>
+              <a:t> </a:t>
+            </a:r>
+            <a:r>
+              <a:rPr lang="en-US" sz="1400" b="0" dirty="0" err="1">
+                <a:solidFill>
+                  <a:srgbClr val="000000"/>
+                </a:solidFill>
+                <a:effectLst/>
+                <a:latin typeface="Consolas" panose="020B0609020204030204" pitchFamily="49" charset="0"/>
+              </a:rPr>
+              <a:t>ITicker</a:t>
+            </a:r>
+            <a:r>
+              <a:rPr lang="en-US" sz="1400" b="0" dirty="0">
+                <a:solidFill>
+                  <a:srgbClr val="000000"/>
+                </a:solidFill>
+                <a:effectLst/>
+                <a:latin typeface="Consolas" panose="020B0609020204030204" pitchFamily="49" charset="0"/>
+              </a:rPr>
+              <a:t> } </a:t>
+            </a:r>
+            <a:r>
+              <a:rPr lang="en-US" sz="1400" b="0" dirty="0">
+                <a:solidFill>
+                  <a:srgbClr val="0000FF"/>
+                </a:solidFill>
+                <a:effectLst/>
+                <a:latin typeface="Consolas" panose="020B0609020204030204" pitchFamily="49" charset="0"/>
+              </a:rPr>
+              <a:t>from</a:t>
+            </a:r>
+            <a:r>
+              <a:rPr lang="en-US" sz="1400" b="0" dirty="0">
+                <a:solidFill>
+                  <a:srgbClr val="000000"/>
+                </a:solidFill>
+                <a:effectLst/>
+                <a:latin typeface="Consolas" panose="020B0609020204030204" pitchFamily="49" charset="0"/>
+              </a:rPr>
+              <a:t> </a:t>
+            </a:r>
+            <a:r>
+              <a:rPr lang="en-US" sz="1400" b="0" dirty="0">
+                <a:solidFill>
+                  <a:srgbClr val="A31515"/>
+                </a:solidFill>
+                <a:effectLst/>
+                <a:latin typeface="Consolas" panose="020B0609020204030204" pitchFamily="49" charset="0"/>
+              </a:rPr>
+              <a:t>"../Shared/types"</a:t>
+            </a:r>
+            <a:r>
+              <a:rPr lang="en-US" sz="1400" b="0" dirty="0">
+                <a:solidFill>
+                  <a:srgbClr val="000000"/>
+                </a:solidFill>
+                <a:effectLst/>
+                <a:latin typeface="Consolas" panose="020B0609020204030204" pitchFamily="49" charset="0"/>
+              </a:rPr>
+              <a:t>;</a:t>
+            </a:r>
+          </a:p>
+          <a:p>
+            <a:pPr>
+              <a:lnSpc>
+                <a:spcPct val="113095"/>
+              </a:lnSpc>
+              <a:buNone/>
+            </a:pPr>
+            <a:r>
+              <a:rPr lang="en-US" sz="1400" b="0" dirty="0">
+                <a:solidFill>
+                  <a:srgbClr val="0000FF"/>
+                </a:solidFill>
+                <a:effectLst/>
+                <a:latin typeface="Consolas" panose="020B0609020204030204" pitchFamily="49" charset="0"/>
+              </a:rPr>
+              <a:t>import</a:t>
+            </a:r>
+            <a:r>
+              <a:rPr lang="en-US" sz="1400" b="0" dirty="0">
+                <a:solidFill>
+                  <a:srgbClr val="000000"/>
+                </a:solidFill>
+                <a:effectLst/>
+                <a:latin typeface="Consolas" panose="020B0609020204030204" pitchFamily="49" charset="0"/>
+              </a:rPr>
+              <a:t> { </a:t>
+            </a:r>
+            <a:r>
+              <a:rPr lang="en-US" sz="1400" b="0" dirty="0" err="1">
+                <a:solidFill>
+                  <a:srgbClr val="000000"/>
+                </a:solidFill>
+                <a:effectLst/>
+                <a:latin typeface="Consolas" panose="020B0609020204030204" pitchFamily="49" charset="0"/>
+              </a:rPr>
+              <a:t>useClock</a:t>
+            </a:r>
+            <a:r>
+              <a:rPr lang="en-US" sz="1400" b="0" dirty="0">
+                <a:solidFill>
+                  <a:srgbClr val="000000"/>
+                </a:solidFill>
+                <a:effectLst/>
+                <a:latin typeface="Consolas" panose="020B0609020204030204" pitchFamily="49" charset="0"/>
+              </a:rPr>
+              <a:t> } </a:t>
+            </a:r>
+            <a:r>
+              <a:rPr lang="en-US" sz="1400" b="0" dirty="0">
+                <a:solidFill>
+                  <a:srgbClr val="0000FF"/>
+                </a:solidFill>
+                <a:effectLst/>
+                <a:latin typeface="Consolas" panose="020B0609020204030204" pitchFamily="49" charset="0"/>
+              </a:rPr>
+              <a:t>from</a:t>
+            </a:r>
+            <a:r>
+              <a:rPr lang="en-US" sz="1400" b="0" dirty="0">
+                <a:solidFill>
+                  <a:srgbClr val="000000"/>
+                </a:solidFill>
+                <a:effectLst/>
+                <a:latin typeface="Consolas" panose="020B0609020204030204" pitchFamily="49" charset="0"/>
+              </a:rPr>
+              <a:t> </a:t>
+            </a:r>
+            <a:r>
+              <a:rPr lang="en-US" sz="1400" b="0" dirty="0">
+                <a:solidFill>
+                  <a:srgbClr val="A31515"/>
+                </a:solidFill>
+                <a:effectLst/>
+                <a:latin typeface="Consolas" panose="020B0609020204030204" pitchFamily="49" charset="0"/>
+              </a:rPr>
+              <a:t>"../Shared/Hooks/</a:t>
+            </a:r>
+            <a:r>
+              <a:rPr lang="en-US" sz="1400" b="0" dirty="0" err="1">
+                <a:solidFill>
+                  <a:srgbClr val="A31515"/>
+                </a:solidFill>
+                <a:effectLst/>
+                <a:latin typeface="Consolas" panose="020B0609020204030204" pitchFamily="49" charset="0"/>
+              </a:rPr>
+              <a:t>useClock</a:t>
+            </a:r>
+            <a:r>
+              <a:rPr lang="en-US" sz="1400" b="0" dirty="0">
+                <a:solidFill>
+                  <a:srgbClr val="A31515"/>
+                </a:solidFill>
+                <a:effectLst/>
+                <a:latin typeface="Consolas" panose="020B0609020204030204" pitchFamily="49" charset="0"/>
+              </a:rPr>
+              <a:t>"</a:t>
+            </a:r>
+            <a:r>
+              <a:rPr lang="en-US" sz="1400" b="0" dirty="0">
+                <a:solidFill>
+                  <a:srgbClr val="000000"/>
+                </a:solidFill>
+                <a:effectLst/>
+                <a:latin typeface="Consolas" panose="020B0609020204030204" pitchFamily="49" charset="0"/>
+              </a:rPr>
+              <a:t>;</a:t>
+            </a:r>
+          </a:p>
+          <a:p>
+            <a:pPr>
+              <a:lnSpc>
+                <a:spcPct val="113095"/>
+              </a:lnSpc>
+              <a:buNone/>
+            </a:pPr>
+            <a:r>
+              <a:rPr lang="en-US" sz="1400" b="0" dirty="0">
+                <a:solidFill>
+                  <a:srgbClr val="0000FF"/>
+                </a:solidFill>
+                <a:effectLst/>
+                <a:latin typeface="Consolas" panose="020B0609020204030204" pitchFamily="49" charset="0"/>
+              </a:rPr>
+              <a:t>import</a:t>
+            </a:r>
+            <a:r>
+              <a:rPr lang="en-US" sz="1400" b="0" dirty="0">
+                <a:solidFill>
+                  <a:srgbClr val="000000"/>
+                </a:solidFill>
+                <a:effectLst/>
+                <a:latin typeface="Consolas" panose="020B0609020204030204" pitchFamily="49" charset="0"/>
+              </a:rPr>
+              <a:t> { Box,  </a:t>
+            </a:r>
+            <a:r>
+              <a:rPr lang="en-US" sz="1400" b="0" dirty="0" err="1">
+                <a:solidFill>
+                  <a:srgbClr val="000000"/>
+                </a:solidFill>
+                <a:effectLst/>
+                <a:latin typeface="Consolas" panose="020B0609020204030204" pitchFamily="49" charset="0"/>
+              </a:rPr>
+              <a:t>HStack</a:t>
+            </a:r>
+            <a:r>
+              <a:rPr lang="en-US" sz="1400" b="0" dirty="0">
+                <a:solidFill>
+                  <a:srgbClr val="000000"/>
+                </a:solidFill>
+                <a:effectLst/>
+                <a:latin typeface="Consolas" panose="020B0609020204030204" pitchFamily="49" charset="0"/>
+              </a:rPr>
+              <a:t>, </a:t>
+            </a:r>
+            <a:r>
+              <a:rPr lang="en-US" sz="1400" b="0" dirty="0" err="1">
+                <a:solidFill>
+                  <a:srgbClr val="000000"/>
+                </a:solidFill>
+                <a:effectLst/>
+                <a:latin typeface="Consolas" panose="020B0609020204030204" pitchFamily="49" charset="0"/>
+              </a:rPr>
+              <a:t>IconButton</a:t>
+            </a:r>
+            <a:r>
+              <a:rPr lang="en-US" sz="1400" b="0" dirty="0">
+                <a:solidFill>
+                  <a:srgbClr val="000000"/>
+                </a:solidFill>
+                <a:effectLst/>
+                <a:latin typeface="Consolas" panose="020B0609020204030204" pitchFamily="49" charset="0"/>
+              </a:rPr>
+              <a:t> } </a:t>
+            </a:r>
+            <a:r>
+              <a:rPr lang="en-US" sz="1400" b="0" dirty="0">
+                <a:solidFill>
+                  <a:srgbClr val="0000FF"/>
+                </a:solidFill>
+                <a:effectLst/>
+                <a:latin typeface="Consolas" panose="020B0609020204030204" pitchFamily="49" charset="0"/>
+              </a:rPr>
+              <a:t>from</a:t>
+            </a:r>
+            <a:r>
+              <a:rPr lang="en-US" sz="1400" b="0" dirty="0">
+                <a:solidFill>
+                  <a:srgbClr val="000000"/>
+                </a:solidFill>
+                <a:effectLst/>
+                <a:latin typeface="Consolas" panose="020B0609020204030204" pitchFamily="49" charset="0"/>
+              </a:rPr>
+              <a:t> </a:t>
+            </a:r>
+            <a:r>
+              <a:rPr lang="en-US" sz="1400" b="0" dirty="0">
+                <a:solidFill>
+                  <a:srgbClr val="A31515"/>
+                </a:solidFill>
+                <a:effectLst/>
+                <a:latin typeface="Consolas" panose="020B0609020204030204" pitchFamily="49" charset="0"/>
+              </a:rPr>
+              <a:t>"@chakra-</a:t>
+            </a:r>
+            <a:r>
+              <a:rPr lang="en-US" sz="1400" b="0" dirty="0" err="1">
+                <a:solidFill>
+                  <a:srgbClr val="A31515"/>
+                </a:solidFill>
+                <a:effectLst/>
+                <a:latin typeface="Consolas" panose="020B0609020204030204" pitchFamily="49" charset="0"/>
+              </a:rPr>
+              <a:t>ui</a:t>
+            </a:r>
+            <a:r>
+              <a:rPr lang="en-US" sz="1400" b="0" dirty="0">
+                <a:solidFill>
+                  <a:srgbClr val="A31515"/>
+                </a:solidFill>
+                <a:effectLst/>
+                <a:latin typeface="Consolas" panose="020B0609020204030204" pitchFamily="49" charset="0"/>
+              </a:rPr>
+              <a:t>/react"</a:t>
+            </a:r>
+            <a:r>
+              <a:rPr lang="en-US" sz="1400" b="0" dirty="0">
+                <a:solidFill>
+                  <a:srgbClr val="000000"/>
+                </a:solidFill>
+                <a:effectLst/>
+                <a:latin typeface="Consolas" panose="020B0609020204030204" pitchFamily="49" charset="0"/>
+              </a:rPr>
+              <a:t>;</a:t>
+            </a:r>
+          </a:p>
+          <a:p>
+            <a:pPr>
+              <a:lnSpc>
+                <a:spcPct val="113095"/>
+              </a:lnSpc>
+              <a:buNone/>
+            </a:pPr>
+            <a:r>
+              <a:rPr lang="en-US" sz="1400" b="0" dirty="0">
+                <a:solidFill>
+                  <a:srgbClr val="0000FF"/>
+                </a:solidFill>
+                <a:effectLst/>
+                <a:latin typeface="Consolas" panose="020B0609020204030204" pitchFamily="49" charset="0"/>
+              </a:rPr>
+              <a:t>import</a:t>
+            </a:r>
+            <a:r>
+              <a:rPr lang="en-US" sz="1400" b="0" dirty="0">
+                <a:solidFill>
+                  <a:srgbClr val="000000"/>
+                </a:solidFill>
+                <a:effectLst/>
+                <a:latin typeface="Consolas" panose="020B0609020204030204" pitchFamily="49" charset="0"/>
+              </a:rPr>
+              <a:t> { </a:t>
+            </a:r>
+            <a:r>
+              <a:rPr lang="en-US" sz="1400" b="0" dirty="0" err="1">
+                <a:solidFill>
+                  <a:srgbClr val="000000"/>
+                </a:solidFill>
+                <a:effectLst/>
+                <a:latin typeface="Consolas" panose="020B0609020204030204" pitchFamily="49" charset="0"/>
+              </a:rPr>
+              <a:t>AiOutlineDelete</a:t>
+            </a:r>
+            <a:r>
+              <a:rPr lang="en-US" sz="1400" b="0" dirty="0">
+                <a:solidFill>
+                  <a:srgbClr val="000000"/>
+                </a:solidFill>
+                <a:effectLst/>
+                <a:latin typeface="Consolas" panose="020B0609020204030204" pitchFamily="49" charset="0"/>
+              </a:rPr>
+              <a:t>, </a:t>
+            </a:r>
+            <a:r>
+              <a:rPr lang="en-US" sz="1400" b="0" dirty="0" err="1">
+                <a:solidFill>
+                  <a:srgbClr val="000000"/>
+                </a:solidFill>
+                <a:effectLst/>
+                <a:latin typeface="Consolas" panose="020B0609020204030204" pitchFamily="49" charset="0"/>
+              </a:rPr>
+              <a:t>AiOutlinePlus</a:t>
+            </a:r>
+            <a:r>
+              <a:rPr lang="en-US" sz="1400" b="0" dirty="0">
+                <a:solidFill>
+                  <a:srgbClr val="000000"/>
+                </a:solidFill>
+                <a:effectLst/>
+                <a:latin typeface="Consolas" panose="020B0609020204030204" pitchFamily="49" charset="0"/>
+              </a:rPr>
+              <a:t> } </a:t>
+            </a:r>
+            <a:r>
+              <a:rPr lang="en-US" sz="1400" b="0" dirty="0">
+                <a:solidFill>
+                  <a:srgbClr val="0000FF"/>
+                </a:solidFill>
+                <a:effectLst/>
+                <a:latin typeface="Consolas" panose="020B0609020204030204" pitchFamily="49" charset="0"/>
+              </a:rPr>
+              <a:t>from</a:t>
+            </a:r>
+            <a:r>
+              <a:rPr lang="en-US" sz="1400" b="0" dirty="0">
+                <a:solidFill>
+                  <a:srgbClr val="000000"/>
+                </a:solidFill>
+                <a:effectLst/>
+                <a:latin typeface="Consolas" panose="020B0609020204030204" pitchFamily="49" charset="0"/>
+              </a:rPr>
+              <a:t> </a:t>
+            </a:r>
+            <a:r>
+              <a:rPr lang="en-US" sz="1400" b="0" dirty="0">
+                <a:solidFill>
+                  <a:srgbClr val="A31515"/>
+                </a:solidFill>
+                <a:effectLst/>
+                <a:latin typeface="Consolas" panose="020B0609020204030204" pitchFamily="49" charset="0"/>
+              </a:rPr>
+              <a:t>"react-icons/ai"</a:t>
+            </a:r>
+            <a:r>
+              <a:rPr lang="en-US" sz="1400" b="0" dirty="0">
+                <a:solidFill>
+                  <a:srgbClr val="000000"/>
+                </a:solidFill>
+                <a:effectLst/>
+                <a:latin typeface="Consolas" panose="020B0609020204030204" pitchFamily="49" charset="0"/>
+              </a:rPr>
+              <a:t>;</a:t>
+            </a:r>
+            <a:br>
+              <a:rPr lang="en-US" sz="1400" b="0" dirty="0">
+                <a:solidFill>
+                  <a:srgbClr val="000000"/>
+                </a:solidFill>
+                <a:effectLst/>
+                <a:latin typeface="Consolas" panose="020B0609020204030204" pitchFamily="49" charset="0"/>
+              </a:rPr>
+            </a:br>
+            <a:endParaRPr lang="en-US" sz="1400" b="0" dirty="0">
+              <a:solidFill>
+                <a:srgbClr val="000000"/>
+              </a:solidFill>
+              <a:effectLst/>
+              <a:latin typeface="Consolas" panose="020B0609020204030204" pitchFamily="49" charset="0"/>
+            </a:endParaRPr>
+          </a:p>
+          <a:p>
+            <a:pPr>
+              <a:lnSpc>
+                <a:spcPct val="113095"/>
+              </a:lnSpc>
+              <a:buNone/>
+            </a:pPr>
+            <a:r>
+              <a:rPr lang="en-US" sz="1400" b="0" dirty="0">
+                <a:solidFill>
+                  <a:srgbClr val="0000FF"/>
+                </a:solidFill>
+                <a:effectLst/>
+                <a:latin typeface="Consolas" panose="020B0609020204030204" pitchFamily="49" charset="0"/>
+              </a:rPr>
+              <a:t>export</a:t>
+            </a:r>
+            <a:r>
+              <a:rPr lang="en-US" sz="1400" b="0" dirty="0">
+                <a:solidFill>
+                  <a:srgbClr val="000000"/>
+                </a:solidFill>
+                <a:effectLst/>
+                <a:latin typeface="Consolas" panose="020B0609020204030204" pitchFamily="49" charset="0"/>
+              </a:rPr>
+              <a:t> </a:t>
+            </a:r>
+            <a:r>
+              <a:rPr lang="en-US" sz="1400" b="0" dirty="0">
+                <a:solidFill>
+                  <a:srgbClr val="0000FF"/>
+                </a:solidFill>
+                <a:effectLst/>
+                <a:latin typeface="Consolas" panose="020B0609020204030204" pitchFamily="49" charset="0"/>
+              </a:rPr>
+              <a:t>function</a:t>
+            </a:r>
+            <a:r>
+              <a:rPr lang="en-US" sz="1400" b="0" dirty="0">
+                <a:solidFill>
+                  <a:srgbClr val="000000"/>
+                </a:solidFill>
+                <a:effectLst/>
+                <a:latin typeface="Consolas" panose="020B0609020204030204" pitchFamily="49" charset="0"/>
+              </a:rPr>
+              <a:t> </a:t>
+            </a:r>
+            <a:r>
+              <a:rPr lang="en-US" sz="1400" b="0" dirty="0" err="1">
+                <a:solidFill>
+                  <a:srgbClr val="000000"/>
+                </a:solidFill>
+                <a:effectLst/>
+                <a:latin typeface="Consolas" panose="020B0609020204030204" pitchFamily="49" charset="0"/>
+              </a:rPr>
+              <a:t>ClockDisplay</a:t>
+            </a:r>
+            <a:r>
+              <a:rPr lang="en-US" sz="1400" b="0" dirty="0">
+                <a:solidFill>
+                  <a:srgbClr val="000000"/>
+                </a:solidFill>
+                <a:effectLst/>
+                <a:latin typeface="Consolas" panose="020B0609020204030204" pitchFamily="49" charset="0"/>
+              </a:rPr>
+              <a:t>(props: ClockDisplayProps) {</a:t>
+            </a:r>
+          </a:p>
+          <a:p>
+            <a:pPr>
+              <a:lnSpc>
+                <a:spcPct val="113095"/>
+              </a:lnSpc>
+              <a:buNone/>
+            </a:pPr>
+            <a:r>
+              <a:rPr lang="en-US" sz="1400" b="0" dirty="0">
+                <a:solidFill>
+                  <a:srgbClr val="000000"/>
+                </a:solidFill>
+                <a:effectLst/>
+                <a:latin typeface="Consolas" panose="020B0609020204030204" pitchFamily="49" charset="0"/>
+              </a:rPr>
+              <a:t>  </a:t>
+            </a:r>
+            <a:r>
+              <a:rPr lang="en-US" sz="1400" b="0" dirty="0">
+                <a:solidFill>
+                  <a:srgbClr val="0000FF"/>
+                </a:solidFill>
+                <a:effectLst/>
+                <a:latin typeface="Consolas" panose="020B0609020204030204" pitchFamily="49" charset="0"/>
+              </a:rPr>
+              <a:t>const</a:t>
+            </a:r>
+            <a:r>
+              <a:rPr lang="en-US" sz="1400" b="0" dirty="0">
+                <a:solidFill>
+                  <a:srgbClr val="000000"/>
+                </a:solidFill>
+                <a:effectLst/>
+                <a:latin typeface="Consolas" panose="020B0609020204030204" pitchFamily="49" charset="0"/>
+              </a:rPr>
+              <a:t> [</a:t>
+            </a:r>
+            <a:r>
+              <a:rPr lang="en-US" sz="1400" b="0" dirty="0" err="1">
+                <a:solidFill>
+                  <a:srgbClr val="000000"/>
+                </a:solidFill>
+                <a:effectLst/>
+                <a:latin typeface="Consolas" panose="020B0609020204030204" pitchFamily="49" charset="0"/>
+              </a:rPr>
+              <a:t>localTime</a:t>
+            </a:r>
+            <a:r>
+              <a:rPr lang="en-US" sz="1400" b="0" dirty="0">
+                <a:solidFill>
+                  <a:srgbClr val="000000"/>
+                </a:solidFill>
+                <a:effectLst/>
+                <a:latin typeface="Consolas" panose="020B0609020204030204" pitchFamily="49" charset="0"/>
+              </a:rPr>
+              <a:t>, </a:t>
+            </a:r>
+            <a:r>
+              <a:rPr lang="en-US" sz="1400" b="0" dirty="0" err="1">
+                <a:solidFill>
+                  <a:srgbClr val="000000"/>
+                </a:solidFill>
+                <a:effectLst/>
+                <a:latin typeface="Consolas" panose="020B0609020204030204" pitchFamily="49" charset="0"/>
+              </a:rPr>
+              <a:t>setLocalTime</a:t>
+            </a:r>
+            <a:r>
+              <a:rPr lang="en-US" sz="1400" b="0" dirty="0">
+                <a:solidFill>
+                  <a:srgbClr val="000000"/>
+                </a:solidFill>
+                <a:effectLst/>
+                <a:latin typeface="Consolas" panose="020B0609020204030204" pitchFamily="49" charset="0"/>
+              </a:rPr>
+              <a:t>] = </a:t>
+            </a:r>
+            <a:r>
+              <a:rPr lang="en-US" sz="1400" b="0" dirty="0" err="1">
+                <a:solidFill>
+                  <a:srgbClr val="000000"/>
+                </a:solidFill>
+                <a:effectLst/>
+                <a:latin typeface="Consolas" panose="020B0609020204030204" pitchFamily="49" charset="0"/>
+              </a:rPr>
+              <a:t>useState</a:t>
+            </a:r>
+            <a:r>
+              <a:rPr lang="en-US" sz="1400" b="0" dirty="0">
+                <a:solidFill>
+                  <a:srgbClr val="000000"/>
+                </a:solidFill>
+                <a:effectLst/>
+                <a:latin typeface="Consolas" panose="020B0609020204030204" pitchFamily="49" charset="0"/>
+              </a:rPr>
+              <a:t>(</a:t>
+            </a:r>
+            <a:r>
+              <a:rPr lang="en-US" sz="1400" b="0" dirty="0">
+                <a:solidFill>
+                  <a:srgbClr val="098658"/>
+                </a:solidFill>
+                <a:effectLst/>
+                <a:latin typeface="Consolas" panose="020B0609020204030204" pitchFamily="49" charset="0"/>
+              </a:rPr>
+              <a:t>0</a:t>
+            </a:r>
+            <a:r>
+              <a:rPr lang="en-US" sz="1400" b="0" dirty="0">
+                <a:solidFill>
+                  <a:srgbClr val="000000"/>
+                </a:solidFill>
+                <a:effectLst/>
+                <a:latin typeface="Consolas" panose="020B0609020204030204" pitchFamily="49" charset="0"/>
+              </a:rPr>
+              <a:t>);</a:t>
+            </a:r>
+          </a:p>
+          <a:p>
+            <a:pPr>
+              <a:lnSpc>
+                <a:spcPct val="113095"/>
+              </a:lnSpc>
+              <a:buNone/>
+            </a:pPr>
+            <a:r>
+              <a:rPr lang="en-US" sz="1400" b="0" dirty="0">
+                <a:solidFill>
+                  <a:srgbClr val="000000"/>
+                </a:solidFill>
+                <a:effectLst/>
+                <a:latin typeface="Consolas" panose="020B0609020204030204" pitchFamily="49" charset="0"/>
+              </a:rPr>
+              <a:t>  </a:t>
+            </a:r>
+            <a:r>
+              <a:rPr lang="en-US" sz="1400" b="0" dirty="0">
+                <a:solidFill>
+                  <a:srgbClr val="0000FF"/>
+                </a:solidFill>
+                <a:effectLst/>
+                <a:latin typeface="Consolas" panose="020B0609020204030204" pitchFamily="49" charset="0"/>
+              </a:rPr>
+              <a:t>const</a:t>
+            </a:r>
+            <a:r>
+              <a:rPr lang="en-US" sz="1400" b="0" dirty="0">
+                <a:solidFill>
+                  <a:srgbClr val="000000"/>
+                </a:solidFill>
+                <a:effectLst/>
+                <a:latin typeface="Consolas" panose="020B0609020204030204" pitchFamily="49" charset="0"/>
+              </a:rPr>
+              <a:t> </a:t>
+            </a:r>
+            <a:r>
+              <a:rPr lang="en-US" sz="1400" b="0" dirty="0" err="1">
+                <a:solidFill>
+                  <a:srgbClr val="000000"/>
+                </a:solidFill>
+                <a:effectLst/>
+                <a:latin typeface="Consolas" panose="020B0609020204030204" pitchFamily="49" charset="0"/>
+              </a:rPr>
+              <a:t>incrementLocalTime</a:t>
+            </a:r>
+            <a:r>
+              <a:rPr lang="en-US" sz="1400" b="0" dirty="0">
+                <a:solidFill>
+                  <a:srgbClr val="000000"/>
+                </a:solidFill>
+                <a:effectLst/>
+                <a:latin typeface="Consolas" panose="020B0609020204030204" pitchFamily="49" charset="0"/>
+              </a:rPr>
+              <a:t> = () </a:t>
+            </a:r>
+            <a:r>
+              <a:rPr lang="en-US" sz="1400" b="0" dirty="0">
+                <a:solidFill>
+                  <a:srgbClr val="0000FF"/>
+                </a:solidFill>
+                <a:effectLst/>
+                <a:latin typeface="Consolas" panose="020B0609020204030204" pitchFamily="49" charset="0"/>
+              </a:rPr>
+              <a:t>=&gt;</a:t>
+            </a:r>
+            <a:r>
+              <a:rPr lang="en-US" sz="1400" b="0" dirty="0">
+                <a:solidFill>
+                  <a:srgbClr val="000000"/>
+                </a:solidFill>
+                <a:effectLst/>
+                <a:latin typeface="Consolas" panose="020B0609020204030204" pitchFamily="49" charset="0"/>
+              </a:rPr>
+              <a:t> </a:t>
+            </a:r>
+            <a:r>
+              <a:rPr lang="en-US" sz="1400" b="0" dirty="0" err="1">
+                <a:solidFill>
+                  <a:srgbClr val="000000"/>
+                </a:solidFill>
+                <a:effectLst/>
+                <a:latin typeface="Consolas" panose="020B0609020204030204" pitchFamily="49" charset="0"/>
+              </a:rPr>
+              <a:t>setLocalTime</a:t>
+            </a:r>
+            <a:r>
+              <a:rPr lang="en-US" sz="1400" b="0" dirty="0">
+                <a:solidFill>
+                  <a:srgbClr val="000000"/>
+                </a:solidFill>
+                <a:effectLst/>
+                <a:latin typeface="Consolas" panose="020B0609020204030204" pitchFamily="49" charset="0"/>
+              </a:rPr>
+              <a:t>((</a:t>
+            </a:r>
+            <a:r>
+              <a:rPr lang="en-US" sz="1400" b="0" dirty="0" err="1">
+                <a:solidFill>
+                  <a:srgbClr val="000000"/>
+                </a:solidFill>
+                <a:effectLst/>
+                <a:latin typeface="Consolas" panose="020B0609020204030204" pitchFamily="49" charset="0"/>
+              </a:rPr>
+              <a:t>localTime</a:t>
+            </a:r>
+            <a:r>
+              <a:rPr lang="en-US" sz="1400" b="0" dirty="0">
+                <a:solidFill>
+                  <a:srgbClr val="000000"/>
+                </a:solidFill>
+                <a:effectLst/>
+                <a:latin typeface="Consolas" panose="020B0609020204030204" pitchFamily="49" charset="0"/>
+              </a:rPr>
+              <a:t>) </a:t>
+            </a:r>
+            <a:r>
+              <a:rPr lang="en-US" sz="1400" b="0" dirty="0">
+                <a:solidFill>
+                  <a:srgbClr val="0000FF"/>
+                </a:solidFill>
+                <a:effectLst/>
+                <a:latin typeface="Consolas" panose="020B0609020204030204" pitchFamily="49" charset="0"/>
+              </a:rPr>
+              <a:t>=&gt;</a:t>
+            </a:r>
+            <a:r>
+              <a:rPr lang="en-US" sz="1400" b="0" dirty="0">
+                <a:solidFill>
+                  <a:srgbClr val="000000"/>
+                </a:solidFill>
+                <a:effectLst/>
+                <a:latin typeface="Consolas" panose="020B0609020204030204" pitchFamily="49" charset="0"/>
+              </a:rPr>
+              <a:t> </a:t>
+            </a:r>
+            <a:r>
+              <a:rPr lang="en-US" sz="1400" b="0" dirty="0" err="1">
+                <a:solidFill>
+                  <a:srgbClr val="000000"/>
+                </a:solidFill>
+                <a:effectLst/>
+                <a:latin typeface="Consolas" panose="020B0609020204030204" pitchFamily="49" charset="0"/>
+              </a:rPr>
+              <a:t>localTime</a:t>
+            </a:r>
+            <a:r>
+              <a:rPr lang="en-US" sz="1400" b="0" dirty="0">
+                <a:solidFill>
+                  <a:srgbClr val="000000"/>
+                </a:solidFill>
+                <a:effectLst/>
+                <a:latin typeface="Consolas" panose="020B0609020204030204" pitchFamily="49" charset="0"/>
+              </a:rPr>
+              <a:t> + </a:t>
+            </a:r>
+            <a:r>
+              <a:rPr lang="en-US" sz="1400" b="0" dirty="0">
+                <a:solidFill>
+                  <a:srgbClr val="098658"/>
+                </a:solidFill>
+                <a:effectLst/>
+                <a:latin typeface="Consolas" panose="020B0609020204030204" pitchFamily="49" charset="0"/>
+              </a:rPr>
+              <a:t>1</a:t>
+            </a:r>
+            <a:r>
+              <a:rPr lang="en-US" sz="1400" b="0" dirty="0">
+                <a:solidFill>
+                  <a:srgbClr val="000000"/>
+                </a:solidFill>
+                <a:effectLst/>
+                <a:latin typeface="Consolas" panose="020B0609020204030204" pitchFamily="49" charset="0"/>
+              </a:rPr>
+              <a:t>);</a:t>
+            </a:r>
+          </a:p>
+          <a:p>
+            <a:pPr>
+              <a:lnSpc>
+                <a:spcPct val="113095"/>
+              </a:lnSpc>
+              <a:buNone/>
+            </a:pPr>
+            <a:r>
+              <a:rPr lang="en-US" sz="1400" b="0" dirty="0">
+                <a:solidFill>
+                  <a:srgbClr val="000000"/>
+                </a:solidFill>
+                <a:effectLst/>
+                <a:latin typeface="Consolas" panose="020B0609020204030204" pitchFamily="49" charset="0"/>
+              </a:rPr>
+              <a:t>  </a:t>
+            </a:r>
+            <a:r>
+              <a:rPr lang="en-US" sz="1400" b="0" dirty="0">
+                <a:solidFill>
+                  <a:srgbClr val="0000FF"/>
+                </a:solidFill>
+                <a:effectLst/>
+                <a:latin typeface="Consolas" panose="020B0609020204030204" pitchFamily="49" charset="0"/>
+              </a:rPr>
+              <a:t>const</a:t>
+            </a:r>
+            <a:r>
+              <a:rPr lang="en-US" sz="1400" b="0" dirty="0">
+                <a:solidFill>
+                  <a:srgbClr val="000000"/>
+                </a:solidFill>
+                <a:effectLst/>
+                <a:latin typeface="Consolas" panose="020B0609020204030204" pitchFamily="49" charset="0"/>
+              </a:rPr>
+              <a:t> clock: </a:t>
+            </a:r>
+            <a:r>
+              <a:rPr lang="en-US" sz="1400" b="0" dirty="0" err="1">
+                <a:solidFill>
+                  <a:srgbClr val="000000"/>
+                </a:solidFill>
+                <a:effectLst/>
+                <a:latin typeface="Consolas" panose="020B0609020204030204" pitchFamily="49" charset="0"/>
+              </a:rPr>
+              <a:t>ITicker</a:t>
+            </a:r>
+            <a:r>
+              <a:rPr lang="en-US" sz="1400" b="0" dirty="0">
+                <a:solidFill>
+                  <a:srgbClr val="000000"/>
+                </a:solidFill>
+                <a:effectLst/>
+                <a:latin typeface="Consolas" panose="020B0609020204030204" pitchFamily="49" charset="0"/>
+              </a:rPr>
+              <a:t> = </a:t>
+            </a:r>
+            <a:r>
+              <a:rPr lang="en-US" sz="1400" b="0" dirty="0" err="1">
+                <a:solidFill>
+                  <a:srgbClr val="000000"/>
+                </a:solidFill>
+                <a:effectLst/>
+                <a:highlight>
+                  <a:srgbClr val="FFFF00"/>
+                </a:highlight>
+                <a:latin typeface="Consolas" panose="020B0609020204030204" pitchFamily="49" charset="0"/>
+              </a:rPr>
+              <a:t>useClock</a:t>
+            </a:r>
+            <a:r>
+              <a:rPr lang="en-US" sz="1400" b="0" dirty="0">
+                <a:solidFill>
+                  <a:srgbClr val="000000"/>
+                </a:solidFill>
+                <a:effectLst/>
+                <a:highlight>
+                  <a:srgbClr val="FFFF00"/>
+                </a:highlight>
+                <a:latin typeface="Consolas" panose="020B0609020204030204" pitchFamily="49" charset="0"/>
+              </a:rPr>
+              <a:t>(</a:t>
+            </a:r>
+            <a:r>
+              <a:rPr lang="en-US" sz="1400" b="0" dirty="0" err="1">
+                <a:solidFill>
+                  <a:srgbClr val="000000"/>
+                </a:solidFill>
+                <a:effectLst/>
+                <a:highlight>
+                  <a:srgbClr val="FFFF00"/>
+                </a:highlight>
+                <a:latin typeface="Consolas" panose="020B0609020204030204" pitchFamily="49" charset="0"/>
+              </a:rPr>
+              <a:t>incrementLocalTime</a:t>
+            </a:r>
+            <a:r>
+              <a:rPr lang="en-US" sz="1400" b="0" dirty="0">
+                <a:solidFill>
+                  <a:srgbClr val="000000"/>
+                </a:solidFill>
+                <a:effectLst/>
+                <a:highlight>
+                  <a:srgbClr val="FFFF00"/>
+                </a:highlight>
+                <a:latin typeface="Consolas" panose="020B0609020204030204" pitchFamily="49" charset="0"/>
+              </a:rPr>
+              <a:t>);</a:t>
+            </a:r>
+          </a:p>
+          <a:p>
+            <a:pPr>
+              <a:lnSpc>
+                <a:spcPct val="113095"/>
+              </a:lnSpc>
+              <a:buNone/>
+            </a:pPr>
+            <a:endParaRPr lang="en-US" sz="1400" b="0" dirty="0">
+              <a:solidFill>
+                <a:srgbClr val="000000"/>
+              </a:solidFill>
+              <a:effectLst/>
+              <a:latin typeface="Consolas" panose="020B0609020204030204" pitchFamily="49" charset="0"/>
+            </a:endParaRPr>
+          </a:p>
+          <a:p>
+            <a:pPr>
+              <a:lnSpc>
+                <a:spcPct val="113095"/>
+              </a:lnSpc>
+              <a:buNone/>
+            </a:pPr>
+            <a:r>
+              <a:rPr lang="en-US" sz="1400" b="0" dirty="0">
+                <a:solidFill>
+                  <a:srgbClr val="000000"/>
+                </a:solidFill>
+                <a:effectLst/>
+                <a:latin typeface="Consolas" panose="020B0609020204030204" pitchFamily="49" charset="0"/>
+              </a:rPr>
+              <a:t>  </a:t>
+            </a:r>
+            <a:r>
+              <a:rPr lang="en-US" sz="1400" b="0" dirty="0">
+                <a:solidFill>
+                  <a:srgbClr val="0000FF"/>
+                </a:solidFill>
+                <a:effectLst/>
+                <a:latin typeface="Consolas" panose="020B0609020204030204" pitchFamily="49" charset="0"/>
+              </a:rPr>
+              <a:t>return</a:t>
+            </a:r>
+            <a:r>
+              <a:rPr lang="en-US" sz="1400" b="0" dirty="0">
+                <a:solidFill>
+                  <a:srgbClr val="000000"/>
+                </a:solidFill>
+                <a:effectLst/>
+                <a:latin typeface="Consolas" panose="020B0609020204030204" pitchFamily="49" charset="0"/>
+              </a:rPr>
+              <a:t> (</a:t>
+            </a:r>
+          </a:p>
+          <a:p>
+            <a:pPr>
+              <a:lnSpc>
+                <a:spcPct val="113095"/>
+              </a:lnSpc>
+              <a:buNone/>
+            </a:pPr>
+            <a:r>
+              <a:rPr lang="en-US" sz="1400" b="0" dirty="0">
+                <a:solidFill>
+                  <a:srgbClr val="000000"/>
+                </a:solidFill>
+                <a:effectLst/>
+                <a:latin typeface="Consolas" panose="020B0609020204030204" pitchFamily="49" charset="0"/>
+              </a:rPr>
+              <a:t>    </a:t>
+            </a:r>
+            <a:r>
+              <a:rPr lang="en-US" sz="1400" b="0" dirty="0">
+                <a:solidFill>
+                  <a:srgbClr val="800000"/>
+                </a:solidFill>
+                <a:effectLst/>
+                <a:latin typeface="Consolas" panose="020B0609020204030204" pitchFamily="49" charset="0"/>
+              </a:rPr>
+              <a:t>&lt;</a:t>
+            </a:r>
+            <a:r>
+              <a:rPr lang="en-US" sz="1400" b="0" dirty="0" err="1">
+                <a:solidFill>
+                  <a:srgbClr val="800000"/>
+                </a:solidFill>
+                <a:effectLst/>
+                <a:latin typeface="Consolas" panose="020B0609020204030204" pitchFamily="49" charset="0"/>
+              </a:rPr>
+              <a:t>HStack</a:t>
+            </a:r>
+            <a:r>
+              <a:rPr lang="en-US" sz="1400" b="0" dirty="0">
+                <a:solidFill>
+                  <a:srgbClr val="800000"/>
+                </a:solidFill>
+                <a:effectLst/>
+                <a:latin typeface="Consolas" panose="020B0609020204030204" pitchFamily="49" charset="0"/>
+              </a:rPr>
+              <a:t>&gt;</a:t>
+            </a:r>
+            <a:endParaRPr lang="en-US" sz="1400" b="0" dirty="0">
+              <a:solidFill>
+                <a:srgbClr val="000000"/>
+              </a:solidFill>
+              <a:effectLst/>
+              <a:latin typeface="Consolas" panose="020B0609020204030204" pitchFamily="49" charset="0"/>
+            </a:endParaRPr>
+          </a:p>
+          <a:p>
+            <a:pPr>
+              <a:lnSpc>
+                <a:spcPct val="113095"/>
+              </a:lnSpc>
+              <a:buNone/>
+            </a:pPr>
+            <a:r>
+              <a:rPr lang="en-US" sz="1400" b="0" dirty="0">
+                <a:solidFill>
+                  <a:srgbClr val="000000"/>
+                </a:solidFill>
+                <a:effectLst/>
+                <a:latin typeface="Consolas" panose="020B0609020204030204" pitchFamily="49" charset="0"/>
+              </a:rPr>
+              <a:t>      </a:t>
+            </a:r>
+            <a:r>
+              <a:rPr lang="en-US" sz="1400" b="0" dirty="0">
+                <a:solidFill>
+                  <a:srgbClr val="800000"/>
+                </a:solidFill>
+                <a:effectLst/>
+                <a:latin typeface="Consolas" panose="020B0609020204030204" pitchFamily="49" charset="0"/>
+              </a:rPr>
+              <a:t>&lt;Box&gt;</a:t>
+            </a:r>
+            <a:r>
+              <a:rPr lang="en-US" sz="1400" b="0" dirty="0">
+                <a:solidFill>
+                  <a:srgbClr val="000000"/>
+                </a:solidFill>
+                <a:effectLst/>
+                <a:latin typeface="Consolas" panose="020B0609020204030204" pitchFamily="49" charset="0"/>
+              </a:rPr>
+              <a:t>Clock: </a:t>
+            </a:r>
+            <a:r>
+              <a:rPr lang="en-US" sz="1400" b="0" dirty="0">
+                <a:solidFill>
+                  <a:srgbClr val="0000FF"/>
+                </a:solidFill>
+                <a:effectLst/>
+                <a:latin typeface="Consolas" panose="020B0609020204030204" pitchFamily="49" charset="0"/>
+              </a:rPr>
+              <a:t>{</a:t>
+            </a:r>
+            <a:r>
+              <a:rPr lang="en-US" sz="1400" b="0" dirty="0">
+                <a:solidFill>
+                  <a:srgbClr val="000000"/>
+                </a:solidFill>
+                <a:effectLst/>
+                <a:latin typeface="Consolas" panose="020B0609020204030204" pitchFamily="49" charset="0"/>
+              </a:rPr>
+              <a:t>props.name</a:t>
+            </a:r>
+            <a:r>
+              <a:rPr lang="en-US" sz="1400" b="0" dirty="0">
+                <a:solidFill>
+                  <a:srgbClr val="0000FF"/>
+                </a:solidFill>
+                <a:effectLst/>
+                <a:latin typeface="Consolas" panose="020B0609020204030204" pitchFamily="49" charset="0"/>
+              </a:rPr>
+              <a:t>}</a:t>
+            </a:r>
+            <a:r>
+              <a:rPr lang="en-US" sz="1400" b="0" dirty="0">
+                <a:solidFill>
+                  <a:srgbClr val="800000"/>
+                </a:solidFill>
+                <a:effectLst/>
+                <a:latin typeface="Consolas" panose="020B0609020204030204" pitchFamily="49" charset="0"/>
+              </a:rPr>
+              <a:t>&lt;/Box&gt;</a:t>
+            </a:r>
+            <a:endParaRPr lang="en-US" sz="1400" b="0" dirty="0">
+              <a:solidFill>
+                <a:srgbClr val="000000"/>
+              </a:solidFill>
+              <a:effectLst/>
+              <a:latin typeface="Consolas" panose="020B0609020204030204" pitchFamily="49" charset="0"/>
+            </a:endParaRPr>
+          </a:p>
+          <a:p>
+            <a:pPr>
+              <a:lnSpc>
+                <a:spcPct val="113095"/>
+              </a:lnSpc>
+              <a:buNone/>
+            </a:pPr>
+            <a:r>
+              <a:rPr lang="en-US" sz="1400" b="0" dirty="0">
+                <a:solidFill>
+                  <a:srgbClr val="000000"/>
+                </a:solidFill>
+                <a:effectLst/>
+                <a:latin typeface="Consolas" panose="020B0609020204030204" pitchFamily="49" charset="0"/>
+              </a:rPr>
+              <a:t>      </a:t>
+            </a:r>
+            <a:r>
+              <a:rPr lang="en-US" sz="1400" b="0" dirty="0">
+                <a:solidFill>
+                  <a:srgbClr val="800000"/>
+                </a:solidFill>
+                <a:effectLst/>
+                <a:latin typeface="Consolas" panose="020B0609020204030204" pitchFamily="49" charset="0"/>
+              </a:rPr>
+              <a:t>&lt;Box&gt;</a:t>
+            </a:r>
+            <a:r>
+              <a:rPr lang="en-US" sz="1400" b="0" dirty="0">
+                <a:solidFill>
+                  <a:srgbClr val="000000"/>
+                </a:solidFill>
+                <a:effectLst/>
+                <a:latin typeface="Consolas" panose="020B0609020204030204" pitchFamily="49" charset="0"/>
+              </a:rPr>
+              <a:t>Time = </a:t>
+            </a:r>
+            <a:r>
+              <a:rPr lang="en-US" sz="1400" b="0" dirty="0">
+                <a:solidFill>
+                  <a:srgbClr val="0000FF"/>
+                </a:solidFill>
+                <a:effectLst/>
+                <a:latin typeface="Consolas" panose="020B0609020204030204" pitchFamily="49" charset="0"/>
+              </a:rPr>
+              <a:t>{</a:t>
+            </a:r>
+            <a:r>
+              <a:rPr lang="en-US" sz="1400" b="0" dirty="0" err="1">
+                <a:solidFill>
+                  <a:srgbClr val="000000"/>
+                </a:solidFill>
+                <a:effectLst/>
+                <a:latin typeface="Consolas" panose="020B0609020204030204" pitchFamily="49" charset="0"/>
+              </a:rPr>
+              <a:t>localTime</a:t>
+            </a:r>
+            <a:r>
+              <a:rPr lang="en-US" sz="1400" b="0" dirty="0">
+                <a:solidFill>
+                  <a:srgbClr val="0000FF"/>
+                </a:solidFill>
+                <a:effectLst/>
+                <a:latin typeface="Consolas" panose="020B0609020204030204" pitchFamily="49" charset="0"/>
+              </a:rPr>
+              <a:t>}</a:t>
+            </a:r>
+            <a:r>
+              <a:rPr lang="en-US" sz="1400" b="0" dirty="0">
+                <a:solidFill>
+                  <a:srgbClr val="800000"/>
+                </a:solidFill>
+                <a:effectLst/>
+                <a:latin typeface="Consolas" panose="020B0609020204030204" pitchFamily="49" charset="0"/>
+              </a:rPr>
+              <a:t>&lt;/Box&gt;</a:t>
+            </a:r>
+            <a:endParaRPr lang="en-US" sz="1400" b="0" dirty="0">
+              <a:solidFill>
+                <a:srgbClr val="000000"/>
+              </a:solidFill>
+              <a:effectLst/>
+              <a:latin typeface="Consolas" panose="020B0609020204030204" pitchFamily="49" charset="0"/>
+            </a:endParaRPr>
+          </a:p>
+          <a:p>
+            <a:pPr>
+              <a:lnSpc>
+                <a:spcPct val="113095"/>
+              </a:lnSpc>
+              <a:buNone/>
+            </a:pPr>
+            <a:r>
+              <a:rPr lang="en-US" sz="1400" b="0" dirty="0">
+                <a:solidFill>
+                  <a:srgbClr val="000000"/>
+                </a:solidFill>
+                <a:effectLst/>
+                <a:latin typeface="Consolas" panose="020B0609020204030204" pitchFamily="49" charset="0"/>
+              </a:rPr>
+              <a:t>      </a:t>
+            </a:r>
+            <a:r>
+              <a:rPr lang="en-US" sz="1400" b="0" dirty="0">
+                <a:solidFill>
+                  <a:srgbClr val="800000"/>
+                </a:solidFill>
+                <a:effectLst/>
+                <a:latin typeface="Consolas" panose="020B0609020204030204" pitchFamily="49" charset="0"/>
+              </a:rPr>
+              <a:t>&lt;Box&gt;</a:t>
+            </a:r>
+            <a:r>
+              <a:rPr lang="en-US" sz="1400" b="0" dirty="0" err="1">
+                <a:solidFill>
+                  <a:srgbClr val="000000"/>
+                </a:solidFill>
+                <a:effectLst/>
+                <a:latin typeface="Consolas" panose="020B0609020204030204" pitchFamily="49" charset="0"/>
+              </a:rPr>
+              <a:t>nlisteners</a:t>
+            </a:r>
+            <a:r>
+              <a:rPr lang="en-US" sz="1400" b="0" dirty="0">
+                <a:solidFill>
+                  <a:srgbClr val="000000"/>
+                </a:solidFill>
+                <a:effectLst/>
+                <a:latin typeface="Consolas" panose="020B0609020204030204" pitchFamily="49" charset="0"/>
+              </a:rPr>
+              <a:t> = </a:t>
+            </a:r>
+            <a:r>
+              <a:rPr lang="en-US" sz="1400" b="0" dirty="0">
+                <a:solidFill>
+                  <a:srgbClr val="0000FF"/>
+                </a:solidFill>
+                <a:effectLst/>
+                <a:latin typeface="Consolas" panose="020B0609020204030204" pitchFamily="49" charset="0"/>
+              </a:rPr>
+              <a:t>{</a:t>
+            </a:r>
+            <a:r>
+              <a:rPr lang="en-US" sz="1400" b="0" dirty="0" err="1">
+                <a:solidFill>
+                  <a:srgbClr val="000000"/>
+                </a:solidFill>
+                <a:effectLst/>
+                <a:latin typeface="Consolas" panose="020B0609020204030204" pitchFamily="49" charset="0"/>
+              </a:rPr>
+              <a:t>clock.nListeners</a:t>
+            </a:r>
+            <a:r>
+              <a:rPr lang="en-US" sz="1400" b="0" dirty="0">
+                <a:solidFill>
+                  <a:srgbClr val="0000FF"/>
+                </a:solidFill>
+                <a:effectLst/>
+                <a:latin typeface="Consolas" panose="020B0609020204030204" pitchFamily="49" charset="0"/>
+              </a:rPr>
+              <a:t>}</a:t>
+            </a:r>
+            <a:r>
+              <a:rPr lang="en-US" sz="1400" b="0" dirty="0">
+                <a:solidFill>
+                  <a:srgbClr val="800000"/>
+                </a:solidFill>
+                <a:effectLst/>
+                <a:latin typeface="Consolas" panose="020B0609020204030204" pitchFamily="49" charset="0"/>
+              </a:rPr>
+              <a:t>&lt;/Box&gt;</a:t>
+            </a:r>
+            <a:endParaRPr lang="en-US" sz="1400" b="0" dirty="0">
+              <a:solidFill>
+                <a:srgbClr val="000000"/>
+              </a:solidFill>
+              <a:effectLst/>
+              <a:latin typeface="Consolas" panose="020B0609020204030204" pitchFamily="49" charset="0"/>
+            </a:endParaRPr>
+          </a:p>
+          <a:p>
+            <a:pPr>
+              <a:lnSpc>
+                <a:spcPct val="113095"/>
+              </a:lnSpc>
+              <a:buNone/>
+            </a:pPr>
+            <a:r>
+              <a:rPr lang="en-US" sz="1400" b="0" dirty="0">
+                <a:solidFill>
+                  <a:srgbClr val="000000"/>
+                </a:solidFill>
+                <a:effectLst/>
+                <a:latin typeface="Consolas" panose="020B0609020204030204" pitchFamily="49" charset="0"/>
+              </a:rPr>
+              <a:t>      </a:t>
+            </a:r>
+            <a:r>
+              <a:rPr lang="en-US" sz="1400" b="0" dirty="0">
+                <a:solidFill>
+                  <a:srgbClr val="800000"/>
+                </a:solidFill>
+                <a:effectLst/>
+                <a:latin typeface="Consolas" panose="020B0609020204030204" pitchFamily="49" charset="0"/>
+              </a:rPr>
+              <a:t>&lt;</a:t>
+            </a:r>
+            <a:r>
+              <a:rPr lang="en-US" sz="1400" b="0" dirty="0" err="1">
+                <a:solidFill>
+                  <a:srgbClr val="800000"/>
+                </a:solidFill>
+                <a:effectLst/>
+                <a:latin typeface="Consolas" panose="020B0609020204030204" pitchFamily="49" charset="0"/>
+              </a:rPr>
+              <a:t>IconButton</a:t>
+            </a:r>
+            <a:r>
+              <a:rPr lang="en-US" sz="1400" b="0" dirty="0">
+                <a:solidFill>
+                  <a:srgbClr val="000000"/>
+                </a:solidFill>
+                <a:effectLst/>
+                <a:latin typeface="Consolas" panose="020B0609020204030204" pitchFamily="49" charset="0"/>
+              </a:rPr>
+              <a:t> </a:t>
+            </a:r>
+            <a:r>
+              <a:rPr lang="en-US" sz="1400" b="0" dirty="0">
+                <a:solidFill>
+                  <a:srgbClr val="E50000"/>
+                </a:solidFill>
+                <a:effectLst/>
+                <a:latin typeface="Consolas" panose="020B0609020204030204" pitchFamily="49" charset="0"/>
+              </a:rPr>
+              <a:t>aria-label</a:t>
+            </a:r>
+            <a:r>
+              <a:rPr lang="en-US" sz="1400" b="0" dirty="0">
+                <a:solidFill>
+                  <a:srgbClr val="000000"/>
+                </a:solidFill>
+                <a:effectLst/>
+                <a:latin typeface="Consolas" panose="020B0609020204030204" pitchFamily="49" charset="0"/>
+              </a:rPr>
+              <a:t>=</a:t>
+            </a:r>
+            <a:r>
+              <a:rPr lang="en-US" sz="1400" b="0" dirty="0">
+                <a:solidFill>
+                  <a:srgbClr val="0000FF"/>
+                </a:solidFill>
+                <a:effectLst/>
+                <a:latin typeface="Consolas" panose="020B0609020204030204" pitchFamily="49" charset="0"/>
+              </a:rPr>
+              <a:t>{</a:t>
+            </a:r>
+            <a:r>
+              <a:rPr lang="en-US" sz="1400" b="0" dirty="0">
+                <a:solidFill>
+                  <a:srgbClr val="A31515"/>
+                </a:solidFill>
+                <a:effectLst/>
+                <a:latin typeface="Consolas" panose="020B0609020204030204" pitchFamily="49" charset="0"/>
+              </a:rPr>
+              <a:t>"delete"</a:t>
+            </a:r>
+            <a:r>
+              <a:rPr lang="en-US" sz="1400" b="0" dirty="0">
+                <a:solidFill>
+                  <a:srgbClr val="0000FF"/>
+                </a:solidFill>
+                <a:effectLst/>
+                <a:latin typeface="Consolas" panose="020B0609020204030204" pitchFamily="49" charset="0"/>
+              </a:rPr>
+              <a:t>}</a:t>
+            </a:r>
+            <a:r>
+              <a:rPr lang="en-US" sz="1400" b="0" dirty="0">
+                <a:solidFill>
+                  <a:srgbClr val="000000"/>
+                </a:solidFill>
+                <a:effectLst/>
+                <a:latin typeface="Consolas" panose="020B0609020204030204" pitchFamily="49" charset="0"/>
+              </a:rPr>
+              <a:t> </a:t>
+            </a:r>
+            <a:r>
+              <a:rPr lang="en-US" sz="1400" b="0" dirty="0" err="1">
+                <a:solidFill>
+                  <a:srgbClr val="E50000"/>
+                </a:solidFill>
+                <a:effectLst/>
+                <a:latin typeface="Consolas" panose="020B0609020204030204" pitchFamily="49" charset="0"/>
+              </a:rPr>
+              <a:t>onClick</a:t>
+            </a:r>
+            <a:r>
+              <a:rPr lang="en-US" sz="1400" b="0" dirty="0">
+                <a:solidFill>
+                  <a:srgbClr val="000000"/>
+                </a:solidFill>
+                <a:effectLst/>
+                <a:latin typeface="Consolas" panose="020B0609020204030204" pitchFamily="49" charset="0"/>
+              </a:rPr>
+              <a:t>=</a:t>
+            </a:r>
+            <a:r>
+              <a:rPr lang="en-US" sz="1400" b="0" dirty="0">
+                <a:solidFill>
+                  <a:srgbClr val="0000FF"/>
+                </a:solidFill>
+                <a:effectLst/>
+                <a:latin typeface="Consolas" panose="020B0609020204030204" pitchFamily="49" charset="0"/>
+              </a:rPr>
+              <a:t>{</a:t>
+            </a:r>
+            <a:r>
+              <a:rPr lang="en-US" sz="1400" b="0" dirty="0" err="1">
+                <a:solidFill>
+                  <a:srgbClr val="000000"/>
+                </a:solidFill>
+                <a:effectLst/>
+                <a:latin typeface="Consolas" panose="020B0609020204030204" pitchFamily="49" charset="0"/>
+              </a:rPr>
+              <a:t>props.handleDelete</a:t>
+            </a:r>
+            <a:r>
+              <a:rPr lang="en-US" sz="1400" b="0" dirty="0">
+                <a:solidFill>
+                  <a:srgbClr val="0000FF"/>
+                </a:solidFill>
+                <a:effectLst/>
+                <a:latin typeface="Consolas" panose="020B0609020204030204" pitchFamily="49" charset="0"/>
+              </a:rPr>
+              <a:t>}</a:t>
+            </a:r>
+            <a:r>
+              <a:rPr lang="en-US" sz="1400" b="0" dirty="0">
+                <a:solidFill>
+                  <a:srgbClr val="000000"/>
+                </a:solidFill>
+                <a:effectLst/>
+                <a:latin typeface="Consolas" panose="020B0609020204030204" pitchFamily="49" charset="0"/>
+              </a:rPr>
+              <a:t> </a:t>
+            </a:r>
+            <a:r>
+              <a:rPr lang="en-US" sz="1400" b="0" dirty="0">
+                <a:solidFill>
+                  <a:srgbClr val="E50000"/>
+                </a:solidFill>
+                <a:effectLst/>
+                <a:latin typeface="Consolas" panose="020B0609020204030204" pitchFamily="49" charset="0"/>
+              </a:rPr>
+              <a:t>icon</a:t>
+            </a:r>
+            <a:r>
+              <a:rPr lang="en-US" sz="1400" b="0" dirty="0">
+                <a:solidFill>
+                  <a:srgbClr val="000000"/>
+                </a:solidFill>
+                <a:effectLst/>
+                <a:latin typeface="Consolas" panose="020B0609020204030204" pitchFamily="49" charset="0"/>
+              </a:rPr>
+              <a:t>=</a:t>
+            </a:r>
+            <a:r>
+              <a:rPr lang="en-US" sz="1400" b="0" dirty="0">
+                <a:solidFill>
+                  <a:srgbClr val="0000FF"/>
+                </a:solidFill>
+                <a:effectLst/>
+                <a:latin typeface="Consolas" panose="020B0609020204030204" pitchFamily="49" charset="0"/>
+              </a:rPr>
+              <a:t>{</a:t>
+            </a:r>
+            <a:r>
+              <a:rPr lang="en-US" sz="1400" b="0" dirty="0">
+                <a:solidFill>
+                  <a:srgbClr val="800000"/>
+                </a:solidFill>
+                <a:effectLst/>
+                <a:latin typeface="Consolas" panose="020B0609020204030204" pitchFamily="49" charset="0"/>
+              </a:rPr>
+              <a:t>&lt;</a:t>
+            </a:r>
+            <a:r>
+              <a:rPr lang="en-US" sz="1400" b="0" dirty="0" err="1">
+                <a:solidFill>
+                  <a:srgbClr val="800000"/>
+                </a:solidFill>
+                <a:effectLst/>
+                <a:latin typeface="Consolas" panose="020B0609020204030204" pitchFamily="49" charset="0"/>
+              </a:rPr>
+              <a:t>AiOutlineDelete</a:t>
+            </a:r>
+            <a:r>
+              <a:rPr lang="en-US" sz="1400" b="0" dirty="0">
+                <a:solidFill>
+                  <a:srgbClr val="000000"/>
+                </a:solidFill>
+                <a:effectLst/>
+                <a:latin typeface="Consolas" panose="020B0609020204030204" pitchFamily="49" charset="0"/>
+              </a:rPr>
+              <a:t> </a:t>
+            </a:r>
+            <a:r>
+              <a:rPr lang="en-US" sz="1400" b="0" dirty="0">
+                <a:solidFill>
+                  <a:srgbClr val="800000"/>
+                </a:solidFill>
+                <a:effectLst/>
+                <a:latin typeface="Consolas" panose="020B0609020204030204" pitchFamily="49" charset="0"/>
+              </a:rPr>
+              <a:t>/&gt;</a:t>
+            </a:r>
+            <a:r>
+              <a:rPr lang="en-US" sz="1400" b="0" dirty="0">
+                <a:solidFill>
+                  <a:srgbClr val="0000FF"/>
+                </a:solidFill>
+                <a:effectLst/>
+                <a:latin typeface="Consolas" panose="020B0609020204030204" pitchFamily="49" charset="0"/>
+              </a:rPr>
+              <a:t>}</a:t>
+            </a:r>
+            <a:r>
+              <a:rPr lang="en-US" sz="1400" b="0" dirty="0">
+                <a:solidFill>
+                  <a:srgbClr val="000000"/>
+                </a:solidFill>
+                <a:effectLst/>
+                <a:latin typeface="Consolas" panose="020B0609020204030204" pitchFamily="49" charset="0"/>
+              </a:rPr>
+              <a:t> </a:t>
+            </a:r>
+            <a:r>
+              <a:rPr lang="en-US" sz="1400" b="0" dirty="0">
+                <a:solidFill>
+                  <a:srgbClr val="800000"/>
+                </a:solidFill>
+                <a:effectLst/>
+                <a:latin typeface="Consolas" panose="020B0609020204030204" pitchFamily="49" charset="0"/>
+              </a:rPr>
+              <a:t>/&gt;</a:t>
+            </a:r>
+            <a:endParaRPr lang="en-US" sz="1400" b="0" dirty="0">
+              <a:solidFill>
+                <a:srgbClr val="000000"/>
+              </a:solidFill>
+              <a:effectLst/>
+              <a:latin typeface="Consolas" panose="020B0609020204030204" pitchFamily="49" charset="0"/>
+            </a:endParaRPr>
+          </a:p>
+          <a:p>
+            <a:pPr>
+              <a:lnSpc>
+                <a:spcPct val="113095"/>
+              </a:lnSpc>
+              <a:buNone/>
+            </a:pPr>
+            <a:r>
+              <a:rPr lang="en-US" sz="1400" b="0" dirty="0">
+                <a:solidFill>
+                  <a:srgbClr val="000000"/>
+                </a:solidFill>
+                <a:effectLst/>
+                <a:latin typeface="Consolas" panose="020B0609020204030204" pitchFamily="49" charset="0"/>
+              </a:rPr>
+              <a:t>      </a:t>
+            </a:r>
+            <a:r>
+              <a:rPr lang="en-US" sz="1400" b="0" dirty="0">
+                <a:solidFill>
+                  <a:srgbClr val="800000"/>
+                </a:solidFill>
+                <a:effectLst/>
+                <a:latin typeface="Consolas" panose="020B0609020204030204" pitchFamily="49" charset="0"/>
+              </a:rPr>
+              <a:t>&lt;</a:t>
+            </a:r>
+            <a:r>
+              <a:rPr lang="en-US" sz="1400" b="0" dirty="0" err="1">
+                <a:solidFill>
+                  <a:srgbClr val="800000"/>
+                </a:solidFill>
+                <a:effectLst/>
+                <a:latin typeface="Consolas" panose="020B0609020204030204" pitchFamily="49" charset="0"/>
+              </a:rPr>
+              <a:t>IconButton</a:t>
+            </a:r>
+            <a:r>
+              <a:rPr lang="en-US" sz="1400" b="0" dirty="0">
+                <a:solidFill>
+                  <a:srgbClr val="000000"/>
+                </a:solidFill>
+                <a:effectLst/>
+                <a:latin typeface="Consolas" panose="020B0609020204030204" pitchFamily="49" charset="0"/>
+              </a:rPr>
+              <a:t> </a:t>
+            </a:r>
+            <a:r>
+              <a:rPr lang="en-US" sz="1400" b="0" dirty="0">
+                <a:solidFill>
+                  <a:srgbClr val="E50000"/>
+                </a:solidFill>
+                <a:effectLst/>
+                <a:latin typeface="Consolas" panose="020B0609020204030204" pitchFamily="49" charset="0"/>
+              </a:rPr>
+              <a:t>aria-label</a:t>
+            </a:r>
+            <a:r>
+              <a:rPr lang="en-US" sz="1400" b="0" dirty="0">
+                <a:solidFill>
+                  <a:srgbClr val="000000"/>
+                </a:solidFill>
+                <a:effectLst/>
+                <a:latin typeface="Consolas" panose="020B0609020204030204" pitchFamily="49" charset="0"/>
+              </a:rPr>
+              <a:t>=</a:t>
+            </a:r>
+            <a:r>
+              <a:rPr lang="en-US" sz="1400" b="0" dirty="0">
+                <a:solidFill>
+                  <a:srgbClr val="0000FF"/>
+                </a:solidFill>
+                <a:effectLst/>
+                <a:latin typeface="Consolas" panose="020B0609020204030204" pitchFamily="49" charset="0"/>
+              </a:rPr>
+              <a:t>{</a:t>
+            </a:r>
+            <a:r>
+              <a:rPr lang="en-US" sz="1400" b="0" dirty="0">
+                <a:solidFill>
+                  <a:srgbClr val="A31515"/>
+                </a:solidFill>
+                <a:effectLst/>
+                <a:latin typeface="Consolas" panose="020B0609020204030204" pitchFamily="49" charset="0"/>
+              </a:rPr>
+              <a:t>"add"</a:t>
+            </a:r>
+            <a:r>
+              <a:rPr lang="en-US" sz="1400" b="0" dirty="0">
+                <a:solidFill>
+                  <a:srgbClr val="0000FF"/>
+                </a:solidFill>
+                <a:effectLst/>
+                <a:latin typeface="Consolas" panose="020B0609020204030204" pitchFamily="49" charset="0"/>
+              </a:rPr>
+              <a:t>}</a:t>
+            </a:r>
+            <a:r>
+              <a:rPr lang="en-US" sz="1400" b="0" dirty="0">
+                <a:solidFill>
+                  <a:srgbClr val="000000"/>
+                </a:solidFill>
+                <a:effectLst/>
+                <a:latin typeface="Consolas" panose="020B0609020204030204" pitchFamily="49" charset="0"/>
+              </a:rPr>
+              <a:t> </a:t>
+            </a:r>
+            <a:r>
+              <a:rPr lang="en-US" sz="1400" b="0" dirty="0" err="1">
+                <a:solidFill>
+                  <a:srgbClr val="E50000"/>
+                </a:solidFill>
+                <a:effectLst/>
+                <a:latin typeface="Consolas" panose="020B0609020204030204" pitchFamily="49" charset="0"/>
+              </a:rPr>
+              <a:t>onClick</a:t>
+            </a:r>
+            <a:r>
+              <a:rPr lang="en-US" sz="1400" b="0" dirty="0">
+                <a:solidFill>
+                  <a:srgbClr val="000000"/>
+                </a:solidFill>
+                <a:effectLst/>
+                <a:latin typeface="Consolas" panose="020B0609020204030204" pitchFamily="49" charset="0"/>
+              </a:rPr>
+              <a:t>=</a:t>
+            </a:r>
+            <a:r>
+              <a:rPr lang="en-US" sz="1400" b="0" dirty="0">
+                <a:solidFill>
+                  <a:srgbClr val="0000FF"/>
+                </a:solidFill>
+                <a:effectLst/>
+                <a:latin typeface="Consolas" panose="020B0609020204030204" pitchFamily="49" charset="0"/>
+              </a:rPr>
+              <a:t>{</a:t>
+            </a:r>
+            <a:r>
+              <a:rPr lang="en-US" sz="1400" b="0" dirty="0" err="1">
+                <a:solidFill>
+                  <a:srgbClr val="000000"/>
+                </a:solidFill>
+                <a:effectLst/>
+                <a:latin typeface="Consolas" panose="020B0609020204030204" pitchFamily="49" charset="0"/>
+              </a:rPr>
+              <a:t>props.handleAdd</a:t>
+            </a:r>
+            <a:r>
+              <a:rPr lang="en-US" sz="1400" b="0" dirty="0">
+                <a:solidFill>
+                  <a:srgbClr val="0000FF"/>
+                </a:solidFill>
+                <a:effectLst/>
+                <a:latin typeface="Consolas" panose="020B0609020204030204" pitchFamily="49" charset="0"/>
+              </a:rPr>
+              <a:t>}</a:t>
+            </a:r>
+            <a:r>
+              <a:rPr lang="en-US" sz="1400" b="0" dirty="0">
+                <a:solidFill>
+                  <a:srgbClr val="000000"/>
+                </a:solidFill>
+                <a:effectLst/>
+                <a:latin typeface="Consolas" panose="020B0609020204030204" pitchFamily="49" charset="0"/>
+              </a:rPr>
+              <a:t> </a:t>
+            </a:r>
+            <a:r>
+              <a:rPr lang="en-US" sz="1400" b="0" dirty="0">
+                <a:solidFill>
+                  <a:srgbClr val="E50000"/>
+                </a:solidFill>
+                <a:effectLst/>
+                <a:latin typeface="Consolas" panose="020B0609020204030204" pitchFamily="49" charset="0"/>
+              </a:rPr>
+              <a:t>icon</a:t>
+            </a:r>
+            <a:r>
+              <a:rPr lang="en-US" sz="1400" b="0" dirty="0">
+                <a:solidFill>
+                  <a:srgbClr val="000000"/>
+                </a:solidFill>
+                <a:effectLst/>
+                <a:latin typeface="Consolas" panose="020B0609020204030204" pitchFamily="49" charset="0"/>
+              </a:rPr>
+              <a:t>=</a:t>
+            </a:r>
+            <a:r>
+              <a:rPr lang="en-US" sz="1400" b="0" dirty="0">
+                <a:solidFill>
+                  <a:srgbClr val="0000FF"/>
+                </a:solidFill>
+                <a:effectLst/>
+                <a:latin typeface="Consolas" panose="020B0609020204030204" pitchFamily="49" charset="0"/>
+              </a:rPr>
+              <a:t>{</a:t>
+            </a:r>
+            <a:r>
+              <a:rPr lang="en-US" sz="1400" b="0" dirty="0">
+                <a:solidFill>
+                  <a:srgbClr val="800000"/>
+                </a:solidFill>
+                <a:effectLst/>
+                <a:latin typeface="Consolas" panose="020B0609020204030204" pitchFamily="49" charset="0"/>
+              </a:rPr>
+              <a:t>&lt;</a:t>
+            </a:r>
+            <a:r>
+              <a:rPr lang="en-US" sz="1400" b="0" dirty="0" err="1">
+                <a:solidFill>
+                  <a:srgbClr val="800000"/>
+                </a:solidFill>
+                <a:effectLst/>
+                <a:latin typeface="Consolas" panose="020B0609020204030204" pitchFamily="49" charset="0"/>
+              </a:rPr>
+              <a:t>AiOutlinePlus</a:t>
+            </a:r>
+            <a:r>
+              <a:rPr lang="en-US" sz="1400" b="0" dirty="0">
+                <a:solidFill>
+                  <a:srgbClr val="000000"/>
+                </a:solidFill>
+                <a:effectLst/>
+                <a:latin typeface="Consolas" panose="020B0609020204030204" pitchFamily="49" charset="0"/>
+              </a:rPr>
+              <a:t> </a:t>
+            </a:r>
+            <a:r>
+              <a:rPr lang="en-US" sz="1400" b="0" dirty="0">
+                <a:solidFill>
+                  <a:srgbClr val="800000"/>
+                </a:solidFill>
+                <a:effectLst/>
+                <a:latin typeface="Consolas" panose="020B0609020204030204" pitchFamily="49" charset="0"/>
+              </a:rPr>
+              <a:t>/&gt;</a:t>
+            </a:r>
+            <a:r>
+              <a:rPr lang="en-US" sz="1400" b="0" dirty="0">
+                <a:solidFill>
+                  <a:srgbClr val="0000FF"/>
+                </a:solidFill>
+                <a:effectLst/>
+                <a:latin typeface="Consolas" panose="020B0609020204030204" pitchFamily="49" charset="0"/>
+              </a:rPr>
+              <a:t>}</a:t>
+            </a:r>
+            <a:r>
+              <a:rPr lang="en-US" sz="1400" b="0" dirty="0">
+                <a:solidFill>
+                  <a:srgbClr val="000000"/>
+                </a:solidFill>
+                <a:effectLst/>
+                <a:latin typeface="Consolas" panose="020B0609020204030204" pitchFamily="49" charset="0"/>
+              </a:rPr>
+              <a:t> </a:t>
+            </a:r>
+            <a:r>
+              <a:rPr lang="en-US" sz="1400" b="0" dirty="0">
+                <a:solidFill>
+                  <a:srgbClr val="800000"/>
+                </a:solidFill>
+                <a:effectLst/>
+                <a:latin typeface="Consolas" panose="020B0609020204030204" pitchFamily="49" charset="0"/>
+              </a:rPr>
+              <a:t>/&gt;</a:t>
+            </a:r>
+            <a:endParaRPr lang="en-US" sz="1400" b="0" dirty="0">
+              <a:solidFill>
+                <a:srgbClr val="000000"/>
+              </a:solidFill>
+              <a:effectLst/>
+              <a:latin typeface="Consolas" panose="020B0609020204030204" pitchFamily="49" charset="0"/>
+            </a:endParaRPr>
+          </a:p>
+          <a:p>
+            <a:pPr>
+              <a:lnSpc>
+                <a:spcPct val="113095"/>
+              </a:lnSpc>
+              <a:buNone/>
+            </a:pPr>
+            <a:r>
+              <a:rPr lang="en-US" sz="1400" b="0" dirty="0">
+                <a:solidFill>
+                  <a:srgbClr val="000000"/>
+                </a:solidFill>
+                <a:effectLst/>
+                <a:latin typeface="Consolas" panose="020B0609020204030204" pitchFamily="49" charset="0"/>
+              </a:rPr>
+              <a:t>    </a:t>
+            </a:r>
+            <a:r>
+              <a:rPr lang="en-US" sz="1400" b="0" dirty="0">
+                <a:solidFill>
+                  <a:srgbClr val="800000"/>
+                </a:solidFill>
+                <a:effectLst/>
+                <a:latin typeface="Consolas" panose="020B0609020204030204" pitchFamily="49" charset="0"/>
+              </a:rPr>
+              <a:t>&lt;/</a:t>
+            </a:r>
+            <a:r>
+              <a:rPr lang="en-US" sz="1400" b="0" dirty="0" err="1">
+                <a:solidFill>
+                  <a:srgbClr val="800000"/>
+                </a:solidFill>
+                <a:effectLst/>
+                <a:latin typeface="Consolas" panose="020B0609020204030204" pitchFamily="49" charset="0"/>
+              </a:rPr>
+              <a:t>HStack</a:t>
+            </a:r>
+            <a:r>
+              <a:rPr lang="en-US" sz="1400" b="0" dirty="0">
+                <a:solidFill>
+                  <a:srgbClr val="800000"/>
+                </a:solidFill>
+                <a:effectLst/>
+                <a:latin typeface="Consolas" panose="020B0609020204030204" pitchFamily="49" charset="0"/>
+              </a:rPr>
+              <a:t>&gt;</a:t>
+            </a:r>
+            <a:endParaRPr lang="en-US" sz="1400" b="0" dirty="0">
+              <a:solidFill>
+                <a:srgbClr val="000000"/>
+              </a:solidFill>
+              <a:effectLst/>
+              <a:latin typeface="Consolas" panose="020B0609020204030204" pitchFamily="49" charset="0"/>
+            </a:endParaRPr>
+          </a:p>
+          <a:p>
+            <a:pPr>
+              <a:lnSpc>
+                <a:spcPct val="113095"/>
+              </a:lnSpc>
+              <a:buNone/>
+            </a:pPr>
+            <a:r>
+              <a:rPr lang="en-US" sz="1400" b="0" dirty="0">
+                <a:solidFill>
+                  <a:srgbClr val="000000"/>
+                </a:solidFill>
+                <a:effectLst/>
+                <a:latin typeface="Consolas" panose="020B0609020204030204" pitchFamily="49" charset="0"/>
+              </a:rPr>
+              <a:t>  );</a:t>
+            </a:r>
+          </a:p>
+          <a:p>
+            <a:pPr>
+              <a:lnSpc>
+                <a:spcPct val="113095"/>
+              </a:lnSpc>
+              <a:buNone/>
+            </a:pPr>
+            <a:r>
+              <a:rPr lang="en-US" sz="1400" b="0" dirty="0">
+                <a:solidFill>
+                  <a:srgbClr val="000000"/>
+                </a:solidFill>
+                <a:effectLst/>
+                <a:latin typeface="Consolas" panose="020B0609020204030204" pitchFamily="49" charset="0"/>
+              </a:rPr>
+              <a:t>}</a:t>
+            </a:r>
+          </a:p>
+          <a:p>
+            <a:pPr>
+              <a:lnSpc>
+                <a:spcPct val="113095"/>
+              </a:lnSpc>
+              <a:buNone/>
+            </a:pPr>
+            <a:br>
+              <a:rPr lang="en-US" sz="1400" b="0" dirty="0">
+                <a:solidFill>
+                  <a:srgbClr val="000000"/>
+                </a:solidFill>
+                <a:effectLst/>
+                <a:latin typeface="Consolas" panose="020B0609020204030204" pitchFamily="49" charset="0"/>
+              </a:rPr>
+            </a:br>
+            <a:endParaRPr lang="en-US" sz="1400" b="0" dirty="0">
+              <a:solidFill>
+                <a:srgbClr val="000000"/>
+              </a:solidFill>
+              <a:effectLst/>
+              <a:latin typeface="Consolas" panose="020B0609020204030204" pitchFamily="49" charset="0"/>
+            </a:endParaRPr>
+          </a:p>
+        </p:txBody>
+      </p:sp>
+    </p:spTree>
+    <p:extLst>
+      <p:ext uri="{BB962C8B-B14F-4D97-AF65-F5344CB8AC3E}">
+        <p14:creationId xmlns:p14="http://schemas.microsoft.com/office/powerpoint/2010/main" val="3886866829"/>
+      </p:ext>
+    </p:extLst>
+  </p:cSld>
+  <p:clrMapOvr>
+    <a:masterClrMapping/>
+  </p:clrMapOvr>
+  <p:transition spd="med"/>
+</p:sld>
+</file>
+
+<file path=ppt/slides/slide26.xml><?xml version="1.0" encoding="utf-8"?>
+<p:sld xmlns:a="http://schemas.openxmlformats.org/drawingml/2006/main" xmlns:r="http://schemas.openxmlformats.org/officeDocument/2006/relationships" xmlns:p="http://schemas.openxmlformats.org/presentationml/2006/main">
+  <p:cSld>
+    <p:spTree>
+      <p:nvGrpSpPr>
+        <p:cNvPr id="1" name=""/>
+        <p:cNvGrpSpPr/>
+        <p:nvPr/>
+      </p:nvGrpSpPr>
+      <p:grpSpPr>
+        <a:xfrm>
+          <a:off x="0" y="0"/>
+          <a:ext cx="0" cy="0"/>
+          <a:chOff x="0" y="0"/>
+          <a:chExt cx="0" cy="0"/>
+        </a:xfrm>
+      </p:grpSpPr>
+      <p:sp>
+        <p:nvSpPr>
           <p:cNvPr id="2" name="Title 1">
             <a:extLst>
               <a:ext uri="{FF2B5EF4-FFF2-40B4-BE49-F238E27FC236}">
@@ -17790,7 +21618,7 @@
           <a:p>
             <a:fld id="{86CB4B4D-7CA3-9044-876B-883B54F8677D}" type="slidenum">
               <a:rPr lang="en-US" smtClean="0"/>
-              <a:t>24</a:t>
+              <a:t>26</a:t>
             </a:fld>
             <a:endParaRPr lang="en-US"/>
           </a:p>
@@ -18620,7 +22448,7 @@
                 <a:effectLst/>
                 <a:latin typeface="Consolas" panose="020B0609020204030204" pitchFamily="49" charset="0"/>
               </a:rPr>
-              <a:t> != </a:t>
+              <a:t> !== </a:t>
             </a:r>
             <a:r>
               <a:rPr lang="en-US" sz="1400" b="0" dirty="0" err="1">
@@ -19668,7 +23496,7 @@
 </p:sld>
 </file>
 
-<file path=ppt/slides/slide25.xml><?xml version="1.0" encoding="utf-8"?>
+<file path=ppt/slides/slide27.xml><?xml version="1.0" encoding="utf-8"?>
 <p:sld xmlns:a="http://schemas.openxmlformats.org/drawingml/2006/main" xmlns:r="http://schemas.openxmlformats.org/officeDocument/2006/relationships" xmlns:p="http://schemas.openxmlformats.org/presentationml/2006/main">
   <p:cSld>
     <p:spTree>
@@ -19741,7 +23569,7 @@
           <a:p>
             <a:fld id="{86CB4B4D-7CA3-9044-876B-883B54F8677D}" type="slidenum">
               <a:rPr lang="en-US" smtClean="0"/>
-              <a:t>25</a:t>
+              <a:t>27</a:t>
             </a:fld>
             <a:endParaRPr lang="en-US"/>
           </a:p>
@@ -20707,7 +24535,7 @@
 </p:sld>
 </file>
 
-<file path=ppt/slides/slide26.xml><?xml version="1.0" encoding="utf-8"?>
+<file path=ppt/slides/slide28.xml><?xml version="1.0" encoding="utf-8"?>
 <p:sld xmlns:a="http://schemas.openxmlformats.org/drawingml/2006/main" xmlns:r="http://schemas.openxmlformats.org/officeDocument/2006/relationships" xmlns:p="http://schemas.openxmlformats.org/presentationml/2006/main">
   <p:cSld>
     <p:spTree>
@@ -20775,7 +24603,7 @@
           <a:p>
             <a:fld id="{86CB4B4D-7CA3-9044-876B-883B54F8677D}" type="slidenum">
               <a:rPr lang="en-US" smtClean="0"/>
-              <a:t>26</a:t>
+              <a:t>28</a:t>
             </a:fld>
             <a:endParaRPr lang="en-US"/>
           </a:p>
@@ -21605,7 +25433,7 @@
                 <a:effectLst/>
                 <a:latin typeface="Consolas" panose="020B0609020204030204" pitchFamily="49" charset="0"/>
               </a:rPr>
-              <a:t> != </a:t>
+              <a:t> !== </a:t>
             </a:r>
             <a:r>
               <a:rPr lang="en-US" b="0" dirty="0" err="1">
@@ -21982,7 +25810,7 @@
 </p:sld>
 </file>
 
-<file path=ppt/slides/slide27.xml><?xml version="1.0" encoding="utf-8"?>
+<file path=ppt/slides/slide29.xml><?xml version="1.0" encoding="utf-8"?>
 <p:sld xmlns:a="http://schemas.openxmlformats.org/drawingml/2006/main" xmlns:r="http://schemas.openxmlformats.org/officeDocument/2006/relationships" xmlns:p="http://schemas.openxmlformats.org/presentationml/2006/main">
   <p:cSld>
     <p:spTree>
@@ -22050,7 +25878,7 @@
           <a:p>
             <a:fld id="{86CB4B4D-7CA3-9044-876B-883B54F8677D}" type="slidenum">
               <a:rPr lang="en-US" smtClean="0"/>
-              <a:t>27</a:t>
+              <a:t>29</a:t>
             </a:fld>
             <a:endParaRPr lang="en-US"/>
           </a:p>
@@ -22880,7 +26708,7 @@
                 <a:effectLst/>
                 <a:latin typeface="Consolas" panose="020B0609020204030204" pitchFamily="49" charset="0"/>
               </a:rPr>
-              <a:t> != </a:t>
+              <a:t> !== </a:t>
             </a:r>
             <a:r>
               <a:rPr lang="en-US" b="0" dirty="0" err="1">
@@ -23260,7 +27088,120 @@
 </p:sld>
 </file>
 
-<file path=ppt/slides/slide28.xml><?xml version="1.0" encoding="utf-8"?>
+<file path=ppt/slides/slide3.xml><?xml version="1.0" encoding="utf-8"?>
+<p:sld xmlns:a="http://schemas.openxmlformats.org/drawingml/2006/main" xmlns:r="http://schemas.openxmlformats.org/officeDocument/2006/relationships" xmlns:p="http://schemas.openxmlformats.org/presentationml/2006/main">
+  <p:cSld>
+    <p:spTree>
+      <p:nvGrpSpPr>
+        <p:cNvPr id="1" name=""/>
+        <p:cNvGrpSpPr/>
+        <p:nvPr/>
+      </p:nvGrpSpPr>
+      <p:grpSpPr>
+        <a:xfrm>
+          <a:off x="0" y="0"/>
+          <a:ext cx="0" cy="0"/>
+          <a:chOff x="0" y="0"/>
+          <a:chExt cx="0" cy="0"/>
+        </a:xfrm>
+      </p:grpSpPr>
+      <p:sp>
+        <p:nvSpPr>
+          <p:cNvPr id="2" name="Title 1">
+            <a:extLst>
+              <a:ext uri="{FF2B5EF4-FFF2-40B4-BE49-F238E27FC236}">
+                <a16:creationId xmlns:a16="http://schemas.microsoft.com/office/drawing/2014/main" id="{F5C6FDF5-81CD-4A4A-0A9A-CF58B2A7DAB3}"/>
+              </a:ext>
+            </a:extLst>
+          </p:cNvPr>
+          <p:cNvSpPr>
+            <a:spLocks noGrp="1"/>
+          </p:cNvSpPr>
+          <p:nvPr>
+            <p:ph type="title"/>
+          </p:nvPr>
+        </p:nvSpPr>
+        <p:spPr/>
+        <p:txBody>
+          <a:bodyPr/>
+          <a:lstStyle/>
+          <a:p>
+            <a:r>
+              <a:rPr lang="en-US" dirty="0"/>
+              <a:t>Lesson 6.1 useEffect</a:t>
+            </a:r>
+          </a:p>
+        </p:txBody>
+      </p:sp>
+      <p:sp>
+        <p:nvSpPr>
+          <p:cNvPr id="3" name="Text Placeholder 2">
+            <a:extLst>
+              <a:ext uri="{FF2B5EF4-FFF2-40B4-BE49-F238E27FC236}">
+                <a16:creationId xmlns:a16="http://schemas.microsoft.com/office/drawing/2014/main" id="{731FA6A7-CC69-D79D-12F2-A92C19969EFF}"/>
+              </a:ext>
+            </a:extLst>
+          </p:cNvPr>
+          <p:cNvSpPr>
+            <a:spLocks noGrp="1"/>
+          </p:cNvSpPr>
+          <p:nvPr>
+            <p:ph type="body" sz="half" idx="1"/>
+          </p:nvPr>
+        </p:nvSpPr>
+        <p:spPr/>
+        <p:txBody>
+          <a:bodyPr/>
+          <a:lstStyle/>
+          <a:p>
+            <a:endParaRPr lang="en-US" dirty="0"/>
+          </a:p>
+        </p:txBody>
+      </p:sp>
+      <p:sp>
+        <p:nvSpPr>
+          <p:cNvPr id="4" name="Slide Number Placeholder 3">
+            <a:extLst>
+              <a:ext uri="{FF2B5EF4-FFF2-40B4-BE49-F238E27FC236}">
+                <a16:creationId xmlns:a16="http://schemas.microsoft.com/office/drawing/2014/main" id="{04C8268C-E4F6-B470-A4EE-A47ED18C9514}"/>
+              </a:ext>
+            </a:extLst>
+          </p:cNvPr>
+          <p:cNvSpPr>
+            <a:spLocks noGrp="1"/>
+          </p:cNvSpPr>
+          <p:nvPr>
+            <p:ph type="sldNum" sz="quarter" idx="2"/>
+          </p:nvPr>
+        </p:nvSpPr>
+        <p:spPr/>
+        <p:txBody>
+          <a:bodyPr/>
+          <a:lstStyle/>
+          <a:p>
+            <a:fld id="{86CB4B4D-7CA3-9044-876B-883B54F8677D}" type="slidenum">
+              <a:rPr lang="en-US" smtClean="0"/>
+              <a:t>3</a:t>
+            </a:fld>
+            <a:endParaRPr lang="en-US"/>
+          </a:p>
+        </p:txBody>
+      </p:sp>
+    </p:spTree>
+    <p:extLst>
+      <p:ext uri="{BB962C8B-B14F-4D97-AF65-F5344CB8AC3E}">
+        <p14:creationId xmlns:p14="http://schemas.microsoft.com/office/powerpoint/2010/main" val="409711853"/>
+      </p:ext>
+    </p:extLst>
+  </p:cSld>
+  <p:clrMapOvr>
+    <a:masterClrMapping/>
+  </p:clrMapOvr>
+  <p:transition spd="med"/>
+</p:sld>
+</file>
+
+<file path=ppt/slides/slide30.xml><?xml version="1.0" encoding="utf-8"?>
 <p:sld xmlns:a="http://schemas.openxmlformats.org/drawingml/2006/main" xmlns:r="http://schemas.openxmlformats.org/officeDocument/2006/relationships" xmlns:p="http://schemas.openxmlformats.org/presentationml/2006/main">
   <p:cSld>
     <p:spTree>
@@ -23328,7 +27269,7 @@
           <a:p>
             <a:fld id="{86CB4B4D-7CA3-9044-876B-883B54F8677D}" type="slidenum">
               <a:rPr lang="en-US" smtClean="0"/>
-              <a:t>28</a:t>
+              <a:t>30</a:t>
             </a:fld>
             <a:endParaRPr lang="en-US"/>
           </a:p>
@@ -24190,7 +28131,7 @@
                 <a:effectLst/>
                 <a:latin typeface="Consolas" panose="020B0609020204030204" pitchFamily="49" charset="0"/>
               </a:rPr>
-              <a:t> != </a:t>
+              <a:t> !== </a:t>
             </a:r>
             <a:r>
               <a:rPr lang="en-US" b="0" dirty="0" err="1">
@@ -24561,7 +28502,7 @@
 </p:sld>
 </file>
 
-<file path=ppt/slides/slide29.xml><?xml version="1.0" encoding="utf-8"?>
+<file path=ppt/slides/slide31.xml><?xml version="1.0" encoding="utf-8"?>
 <p:sld xmlns:a="http://schemas.openxmlformats.org/drawingml/2006/main" xmlns:r="http://schemas.openxmlformats.org/officeDocument/2006/relationships" xmlns:p="http://schemas.openxmlformats.org/presentationml/2006/main">
   <p:cSld>
     <p:spTree>
@@ -24701,7 +28642,7 @@
           </a:prstGeom>
           <a:extLst>
             <a:ext uri="{C572A759-6A51-4108-AA02-DFA0A04FC94B}">
-              <ma14:wrappingTextBoxFlag xmlns="" xmlns:m="http://schemas.openxmlformats.org/officeDocument/2006/math" xmlns:a14="http://schemas.microsoft.com/office/drawing/2010/main" xmlns:ma14="http://schemas.microsoft.com/office/mac/drawingml/2011/main" val="1"/>
+              <ma14:wrappingTextBoxFlag xmlns:ma14="http://schemas.microsoft.com/office/mac/drawingml/2011/main" xmlns:a14="http://schemas.microsoft.com/office/drawing/2010/main" xmlns:m="http://schemas.openxmlformats.org/officeDocument/2006/math" xmlns="" val="1"/>
             </a:ext>
           </a:extLst>
         </p:spPr>
@@ -24711,7 +28652,7 @@
           <a:p>
             <a:fld id="{86CB4B4D-7CA3-9044-876B-883B54F8677D}" type="slidenum">
               <a:rPr/>
-              <a:t>29</a:t>
+              <a:t>31</a:t>
             </a:fld>
             <a:endParaRPr/>
           </a:p>
@@ -24742,7 +28683,7 @@
           </a:ln>
           <a:extLst>
             <a:ext uri="{C572A759-6A51-4108-AA02-DFA0A04FC94B}">
-              <ma14:wrappingTextBoxFlag xmlns="" xmlns:m="http://schemas.openxmlformats.org/officeDocument/2006/math" xmlns:a14="http://schemas.microsoft.com/office/drawing/2010/main" xmlns:ma14="http://schemas.microsoft.com/office/mac/drawingml/2011/main" val="1"/>
+              <ma14:wrappingTextBoxFlag xmlns:ma14="http://schemas.microsoft.com/office/mac/drawingml/2011/main" xmlns:a14="http://schemas.microsoft.com/office/drawing/2010/main" xmlns:m="http://schemas.openxmlformats.org/officeDocument/2006/math" xmlns="" val="1"/>
             </a:ext>
           </a:extLst>
         </p:spPr>
@@ -25032,7 +28973,7 @@
             <a:effectLst/>
             <a:extLst>
               <a:ext uri="{C572A759-6A51-4108-AA02-DFA0A04FC94B}">
-                <ma14:wrappingTextBoxFlag xmlns="" xmlns:m="http://schemas.openxmlformats.org/officeDocument/2006/math" xmlns:a14="http://schemas.microsoft.com/office/drawing/2010/main" xmlns:ma14="http://schemas.microsoft.com/office/mac/drawingml/2011/main" val="1"/>
+                <ma14:wrappingTextBoxFlag xmlns:ma14="http://schemas.microsoft.com/office/mac/drawingml/2011/main" xmlns:a14="http://schemas.microsoft.com/office/drawing/2010/main" xmlns:m="http://schemas.openxmlformats.org/officeDocument/2006/math" xmlns="" val="1"/>
               </a:ext>
             </a:extLst>
           </p:spPr>
@@ -25142,120 +29083,7 @@
 </p:sld>
 </file>
 
-<file path=ppt/slides/slide3.xml><?xml version="1.0" encoding="utf-8"?>
-<p:sld xmlns:a="http://schemas.openxmlformats.org/drawingml/2006/main" xmlns:r="http://schemas.openxmlformats.org/officeDocument/2006/relationships" xmlns:p="http://schemas.openxmlformats.org/presentationml/2006/main">
-  <p:cSld>
-    <p:spTree>
-      <p:nvGrpSpPr>
-        <p:cNvPr id="1" name=""/>
-        <p:cNvGrpSpPr/>
-        <p:nvPr/>
-      </p:nvGrpSpPr>
-      <p:grpSpPr>
-        <a:xfrm>
-          <a:off x="0" y="0"/>
-          <a:ext cx="0" cy="0"/>
-          <a:chOff x="0" y="0"/>
-          <a:chExt cx="0" cy="0"/>
-        </a:xfrm>
-      </p:grpSpPr>
-      <p:sp>
-        <p:nvSpPr>
-          <p:cNvPr id="2" name="Title 1">
-            <a:extLst>
-              <a:ext uri="{FF2B5EF4-FFF2-40B4-BE49-F238E27FC236}">
-                <a16:creationId xmlns:a16="http://schemas.microsoft.com/office/drawing/2014/main" id="{F5C6FDF5-81CD-4A4A-0A9A-CF58B2A7DAB3}"/>
-              </a:ext>
-            </a:extLst>
-          </p:cNvPr>
-          <p:cNvSpPr>
-            <a:spLocks noGrp="1"/>
-          </p:cNvSpPr>
-          <p:nvPr>
-            <p:ph type="title"/>
-          </p:nvPr>
-        </p:nvSpPr>
-        <p:spPr/>
-        <p:txBody>
-          <a:bodyPr/>
-          <a:lstStyle/>
-          <a:p>
-            <a:r>
-              <a:rPr lang="en-US" dirty="0"/>
-              <a:t>Lesson 6.1 useEffect</a:t>
-            </a:r>
-          </a:p>
-        </p:txBody>
-      </p:sp>
-      <p:sp>
-        <p:nvSpPr>
-          <p:cNvPr id="3" name="Text Placeholder 2">
-            <a:extLst>
-              <a:ext uri="{FF2B5EF4-FFF2-40B4-BE49-F238E27FC236}">
-                <a16:creationId xmlns:a16="http://schemas.microsoft.com/office/drawing/2014/main" id="{731FA6A7-CC69-D79D-12F2-A92C19969EFF}"/>
-              </a:ext>
-            </a:extLst>
-          </p:cNvPr>
-          <p:cNvSpPr>
-            <a:spLocks noGrp="1"/>
-          </p:cNvSpPr>
-          <p:nvPr>
-            <p:ph type="body" sz="half" idx="1"/>
-          </p:nvPr>
-        </p:nvSpPr>
-        <p:spPr/>
-        <p:txBody>
-          <a:bodyPr/>
-          <a:lstStyle/>
-          <a:p>
-            <a:endParaRPr lang="en-US" dirty="0"/>
-          </a:p>
-        </p:txBody>
-      </p:sp>
-      <p:sp>
-        <p:nvSpPr>
-          <p:cNvPr id="4" name="Slide Number Placeholder 3">
-            <a:extLst>
-              <a:ext uri="{FF2B5EF4-FFF2-40B4-BE49-F238E27FC236}">
-                <a16:creationId xmlns:a16="http://schemas.microsoft.com/office/drawing/2014/main" id="{04C8268C-E4F6-B470-A4EE-A47ED18C9514}"/>
-              </a:ext>
-            </a:extLst>
-          </p:cNvPr>
-          <p:cNvSpPr>
-            <a:spLocks noGrp="1"/>
-          </p:cNvSpPr>
-          <p:nvPr>
-            <p:ph type="sldNum" sz="quarter" idx="2"/>
-          </p:nvPr>
-        </p:nvSpPr>
-        <p:spPr/>
-        <p:txBody>
-          <a:bodyPr/>
-          <a:lstStyle/>
-          <a:p>
-            <a:fld id="{86CB4B4D-7CA3-9044-876B-883B54F8677D}" type="slidenum">
-              <a:rPr lang="en-US" smtClean="0"/>
-              <a:t>3</a:t>
-            </a:fld>
-            <a:endParaRPr lang="en-US"/>
-          </a:p>
-        </p:txBody>
-      </p:sp>
-    </p:spTree>
-    <p:extLst>
-      <p:ext uri="{BB962C8B-B14F-4D97-AF65-F5344CB8AC3E}">
-        <p14:creationId xmlns:p14="http://schemas.microsoft.com/office/powerpoint/2010/main" val="409711853"/>
-      </p:ext>
-    </p:extLst>
-  </p:cSld>
-  <p:clrMapOvr>
-    <a:masterClrMapping/>
-  </p:clrMapOvr>
-  <p:transition spd="med"/>
-</p:sld>
-</file>
-
-<file path=ppt/slides/slide30.xml><?xml version="1.0" encoding="utf-8"?>
+<file path=ppt/slides/slide32.xml><?xml version="1.0" encoding="utf-8"?>
 <p:sld xmlns:a="http://schemas.openxmlformats.org/drawingml/2006/main" xmlns:r="http://schemas.openxmlformats.org/officeDocument/2006/relationships" xmlns:p="http://schemas.openxmlformats.org/presentationml/2006/main">
   <p:cSld>
     <p:spTree>
@@ -25372,7 +29200,7 @@
           </a:prstGeom>
           <a:extLst>
             <a:ext uri="{C572A759-6A51-4108-AA02-DFA0A04FC94B}">
-              <ma14:wrappingTextBoxFlag xmlns="" xmlns:m="http://schemas.openxmlformats.org/officeDocument/2006/math" xmlns:a14="http://schemas.microsoft.com/office/drawing/2010/main" xmlns:ma14="http://schemas.microsoft.com/office/mac/drawingml/2011/main" val="1"/>
+              <ma14:wrappingTextBoxFlag xmlns:ma14="http://schemas.microsoft.com/office/mac/drawingml/2011/main" xmlns:a14="http://schemas.microsoft.com/office/drawing/2010/main" xmlns:m="http://schemas.openxmlformats.org/officeDocument/2006/math" xmlns="" val="1"/>
             </a:ext>
           </a:extLst>
         </p:spPr>
@@ -25382,7 +29210,7 @@
           <a:p>
             <a:fld id="{86CB4B4D-7CA3-9044-876B-883B54F8677D}" type="slidenum">
               <a:rPr/>
-              <a:t>30</a:t>
+              <a:t>32</a:t>
             </a:fld>
             <a:endParaRPr/>
           </a:p>
@@ -25397,7 +29225,7 @@
 </p:sld>
 </file>
 
-<file path=ppt/slides/slide31.xml><?xml version="1.0" encoding="utf-8"?>
+<file path=ppt/slides/slide33.xml><?xml version="1.0" encoding="utf-8"?>
 <p:sld xmlns:a="http://schemas.openxmlformats.org/drawingml/2006/main" xmlns:r="http://schemas.openxmlformats.org/officeDocument/2006/relationships" xmlns:p="http://schemas.openxmlformats.org/presentationml/2006/main">
   <p:cSld>
     <p:spTree>
@@ -25517,7 +29345,7 @@
           <a:p>
             <a:fld id="{86CB4B4D-7CA3-9044-876B-883B54F8677D}" type="slidenum">
               <a:rPr lang="en-US" smtClean="0"/>
-              <a:t>31</a:t>
+              <a:t>33</a:t>
             </a:fld>
             <a:endParaRPr lang="en-US"/>
           </a:p>
@@ -25537,7 +29365,7 @@
 </p:sld>
 </file>
 
-<file path=ppt/slides/slide32.xml><?xml version="1.0" encoding="utf-8"?>
+<file path=ppt/slides/slide34.xml><?xml version="1.0" encoding="utf-8"?>
 <p:sld xmlns:a="http://schemas.openxmlformats.org/drawingml/2006/main" xmlns:r="http://schemas.openxmlformats.org/officeDocument/2006/relationships" xmlns:p="http://schemas.openxmlformats.org/presentationml/2006/main">
   <p:cSld>
     <p:spTree>
@@ -25847,7 +29675,7 @@
           <a:p>
             <a:fld id="{86CB4B4D-7CA3-9044-876B-883B54F8677D}" type="slidenum">
               <a:rPr lang="en-US" smtClean="0"/>
-              <a:t>32</a:t>
+              <a:t>34</a:t>
             </a:fld>
             <a:endParaRPr lang="en-US"/>
           </a:p>
@@ -26131,7 +29959,7 @@
           </a:ln>
           <a:extLst>
             <a:ext uri="{C572A759-6A51-4108-AA02-DFA0A04FC94B}">
-              <ma14:wrappingTextBoxFlag xmlns="" xmlns:m="http://schemas.openxmlformats.org/officeDocument/2006/math" xmlns:a14="http://schemas.microsoft.com/office/drawing/2010/main" xmlns:ma14="http://schemas.microsoft.com/office/mac/drawingml/2011/main" val="1"/>
+              <ma14:wrappingTextBoxFlag xmlns:ma14="http://schemas.microsoft.com/office/mac/drawingml/2011/main" xmlns:a14="http://schemas.microsoft.com/office/drawing/2010/main" xmlns:m="http://schemas.openxmlformats.org/officeDocument/2006/math" xmlns="" val="1"/>
             </a:ext>
           </a:extLst>
         </p:spPr>
@@ -26592,8 +30420,8 @@
 </p:sld>
 </file>
 
-<file path=ppt/slides/slide33.xml><?xml version="1.0" encoding="utf-8"?>
-<p:sld xmlns:a="http://schemas.openxmlformats.org/drawingml/2006/main" xmlns:r="http://schemas.openxmlformats.org/officeDocument/2006/relationships" xmlns:p="http://schemas.openxmlformats.org/presentationml/2006/main" show="0">
+<file path=ppt/slides/slide35.xml><?xml version="1.0" encoding="utf-8"?>
+<p:sld xmlns:a="http://schemas.openxmlformats.org/drawingml/2006/main" xmlns:r="http://schemas.openxmlformats.org/officeDocument/2006/relationships" xmlns:p="http://schemas.openxmlformats.org/presentationml/2006/main">
   <p:cSld>
     <p:spTree>
       <p:nvGrpSpPr>
@@ -27618,7 +31446,7 @@
           <a:p>
             <a:fld id="{86CB4B4D-7CA3-9044-876B-883B54F8677D}" type="slidenum">
               <a:rPr lang="en-US" smtClean="0"/>
-              <a:t>33</a:t>
+              <a:t>35</a:t>
             </a:fld>
             <a:endParaRPr lang="en-US"/>
           </a:p>
@@ -27944,8 +31772,8 @@
 </p:sld>
 </file>
 
-<file path=ppt/slides/slide34.xml><?xml version="1.0" encoding="utf-8"?>
-<p:sld xmlns:a="http://schemas.openxmlformats.org/drawingml/2006/main" xmlns:r="http://schemas.openxmlformats.org/officeDocument/2006/relationships" xmlns:p="http://schemas.openxmlformats.org/presentationml/2006/main" show="0">
+<file path=ppt/slides/slide36.xml><?xml version="1.0" encoding="utf-8"?>
+<p:sld xmlns:a="http://schemas.openxmlformats.org/drawingml/2006/main" xmlns:r="http://schemas.openxmlformats.org/officeDocument/2006/relationships" xmlns:p="http://schemas.openxmlformats.org/presentationml/2006/main">
   <p:cSld>
     <p:spTree>
       <p:nvGrpSpPr>
@@ -29098,7 +32926,7 @@
           <a:p>
             <a:fld id="{86CB4B4D-7CA3-9044-876B-883B54F8677D}" type="slidenum">
               <a:rPr lang="en-US" smtClean="0"/>
-              <a:t>34</a:t>
+              <a:t>36</a:t>
             </a:fld>
             <a:endParaRPr lang="en-US"/>
           </a:p>
@@ -29118,7 +32946,7 @@
 </p:sld>
 </file>
 
-<file path=ppt/slides/slide35.xml><?xml version="1.0" encoding="utf-8"?>
+<file path=ppt/slides/slide37.xml><?xml version="1.0" encoding="utf-8"?>
 <p:sld xmlns:a="http://schemas.openxmlformats.org/drawingml/2006/main" xmlns:r="http://schemas.openxmlformats.org/officeDocument/2006/relationships" xmlns:p="http://schemas.openxmlformats.org/presentationml/2006/main" show="0">
   <p:cSld>
     <p:spTree>
@@ -30062,7 +33890,7 @@
           <a:p>
             <a:fld id="{86CB4B4D-7CA3-9044-876B-883B54F8677D}" type="slidenum">
               <a:rPr lang="en-US" smtClean="0"/>
-              <a:t>35</a:t>
+              <a:t>37</a:t>
             </a:fld>
             <a:endParaRPr lang="en-US"/>
           </a:p>
@@ -30294,7 +34122,7 @@
 </p:sld>
 </file>
 
-<file path=ppt/slides/slide36.xml><?xml version="1.0" encoding="utf-8"?>
+<file path=ppt/slides/slide38.xml><?xml version="1.0" encoding="utf-8"?>
 <p:sld xmlns:a="http://schemas.openxmlformats.org/drawingml/2006/main" xmlns:r="http://schemas.openxmlformats.org/officeDocument/2006/relationships" xmlns:p="http://schemas.openxmlformats.org/presentationml/2006/main">
   <p:cSld>
     <p:spTree>
@@ -30733,7 +34561,7 @@
           <a:p>
             <a:fld id="{86CB4B4D-7CA3-9044-876B-883B54F8677D}" type="slidenum">
               <a:rPr lang="en-US" smtClean="0"/>
-              <a:t>36</a:t>
+              <a:t>38</a:t>
             </a:fld>
             <a:endParaRPr lang="en-US"/>
           </a:p>
@@ -30821,7 +34649,7 @@
 </p:sld>
 </file>
 
-<file path=ppt/slides/slide37.xml><?xml version="1.0" encoding="utf-8"?>
+<file path=ppt/slides/slide39.xml><?xml version="1.0" encoding="utf-8"?>
 <p:sld xmlns:a="http://schemas.openxmlformats.org/drawingml/2006/main" xmlns:r="http://schemas.openxmlformats.org/officeDocument/2006/relationships" xmlns:p="http://schemas.openxmlformats.org/presentationml/2006/main">
   <p:cSld>
     <p:spTree>
@@ -30914,7 +34742,7 @@
           <a:p>
             <a:fld id="{86CB4B4D-7CA3-9044-876B-883B54F8677D}" type="slidenum">
               <a:rPr lang="en-US" smtClean="0"/>
-              <a:t>37</a:t>
+              <a:t>39</a:t>
             </a:fld>
             <a:endParaRPr lang="en-US"/>
           </a:p>
@@ -30934,7 +34762,1482 @@
 </p:sld>
 </file>
 
-<file path=ppt/slides/slide38.xml><?xml version="1.0" encoding="utf-8"?>
+<file path=ppt/slides/slide4.xml><?xml version="1.0" encoding="utf-8"?>
+<p:sld xmlns:a="http://schemas.openxmlformats.org/drawingml/2006/main" xmlns:r="http://schemas.openxmlformats.org/officeDocument/2006/relationships" xmlns:p="http://schemas.openxmlformats.org/presentationml/2006/main">
+  <p:cSld>
+    <p:spTree>
+      <p:nvGrpSpPr>
+        <p:cNvPr id="1" name=""/>
+        <p:cNvGrpSpPr/>
+        <p:nvPr/>
+      </p:nvGrpSpPr>
+      <p:grpSpPr>
+        <a:xfrm>
+          <a:off x="0" y="0"/>
+          <a:ext cx="0" cy="0"/>
+          <a:chOff x="0" y="0"/>
+          <a:chExt cx="0" cy="0"/>
+        </a:xfrm>
+      </p:grpSpPr>
+      <p:sp>
+        <p:nvSpPr>
+          <p:cNvPr id="12" name="TextBox 11">
+            <a:extLst>
+              <a:ext uri="{FF2B5EF4-FFF2-40B4-BE49-F238E27FC236}">
+                <a16:creationId xmlns:a16="http://schemas.microsoft.com/office/drawing/2014/main" id="{CB8AB8A6-3946-36F5-47EA-C69393119EAE}"/>
+              </a:ext>
+            </a:extLst>
+          </p:cNvPr>
+          <p:cNvSpPr txBox="1"/>
+          <p:nvPr/>
+        </p:nvSpPr>
+        <p:spPr>
+          <a:xfrm>
+            <a:off x="838200" y="1630950"/>
+            <a:ext cx="10256976" cy="3829895"/>
+          </a:xfrm>
+          <a:prstGeom prst="rect">
+            <a:avLst/>
+          </a:prstGeom>
+          <a:noFill/>
+          <a:ln w="12700" cap="flat">
+            <a:noFill/>
+            <a:miter lim="400000"/>
+          </a:ln>
+          <a:effectLst/>
+          <a:sp3d/>
+        </p:spPr>
+        <p:style>
+          <a:lnRef idx="0">
+            <a:scrgbClr r="0" g="0" b="0"/>
+          </a:lnRef>
+          <a:fillRef idx="0">
+            <a:scrgbClr r="0" g="0" b="0"/>
+          </a:fillRef>
+          <a:effectRef idx="0">
+            <a:scrgbClr r="0" g="0" b="0"/>
+          </a:effectRef>
+          <a:fontRef idx="none"/>
+        </p:style>
+        <p:txBody>
+          <a:bodyPr wrap="square">
+            <a:spAutoFit/>
+          </a:bodyPr>
+          <a:lstStyle/>
+          <a:p>
+            <a:pPr>
+              <a:lnSpc>
+                <a:spcPct val="113095"/>
+              </a:lnSpc>
+              <a:buNone/>
+            </a:pPr>
+            <a:r>
+              <a:rPr lang="en-US" sz="1800" b="0" dirty="0">
+                <a:solidFill>
+                  <a:srgbClr val="0000FF"/>
+                </a:solidFill>
+                <a:effectLst/>
+                <a:latin typeface="Consolas" panose="020B0609020204030204" pitchFamily="49" charset="0"/>
+              </a:rPr>
+              <a:t>export</a:t>
+            </a:r>
+            <a:r>
+              <a:rPr lang="en-US" sz="1800" b="0" dirty="0">
+                <a:solidFill>
+                  <a:srgbClr val="000000"/>
+                </a:solidFill>
+                <a:effectLst/>
+                <a:latin typeface="Consolas" panose="020B0609020204030204" pitchFamily="49" charset="0"/>
+              </a:rPr>
+              <a:t> </a:t>
+            </a:r>
+            <a:r>
+              <a:rPr lang="en-US" sz="1800" b="0" dirty="0">
+                <a:solidFill>
+                  <a:srgbClr val="0000FF"/>
+                </a:solidFill>
+                <a:effectLst/>
+                <a:latin typeface="Consolas" panose="020B0609020204030204" pitchFamily="49" charset="0"/>
+              </a:rPr>
+              <a:t>default</a:t>
+            </a:r>
+            <a:r>
+              <a:rPr lang="en-US" sz="1800" b="0" dirty="0">
+                <a:solidFill>
+                  <a:srgbClr val="000000"/>
+                </a:solidFill>
+                <a:effectLst/>
+                <a:latin typeface="Consolas" panose="020B0609020204030204" pitchFamily="49" charset="0"/>
+              </a:rPr>
+              <a:t> </a:t>
+            </a:r>
+            <a:r>
+              <a:rPr lang="en-US" sz="1800" b="0" dirty="0">
+                <a:solidFill>
+                  <a:srgbClr val="0000FF"/>
+                </a:solidFill>
+                <a:effectLst/>
+                <a:latin typeface="Consolas" panose="020B0609020204030204" pitchFamily="49" charset="0"/>
+              </a:rPr>
+              <a:t>function</a:t>
+            </a:r>
+            <a:r>
+              <a:rPr lang="en-US" sz="1800" b="0" dirty="0">
+                <a:solidFill>
+                  <a:srgbClr val="000000"/>
+                </a:solidFill>
+                <a:effectLst/>
+                <a:latin typeface="Consolas" panose="020B0609020204030204" pitchFamily="49" charset="0"/>
+              </a:rPr>
+              <a:t> </a:t>
+            </a:r>
+            <a:r>
+              <a:rPr lang="en-US" sz="1800" b="0" dirty="0" err="1">
+                <a:solidFill>
+                  <a:srgbClr val="000000"/>
+                </a:solidFill>
+                <a:effectLst/>
+                <a:latin typeface="Consolas" panose="020B0609020204030204" pitchFamily="49" charset="0"/>
+              </a:rPr>
+              <a:t>ClockDisplay</a:t>
+            </a:r>
+            <a:r>
+              <a:rPr lang="en-US" sz="1800" b="0" dirty="0">
+                <a:solidFill>
+                  <a:srgbClr val="000000"/>
+                </a:solidFill>
+                <a:effectLst/>
+                <a:latin typeface="Consolas" panose="020B0609020204030204" pitchFamily="49" charset="0"/>
+              </a:rPr>
+              <a:t>(props: ClockDisplayProps) {</a:t>
+            </a:r>
+          </a:p>
+          <a:p>
+            <a:pPr>
+              <a:lnSpc>
+                <a:spcPct val="113095"/>
+              </a:lnSpc>
+              <a:buNone/>
+            </a:pPr>
+            <a:r>
+              <a:rPr lang="en-US" sz="1800" b="0" dirty="0">
+                <a:solidFill>
+                  <a:srgbClr val="000000"/>
+                </a:solidFill>
+                <a:effectLst/>
+                <a:latin typeface="Consolas" panose="020B0609020204030204" pitchFamily="49" charset="0"/>
+              </a:rPr>
+              <a:t>  </a:t>
+            </a:r>
+            <a:r>
+              <a:rPr lang="en-US" sz="1800" b="0" dirty="0">
+                <a:solidFill>
+                  <a:srgbClr val="0000FF"/>
+                </a:solidFill>
+                <a:effectLst/>
+                <a:latin typeface="Consolas" panose="020B0609020204030204" pitchFamily="49" charset="0"/>
+              </a:rPr>
+              <a:t>const</a:t>
+            </a:r>
+            <a:r>
+              <a:rPr lang="en-US" sz="1800" b="0" dirty="0">
+                <a:solidFill>
+                  <a:srgbClr val="000000"/>
+                </a:solidFill>
+                <a:effectLst/>
+                <a:latin typeface="Consolas" panose="020B0609020204030204" pitchFamily="49" charset="0"/>
+              </a:rPr>
+              <a:t> clock = </a:t>
+            </a:r>
+            <a:r>
+              <a:rPr lang="en-US" sz="1800" b="0" dirty="0" err="1">
+                <a:solidFill>
+                  <a:srgbClr val="000000"/>
+                </a:solidFill>
+                <a:effectLst/>
+                <a:latin typeface="Consolas" panose="020B0609020204030204" pitchFamily="49" charset="0"/>
+              </a:rPr>
+              <a:t>props.clock</a:t>
+            </a:r>
+            <a:r>
+              <a:rPr lang="en-US" sz="1800" b="0" dirty="0">
+                <a:solidFill>
+                  <a:srgbClr val="000000"/>
+                </a:solidFill>
+                <a:effectLst/>
+                <a:latin typeface="Consolas" panose="020B0609020204030204" pitchFamily="49" charset="0"/>
+              </a:rPr>
+              <a:t>;</a:t>
+            </a:r>
+          </a:p>
+          <a:p>
+            <a:pPr>
+              <a:lnSpc>
+                <a:spcPct val="113095"/>
+              </a:lnSpc>
+              <a:buNone/>
+            </a:pPr>
+            <a:r>
+              <a:rPr lang="en-US" sz="1800" b="0" dirty="0">
+                <a:solidFill>
+                  <a:srgbClr val="000000"/>
+                </a:solidFill>
+                <a:effectLst/>
+                <a:latin typeface="Consolas" panose="020B0609020204030204" pitchFamily="49" charset="0"/>
+              </a:rPr>
+              <a:t>  </a:t>
+            </a:r>
+            <a:r>
+              <a:rPr lang="en-US" sz="1800" b="0" dirty="0">
+                <a:solidFill>
+                  <a:srgbClr val="0000FF"/>
+                </a:solidFill>
+                <a:effectLst/>
+                <a:latin typeface="Consolas" panose="020B0609020204030204" pitchFamily="49" charset="0"/>
+              </a:rPr>
+              <a:t>const</a:t>
+            </a:r>
+            <a:r>
+              <a:rPr lang="en-US" sz="1800" b="0" dirty="0">
+                <a:solidFill>
+                  <a:srgbClr val="000000"/>
+                </a:solidFill>
+                <a:effectLst/>
+                <a:latin typeface="Consolas" panose="020B0609020204030204" pitchFamily="49" charset="0"/>
+              </a:rPr>
+              <a:t> [</a:t>
+            </a:r>
+            <a:r>
+              <a:rPr lang="en-US" sz="1800" b="0" dirty="0" err="1">
+                <a:solidFill>
+                  <a:srgbClr val="000000"/>
+                </a:solidFill>
+                <a:effectLst/>
+                <a:latin typeface="Consolas" panose="020B0609020204030204" pitchFamily="49" charset="0"/>
+              </a:rPr>
+              <a:t>localTime</a:t>
+            </a:r>
+            <a:r>
+              <a:rPr lang="en-US" sz="1800" b="0" dirty="0">
+                <a:solidFill>
+                  <a:srgbClr val="000000"/>
+                </a:solidFill>
+                <a:effectLst/>
+                <a:latin typeface="Consolas" panose="020B0609020204030204" pitchFamily="49" charset="0"/>
+              </a:rPr>
+              <a:t>, </a:t>
+            </a:r>
+            <a:r>
+              <a:rPr lang="en-US" sz="1800" b="0" dirty="0" err="1">
+                <a:solidFill>
+                  <a:srgbClr val="000000"/>
+                </a:solidFill>
+                <a:effectLst/>
+                <a:latin typeface="Consolas" panose="020B0609020204030204" pitchFamily="49" charset="0"/>
+              </a:rPr>
+              <a:t>setLocalTime</a:t>
+            </a:r>
+            <a:r>
+              <a:rPr lang="en-US" sz="1800" b="0" dirty="0">
+                <a:solidFill>
+                  <a:srgbClr val="000000"/>
+                </a:solidFill>
+                <a:effectLst/>
+                <a:latin typeface="Consolas" panose="020B0609020204030204" pitchFamily="49" charset="0"/>
+              </a:rPr>
+              <a:t>] = </a:t>
+            </a:r>
+            <a:r>
+              <a:rPr lang="en-US" sz="1800" b="0" dirty="0" err="1">
+                <a:solidFill>
+                  <a:srgbClr val="000000"/>
+                </a:solidFill>
+                <a:effectLst/>
+                <a:latin typeface="Consolas" panose="020B0609020204030204" pitchFamily="49" charset="0"/>
+              </a:rPr>
+              <a:t>useState</a:t>
+            </a:r>
+            <a:r>
+              <a:rPr lang="en-US" sz="1800" b="0" dirty="0">
+                <a:solidFill>
+                  <a:srgbClr val="000000"/>
+                </a:solidFill>
+                <a:effectLst/>
+                <a:latin typeface="Consolas" panose="020B0609020204030204" pitchFamily="49" charset="0"/>
+              </a:rPr>
+              <a:t>(</a:t>
+            </a:r>
+            <a:r>
+              <a:rPr lang="en-US" sz="1800" b="0" dirty="0">
+                <a:solidFill>
+                  <a:srgbClr val="098658"/>
+                </a:solidFill>
+                <a:effectLst/>
+                <a:latin typeface="Consolas" panose="020B0609020204030204" pitchFamily="49" charset="0"/>
+              </a:rPr>
+              <a:t>0</a:t>
+            </a:r>
+            <a:r>
+              <a:rPr lang="en-US" sz="1800" b="0" dirty="0">
+                <a:solidFill>
+                  <a:srgbClr val="000000"/>
+                </a:solidFill>
+                <a:effectLst/>
+                <a:latin typeface="Consolas" panose="020B0609020204030204" pitchFamily="49" charset="0"/>
+              </a:rPr>
+              <a:t>);</a:t>
+            </a:r>
+            <a:br>
+              <a:rPr lang="en-US" sz="1800" b="0" dirty="0">
+                <a:solidFill>
+                  <a:srgbClr val="000000"/>
+                </a:solidFill>
+                <a:effectLst/>
+                <a:latin typeface="Consolas" panose="020B0609020204030204" pitchFamily="49" charset="0"/>
+              </a:rPr>
+            </a:br>
+            <a:endParaRPr lang="en-US" sz="1800" b="0" dirty="0">
+              <a:solidFill>
+                <a:srgbClr val="000000"/>
+              </a:solidFill>
+              <a:effectLst/>
+              <a:latin typeface="Consolas" panose="020B0609020204030204" pitchFamily="49" charset="0"/>
+            </a:endParaRPr>
+          </a:p>
+          <a:p>
+            <a:pPr>
+              <a:lnSpc>
+                <a:spcPct val="113095"/>
+              </a:lnSpc>
+              <a:buNone/>
+            </a:pPr>
+            <a:r>
+              <a:rPr lang="en-US" sz="1800" b="0" dirty="0">
+                <a:solidFill>
+                  <a:srgbClr val="000000"/>
+                </a:solidFill>
+                <a:effectLst/>
+                <a:latin typeface="Consolas" panose="020B0609020204030204" pitchFamily="49" charset="0"/>
+              </a:rPr>
+              <a:t>  </a:t>
+            </a:r>
+            <a:r>
+              <a:rPr lang="en-US" sz="1800" b="0" dirty="0" err="1">
+                <a:solidFill>
+                  <a:srgbClr val="000000"/>
+                </a:solidFill>
+                <a:effectLst/>
+                <a:latin typeface="Consolas" panose="020B0609020204030204" pitchFamily="49" charset="0"/>
+              </a:rPr>
+              <a:t>useEffect</a:t>
+            </a:r>
+            <a:r>
+              <a:rPr lang="en-US" sz="1800" b="0" dirty="0">
+                <a:solidFill>
+                  <a:srgbClr val="000000"/>
+                </a:solidFill>
+                <a:effectLst/>
+                <a:latin typeface="Consolas" panose="020B0609020204030204" pitchFamily="49" charset="0"/>
+              </a:rPr>
+              <a:t>(() </a:t>
+            </a:r>
+            <a:r>
+              <a:rPr lang="en-US" sz="1800" b="0" dirty="0">
+                <a:solidFill>
+                  <a:srgbClr val="0000FF"/>
+                </a:solidFill>
+                <a:effectLst/>
+                <a:latin typeface="Consolas" panose="020B0609020204030204" pitchFamily="49" charset="0"/>
+              </a:rPr>
+              <a:t>=&gt;</a:t>
+            </a:r>
+            <a:r>
+              <a:rPr lang="en-US" sz="1800" b="0" dirty="0">
+                <a:solidFill>
+                  <a:srgbClr val="000000"/>
+                </a:solidFill>
+                <a:effectLst/>
+                <a:latin typeface="Consolas" panose="020B0609020204030204" pitchFamily="49" charset="0"/>
+              </a:rPr>
+              <a:t> {</a:t>
+            </a:r>
+          </a:p>
+          <a:p>
+            <a:pPr>
+              <a:lnSpc>
+                <a:spcPct val="113095"/>
+              </a:lnSpc>
+              <a:buNone/>
+            </a:pPr>
+            <a:r>
+              <a:rPr lang="en-US" sz="1800" b="0" dirty="0">
+                <a:solidFill>
+                  <a:srgbClr val="000000"/>
+                </a:solidFill>
+                <a:effectLst/>
+                <a:latin typeface="Consolas" panose="020B0609020204030204" pitchFamily="49" charset="0"/>
+              </a:rPr>
+              <a:t>    </a:t>
+            </a:r>
+            <a:r>
+              <a:rPr lang="en-US" sz="1800" b="0" dirty="0">
+                <a:solidFill>
+                  <a:srgbClr val="0000FF"/>
+                </a:solidFill>
+                <a:effectLst/>
+                <a:highlight>
+                  <a:srgbClr val="FFFF00"/>
+                </a:highlight>
+                <a:latin typeface="Consolas" panose="020B0609020204030204" pitchFamily="49" charset="0"/>
+              </a:rPr>
+              <a:t>const</a:t>
+            </a:r>
+            <a:r>
+              <a:rPr lang="en-US" sz="1800" b="0" dirty="0">
+                <a:solidFill>
+                  <a:srgbClr val="000000"/>
+                </a:solidFill>
+                <a:effectLst/>
+                <a:highlight>
+                  <a:srgbClr val="FFFF00"/>
+                </a:highlight>
+                <a:latin typeface="Consolas" panose="020B0609020204030204" pitchFamily="49" charset="0"/>
+              </a:rPr>
+              <a:t> listener1 = () </a:t>
+            </a:r>
+            <a:r>
+              <a:rPr lang="en-US" sz="1800" b="0" dirty="0">
+                <a:solidFill>
+                  <a:srgbClr val="0000FF"/>
+                </a:solidFill>
+                <a:effectLst/>
+                <a:highlight>
+                  <a:srgbClr val="FFFF00"/>
+                </a:highlight>
+                <a:latin typeface="Consolas" panose="020B0609020204030204" pitchFamily="49" charset="0"/>
+              </a:rPr>
+              <a:t>=&gt;</a:t>
+            </a:r>
+            <a:r>
+              <a:rPr lang="en-US" sz="1800" b="0" dirty="0">
+                <a:solidFill>
+                  <a:srgbClr val="000000"/>
+                </a:solidFill>
+                <a:effectLst/>
+                <a:highlight>
+                  <a:srgbClr val="FFFF00"/>
+                </a:highlight>
+                <a:latin typeface="Consolas" panose="020B0609020204030204" pitchFamily="49" charset="0"/>
+              </a:rPr>
+              <a:t> </a:t>
+            </a:r>
+            <a:r>
+              <a:rPr lang="en-US" sz="1800" b="0" dirty="0" err="1">
+                <a:solidFill>
+                  <a:srgbClr val="000000"/>
+                </a:solidFill>
+                <a:effectLst/>
+                <a:highlight>
+                  <a:srgbClr val="FFFF00"/>
+                </a:highlight>
+                <a:latin typeface="Consolas" panose="020B0609020204030204" pitchFamily="49" charset="0"/>
+              </a:rPr>
+              <a:t>setLocalTime</a:t>
+            </a:r>
+            <a:r>
+              <a:rPr lang="en-US" sz="1800" b="0" dirty="0">
+                <a:solidFill>
+                  <a:srgbClr val="000000"/>
+                </a:solidFill>
+                <a:effectLst/>
+                <a:highlight>
+                  <a:srgbClr val="FFFF00"/>
+                </a:highlight>
+                <a:latin typeface="Consolas" panose="020B0609020204030204" pitchFamily="49" charset="0"/>
+              </a:rPr>
+              <a:t>(time =&gt; time +1)</a:t>
+            </a:r>
+          </a:p>
+          <a:p>
+            <a:pPr>
+              <a:lnSpc>
+                <a:spcPct val="113095"/>
+              </a:lnSpc>
+              <a:buNone/>
+            </a:pPr>
+            <a:r>
+              <a:rPr lang="en-US" sz="1800" b="0" dirty="0">
+                <a:solidFill>
+                  <a:srgbClr val="000000"/>
+                </a:solidFill>
+                <a:effectLst/>
+                <a:highlight>
+                  <a:srgbClr val="FFFF00"/>
+                </a:highlight>
+                <a:latin typeface="Consolas" panose="020B0609020204030204" pitchFamily="49" charset="0"/>
+              </a:rPr>
+              <a:t>    </a:t>
+            </a:r>
+            <a:r>
+              <a:rPr lang="en-US" sz="1800" b="0" dirty="0" err="1">
+                <a:solidFill>
+                  <a:srgbClr val="000000"/>
+                </a:solidFill>
+                <a:effectLst/>
+                <a:highlight>
+                  <a:srgbClr val="FFFF00"/>
+                </a:highlight>
+                <a:latin typeface="Consolas" panose="020B0609020204030204" pitchFamily="49" charset="0"/>
+              </a:rPr>
+              <a:t>clock.addListener</a:t>
+            </a:r>
+            <a:r>
+              <a:rPr lang="en-US" sz="1800" b="0" dirty="0">
+                <a:solidFill>
+                  <a:srgbClr val="000000"/>
+                </a:solidFill>
+                <a:effectLst/>
+                <a:highlight>
+                  <a:srgbClr val="FFFF00"/>
+                </a:highlight>
+                <a:latin typeface="Consolas" panose="020B0609020204030204" pitchFamily="49" charset="0"/>
+              </a:rPr>
+              <a:t>(listener1);</a:t>
+            </a:r>
+          </a:p>
+          <a:p>
+            <a:pPr>
+              <a:lnSpc>
+                <a:spcPct val="113095"/>
+              </a:lnSpc>
+              <a:buNone/>
+            </a:pPr>
+            <a:endParaRPr lang="en-US" dirty="0">
+              <a:highlight>
+                <a:srgbClr val="FFFF00"/>
+              </a:highlight>
+              <a:latin typeface="Consolas" panose="020B0609020204030204" pitchFamily="49" charset="0"/>
+            </a:endParaRPr>
+          </a:p>
+          <a:p>
+            <a:pPr>
+              <a:lnSpc>
+                <a:spcPct val="113095"/>
+              </a:lnSpc>
+              <a:buNone/>
+            </a:pPr>
+            <a:endParaRPr lang="en-US" sz="1800" b="0" dirty="0">
+              <a:solidFill>
+                <a:srgbClr val="000000"/>
+              </a:solidFill>
+              <a:effectLst/>
+              <a:highlight>
+                <a:srgbClr val="FFFF00"/>
+              </a:highlight>
+              <a:latin typeface="Consolas" panose="020B0609020204030204" pitchFamily="49" charset="0"/>
+            </a:endParaRPr>
+          </a:p>
+          <a:p>
+            <a:pPr>
+              <a:lnSpc>
+                <a:spcPct val="113095"/>
+              </a:lnSpc>
+              <a:buNone/>
+            </a:pPr>
+            <a:r>
+              <a:rPr lang="en-US" sz="1800" b="0" dirty="0">
+                <a:solidFill>
+                  <a:srgbClr val="000000"/>
+                </a:solidFill>
+                <a:effectLst/>
+                <a:latin typeface="Consolas" panose="020B0609020204030204" pitchFamily="49" charset="0"/>
+              </a:rPr>
+              <a:t>    </a:t>
+            </a:r>
+            <a:r>
+              <a:rPr lang="en-US" sz="1800" b="0" dirty="0">
+                <a:solidFill>
+                  <a:srgbClr val="0000FF"/>
+                </a:solidFill>
+                <a:effectLst/>
+                <a:latin typeface="Consolas" panose="020B0609020204030204" pitchFamily="49" charset="0"/>
+              </a:rPr>
+              <a:t>return</a:t>
+            </a:r>
+            <a:r>
+              <a:rPr lang="en-US" sz="1800" b="0" dirty="0">
+                <a:solidFill>
+                  <a:srgbClr val="000000"/>
+                </a:solidFill>
+                <a:effectLst/>
+                <a:latin typeface="Consolas" panose="020B0609020204030204" pitchFamily="49" charset="0"/>
+              </a:rPr>
+              <a:t> </a:t>
+            </a:r>
+            <a:r>
+              <a:rPr lang="en-US" sz="1800" b="0" dirty="0">
+                <a:solidFill>
+                  <a:srgbClr val="000000"/>
+                </a:solidFill>
+                <a:effectLst/>
+                <a:highlight>
+                  <a:srgbClr val="00FFFF"/>
+                </a:highlight>
+                <a:latin typeface="Consolas" panose="020B0609020204030204" pitchFamily="49" charset="0"/>
+              </a:rPr>
+              <a:t>() </a:t>
+            </a:r>
+            <a:r>
+              <a:rPr lang="en-US" sz="1800" b="0" dirty="0">
+                <a:solidFill>
+                  <a:srgbClr val="0000FF"/>
+                </a:solidFill>
+                <a:effectLst/>
+                <a:highlight>
+                  <a:srgbClr val="00FFFF"/>
+                </a:highlight>
+                <a:latin typeface="Consolas" panose="020B0609020204030204" pitchFamily="49" charset="0"/>
+              </a:rPr>
+              <a:t>=&gt;</a:t>
+            </a:r>
+            <a:r>
+              <a:rPr lang="en-US" sz="1800" b="0" dirty="0">
+                <a:solidFill>
+                  <a:srgbClr val="000000"/>
+                </a:solidFill>
+                <a:effectLst/>
+                <a:highlight>
+                  <a:srgbClr val="00FFFF"/>
+                </a:highlight>
+                <a:latin typeface="Consolas" panose="020B0609020204030204" pitchFamily="49" charset="0"/>
+              </a:rPr>
+              <a:t> {</a:t>
+            </a:r>
+            <a:r>
+              <a:rPr lang="en-US" sz="1800" b="0" dirty="0" err="1">
+                <a:solidFill>
+                  <a:srgbClr val="000000"/>
+                </a:solidFill>
+                <a:effectLst/>
+                <a:highlight>
+                  <a:srgbClr val="00FFFF"/>
+                </a:highlight>
+                <a:latin typeface="Consolas" panose="020B0609020204030204" pitchFamily="49" charset="0"/>
+              </a:rPr>
+              <a:t>clock.removeListener</a:t>
+            </a:r>
+            <a:r>
+              <a:rPr lang="en-US" sz="1800" b="0" dirty="0">
+                <a:solidFill>
+                  <a:srgbClr val="000000"/>
+                </a:solidFill>
+                <a:effectLst/>
+                <a:highlight>
+                  <a:srgbClr val="00FFFF"/>
+                </a:highlight>
+                <a:latin typeface="Consolas" panose="020B0609020204030204" pitchFamily="49" charset="0"/>
+              </a:rPr>
+              <a:t>(listener1);</a:t>
+            </a:r>
+          </a:p>
+          <a:p>
+            <a:pPr>
+              <a:lnSpc>
+                <a:spcPct val="113095"/>
+              </a:lnSpc>
+              <a:buNone/>
+            </a:pPr>
+            <a:r>
+              <a:rPr lang="en-US" sz="1800" b="0" dirty="0">
+                <a:solidFill>
+                  <a:srgbClr val="000000"/>
+                </a:solidFill>
+                <a:effectLst/>
+                <a:latin typeface="Consolas" panose="020B0609020204030204" pitchFamily="49" charset="0"/>
+              </a:rPr>
+              <a:t>    };</a:t>
+            </a:r>
+          </a:p>
+          <a:p>
+            <a:pPr>
+              <a:lnSpc>
+                <a:spcPct val="113095"/>
+              </a:lnSpc>
+              <a:buNone/>
+            </a:pPr>
+            <a:r>
+              <a:rPr lang="en-US" sz="1800" b="0" dirty="0">
+                <a:solidFill>
+                  <a:srgbClr val="000000"/>
+                </a:solidFill>
+                <a:effectLst/>
+                <a:latin typeface="Consolas" panose="020B0609020204030204" pitchFamily="49" charset="0"/>
+              </a:rPr>
+              <a:t>  }, </a:t>
+            </a:r>
+            <a:r>
+              <a:rPr lang="en-US" sz="1800" b="0" dirty="0">
+                <a:solidFill>
+                  <a:srgbClr val="000000"/>
+                </a:solidFill>
+                <a:effectLst/>
+                <a:highlight>
+                  <a:srgbClr val="C0C0C0"/>
+                </a:highlight>
+                <a:latin typeface="Consolas" panose="020B0609020204030204" pitchFamily="49" charset="0"/>
+              </a:rPr>
+              <a:t>[]</a:t>
+            </a:r>
+            <a:r>
+              <a:rPr lang="en-US" sz="1800" b="0" dirty="0">
+                <a:solidFill>
+                  <a:srgbClr val="000000"/>
+                </a:solidFill>
+                <a:effectLst/>
+                <a:latin typeface="Consolas" panose="020B0609020204030204" pitchFamily="49" charset="0"/>
+              </a:rPr>
+              <a:t>);</a:t>
+            </a:r>
+          </a:p>
+        </p:txBody>
+      </p:sp>
+      <p:sp>
+        <p:nvSpPr>
+          <p:cNvPr id="2" name="Title 1">
+            <a:extLst>
+              <a:ext uri="{FF2B5EF4-FFF2-40B4-BE49-F238E27FC236}">
+                <a16:creationId xmlns:a16="http://schemas.microsoft.com/office/drawing/2014/main" id="{784A4F4F-C4AE-D1C0-3F12-9DB3018AC09E}"/>
+              </a:ext>
+            </a:extLst>
+          </p:cNvPr>
+          <p:cNvSpPr>
+            <a:spLocks noGrp="1"/>
+          </p:cNvSpPr>
+          <p:nvPr>
+            <p:ph type="title"/>
+          </p:nvPr>
+        </p:nvSpPr>
+        <p:spPr/>
+        <p:txBody>
+          <a:bodyPr/>
+          <a:lstStyle/>
+          <a:p>
+            <a:r>
+              <a:rPr lang="en-US" dirty="0"/>
+              <a:t>useEffect is a mechanism for synchronizing a component with an external system</a:t>
+            </a:r>
+          </a:p>
+        </p:txBody>
+      </p:sp>
+      <p:sp>
+        <p:nvSpPr>
+          <p:cNvPr id="6" name="TextBox 5">
+            <a:extLst>
+              <a:ext uri="{FF2B5EF4-FFF2-40B4-BE49-F238E27FC236}">
+                <a16:creationId xmlns:a16="http://schemas.microsoft.com/office/drawing/2014/main" id="{DA2921BC-D96C-CE4E-A24A-793135B0040D}"/>
+              </a:ext>
+            </a:extLst>
+          </p:cNvPr>
+          <p:cNvSpPr txBox="1"/>
+          <p:nvPr/>
+        </p:nvSpPr>
+        <p:spPr>
+          <a:xfrm>
+            <a:off x="6946711" y="6149326"/>
+            <a:ext cx="4234491" cy="369330"/>
+          </a:xfrm>
+          <a:prstGeom prst="rect">
+            <a:avLst/>
+          </a:prstGeom>
+          <a:noFill/>
+          <a:ln w="12700" cap="flat">
+            <a:noFill/>
+            <a:miter lim="400000"/>
+          </a:ln>
+          <a:effectLst/>
+          <a:sp3d/>
+        </p:spPr>
+        <p:style>
+          <a:lnRef idx="0">
+            <a:scrgbClr r="0" g="0" b="0"/>
+          </a:lnRef>
+          <a:fillRef idx="0">
+            <a:scrgbClr r="0" g="0" b="0"/>
+          </a:fillRef>
+          <a:effectRef idx="0">
+            <a:scrgbClr r="0" g="0" b="0"/>
+          </a:effectRef>
+          <a:fontRef idx="none"/>
+        </p:style>
+        <p:txBody>
+          <a:bodyPr rot="0" spcFirstLastPara="1" vertOverflow="overflow" horzOverflow="overflow" vert="horz" wrap="none" lIns="45719" tIns="45719" rIns="45719" bIns="45719" numCol="1" spcCol="38100" rtlCol="0" anchor="t">
+            <a:spAutoFit/>
+          </a:bodyPr>
+          <a:lstStyle/>
+          <a:p>
+            <a:pPr marL="0" marR="0" indent="0" algn="l" defTabSz="914400" rtl="0" fontAlgn="auto" latinLnBrk="0" hangingPunct="0">
+              <a:lnSpc>
+                <a:spcPct val="100000"/>
+              </a:lnSpc>
+              <a:spcBef>
+                <a:spcPts val="0"/>
+              </a:spcBef>
+              <a:spcAft>
+                <a:spcPts val="0"/>
+              </a:spcAft>
+              <a:buClrTx/>
+              <a:buSzTx/>
+              <a:buFontTx/>
+              <a:buNone/>
+              <a:tabLst/>
+            </a:pPr>
+            <a:r>
+              <a:rPr kumimoji="0" lang="en-US" sz="1800" b="0" i="0" u="none" strike="noStrike" cap="none" spc="0" normalizeH="0" baseline="0" dirty="0">
+                <a:ln>
+                  <a:noFill/>
+                </a:ln>
+                <a:solidFill>
+                  <a:srgbClr val="000000"/>
+                </a:solidFill>
+                <a:effectLst/>
+                <a:uFillTx/>
+                <a:latin typeface="+mn-lt"/>
+                <a:ea typeface="+mn-ea"/>
+                <a:cs typeface="+mn-cs"/>
+                <a:sym typeface="Calibri"/>
+                <a:hlinkClick r:id="rId3"/>
+              </a:rPr>
+              <a:t>https://react.dev/reference/react/useEffect</a:t>
+            </a:r>
+            <a:endParaRPr kumimoji="0" lang="en-US" sz="1800" b="0" i="0" u="none" strike="noStrike" cap="none" spc="0" normalizeH="0" baseline="0" dirty="0">
+              <a:ln>
+                <a:noFill/>
+              </a:ln>
+              <a:solidFill>
+                <a:srgbClr val="000000"/>
+              </a:solidFill>
+              <a:effectLst/>
+              <a:uFillTx/>
+              <a:latin typeface="+mn-lt"/>
+              <a:ea typeface="+mn-ea"/>
+              <a:cs typeface="+mn-cs"/>
+              <a:sym typeface="Calibri"/>
+            </a:endParaRPr>
+          </a:p>
+        </p:txBody>
+      </p:sp>
+      <p:sp>
+        <p:nvSpPr>
+          <p:cNvPr id="4" name="Slide Number Placeholder 3">
+            <a:extLst>
+              <a:ext uri="{FF2B5EF4-FFF2-40B4-BE49-F238E27FC236}">
+                <a16:creationId xmlns:a16="http://schemas.microsoft.com/office/drawing/2014/main" id="{C106D35E-F8BC-CC43-CE14-43CAA45C74E9}"/>
+              </a:ext>
+            </a:extLst>
+          </p:cNvPr>
+          <p:cNvSpPr>
+            <a:spLocks noGrp="1"/>
+          </p:cNvSpPr>
+          <p:nvPr>
+            <p:ph type="sldNum" sz="quarter" idx="2"/>
+          </p:nvPr>
+        </p:nvSpPr>
+        <p:spPr/>
+        <p:txBody>
+          <a:bodyPr/>
+          <a:lstStyle/>
+          <a:p>
+            <a:fld id="{86CB4B4D-7CA3-9044-876B-883B54F8677D}" type="slidenum">
+              <a:rPr lang="en-US" smtClean="0"/>
+              <a:t>4</a:t>
+            </a:fld>
+            <a:endParaRPr lang="en-US"/>
+          </a:p>
+        </p:txBody>
+      </p:sp>
+      <p:sp>
+        <p:nvSpPr>
+          <p:cNvPr id="8" name="Arrow: Left 7">
+            <a:extLst>
+              <a:ext uri="{FF2B5EF4-FFF2-40B4-BE49-F238E27FC236}">
+                <a16:creationId xmlns:a16="http://schemas.microsoft.com/office/drawing/2014/main" id="{26C3FA75-64CA-C959-0B28-81AD3FB51474}"/>
+              </a:ext>
+            </a:extLst>
+          </p:cNvPr>
+          <p:cNvSpPr/>
+          <p:nvPr/>
+        </p:nvSpPr>
+        <p:spPr>
+          <a:xfrm>
+            <a:off x="8576911" y="2868429"/>
+            <a:ext cx="2117558" cy="1283906"/>
+          </a:xfrm>
+          <a:prstGeom prst="leftArrow">
+            <a:avLst/>
+          </a:prstGeom>
+          <a:solidFill>
+            <a:srgbClr val="FFFF00"/>
+          </a:solidFill>
+          <a:ln w="12700" cap="flat">
+            <a:solidFill>
+              <a:schemeClr val="accent1"/>
+            </a:solidFill>
+            <a:prstDash val="solid"/>
+            <a:miter lim="800000"/>
+          </a:ln>
+          <a:effectLst/>
+          <a:sp3d/>
+        </p:spPr>
+        <p:style>
+          <a:lnRef idx="0">
+            <a:scrgbClr r="0" g="0" b="0"/>
+          </a:lnRef>
+          <a:fillRef idx="0">
+            <a:scrgbClr r="0" g="0" b="0"/>
+          </a:fillRef>
+          <a:effectRef idx="0">
+            <a:scrgbClr r="0" g="0" b="0"/>
+          </a:effectRef>
+          <a:fontRef idx="none"/>
+        </p:style>
+        <p:txBody>
+          <a:bodyPr rot="0" spcFirstLastPara="1" vertOverflow="overflow" horzOverflow="overflow" vert="horz" wrap="square" lIns="45719" tIns="45719" rIns="45719" bIns="45719" numCol="1" spcCol="38100" rtlCol="0" anchor="ctr">
+            <a:spAutoFit/>
+          </a:bodyPr>
+          <a:lstStyle/>
+          <a:p>
+            <a:pPr marL="0" marR="0" indent="0" algn="l" defTabSz="914400" rtl="0" fontAlgn="auto" latinLnBrk="0" hangingPunct="0">
+              <a:lnSpc>
+                <a:spcPct val="100000"/>
+              </a:lnSpc>
+              <a:spcBef>
+                <a:spcPts val="0"/>
+              </a:spcBef>
+              <a:spcAft>
+                <a:spcPts val="0"/>
+              </a:spcAft>
+              <a:buClrTx/>
+              <a:buSzTx/>
+              <a:buFontTx/>
+              <a:buNone/>
+              <a:tabLst/>
+            </a:pPr>
+            <a:r>
+              <a:rPr lang="en-US" dirty="0"/>
+              <a:t>Action to take on first render</a:t>
+            </a:r>
+            <a:endParaRPr kumimoji="0" lang="en-US" sz="1800" b="0" i="0" u="none" strike="noStrike" cap="none" spc="0" normalizeH="0" baseline="0" dirty="0">
+              <a:ln>
+                <a:noFill/>
+              </a:ln>
+              <a:solidFill>
+                <a:srgbClr val="000000"/>
+              </a:solidFill>
+              <a:effectLst/>
+              <a:uFillTx/>
+              <a:latin typeface="+mn-lt"/>
+              <a:ea typeface="+mn-ea"/>
+              <a:cs typeface="+mn-cs"/>
+              <a:sym typeface="Calibri"/>
+            </a:endParaRPr>
+          </a:p>
+        </p:txBody>
+      </p:sp>
+      <p:sp>
+        <p:nvSpPr>
+          <p:cNvPr id="9" name="Arrow: Left 8">
+            <a:extLst>
+              <a:ext uri="{FF2B5EF4-FFF2-40B4-BE49-F238E27FC236}">
+                <a16:creationId xmlns:a16="http://schemas.microsoft.com/office/drawing/2014/main" id="{311E723F-5709-3B3B-ABAE-5401E8EF42BA}"/>
+              </a:ext>
+            </a:extLst>
+          </p:cNvPr>
+          <p:cNvSpPr/>
+          <p:nvPr/>
+        </p:nvSpPr>
+        <p:spPr>
+          <a:xfrm>
+            <a:off x="7547810" y="4052822"/>
+            <a:ext cx="3547366" cy="1283906"/>
+          </a:xfrm>
+          <a:prstGeom prst="leftArrow">
+            <a:avLst/>
+          </a:prstGeom>
+          <a:solidFill>
+            <a:schemeClr val="accent5">
+              <a:lumMod val="60000"/>
+              <a:lumOff val="40000"/>
+            </a:schemeClr>
+          </a:solidFill>
+          <a:ln w="12700" cap="flat">
+            <a:solidFill>
+              <a:schemeClr val="accent1"/>
+            </a:solidFill>
+            <a:prstDash val="solid"/>
+            <a:miter lim="800000"/>
+          </a:ln>
+          <a:effectLst/>
+          <a:sp3d/>
+        </p:spPr>
+        <p:style>
+          <a:lnRef idx="0">
+            <a:scrgbClr r="0" g="0" b="0"/>
+          </a:lnRef>
+          <a:fillRef idx="0">
+            <a:scrgbClr r="0" g="0" b="0"/>
+          </a:fillRef>
+          <a:effectRef idx="0">
+            <a:scrgbClr r="0" g="0" b="0"/>
+          </a:effectRef>
+          <a:fontRef idx="none"/>
+        </p:style>
+        <p:txBody>
+          <a:bodyPr rot="0" spcFirstLastPara="1" vertOverflow="overflow" horzOverflow="overflow" vert="horz" wrap="square" lIns="45719" tIns="45719" rIns="45719" bIns="45719" numCol="1" spcCol="38100" rtlCol="0" anchor="ctr">
+            <a:spAutoFit/>
+          </a:bodyPr>
+          <a:lstStyle/>
+          <a:p>
+            <a:pPr marL="0" marR="0" indent="0" algn="l" defTabSz="914400" rtl="0" fontAlgn="auto" latinLnBrk="0" hangingPunct="0">
+              <a:lnSpc>
+                <a:spcPct val="100000"/>
+              </a:lnSpc>
+              <a:spcBef>
+                <a:spcPts val="0"/>
+              </a:spcBef>
+              <a:spcAft>
+                <a:spcPts val="0"/>
+              </a:spcAft>
+              <a:buClrTx/>
+              <a:buSzTx/>
+              <a:buFontTx/>
+              <a:buNone/>
+              <a:tabLst/>
+            </a:pPr>
+            <a:r>
+              <a:rPr lang="en-US" dirty="0">
+                <a:highlight>
+                  <a:srgbClr val="00FFFF"/>
+                </a:highlight>
+              </a:rPr>
+              <a:t>Action to take when component dismounts</a:t>
+            </a:r>
+            <a:endParaRPr kumimoji="0" lang="en-US" sz="1800" b="0" i="0" u="none" strike="noStrike" cap="none" spc="0" normalizeH="0" baseline="0" dirty="0">
+              <a:ln>
+                <a:noFill/>
+              </a:ln>
+              <a:solidFill>
+                <a:srgbClr val="000000"/>
+              </a:solidFill>
+              <a:effectLst/>
+              <a:highlight>
+                <a:srgbClr val="00FFFF"/>
+              </a:highlight>
+              <a:uFillTx/>
+              <a:sym typeface="Calibri"/>
+            </a:endParaRPr>
+          </a:p>
+        </p:txBody>
+      </p:sp>
+      <p:grpSp>
+        <p:nvGrpSpPr>
+          <p:cNvPr id="21" name="Group 20">
+            <a:extLst>
+              <a:ext uri="{FF2B5EF4-FFF2-40B4-BE49-F238E27FC236}">
+                <a16:creationId xmlns:a16="http://schemas.microsoft.com/office/drawing/2014/main" id="{6DF6F86B-92DB-2A6F-C86C-D9D8E5D4BF9A}"/>
+              </a:ext>
+            </a:extLst>
+          </p:cNvPr>
+          <p:cNvGrpSpPr/>
+          <p:nvPr/>
+        </p:nvGrpSpPr>
+        <p:grpSpPr>
+          <a:xfrm>
+            <a:off x="1096824" y="5283042"/>
+            <a:ext cx="2797629" cy="1016157"/>
+            <a:chOff x="1687285" y="5076030"/>
+            <a:chExt cx="2797629" cy="1380023"/>
+          </a:xfrm>
+        </p:grpSpPr>
+        <p:cxnSp>
+          <p:nvCxnSpPr>
+            <p:cNvPr id="17" name="Straight Arrow Connector 16">
+              <a:extLst>
+                <a:ext uri="{FF2B5EF4-FFF2-40B4-BE49-F238E27FC236}">
+                  <a16:creationId xmlns:a16="http://schemas.microsoft.com/office/drawing/2014/main" id="{FC0317B6-86FE-BD0A-7F68-B2D5D5675C48}"/>
+                </a:ext>
+              </a:extLst>
+            </p:cNvPr>
+            <p:cNvCxnSpPr>
+              <a:cxnSpLocks/>
+            </p:cNvCxnSpPr>
+            <p:nvPr/>
+          </p:nvCxnSpPr>
+          <p:spPr>
+            <a:xfrm flipH="1" flipV="1">
+              <a:off x="2445129" y="5076030"/>
+              <a:ext cx="294223" cy="765521"/>
+            </a:xfrm>
+            <a:prstGeom prst="straightConnector1">
+              <a:avLst/>
+            </a:prstGeom>
+            <a:noFill/>
+            <a:ln w="63500" cap="flat">
+              <a:solidFill>
+                <a:schemeClr val="bg1">
+                  <a:lumMod val="65000"/>
+                </a:schemeClr>
+              </a:solidFill>
+              <a:prstDash val="solid"/>
+              <a:miter lim="800000"/>
+              <a:tailEnd type="triangle"/>
+            </a:ln>
+            <a:effectLst/>
+            <a:sp3d/>
+          </p:spPr>
+          <p:style>
+            <a:lnRef idx="0">
+              <a:scrgbClr r="0" g="0" b="0"/>
+            </a:lnRef>
+            <a:fillRef idx="0">
+              <a:scrgbClr r="0" g="0" b="0"/>
+            </a:fillRef>
+            <a:effectRef idx="0">
+              <a:scrgbClr r="0" g="0" b="0"/>
+            </a:effectRef>
+            <a:fontRef idx="none"/>
+          </p:style>
+        </p:cxnSp>
+        <p:sp>
+          <p:nvSpPr>
+            <p:cNvPr id="15" name="Rectangle 14">
+              <a:extLst>
+                <a:ext uri="{FF2B5EF4-FFF2-40B4-BE49-F238E27FC236}">
+                  <a16:creationId xmlns:a16="http://schemas.microsoft.com/office/drawing/2014/main" id="{B0B99846-94B1-FB3E-25E9-00C8357F84CE}"/>
+                </a:ext>
+              </a:extLst>
+            </p:cNvPr>
+            <p:cNvSpPr/>
+            <p:nvPr/>
+          </p:nvSpPr>
+          <p:spPr>
+            <a:xfrm>
+              <a:off x="1687285" y="5809724"/>
+              <a:ext cx="2797629" cy="646329"/>
+            </a:xfrm>
+            <a:prstGeom prst="rect">
+              <a:avLst/>
+            </a:prstGeom>
+            <a:solidFill>
+              <a:schemeClr val="accent3">
+                <a:lumMod val="40000"/>
+                <a:lumOff val="60000"/>
+              </a:schemeClr>
+            </a:solidFill>
+            <a:ln w="12700" cap="flat">
+              <a:solidFill>
+                <a:schemeClr val="accent1"/>
+              </a:solidFill>
+              <a:prstDash val="solid"/>
+              <a:miter lim="800000"/>
+            </a:ln>
+            <a:effectLst/>
+            <a:sp3d/>
+          </p:spPr>
+          <p:style>
+            <a:lnRef idx="0">
+              <a:scrgbClr r="0" g="0" b="0"/>
+            </a:lnRef>
+            <a:fillRef idx="0">
+              <a:scrgbClr r="0" g="0" b="0"/>
+            </a:fillRef>
+            <a:effectRef idx="0">
+              <a:scrgbClr r="0" g="0" b="0"/>
+            </a:effectRef>
+            <a:fontRef idx="none"/>
+          </p:style>
+          <p:txBody>
+            <a:bodyPr rot="0" spcFirstLastPara="1" vertOverflow="overflow" horzOverflow="overflow" vert="horz" wrap="square" lIns="45719" tIns="45719" rIns="45719" bIns="45719" numCol="1" spcCol="38100" rtlCol="0" anchor="ctr">
+              <a:spAutoFit/>
+            </a:bodyPr>
+            <a:lstStyle/>
+            <a:p>
+              <a:r>
+                <a:rPr lang="en-US" dirty="0"/>
+                <a:t>Empty array says: do this on first render only</a:t>
+              </a:r>
+            </a:p>
+          </p:txBody>
+        </p:sp>
+      </p:grpSp>
+      <p:sp>
+        <p:nvSpPr>
+          <p:cNvPr id="5" name="Rectangle: Rounded Corners 4">
+            <a:extLst>
+              <a:ext uri="{FF2B5EF4-FFF2-40B4-BE49-F238E27FC236}">
+                <a16:creationId xmlns:a16="http://schemas.microsoft.com/office/drawing/2014/main" id="{B039A5B5-1854-5879-DD3A-BAAE5F2B4E69}"/>
+              </a:ext>
+            </a:extLst>
+          </p:cNvPr>
+          <p:cNvSpPr/>
+          <p:nvPr/>
+        </p:nvSpPr>
+        <p:spPr>
+          <a:xfrm>
+            <a:off x="5529973" y="5474355"/>
+            <a:ext cx="6276204" cy="601981"/>
+          </a:xfrm>
+          <a:prstGeom prst="roundRect">
+            <a:avLst/>
+          </a:prstGeom>
+          <a:solidFill>
+            <a:schemeClr val="accent6">
+              <a:lumMod val="20000"/>
+              <a:lumOff val="80000"/>
+            </a:schemeClr>
+          </a:solidFill>
+          <a:ln>
+            <a:solidFill>
+              <a:srgbClr val="0070C0"/>
+            </a:solidFill>
+          </a:ln>
+        </p:spPr>
+        <p:style>
+          <a:lnRef idx="2">
+            <a:schemeClr val="accent1">
+              <a:shade val="50000"/>
+            </a:schemeClr>
+          </a:lnRef>
+          <a:fillRef idx="1">
+            <a:schemeClr val="accent1"/>
+          </a:fillRef>
+          <a:effectRef idx="0">
+            <a:schemeClr val="accent1"/>
+          </a:effectRef>
+          <a:fontRef idx="minor">
+            <a:schemeClr val="lt1"/>
+          </a:fontRef>
+        </p:style>
+        <p:txBody>
+          <a:bodyPr rtlCol="0" anchor="ctr"/>
+          <a:lstStyle/>
+          <a:p>
+            <a:pPr algn="ctr"/>
+            <a:r>
+              <a:rPr lang="en-US" sz="2400" dirty="0" err="1">
+                <a:solidFill>
+                  <a:schemeClr val="tx1"/>
+                </a:solidFill>
+              </a:rPr>
+              <a:t>src</a:t>
+            </a:r>
+            <a:r>
+              <a:rPr lang="en-US" sz="2400" dirty="0">
+                <a:solidFill>
+                  <a:schemeClr val="tx1"/>
+                </a:solidFill>
+              </a:rPr>
+              <a:t>/Shared/Components/</a:t>
+            </a:r>
+            <a:r>
+              <a:rPr lang="en-US" sz="2400" dirty="0" err="1">
+                <a:solidFill>
+                  <a:schemeClr val="tx1"/>
+                </a:solidFill>
+              </a:rPr>
+              <a:t>SimpleClockDisplay.tsx</a:t>
+            </a:r>
+            <a:endParaRPr lang="en-US" sz="2400" dirty="0">
+              <a:solidFill>
+                <a:schemeClr val="tx1"/>
+              </a:solidFill>
+            </a:endParaRPr>
+          </a:p>
+        </p:txBody>
+      </p:sp>
+    </p:spTree>
+    <p:extLst>
+      <p:ext uri="{BB962C8B-B14F-4D97-AF65-F5344CB8AC3E}">
+        <p14:creationId xmlns:p14="http://schemas.microsoft.com/office/powerpoint/2010/main" val="3414127211"/>
+      </p:ext>
+    </p:extLst>
+  </p:cSld>
+  <p:clrMapOvr>
+    <a:masterClrMapping/>
+  </p:clrMapOvr>
+  <p:transition spd="med"/>
+  <p:timing>
+    <p:tnLst>
+      <p:par>
+        <p:cTn id="1" dur="indefinite" restart="never" nodeType="tmRoot">
+          <p:childTnLst>
+            <p:seq concurrent="1" nextAc="seek">
+              <p:cTn id="2" dur="indefinite" nodeType="mainSeq">
+                <p:childTnLst>
+                  <p:par>
+                    <p:cTn id="3" fill="hold">
+                      <p:stCondLst>
+                        <p:cond delay="indefinite"/>
+                      </p:stCondLst>
+                      <p:childTnLst>
+                        <p:par>
+                          <p:cTn id="4" fill="hold">
+                            <p:stCondLst>
+                              <p:cond delay="0"/>
+                            </p:stCondLst>
+                            <p:childTnLst>
+                              <p:par>
+                                <p:cTn id="5" presetID="1" presetClass="entr" presetSubtype="0" fill="hold" nodeType="clickEffect">
+                                  <p:stCondLst>
+                                    <p:cond delay="0"/>
+                                  </p:stCondLst>
+                                  <p:childTnLst>
+                                    <p:set>
+                                      <p:cBhvr>
+                                        <p:cTn id="6" dur="1" fill="hold">
+                                          <p:stCondLst>
+                                            <p:cond delay="0"/>
+                                          </p:stCondLst>
+                                        </p:cTn>
+                                        <p:tgtEl>
+                                          <p:spTgt spid="21"/>
+                                        </p:tgtEl>
+                                        <p:attrNameLst>
+                                          <p:attrName>style.visibility</p:attrName>
+                                        </p:attrNameLst>
+                                      </p:cBhvr>
+                                      <p:to>
+                                        <p:strVal val="visible"/>
+                                      </p:to>
+                                    </p:set>
+                                  </p:childTnLst>
+                                </p:cTn>
+                              </p:par>
+                            </p:childTnLst>
+                          </p:cTn>
+                        </p:par>
+                      </p:childTnLst>
+                    </p:cTn>
+                  </p:par>
+                  <p:par>
+                    <p:cTn id="7" fill="hold">
+                      <p:stCondLst>
+                        <p:cond delay="indefinite"/>
+                      </p:stCondLst>
+                      <p:childTnLst>
+                        <p:par>
+                          <p:cTn id="8" fill="hold">
+                            <p:stCondLst>
+                              <p:cond delay="0"/>
+                            </p:stCondLst>
+                            <p:childTnLst>
+                              <p:par>
+                                <p:cTn id="9" presetID="1" presetClass="entr" presetSubtype="0" fill="hold" grpId="0" nodeType="clickEffect">
+                                  <p:stCondLst>
+                                    <p:cond delay="0"/>
+                                  </p:stCondLst>
+                                  <p:childTnLst>
+                                    <p:set>
+                                      <p:cBhvr>
+                                        <p:cTn id="10" dur="1" fill="hold">
+                                          <p:stCondLst>
+                                            <p:cond delay="0"/>
+                                          </p:stCondLst>
+                                        </p:cTn>
+                                        <p:tgtEl>
+                                          <p:spTgt spid="8"/>
+                                        </p:tgtEl>
+                                        <p:attrNameLst>
+                                          <p:attrName>style.visibility</p:attrName>
+                                        </p:attrNameLst>
+                                      </p:cBhvr>
+                                      <p:to>
+                                        <p:strVal val="visible"/>
+                                      </p:to>
+                                    </p:set>
+                                  </p:childTnLst>
+                                </p:cTn>
+                              </p:par>
+                            </p:childTnLst>
+                          </p:cTn>
+                        </p:par>
+                      </p:childTnLst>
+                    </p:cTn>
+                  </p:par>
+                  <p:par>
+                    <p:cTn id="11" fill="hold">
+                      <p:stCondLst>
+                        <p:cond delay="indefinite"/>
+                      </p:stCondLst>
+                      <p:childTnLst>
+                        <p:par>
+                          <p:cTn id="12" fill="hold">
+                            <p:stCondLst>
+                              <p:cond delay="0"/>
+                            </p:stCondLst>
+                            <p:childTnLst>
+                              <p:par>
+                                <p:cTn id="13" presetID="1" presetClass="entr" presetSubtype="0" fill="hold" grpId="0" nodeType="clickEffect">
+                                  <p:stCondLst>
+                                    <p:cond delay="0"/>
+                                  </p:stCondLst>
+                                  <p:childTnLst>
+                                    <p:set>
+                                      <p:cBhvr>
+                                        <p:cTn id="14" dur="1" fill="hold">
+                                          <p:stCondLst>
+                                            <p:cond delay="0"/>
+                                          </p:stCondLst>
+                                        </p:cTn>
+                                        <p:tgtEl>
+                                          <p:spTgt spid="9"/>
+                                        </p:tgtEl>
+                                        <p:attrNameLst>
+                                          <p:attrName>style.visibility</p:attrName>
+                                        </p:attrNameLst>
+                                      </p:cBhvr>
+                                      <p:to>
+                                        <p:strVal val="visible"/>
+                                      </p:to>
+                                    </p:set>
+                                  </p:childTnLst>
+                                </p:cTn>
+                              </p:par>
+                            </p:childTnLst>
+                          </p:cTn>
+                        </p:par>
+                      </p:childTnLst>
+                    </p:cTn>
+                  </p:par>
+                </p:childTnLst>
+              </p:cTn>
+              <p:prevCondLst>
+                <p:cond evt="onPrev" delay="0">
+                  <p:tgtEl>
+                    <p:sldTgt/>
+                  </p:tgtEl>
+                </p:cond>
+              </p:prevCondLst>
+              <p:nextCondLst>
+                <p:cond evt="onNext" delay="0">
+                  <p:tgtEl>
+                    <p:sldTgt/>
+                  </p:tgtEl>
+                </p:cond>
+              </p:nextCondLst>
+            </p:seq>
+          </p:childTnLst>
+        </p:cTn>
+      </p:par>
+    </p:tnLst>
+    <p:bldLst>
+      <p:bldP spid="8" grpId="0" animBg="1"/>
+      <p:bldP spid="9" grpId="0" animBg="1"/>
+    </p:bldLst>
+  </p:timing>
+</p:sld>
+</file>
+
+<file path=ppt/slides/slide40.xml><?xml version="1.0" encoding="utf-8"?>
 <p:sld xmlns:a="http://schemas.openxmlformats.org/drawingml/2006/main" xmlns:r="http://schemas.openxmlformats.org/officeDocument/2006/relationships" xmlns:p="http://schemas.openxmlformats.org/presentationml/2006/main">
   <p:cSld>
     <p:spTree>
@@ -31059,7 +36362,7 @@
           </a:prstGeom>
           <a:extLst>
             <a:ext uri="{C572A759-6A51-4108-AA02-DFA0A04FC94B}">
-              <ma14:wrappingTextBoxFlag xmlns:ma14="http://schemas.microsoft.com/office/mac/drawingml/2011/main" xmlns:a14="http://schemas.microsoft.com/office/drawing/2010/main" xmlns:m="http://schemas.openxmlformats.org/officeDocument/2006/math" xmlns="" val="1"/>
+              <ma14:wrappingTextBoxFlag xmlns="" xmlns:m="http://schemas.openxmlformats.org/officeDocument/2006/math" xmlns:a14="http://schemas.microsoft.com/office/drawing/2010/main" xmlns:ma14="http://schemas.microsoft.com/office/mac/drawingml/2011/main" val="1"/>
             </a:ext>
           </a:extLst>
         </p:spPr>
@@ -31069,7 +36372,7 @@
           <a:p>
             <a:fld id="{86CB4B4D-7CA3-9044-876B-883B54F8677D}" type="slidenum">
               <a:rPr/>
-              <a:t>38</a:t>
+              <a:t>40</a:t>
             </a:fld>
             <a:endParaRPr/>
           </a:p>
@@ -31084,7 +36387,7 @@
 </p:sld>
 </file>
 
-<file path=ppt/slides/slide39.xml><?xml version="1.0" encoding="utf-8"?>
+<file path=ppt/slides/slide41.xml><?xml version="1.0" encoding="utf-8"?>
 <p:sld xmlns:a="http://schemas.openxmlformats.org/drawingml/2006/main" xmlns:r="http://schemas.openxmlformats.org/officeDocument/2006/relationships" xmlns:p="http://schemas.openxmlformats.org/presentationml/2006/main">
   <p:cSld>
     <p:spTree>
@@ -31152,7 +36455,7 @@
           <a:p>
             <a:fld id="{20F37917-FD3A-4669-9018-DA04BCDD3D75}" type="slidenum">
               <a:rPr lang="en-US" smtClean="0"/>
-              <a:t>39</a:t>
+              <a:t>41</a:t>
             </a:fld>
             <a:endParaRPr lang="en-US"/>
           </a:p>
@@ -32746,1482 +38049,7 @@
 </p:sld>
 </file>
 
-<file path=ppt/slides/slide4.xml><?xml version="1.0" encoding="utf-8"?>
-<p:sld xmlns:a="http://schemas.openxmlformats.org/drawingml/2006/main" xmlns:r="http://schemas.openxmlformats.org/officeDocument/2006/relationships" xmlns:p="http://schemas.openxmlformats.org/presentationml/2006/main">
-  <p:cSld>
-    <p:spTree>
-      <p:nvGrpSpPr>
-        <p:cNvPr id="1" name=""/>
-        <p:cNvGrpSpPr/>
-        <p:nvPr/>
-      </p:nvGrpSpPr>
-      <p:grpSpPr>
-        <a:xfrm>
-          <a:off x="0" y="0"/>
-          <a:ext cx="0" cy="0"/>
-          <a:chOff x="0" y="0"/>
-          <a:chExt cx="0" cy="0"/>
-        </a:xfrm>
-      </p:grpSpPr>
-      <p:sp>
-        <p:nvSpPr>
-          <p:cNvPr id="12" name="TextBox 11">
-            <a:extLst>
-              <a:ext uri="{FF2B5EF4-FFF2-40B4-BE49-F238E27FC236}">
-                <a16:creationId xmlns:a16="http://schemas.microsoft.com/office/drawing/2014/main" id="{CB8AB8A6-3946-36F5-47EA-C69393119EAE}"/>
-              </a:ext>
-            </a:extLst>
-          </p:cNvPr>
-          <p:cNvSpPr txBox="1"/>
-          <p:nvPr/>
-        </p:nvSpPr>
-        <p:spPr>
-          <a:xfrm>
-            <a:off x="838200" y="1630950"/>
-            <a:ext cx="10256976" cy="3829895"/>
-          </a:xfrm>
-          <a:prstGeom prst="rect">
-            <a:avLst/>
-          </a:prstGeom>
-          <a:noFill/>
-          <a:ln w="12700" cap="flat">
-            <a:noFill/>
-            <a:miter lim="400000"/>
-          </a:ln>
-          <a:effectLst/>
-          <a:sp3d/>
-        </p:spPr>
-        <p:style>
-          <a:lnRef idx="0">
-            <a:scrgbClr r="0" g="0" b="0"/>
-          </a:lnRef>
-          <a:fillRef idx="0">
-            <a:scrgbClr r="0" g="0" b="0"/>
-          </a:fillRef>
-          <a:effectRef idx="0">
-            <a:scrgbClr r="0" g="0" b="0"/>
-          </a:effectRef>
-          <a:fontRef idx="none"/>
-        </p:style>
-        <p:txBody>
-          <a:bodyPr wrap="square">
-            <a:spAutoFit/>
-          </a:bodyPr>
-          <a:lstStyle/>
-          <a:p>
-            <a:pPr>
-              <a:lnSpc>
-                <a:spcPct val="113095"/>
-              </a:lnSpc>
-              <a:buNone/>
-            </a:pPr>
-            <a:r>
-              <a:rPr lang="en-US" sz="1800" b="0" dirty="0">
-                <a:solidFill>
-                  <a:srgbClr val="0000FF"/>
-                </a:solidFill>
-                <a:effectLst/>
-                <a:latin typeface="Consolas" panose="020B0609020204030204" pitchFamily="49" charset="0"/>
-              </a:rPr>
-              <a:t>export</a:t>
-            </a:r>
-            <a:r>
-              <a:rPr lang="en-US" sz="1800" b="0" dirty="0">
-                <a:solidFill>
-                  <a:srgbClr val="000000"/>
-                </a:solidFill>
-                <a:effectLst/>
-                <a:latin typeface="Consolas" panose="020B0609020204030204" pitchFamily="49" charset="0"/>
-              </a:rPr>
-              <a:t> </a:t>
-            </a:r>
-            <a:r>
-              <a:rPr lang="en-US" sz="1800" b="0" dirty="0">
-                <a:solidFill>
-                  <a:srgbClr val="0000FF"/>
-                </a:solidFill>
-                <a:effectLst/>
-                <a:latin typeface="Consolas" panose="020B0609020204030204" pitchFamily="49" charset="0"/>
-              </a:rPr>
-              <a:t>default</a:t>
-            </a:r>
-            <a:r>
-              <a:rPr lang="en-US" sz="1800" b="0" dirty="0">
-                <a:solidFill>
-                  <a:srgbClr val="000000"/>
-                </a:solidFill>
-                <a:effectLst/>
-                <a:latin typeface="Consolas" panose="020B0609020204030204" pitchFamily="49" charset="0"/>
-              </a:rPr>
-              <a:t> </a:t>
-            </a:r>
-            <a:r>
-              <a:rPr lang="en-US" sz="1800" b="0" dirty="0">
-                <a:solidFill>
-                  <a:srgbClr val="0000FF"/>
-                </a:solidFill>
-                <a:effectLst/>
-                <a:latin typeface="Consolas" panose="020B0609020204030204" pitchFamily="49" charset="0"/>
-              </a:rPr>
-              <a:t>function</a:t>
-            </a:r>
-            <a:r>
-              <a:rPr lang="en-US" sz="1800" b="0" dirty="0">
-                <a:solidFill>
-                  <a:srgbClr val="000000"/>
-                </a:solidFill>
-                <a:effectLst/>
-                <a:latin typeface="Consolas" panose="020B0609020204030204" pitchFamily="49" charset="0"/>
-              </a:rPr>
-              <a:t> </a:t>
-            </a:r>
-            <a:r>
-              <a:rPr lang="en-US" sz="1800" b="0" dirty="0" err="1">
-                <a:solidFill>
-                  <a:srgbClr val="000000"/>
-                </a:solidFill>
-                <a:effectLst/>
-                <a:latin typeface="Consolas" panose="020B0609020204030204" pitchFamily="49" charset="0"/>
-              </a:rPr>
-              <a:t>ClockDisplay</a:t>
-            </a:r>
-            <a:r>
-              <a:rPr lang="en-US" sz="1800" b="0" dirty="0">
-                <a:solidFill>
-                  <a:srgbClr val="000000"/>
-                </a:solidFill>
-                <a:effectLst/>
-                <a:latin typeface="Consolas" panose="020B0609020204030204" pitchFamily="49" charset="0"/>
-              </a:rPr>
-              <a:t>(props: ClockDisplayProps) {</a:t>
-            </a:r>
-          </a:p>
-          <a:p>
-            <a:pPr>
-              <a:lnSpc>
-                <a:spcPct val="113095"/>
-              </a:lnSpc>
-              <a:buNone/>
-            </a:pPr>
-            <a:r>
-              <a:rPr lang="en-US" sz="1800" b="0" dirty="0">
-                <a:solidFill>
-                  <a:srgbClr val="000000"/>
-                </a:solidFill>
-                <a:effectLst/>
-                <a:latin typeface="Consolas" panose="020B0609020204030204" pitchFamily="49" charset="0"/>
-              </a:rPr>
-              <a:t>  </a:t>
-            </a:r>
-            <a:r>
-              <a:rPr lang="en-US" sz="1800" b="0" dirty="0">
-                <a:solidFill>
-                  <a:srgbClr val="0000FF"/>
-                </a:solidFill>
-                <a:effectLst/>
-                <a:latin typeface="Consolas" panose="020B0609020204030204" pitchFamily="49" charset="0"/>
-              </a:rPr>
-              <a:t>const</a:t>
-            </a:r>
-            <a:r>
-              <a:rPr lang="en-US" sz="1800" b="0" dirty="0">
-                <a:solidFill>
-                  <a:srgbClr val="000000"/>
-                </a:solidFill>
-                <a:effectLst/>
-                <a:latin typeface="Consolas" panose="020B0609020204030204" pitchFamily="49" charset="0"/>
-              </a:rPr>
-              <a:t> clock = </a:t>
-            </a:r>
-            <a:r>
-              <a:rPr lang="en-US" sz="1800" b="0" dirty="0" err="1">
-                <a:solidFill>
-                  <a:srgbClr val="000000"/>
-                </a:solidFill>
-                <a:effectLst/>
-                <a:latin typeface="Consolas" panose="020B0609020204030204" pitchFamily="49" charset="0"/>
-              </a:rPr>
-              <a:t>props.clock</a:t>
-            </a:r>
-            <a:r>
-              <a:rPr lang="en-US" sz="1800" b="0" dirty="0">
-                <a:solidFill>
-                  <a:srgbClr val="000000"/>
-                </a:solidFill>
-                <a:effectLst/>
-                <a:latin typeface="Consolas" panose="020B0609020204030204" pitchFamily="49" charset="0"/>
-              </a:rPr>
-              <a:t>;</a:t>
-            </a:r>
-          </a:p>
-          <a:p>
-            <a:pPr>
-              <a:lnSpc>
-                <a:spcPct val="113095"/>
-              </a:lnSpc>
-              <a:buNone/>
-            </a:pPr>
-            <a:r>
-              <a:rPr lang="en-US" sz="1800" b="0" dirty="0">
-                <a:solidFill>
-                  <a:srgbClr val="000000"/>
-                </a:solidFill>
-                <a:effectLst/>
-                <a:latin typeface="Consolas" panose="020B0609020204030204" pitchFamily="49" charset="0"/>
-              </a:rPr>
-              <a:t>  </a:t>
-            </a:r>
-            <a:r>
-              <a:rPr lang="en-US" sz="1800" b="0" dirty="0">
-                <a:solidFill>
-                  <a:srgbClr val="0000FF"/>
-                </a:solidFill>
-                <a:effectLst/>
-                <a:latin typeface="Consolas" panose="020B0609020204030204" pitchFamily="49" charset="0"/>
-              </a:rPr>
-              <a:t>const</a:t>
-            </a:r>
-            <a:r>
-              <a:rPr lang="en-US" sz="1800" b="0" dirty="0">
-                <a:solidFill>
-                  <a:srgbClr val="000000"/>
-                </a:solidFill>
-                <a:effectLst/>
-                <a:latin typeface="Consolas" panose="020B0609020204030204" pitchFamily="49" charset="0"/>
-              </a:rPr>
-              <a:t> [</a:t>
-            </a:r>
-            <a:r>
-              <a:rPr lang="en-US" sz="1800" b="0" dirty="0" err="1">
-                <a:solidFill>
-                  <a:srgbClr val="000000"/>
-                </a:solidFill>
-                <a:effectLst/>
-                <a:latin typeface="Consolas" panose="020B0609020204030204" pitchFamily="49" charset="0"/>
-              </a:rPr>
-              <a:t>localTime</a:t>
-            </a:r>
-            <a:r>
-              <a:rPr lang="en-US" sz="1800" b="0" dirty="0">
-                <a:solidFill>
-                  <a:srgbClr val="000000"/>
-                </a:solidFill>
-                <a:effectLst/>
-                <a:latin typeface="Consolas" panose="020B0609020204030204" pitchFamily="49" charset="0"/>
-              </a:rPr>
-              <a:t>, </a:t>
-            </a:r>
-            <a:r>
-              <a:rPr lang="en-US" sz="1800" b="0" dirty="0" err="1">
-                <a:solidFill>
-                  <a:srgbClr val="000000"/>
-                </a:solidFill>
-                <a:effectLst/>
-                <a:latin typeface="Consolas" panose="020B0609020204030204" pitchFamily="49" charset="0"/>
-              </a:rPr>
-              <a:t>setLocalTime</a:t>
-            </a:r>
-            <a:r>
-              <a:rPr lang="en-US" sz="1800" b="0" dirty="0">
-                <a:solidFill>
-                  <a:srgbClr val="000000"/>
-                </a:solidFill>
-                <a:effectLst/>
-                <a:latin typeface="Consolas" panose="020B0609020204030204" pitchFamily="49" charset="0"/>
-              </a:rPr>
-              <a:t>] = </a:t>
-            </a:r>
-            <a:r>
-              <a:rPr lang="en-US" sz="1800" b="0" dirty="0" err="1">
-                <a:solidFill>
-                  <a:srgbClr val="000000"/>
-                </a:solidFill>
-                <a:effectLst/>
-                <a:latin typeface="Consolas" panose="020B0609020204030204" pitchFamily="49" charset="0"/>
-              </a:rPr>
-              <a:t>useState</a:t>
-            </a:r>
-            <a:r>
-              <a:rPr lang="en-US" sz="1800" b="0" dirty="0">
-                <a:solidFill>
-                  <a:srgbClr val="000000"/>
-                </a:solidFill>
-                <a:effectLst/>
-                <a:latin typeface="Consolas" panose="020B0609020204030204" pitchFamily="49" charset="0"/>
-              </a:rPr>
-              <a:t>(</a:t>
-            </a:r>
-            <a:r>
-              <a:rPr lang="en-US" sz="1800" b="0" dirty="0">
-                <a:solidFill>
-                  <a:srgbClr val="098658"/>
-                </a:solidFill>
-                <a:effectLst/>
-                <a:latin typeface="Consolas" panose="020B0609020204030204" pitchFamily="49" charset="0"/>
-              </a:rPr>
-              <a:t>0</a:t>
-            </a:r>
-            <a:r>
-              <a:rPr lang="en-US" sz="1800" b="0" dirty="0">
-                <a:solidFill>
-                  <a:srgbClr val="000000"/>
-                </a:solidFill>
-                <a:effectLst/>
-                <a:latin typeface="Consolas" panose="020B0609020204030204" pitchFamily="49" charset="0"/>
-              </a:rPr>
-              <a:t>);</a:t>
-            </a:r>
-            <a:br>
-              <a:rPr lang="en-US" sz="1800" b="0" dirty="0">
-                <a:solidFill>
-                  <a:srgbClr val="000000"/>
-                </a:solidFill>
-                <a:effectLst/>
-                <a:latin typeface="Consolas" panose="020B0609020204030204" pitchFamily="49" charset="0"/>
-              </a:rPr>
-            </a:br>
-            <a:endParaRPr lang="en-US" sz="1800" b="0" dirty="0">
-              <a:solidFill>
-                <a:srgbClr val="000000"/>
-              </a:solidFill>
-              <a:effectLst/>
-              <a:latin typeface="Consolas" panose="020B0609020204030204" pitchFamily="49" charset="0"/>
-            </a:endParaRPr>
-          </a:p>
-          <a:p>
-            <a:pPr>
-              <a:lnSpc>
-                <a:spcPct val="113095"/>
-              </a:lnSpc>
-              <a:buNone/>
-            </a:pPr>
-            <a:r>
-              <a:rPr lang="en-US" sz="1800" b="0" dirty="0">
-                <a:solidFill>
-                  <a:srgbClr val="000000"/>
-                </a:solidFill>
-                <a:effectLst/>
-                <a:latin typeface="Consolas" panose="020B0609020204030204" pitchFamily="49" charset="0"/>
-              </a:rPr>
-              <a:t>  </a:t>
-            </a:r>
-            <a:r>
-              <a:rPr lang="en-US" sz="1800" b="0" dirty="0" err="1">
-                <a:solidFill>
-                  <a:srgbClr val="000000"/>
-                </a:solidFill>
-                <a:effectLst/>
-                <a:latin typeface="Consolas" panose="020B0609020204030204" pitchFamily="49" charset="0"/>
-              </a:rPr>
-              <a:t>useEffect</a:t>
-            </a:r>
-            <a:r>
-              <a:rPr lang="en-US" sz="1800" b="0" dirty="0">
-                <a:solidFill>
-                  <a:srgbClr val="000000"/>
-                </a:solidFill>
-                <a:effectLst/>
-                <a:latin typeface="Consolas" panose="020B0609020204030204" pitchFamily="49" charset="0"/>
-              </a:rPr>
-              <a:t>(() </a:t>
-            </a:r>
-            <a:r>
-              <a:rPr lang="en-US" sz="1800" b="0" dirty="0">
-                <a:solidFill>
-                  <a:srgbClr val="0000FF"/>
-                </a:solidFill>
-                <a:effectLst/>
-                <a:latin typeface="Consolas" panose="020B0609020204030204" pitchFamily="49" charset="0"/>
-              </a:rPr>
-              <a:t>=&gt;</a:t>
-            </a:r>
-            <a:r>
-              <a:rPr lang="en-US" sz="1800" b="0" dirty="0">
-                <a:solidFill>
-                  <a:srgbClr val="000000"/>
-                </a:solidFill>
-                <a:effectLst/>
-                <a:latin typeface="Consolas" panose="020B0609020204030204" pitchFamily="49" charset="0"/>
-              </a:rPr>
-              <a:t> {</a:t>
-            </a:r>
-          </a:p>
-          <a:p>
-            <a:pPr>
-              <a:lnSpc>
-                <a:spcPct val="113095"/>
-              </a:lnSpc>
-              <a:buNone/>
-            </a:pPr>
-            <a:r>
-              <a:rPr lang="en-US" sz="1800" b="0" dirty="0">
-                <a:solidFill>
-                  <a:srgbClr val="000000"/>
-                </a:solidFill>
-                <a:effectLst/>
-                <a:latin typeface="Consolas" panose="020B0609020204030204" pitchFamily="49" charset="0"/>
-              </a:rPr>
-              <a:t>    </a:t>
-            </a:r>
-            <a:r>
-              <a:rPr lang="en-US" sz="1800" b="0" dirty="0">
-                <a:solidFill>
-                  <a:srgbClr val="0000FF"/>
-                </a:solidFill>
-                <a:effectLst/>
-                <a:highlight>
-                  <a:srgbClr val="FFFF00"/>
-                </a:highlight>
-                <a:latin typeface="Consolas" panose="020B0609020204030204" pitchFamily="49" charset="0"/>
-              </a:rPr>
-              <a:t>const</a:t>
-            </a:r>
-            <a:r>
-              <a:rPr lang="en-US" sz="1800" b="0" dirty="0">
-                <a:solidFill>
-                  <a:srgbClr val="000000"/>
-                </a:solidFill>
-                <a:effectLst/>
-                <a:highlight>
-                  <a:srgbClr val="FFFF00"/>
-                </a:highlight>
-                <a:latin typeface="Consolas" panose="020B0609020204030204" pitchFamily="49" charset="0"/>
-              </a:rPr>
-              <a:t> listener1 = () </a:t>
-            </a:r>
-            <a:r>
-              <a:rPr lang="en-US" sz="1800" b="0" dirty="0">
-                <a:solidFill>
-                  <a:srgbClr val="0000FF"/>
-                </a:solidFill>
-                <a:effectLst/>
-                <a:highlight>
-                  <a:srgbClr val="FFFF00"/>
-                </a:highlight>
-                <a:latin typeface="Consolas" panose="020B0609020204030204" pitchFamily="49" charset="0"/>
-              </a:rPr>
-              <a:t>=&gt;</a:t>
-            </a:r>
-            <a:r>
-              <a:rPr lang="en-US" sz="1800" b="0" dirty="0">
-                <a:solidFill>
-                  <a:srgbClr val="000000"/>
-                </a:solidFill>
-                <a:effectLst/>
-                <a:highlight>
-                  <a:srgbClr val="FFFF00"/>
-                </a:highlight>
-                <a:latin typeface="Consolas" panose="020B0609020204030204" pitchFamily="49" charset="0"/>
-              </a:rPr>
-              <a:t> </a:t>
-            </a:r>
-            <a:r>
-              <a:rPr lang="en-US" sz="1800" b="0" dirty="0" err="1">
-                <a:solidFill>
-                  <a:srgbClr val="000000"/>
-                </a:solidFill>
-                <a:effectLst/>
-                <a:highlight>
-                  <a:srgbClr val="FFFF00"/>
-                </a:highlight>
-                <a:latin typeface="Consolas" panose="020B0609020204030204" pitchFamily="49" charset="0"/>
-              </a:rPr>
-              <a:t>setLocalTime</a:t>
-            </a:r>
-            <a:r>
-              <a:rPr lang="en-US" sz="1800" b="0" dirty="0">
-                <a:solidFill>
-                  <a:srgbClr val="000000"/>
-                </a:solidFill>
-                <a:effectLst/>
-                <a:highlight>
-                  <a:srgbClr val="FFFF00"/>
-                </a:highlight>
-                <a:latin typeface="Consolas" panose="020B0609020204030204" pitchFamily="49" charset="0"/>
-              </a:rPr>
-              <a:t>(time =&gt; time +1)</a:t>
-            </a:r>
-          </a:p>
-          <a:p>
-            <a:pPr>
-              <a:lnSpc>
-                <a:spcPct val="113095"/>
-              </a:lnSpc>
-              <a:buNone/>
-            </a:pPr>
-            <a:r>
-              <a:rPr lang="en-US" sz="1800" b="0" dirty="0">
-                <a:solidFill>
-                  <a:srgbClr val="000000"/>
-                </a:solidFill>
-                <a:effectLst/>
-                <a:highlight>
-                  <a:srgbClr val="FFFF00"/>
-                </a:highlight>
-                <a:latin typeface="Consolas" panose="020B0609020204030204" pitchFamily="49" charset="0"/>
-              </a:rPr>
-              <a:t>    </a:t>
-            </a:r>
-            <a:r>
-              <a:rPr lang="en-US" sz="1800" b="0" dirty="0" err="1">
-                <a:solidFill>
-                  <a:srgbClr val="000000"/>
-                </a:solidFill>
-                <a:effectLst/>
-                <a:highlight>
-                  <a:srgbClr val="FFFF00"/>
-                </a:highlight>
-                <a:latin typeface="Consolas" panose="020B0609020204030204" pitchFamily="49" charset="0"/>
-              </a:rPr>
-              <a:t>clock.addListener</a:t>
-            </a:r>
-            <a:r>
-              <a:rPr lang="en-US" sz="1800" b="0" dirty="0">
-                <a:solidFill>
-                  <a:srgbClr val="000000"/>
-                </a:solidFill>
-                <a:effectLst/>
-                <a:highlight>
-                  <a:srgbClr val="FFFF00"/>
-                </a:highlight>
-                <a:latin typeface="Consolas" panose="020B0609020204030204" pitchFamily="49" charset="0"/>
-              </a:rPr>
-              <a:t>(listener1);</a:t>
-            </a:r>
-          </a:p>
-          <a:p>
-            <a:pPr>
-              <a:lnSpc>
-                <a:spcPct val="113095"/>
-              </a:lnSpc>
-              <a:buNone/>
-            </a:pPr>
-            <a:endParaRPr lang="en-US" dirty="0">
-              <a:highlight>
-                <a:srgbClr val="FFFF00"/>
-              </a:highlight>
-              <a:latin typeface="Consolas" panose="020B0609020204030204" pitchFamily="49" charset="0"/>
-            </a:endParaRPr>
-          </a:p>
-          <a:p>
-            <a:pPr>
-              <a:lnSpc>
-                <a:spcPct val="113095"/>
-              </a:lnSpc>
-              <a:buNone/>
-            </a:pPr>
-            <a:endParaRPr lang="en-US" sz="1800" b="0" dirty="0">
-              <a:solidFill>
-                <a:srgbClr val="000000"/>
-              </a:solidFill>
-              <a:effectLst/>
-              <a:highlight>
-                <a:srgbClr val="FFFF00"/>
-              </a:highlight>
-              <a:latin typeface="Consolas" panose="020B0609020204030204" pitchFamily="49" charset="0"/>
-            </a:endParaRPr>
-          </a:p>
-          <a:p>
-            <a:pPr>
-              <a:lnSpc>
-                <a:spcPct val="113095"/>
-              </a:lnSpc>
-              <a:buNone/>
-            </a:pPr>
-            <a:r>
-              <a:rPr lang="en-US" sz="1800" b="0" dirty="0">
-                <a:solidFill>
-                  <a:srgbClr val="000000"/>
-                </a:solidFill>
-                <a:effectLst/>
-                <a:latin typeface="Consolas" panose="020B0609020204030204" pitchFamily="49" charset="0"/>
-              </a:rPr>
-              <a:t>    </a:t>
-            </a:r>
-            <a:r>
-              <a:rPr lang="en-US" sz="1800" b="0" dirty="0">
-                <a:solidFill>
-                  <a:srgbClr val="0000FF"/>
-                </a:solidFill>
-                <a:effectLst/>
-                <a:latin typeface="Consolas" panose="020B0609020204030204" pitchFamily="49" charset="0"/>
-              </a:rPr>
-              <a:t>return</a:t>
-            </a:r>
-            <a:r>
-              <a:rPr lang="en-US" sz="1800" b="0" dirty="0">
-                <a:solidFill>
-                  <a:srgbClr val="000000"/>
-                </a:solidFill>
-                <a:effectLst/>
-                <a:latin typeface="Consolas" panose="020B0609020204030204" pitchFamily="49" charset="0"/>
-              </a:rPr>
-              <a:t> </a:t>
-            </a:r>
-            <a:r>
-              <a:rPr lang="en-US" sz="1800" b="0" dirty="0">
-                <a:solidFill>
-                  <a:srgbClr val="000000"/>
-                </a:solidFill>
-                <a:effectLst/>
-                <a:highlight>
-                  <a:srgbClr val="00FFFF"/>
-                </a:highlight>
-                <a:latin typeface="Consolas" panose="020B0609020204030204" pitchFamily="49" charset="0"/>
-              </a:rPr>
-              <a:t>() </a:t>
-            </a:r>
-            <a:r>
-              <a:rPr lang="en-US" sz="1800" b="0" dirty="0">
-                <a:solidFill>
-                  <a:srgbClr val="0000FF"/>
-                </a:solidFill>
-                <a:effectLst/>
-                <a:highlight>
-                  <a:srgbClr val="00FFFF"/>
-                </a:highlight>
-                <a:latin typeface="Consolas" panose="020B0609020204030204" pitchFamily="49" charset="0"/>
-              </a:rPr>
-              <a:t>=&gt;</a:t>
-            </a:r>
-            <a:r>
-              <a:rPr lang="en-US" sz="1800" b="0" dirty="0">
-                <a:solidFill>
-                  <a:srgbClr val="000000"/>
-                </a:solidFill>
-                <a:effectLst/>
-                <a:highlight>
-                  <a:srgbClr val="00FFFF"/>
-                </a:highlight>
-                <a:latin typeface="Consolas" panose="020B0609020204030204" pitchFamily="49" charset="0"/>
-              </a:rPr>
-              <a:t> {</a:t>
-            </a:r>
-            <a:r>
-              <a:rPr lang="en-US" sz="1800" b="0" dirty="0" err="1">
-                <a:solidFill>
-                  <a:srgbClr val="000000"/>
-                </a:solidFill>
-                <a:effectLst/>
-                <a:highlight>
-                  <a:srgbClr val="00FFFF"/>
-                </a:highlight>
-                <a:latin typeface="Consolas" panose="020B0609020204030204" pitchFamily="49" charset="0"/>
-              </a:rPr>
-              <a:t>clock.removeListener</a:t>
-            </a:r>
-            <a:r>
-              <a:rPr lang="en-US" sz="1800" b="0" dirty="0">
-                <a:solidFill>
-                  <a:srgbClr val="000000"/>
-                </a:solidFill>
-                <a:effectLst/>
-                <a:highlight>
-                  <a:srgbClr val="00FFFF"/>
-                </a:highlight>
-                <a:latin typeface="Consolas" panose="020B0609020204030204" pitchFamily="49" charset="0"/>
-              </a:rPr>
-              <a:t>(listener1);</a:t>
-            </a:r>
-          </a:p>
-          <a:p>
-            <a:pPr>
-              <a:lnSpc>
-                <a:spcPct val="113095"/>
-              </a:lnSpc>
-              <a:buNone/>
-            </a:pPr>
-            <a:r>
-              <a:rPr lang="en-US" sz="1800" b="0" dirty="0">
-                <a:solidFill>
-                  <a:srgbClr val="000000"/>
-                </a:solidFill>
-                <a:effectLst/>
-                <a:latin typeface="Consolas" panose="020B0609020204030204" pitchFamily="49" charset="0"/>
-              </a:rPr>
-              <a:t>    };</a:t>
-            </a:r>
-          </a:p>
-          <a:p>
-            <a:pPr>
-              <a:lnSpc>
-                <a:spcPct val="113095"/>
-              </a:lnSpc>
-              <a:buNone/>
-            </a:pPr>
-            <a:r>
-              <a:rPr lang="en-US" sz="1800" b="0" dirty="0">
-                <a:solidFill>
-                  <a:srgbClr val="000000"/>
-                </a:solidFill>
-                <a:effectLst/>
-                <a:latin typeface="Consolas" panose="020B0609020204030204" pitchFamily="49" charset="0"/>
-              </a:rPr>
-              <a:t>  }, </a:t>
-            </a:r>
-            <a:r>
-              <a:rPr lang="en-US" sz="1800" b="0" dirty="0">
-                <a:solidFill>
-                  <a:srgbClr val="000000"/>
-                </a:solidFill>
-                <a:effectLst/>
-                <a:highlight>
-                  <a:srgbClr val="C0C0C0"/>
-                </a:highlight>
-                <a:latin typeface="Consolas" panose="020B0609020204030204" pitchFamily="49" charset="0"/>
-              </a:rPr>
-              <a:t>[]</a:t>
-            </a:r>
-            <a:r>
-              <a:rPr lang="en-US" sz="1800" b="0" dirty="0">
-                <a:solidFill>
-                  <a:srgbClr val="000000"/>
-                </a:solidFill>
-                <a:effectLst/>
-                <a:latin typeface="Consolas" panose="020B0609020204030204" pitchFamily="49" charset="0"/>
-              </a:rPr>
-              <a:t>);</a:t>
-            </a:r>
-          </a:p>
-        </p:txBody>
-      </p:sp>
-      <p:sp>
-        <p:nvSpPr>
-          <p:cNvPr id="2" name="Title 1">
-            <a:extLst>
-              <a:ext uri="{FF2B5EF4-FFF2-40B4-BE49-F238E27FC236}">
-                <a16:creationId xmlns:a16="http://schemas.microsoft.com/office/drawing/2014/main" id="{784A4F4F-C4AE-D1C0-3F12-9DB3018AC09E}"/>
-              </a:ext>
-            </a:extLst>
-          </p:cNvPr>
-          <p:cNvSpPr>
-            <a:spLocks noGrp="1"/>
-          </p:cNvSpPr>
-          <p:nvPr>
-            <p:ph type="title"/>
-          </p:nvPr>
-        </p:nvSpPr>
-        <p:spPr/>
-        <p:txBody>
-          <a:bodyPr/>
-          <a:lstStyle/>
-          <a:p>
-            <a:r>
-              <a:rPr lang="en-US" dirty="0"/>
-              <a:t>useEffect is a mechanism for synchronizing a component with an external system</a:t>
-            </a:r>
-          </a:p>
-        </p:txBody>
-      </p:sp>
-      <p:sp>
-        <p:nvSpPr>
-          <p:cNvPr id="6" name="TextBox 5">
-            <a:extLst>
-              <a:ext uri="{FF2B5EF4-FFF2-40B4-BE49-F238E27FC236}">
-                <a16:creationId xmlns:a16="http://schemas.microsoft.com/office/drawing/2014/main" id="{DA2921BC-D96C-CE4E-A24A-793135B0040D}"/>
-              </a:ext>
-            </a:extLst>
-          </p:cNvPr>
-          <p:cNvSpPr txBox="1"/>
-          <p:nvPr/>
-        </p:nvSpPr>
-        <p:spPr>
-          <a:xfrm>
-            <a:off x="6946711" y="6149326"/>
-            <a:ext cx="4234491" cy="369330"/>
-          </a:xfrm>
-          <a:prstGeom prst="rect">
-            <a:avLst/>
-          </a:prstGeom>
-          <a:noFill/>
-          <a:ln w="12700" cap="flat">
-            <a:noFill/>
-            <a:miter lim="400000"/>
-          </a:ln>
-          <a:effectLst/>
-          <a:sp3d/>
-        </p:spPr>
-        <p:style>
-          <a:lnRef idx="0">
-            <a:scrgbClr r="0" g="0" b="0"/>
-          </a:lnRef>
-          <a:fillRef idx="0">
-            <a:scrgbClr r="0" g="0" b="0"/>
-          </a:fillRef>
-          <a:effectRef idx="0">
-            <a:scrgbClr r="0" g="0" b="0"/>
-          </a:effectRef>
-          <a:fontRef idx="none"/>
-        </p:style>
-        <p:txBody>
-          <a:bodyPr rot="0" spcFirstLastPara="1" vertOverflow="overflow" horzOverflow="overflow" vert="horz" wrap="none" lIns="45719" tIns="45719" rIns="45719" bIns="45719" numCol="1" spcCol="38100" rtlCol="0" anchor="t">
-            <a:spAutoFit/>
-          </a:bodyPr>
-          <a:lstStyle/>
-          <a:p>
-            <a:pPr marL="0" marR="0" indent="0" algn="l" defTabSz="914400" rtl="0" fontAlgn="auto" latinLnBrk="0" hangingPunct="0">
-              <a:lnSpc>
-                <a:spcPct val="100000"/>
-              </a:lnSpc>
-              <a:spcBef>
-                <a:spcPts val="0"/>
-              </a:spcBef>
-              <a:spcAft>
-                <a:spcPts val="0"/>
-              </a:spcAft>
-              <a:buClrTx/>
-              <a:buSzTx/>
-              <a:buFontTx/>
-              <a:buNone/>
-              <a:tabLst/>
-            </a:pPr>
-            <a:r>
-              <a:rPr kumimoji="0" lang="en-US" sz="1800" b="0" i="0" u="none" strike="noStrike" cap="none" spc="0" normalizeH="0" baseline="0" dirty="0">
-                <a:ln>
-                  <a:noFill/>
-                </a:ln>
-                <a:solidFill>
-                  <a:srgbClr val="000000"/>
-                </a:solidFill>
-                <a:effectLst/>
-                <a:uFillTx/>
-                <a:latin typeface="+mn-lt"/>
-                <a:ea typeface="+mn-ea"/>
-                <a:cs typeface="+mn-cs"/>
-                <a:sym typeface="Calibri"/>
-                <a:hlinkClick r:id="rId3"/>
-              </a:rPr>
-              <a:t>https://react.dev/reference/react/useEffect</a:t>
-            </a:r>
-            <a:endParaRPr kumimoji="0" lang="en-US" sz="1800" b="0" i="0" u="none" strike="noStrike" cap="none" spc="0" normalizeH="0" baseline="0" dirty="0">
-              <a:ln>
-                <a:noFill/>
-              </a:ln>
-              <a:solidFill>
-                <a:srgbClr val="000000"/>
-              </a:solidFill>
-              <a:effectLst/>
-              <a:uFillTx/>
-              <a:latin typeface="+mn-lt"/>
-              <a:ea typeface="+mn-ea"/>
-              <a:cs typeface="+mn-cs"/>
-              <a:sym typeface="Calibri"/>
-            </a:endParaRPr>
-          </a:p>
-        </p:txBody>
-      </p:sp>
-      <p:sp>
-        <p:nvSpPr>
-          <p:cNvPr id="4" name="Slide Number Placeholder 3">
-            <a:extLst>
-              <a:ext uri="{FF2B5EF4-FFF2-40B4-BE49-F238E27FC236}">
-                <a16:creationId xmlns:a16="http://schemas.microsoft.com/office/drawing/2014/main" id="{C106D35E-F8BC-CC43-CE14-43CAA45C74E9}"/>
-              </a:ext>
-            </a:extLst>
-          </p:cNvPr>
-          <p:cNvSpPr>
-            <a:spLocks noGrp="1"/>
-          </p:cNvSpPr>
-          <p:nvPr>
-            <p:ph type="sldNum" sz="quarter" idx="2"/>
-          </p:nvPr>
-        </p:nvSpPr>
-        <p:spPr/>
-        <p:txBody>
-          <a:bodyPr/>
-          <a:lstStyle/>
-          <a:p>
-            <a:fld id="{86CB4B4D-7CA3-9044-876B-883B54F8677D}" type="slidenum">
-              <a:rPr lang="en-US" smtClean="0"/>
-              <a:t>4</a:t>
-            </a:fld>
-            <a:endParaRPr lang="en-US"/>
-          </a:p>
-        </p:txBody>
-      </p:sp>
-      <p:sp>
-        <p:nvSpPr>
-          <p:cNvPr id="8" name="Arrow: Left 7">
-            <a:extLst>
-              <a:ext uri="{FF2B5EF4-FFF2-40B4-BE49-F238E27FC236}">
-                <a16:creationId xmlns:a16="http://schemas.microsoft.com/office/drawing/2014/main" id="{26C3FA75-64CA-C959-0B28-81AD3FB51474}"/>
-              </a:ext>
-            </a:extLst>
-          </p:cNvPr>
-          <p:cNvSpPr/>
-          <p:nvPr/>
-        </p:nvSpPr>
-        <p:spPr>
-          <a:xfrm>
-            <a:off x="8576911" y="2868429"/>
-            <a:ext cx="2117558" cy="1283906"/>
-          </a:xfrm>
-          <a:prstGeom prst="leftArrow">
-            <a:avLst/>
-          </a:prstGeom>
-          <a:solidFill>
-            <a:srgbClr val="FFFF00"/>
-          </a:solidFill>
-          <a:ln w="12700" cap="flat">
-            <a:solidFill>
-              <a:schemeClr val="accent1"/>
-            </a:solidFill>
-            <a:prstDash val="solid"/>
-            <a:miter lim="800000"/>
-          </a:ln>
-          <a:effectLst/>
-          <a:sp3d/>
-        </p:spPr>
-        <p:style>
-          <a:lnRef idx="0">
-            <a:scrgbClr r="0" g="0" b="0"/>
-          </a:lnRef>
-          <a:fillRef idx="0">
-            <a:scrgbClr r="0" g="0" b="0"/>
-          </a:fillRef>
-          <a:effectRef idx="0">
-            <a:scrgbClr r="0" g="0" b="0"/>
-          </a:effectRef>
-          <a:fontRef idx="none"/>
-        </p:style>
-        <p:txBody>
-          <a:bodyPr rot="0" spcFirstLastPara="1" vertOverflow="overflow" horzOverflow="overflow" vert="horz" wrap="square" lIns="45719" tIns="45719" rIns="45719" bIns="45719" numCol="1" spcCol="38100" rtlCol="0" anchor="ctr">
-            <a:spAutoFit/>
-          </a:bodyPr>
-          <a:lstStyle/>
-          <a:p>
-            <a:pPr marL="0" marR="0" indent="0" algn="l" defTabSz="914400" rtl="0" fontAlgn="auto" latinLnBrk="0" hangingPunct="0">
-              <a:lnSpc>
-                <a:spcPct val="100000"/>
-              </a:lnSpc>
-              <a:spcBef>
-                <a:spcPts val="0"/>
-              </a:spcBef>
-              <a:spcAft>
-                <a:spcPts val="0"/>
-              </a:spcAft>
-              <a:buClrTx/>
-              <a:buSzTx/>
-              <a:buFontTx/>
-              <a:buNone/>
-              <a:tabLst/>
-            </a:pPr>
-            <a:r>
-              <a:rPr lang="en-US" dirty="0"/>
-              <a:t>Action to take on first render</a:t>
-            </a:r>
-            <a:endParaRPr kumimoji="0" lang="en-US" sz="1800" b="0" i="0" u="none" strike="noStrike" cap="none" spc="0" normalizeH="0" baseline="0" dirty="0">
-              <a:ln>
-                <a:noFill/>
-              </a:ln>
-              <a:solidFill>
-                <a:srgbClr val="000000"/>
-              </a:solidFill>
-              <a:effectLst/>
-              <a:uFillTx/>
-              <a:latin typeface="+mn-lt"/>
-              <a:ea typeface="+mn-ea"/>
-              <a:cs typeface="+mn-cs"/>
-              <a:sym typeface="Calibri"/>
-            </a:endParaRPr>
-          </a:p>
-        </p:txBody>
-      </p:sp>
-      <p:sp>
-        <p:nvSpPr>
-          <p:cNvPr id="9" name="Arrow: Left 8">
-            <a:extLst>
-              <a:ext uri="{FF2B5EF4-FFF2-40B4-BE49-F238E27FC236}">
-                <a16:creationId xmlns:a16="http://schemas.microsoft.com/office/drawing/2014/main" id="{311E723F-5709-3B3B-ABAE-5401E8EF42BA}"/>
-              </a:ext>
-            </a:extLst>
-          </p:cNvPr>
-          <p:cNvSpPr/>
-          <p:nvPr/>
-        </p:nvSpPr>
-        <p:spPr>
-          <a:xfrm>
-            <a:off x="7547810" y="4052822"/>
-            <a:ext cx="3547366" cy="1283906"/>
-          </a:xfrm>
-          <a:prstGeom prst="leftArrow">
-            <a:avLst/>
-          </a:prstGeom>
-          <a:solidFill>
-            <a:schemeClr val="accent5">
-              <a:lumMod val="60000"/>
-              <a:lumOff val="40000"/>
-            </a:schemeClr>
-          </a:solidFill>
-          <a:ln w="12700" cap="flat">
-            <a:solidFill>
-              <a:schemeClr val="accent1"/>
-            </a:solidFill>
-            <a:prstDash val="solid"/>
-            <a:miter lim="800000"/>
-          </a:ln>
-          <a:effectLst/>
-          <a:sp3d/>
-        </p:spPr>
-        <p:style>
-          <a:lnRef idx="0">
-            <a:scrgbClr r="0" g="0" b="0"/>
-          </a:lnRef>
-          <a:fillRef idx="0">
-            <a:scrgbClr r="0" g="0" b="0"/>
-          </a:fillRef>
-          <a:effectRef idx="0">
-            <a:scrgbClr r="0" g="0" b="0"/>
-          </a:effectRef>
-          <a:fontRef idx="none"/>
-        </p:style>
-        <p:txBody>
-          <a:bodyPr rot="0" spcFirstLastPara="1" vertOverflow="overflow" horzOverflow="overflow" vert="horz" wrap="square" lIns="45719" tIns="45719" rIns="45719" bIns="45719" numCol="1" spcCol="38100" rtlCol="0" anchor="ctr">
-            <a:spAutoFit/>
-          </a:bodyPr>
-          <a:lstStyle/>
-          <a:p>
-            <a:pPr marL="0" marR="0" indent="0" algn="l" defTabSz="914400" rtl="0" fontAlgn="auto" latinLnBrk="0" hangingPunct="0">
-              <a:lnSpc>
-                <a:spcPct val="100000"/>
-              </a:lnSpc>
-              <a:spcBef>
-                <a:spcPts val="0"/>
-              </a:spcBef>
-              <a:spcAft>
-                <a:spcPts val="0"/>
-              </a:spcAft>
-              <a:buClrTx/>
-              <a:buSzTx/>
-              <a:buFontTx/>
-              <a:buNone/>
-              <a:tabLst/>
-            </a:pPr>
-            <a:r>
-              <a:rPr lang="en-US" dirty="0">
-                <a:highlight>
-                  <a:srgbClr val="00FFFF"/>
-                </a:highlight>
-              </a:rPr>
-              <a:t>Action to take when component dismounts</a:t>
-            </a:r>
-            <a:endParaRPr kumimoji="0" lang="en-US" sz="1800" b="0" i="0" u="none" strike="noStrike" cap="none" spc="0" normalizeH="0" baseline="0" dirty="0">
-              <a:ln>
-                <a:noFill/>
-              </a:ln>
-              <a:solidFill>
-                <a:srgbClr val="000000"/>
-              </a:solidFill>
-              <a:effectLst/>
-              <a:highlight>
-                <a:srgbClr val="00FFFF"/>
-              </a:highlight>
-              <a:uFillTx/>
-              <a:sym typeface="Calibri"/>
-            </a:endParaRPr>
-          </a:p>
-        </p:txBody>
-      </p:sp>
-      <p:grpSp>
-        <p:nvGrpSpPr>
-          <p:cNvPr id="21" name="Group 20">
-            <a:extLst>
-              <a:ext uri="{FF2B5EF4-FFF2-40B4-BE49-F238E27FC236}">
-                <a16:creationId xmlns:a16="http://schemas.microsoft.com/office/drawing/2014/main" id="{6DF6F86B-92DB-2A6F-C86C-D9D8E5D4BF9A}"/>
-              </a:ext>
-            </a:extLst>
-          </p:cNvPr>
-          <p:cNvGrpSpPr/>
-          <p:nvPr/>
-        </p:nvGrpSpPr>
-        <p:grpSpPr>
-          <a:xfrm>
-            <a:off x="1096824" y="5283042"/>
-            <a:ext cx="2797629" cy="1016157"/>
-            <a:chOff x="1687285" y="5076030"/>
-            <a:chExt cx="2797629" cy="1380023"/>
-          </a:xfrm>
-        </p:grpSpPr>
-        <p:cxnSp>
-          <p:nvCxnSpPr>
-            <p:cNvPr id="17" name="Straight Arrow Connector 16">
-              <a:extLst>
-                <a:ext uri="{FF2B5EF4-FFF2-40B4-BE49-F238E27FC236}">
-                  <a16:creationId xmlns:a16="http://schemas.microsoft.com/office/drawing/2014/main" id="{FC0317B6-86FE-BD0A-7F68-B2D5D5675C48}"/>
-                </a:ext>
-              </a:extLst>
-            </p:cNvPr>
-            <p:cNvCxnSpPr>
-              <a:cxnSpLocks/>
-            </p:cNvCxnSpPr>
-            <p:nvPr/>
-          </p:nvCxnSpPr>
-          <p:spPr>
-            <a:xfrm flipH="1" flipV="1">
-              <a:off x="2445129" y="5076030"/>
-              <a:ext cx="294223" cy="765521"/>
-            </a:xfrm>
-            <a:prstGeom prst="straightConnector1">
-              <a:avLst/>
-            </a:prstGeom>
-            <a:noFill/>
-            <a:ln w="63500" cap="flat">
-              <a:solidFill>
-                <a:schemeClr val="bg1">
-                  <a:lumMod val="65000"/>
-                </a:schemeClr>
-              </a:solidFill>
-              <a:prstDash val="solid"/>
-              <a:miter lim="800000"/>
-              <a:tailEnd type="triangle"/>
-            </a:ln>
-            <a:effectLst/>
-            <a:sp3d/>
-          </p:spPr>
-          <p:style>
-            <a:lnRef idx="0">
-              <a:scrgbClr r="0" g="0" b="0"/>
-            </a:lnRef>
-            <a:fillRef idx="0">
-              <a:scrgbClr r="0" g="0" b="0"/>
-            </a:fillRef>
-            <a:effectRef idx="0">
-              <a:scrgbClr r="0" g="0" b="0"/>
-            </a:effectRef>
-            <a:fontRef idx="none"/>
-          </p:style>
-        </p:cxnSp>
-        <p:sp>
-          <p:nvSpPr>
-            <p:cNvPr id="15" name="Rectangle 14">
-              <a:extLst>
-                <a:ext uri="{FF2B5EF4-FFF2-40B4-BE49-F238E27FC236}">
-                  <a16:creationId xmlns:a16="http://schemas.microsoft.com/office/drawing/2014/main" id="{B0B99846-94B1-FB3E-25E9-00C8357F84CE}"/>
-                </a:ext>
-              </a:extLst>
-            </p:cNvPr>
-            <p:cNvSpPr/>
-            <p:nvPr/>
-          </p:nvSpPr>
-          <p:spPr>
-            <a:xfrm>
-              <a:off x="1687285" y="5809724"/>
-              <a:ext cx="2797629" cy="646329"/>
-            </a:xfrm>
-            <a:prstGeom prst="rect">
-              <a:avLst/>
-            </a:prstGeom>
-            <a:solidFill>
-              <a:schemeClr val="accent3">
-                <a:lumMod val="40000"/>
-                <a:lumOff val="60000"/>
-              </a:schemeClr>
-            </a:solidFill>
-            <a:ln w="12700" cap="flat">
-              <a:solidFill>
-                <a:schemeClr val="accent1"/>
-              </a:solidFill>
-              <a:prstDash val="solid"/>
-              <a:miter lim="800000"/>
-            </a:ln>
-            <a:effectLst/>
-            <a:sp3d/>
-          </p:spPr>
-          <p:style>
-            <a:lnRef idx="0">
-              <a:scrgbClr r="0" g="0" b="0"/>
-            </a:lnRef>
-            <a:fillRef idx="0">
-              <a:scrgbClr r="0" g="0" b="0"/>
-            </a:fillRef>
-            <a:effectRef idx="0">
-              <a:scrgbClr r="0" g="0" b="0"/>
-            </a:effectRef>
-            <a:fontRef idx="none"/>
-          </p:style>
-          <p:txBody>
-            <a:bodyPr rot="0" spcFirstLastPara="1" vertOverflow="overflow" horzOverflow="overflow" vert="horz" wrap="square" lIns="45719" tIns="45719" rIns="45719" bIns="45719" numCol="1" spcCol="38100" rtlCol="0" anchor="ctr">
-              <a:spAutoFit/>
-            </a:bodyPr>
-            <a:lstStyle/>
-            <a:p>
-              <a:r>
-                <a:rPr lang="en-US" dirty="0"/>
-                <a:t>Empty array says: do this on first render only</a:t>
-              </a:r>
-            </a:p>
-          </p:txBody>
-        </p:sp>
-      </p:grpSp>
-      <p:sp>
-        <p:nvSpPr>
-          <p:cNvPr id="5" name="Rectangle: Rounded Corners 4">
-            <a:extLst>
-              <a:ext uri="{FF2B5EF4-FFF2-40B4-BE49-F238E27FC236}">
-                <a16:creationId xmlns:a16="http://schemas.microsoft.com/office/drawing/2014/main" id="{B039A5B5-1854-5879-DD3A-BAAE5F2B4E69}"/>
-              </a:ext>
-            </a:extLst>
-          </p:cNvPr>
-          <p:cNvSpPr/>
-          <p:nvPr/>
-        </p:nvSpPr>
-        <p:spPr>
-          <a:xfrm>
-            <a:off x="5529973" y="5474355"/>
-            <a:ext cx="6276204" cy="601981"/>
-          </a:xfrm>
-          <a:prstGeom prst="roundRect">
-            <a:avLst/>
-          </a:prstGeom>
-          <a:solidFill>
-            <a:schemeClr val="accent6">
-              <a:lumMod val="20000"/>
-              <a:lumOff val="80000"/>
-            </a:schemeClr>
-          </a:solidFill>
-          <a:ln>
-            <a:solidFill>
-              <a:srgbClr val="0070C0"/>
-            </a:solidFill>
-          </a:ln>
-        </p:spPr>
-        <p:style>
-          <a:lnRef idx="2">
-            <a:schemeClr val="accent1">
-              <a:shade val="50000"/>
-            </a:schemeClr>
-          </a:lnRef>
-          <a:fillRef idx="1">
-            <a:schemeClr val="accent1"/>
-          </a:fillRef>
-          <a:effectRef idx="0">
-            <a:schemeClr val="accent1"/>
-          </a:effectRef>
-          <a:fontRef idx="minor">
-            <a:schemeClr val="lt1"/>
-          </a:fontRef>
-        </p:style>
-        <p:txBody>
-          <a:bodyPr rtlCol="0" anchor="ctr"/>
-          <a:lstStyle/>
-          <a:p>
-            <a:pPr algn="ctr"/>
-            <a:r>
-              <a:rPr lang="en-US" sz="2400" dirty="0" err="1">
-                <a:solidFill>
-                  <a:schemeClr val="tx1"/>
-                </a:solidFill>
-              </a:rPr>
-              <a:t>src</a:t>
-            </a:r>
-            <a:r>
-              <a:rPr lang="en-US" sz="2400" dirty="0">
-                <a:solidFill>
-                  <a:schemeClr val="tx1"/>
-                </a:solidFill>
-              </a:rPr>
-              <a:t>/Shared/Components/</a:t>
-            </a:r>
-            <a:r>
-              <a:rPr lang="en-US" sz="2400" dirty="0" err="1">
-                <a:solidFill>
-                  <a:schemeClr val="tx1"/>
-                </a:solidFill>
-              </a:rPr>
-              <a:t>SimpleClockDisplay.tsx</a:t>
-            </a:r>
-            <a:endParaRPr lang="en-US" sz="2400" dirty="0">
-              <a:solidFill>
-                <a:schemeClr val="tx1"/>
-              </a:solidFill>
-            </a:endParaRPr>
-          </a:p>
-        </p:txBody>
-      </p:sp>
-    </p:spTree>
-    <p:extLst>
-      <p:ext uri="{BB962C8B-B14F-4D97-AF65-F5344CB8AC3E}">
-        <p14:creationId xmlns:p14="http://schemas.microsoft.com/office/powerpoint/2010/main" val="3414127211"/>
-      </p:ext>
-    </p:extLst>
-  </p:cSld>
-  <p:clrMapOvr>
-    <a:masterClrMapping/>
-  </p:clrMapOvr>
-  <p:transition spd="med"/>
-  <p:timing>
-    <p:tnLst>
-      <p:par>
-        <p:cTn id="1" dur="indefinite" restart="never" nodeType="tmRoot">
-          <p:childTnLst>
-            <p:seq concurrent="1" nextAc="seek">
-              <p:cTn id="2" dur="indefinite" nodeType="mainSeq">
-                <p:childTnLst>
-                  <p:par>
-                    <p:cTn id="3" fill="hold">
-                      <p:stCondLst>
-                        <p:cond delay="indefinite"/>
-                      </p:stCondLst>
-                      <p:childTnLst>
-                        <p:par>
-                          <p:cTn id="4" fill="hold">
-                            <p:stCondLst>
-                              <p:cond delay="0"/>
-                            </p:stCondLst>
-                            <p:childTnLst>
-                              <p:par>
-                                <p:cTn id="5" presetID="1" presetClass="entr" presetSubtype="0" fill="hold" nodeType="clickEffect">
-                                  <p:stCondLst>
-                                    <p:cond delay="0"/>
-                                  </p:stCondLst>
-                                  <p:childTnLst>
-                                    <p:set>
-                                      <p:cBhvr>
-                                        <p:cTn id="6" dur="1" fill="hold">
-                                          <p:stCondLst>
-                                            <p:cond delay="0"/>
-                                          </p:stCondLst>
-                                        </p:cTn>
-                                        <p:tgtEl>
-                                          <p:spTgt spid="21"/>
-                                        </p:tgtEl>
-                                        <p:attrNameLst>
-                                          <p:attrName>style.visibility</p:attrName>
-                                        </p:attrNameLst>
-                                      </p:cBhvr>
-                                      <p:to>
-                                        <p:strVal val="visible"/>
-                                      </p:to>
-                                    </p:set>
-                                  </p:childTnLst>
-                                </p:cTn>
-                              </p:par>
-                            </p:childTnLst>
-                          </p:cTn>
-                        </p:par>
-                      </p:childTnLst>
-                    </p:cTn>
-                  </p:par>
-                  <p:par>
-                    <p:cTn id="7" fill="hold">
-                      <p:stCondLst>
-                        <p:cond delay="indefinite"/>
-                      </p:stCondLst>
-                      <p:childTnLst>
-                        <p:par>
-                          <p:cTn id="8" fill="hold">
-                            <p:stCondLst>
-                              <p:cond delay="0"/>
-                            </p:stCondLst>
-                            <p:childTnLst>
-                              <p:par>
-                                <p:cTn id="9" presetID="1" presetClass="entr" presetSubtype="0" fill="hold" grpId="0" nodeType="clickEffect">
-                                  <p:stCondLst>
-                                    <p:cond delay="0"/>
-                                  </p:stCondLst>
-                                  <p:childTnLst>
-                                    <p:set>
-                                      <p:cBhvr>
-                                        <p:cTn id="10" dur="1" fill="hold">
-                                          <p:stCondLst>
-                                            <p:cond delay="0"/>
-                                          </p:stCondLst>
-                                        </p:cTn>
-                                        <p:tgtEl>
-                                          <p:spTgt spid="8"/>
-                                        </p:tgtEl>
-                                        <p:attrNameLst>
-                                          <p:attrName>style.visibility</p:attrName>
-                                        </p:attrNameLst>
-                                      </p:cBhvr>
-                                      <p:to>
-                                        <p:strVal val="visible"/>
-                                      </p:to>
-                                    </p:set>
-                                  </p:childTnLst>
-                                </p:cTn>
-                              </p:par>
-                            </p:childTnLst>
-                          </p:cTn>
-                        </p:par>
-                      </p:childTnLst>
-                    </p:cTn>
-                  </p:par>
-                  <p:par>
-                    <p:cTn id="11" fill="hold">
-                      <p:stCondLst>
-                        <p:cond delay="indefinite"/>
-                      </p:stCondLst>
-                      <p:childTnLst>
-                        <p:par>
-                          <p:cTn id="12" fill="hold">
-                            <p:stCondLst>
-                              <p:cond delay="0"/>
-                            </p:stCondLst>
-                            <p:childTnLst>
-                              <p:par>
-                                <p:cTn id="13" presetID="1" presetClass="entr" presetSubtype="0" fill="hold" grpId="0" nodeType="clickEffect">
-                                  <p:stCondLst>
-                                    <p:cond delay="0"/>
-                                  </p:stCondLst>
-                                  <p:childTnLst>
-                                    <p:set>
-                                      <p:cBhvr>
-                                        <p:cTn id="14" dur="1" fill="hold">
-                                          <p:stCondLst>
-                                            <p:cond delay="0"/>
-                                          </p:stCondLst>
-                                        </p:cTn>
-                                        <p:tgtEl>
-                                          <p:spTgt spid="9"/>
-                                        </p:tgtEl>
-                                        <p:attrNameLst>
-                                          <p:attrName>style.visibility</p:attrName>
-                                        </p:attrNameLst>
-                                      </p:cBhvr>
-                                      <p:to>
-                                        <p:strVal val="visible"/>
-                                      </p:to>
-                                    </p:set>
-                                  </p:childTnLst>
-                                </p:cTn>
-                              </p:par>
-                            </p:childTnLst>
-                          </p:cTn>
-                        </p:par>
-                      </p:childTnLst>
-                    </p:cTn>
-                  </p:par>
-                </p:childTnLst>
-              </p:cTn>
-              <p:prevCondLst>
-                <p:cond evt="onPrev" delay="0">
-                  <p:tgtEl>
-                    <p:sldTgt/>
-                  </p:tgtEl>
-                </p:cond>
-              </p:prevCondLst>
-              <p:nextCondLst>
-                <p:cond evt="onNext" delay="0">
-                  <p:tgtEl>
-                    <p:sldTgt/>
-                  </p:tgtEl>
-                </p:cond>
-              </p:nextCondLst>
-            </p:seq>
-          </p:childTnLst>
-        </p:cTn>
-      </p:par>
-    </p:tnLst>
-    <p:bldLst>
-      <p:bldP spid="8" grpId="0" animBg="1"/>
-      <p:bldP spid="9" grpId="0" animBg="1"/>
-    </p:bldLst>
-  </p:timing>
-</p:sld>
-</file>
-
-<file path=ppt/slides/slide40.xml><?xml version="1.0" encoding="utf-8"?>
+<file path=ppt/slides/slide42.xml><?xml version="1.0" encoding="utf-8"?>
 <p:sld xmlns:a="http://schemas.openxmlformats.org/drawingml/2006/main" xmlns:r="http://schemas.openxmlformats.org/officeDocument/2006/relationships" xmlns:p="http://schemas.openxmlformats.org/presentationml/2006/main">
   <p:cSld>
     <p:spTree>
@@ -34735,7 +38563,7 @@
           <a:p>
             <a:fld id="{86CB4B4D-7CA3-9044-876B-883B54F8677D}" type="slidenum">
               <a:rPr lang="en-US" smtClean="0"/>
-              <a:t>40</a:t>
+              <a:t>42</a:t>
             </a:fld>
             <a:endParaRPr lang="en-US"/>
           </a:p>
@@ -34829,7 +38657,7 @@
 </p:sld>
 </file>
 
-<file path=ppt/slides/slide41.xml><?xml version="1.0" encoding="utf-8"?>
+<file path=ppt/slides/slide43.xml><?xml version="1.0" encoding="utf-8"?>
 <p:sld xmlns:a="http://schemas.openxmlformats.org/drawingml/2006/main" xmlns:r="http://schemas.openxmlformats.org/officeDocument/2006/relationships" xmlns:p="http://schemas.openxmlformats.org/presentationml/2006/main">
   <p:cSld>
     <p:spTree>
@@ -34905,7 +38733,7 @@
           <a:p>
             <a:fld id="{86CB4B4D-7CA3-9044-876B-883B54F8677D}" type="slidenum">
               <a:rPr lang="en-US" smtClean="0"/>
-              <a:t>41</a:t>
+              <a:t>43</a:t>
             </a:fld>
             <a:endParaRPr lang="en-US"/>
           </a:p>
@@ -36450,7 +40278,7 @@
 </p:sld>
 </file>
 
-<file path=ppt/slides/slide42.xml><?xml version="1.0" encoding="utf-8"?>
+<file path=ppt/slides/slide44.xml><?xml version="1.0" encoding="utf-8"?>
 <p:sld xmlns:a="http://schemas.openxmlformats.org/drawingml/2006/main" xmlns:r="http://schemas.openxmlformats.org/officeDocument/2006/relationships" xmlns:p="http://schemas.openxmlformats.org/presentationml/2006/main">
   <p:cSld>
     <p:spTree>
@@ -36606,7 +40434,7 @@
           <a:p>
             <a:fld id="{86CB4B4D-7CA3-9044-876B-883B54F8677D}" type="slidenum">
               <a:rPr lang="en-US" smtClean="0"/>
-              <a:t>42</a:t>
+              <a:t>44</a:t>
             </a:fld>
             <a:endParaRPr lang="en-US"/>
           </a:p>

--- a/Slides/Module 06 React Hook Patterns.pptx
+++ b/Slides/Module 06 React Hook Patterns.pptx
@@ -6218,7 +6218,7 @@
           </a:ln>
           <a:extLst>
             <a:ext uri="{C572A759-6A51-4108-AA02-DFA0A04FC94B}">
-              <ma14:wrappingTextBoxFlag xmlns:ma14="http://schemas.microsoft.com/office/mac/drawingml/2011/main" xmlns:a14="http://schemas.microsoft.com/office/drawing/2010/main" xmlns:m="http://schemas.openxmlformats.org/officeDocument/2006/math" xmlns="" val="1"/>
+              <ma14:wrappingTextBoxFlag xmlns="" xmlns:m="http://schemas.openxmlformats.org/officeDocument/2006/math" xmlns:a14="http://schemas.microsoft.com/office/drawing/2010/main" xmlns:ma14="http://schemas.microsoft.com/office/mac/drawingml/2011/main" val="1"/>
             </a:ext>
           </a:extLst>
         </p:spPr>
@@ -6329,7 +6329,7 @@
           </a:ln>
           <a:extLst>
             <a:ext uri="{C572A759-6A51-4108-AA02-DFA0A04FC94B}">
-              <ma14:wrappingTextBoxFlag xmlns:ma14="http://schemas.microsoft.com/office/mac/drawingml/2011/main" xmlns:a14="http://schemas.microsoft.com/office/drawing/2010/main" xmlns:m="http://schemas.openxmlformats.org/officeDocument/2006/math" xmlns="" val="1"/>
+              <ma14:wrappingTextBoxFlag xmlns="" xmlns:m="http://schemas.openxmlformats.org/officeDocument/2006/math" xmlns:a14="http://schemas.microsoft.com/office/drawing/2010/main" xmlns:ma14="http://schemas.microsoft.com/office/mac/drawingml/2011/main" val="1"/>
             </a:ext>
           </a:extLst>
         </p:spPr>
@@ -7220,7 +7220,7 @@
           </a:prstGeom>
           <a:extLst>
             <a:ext uri="{C572A759-6A51-4108-AA02-DFA0A04FC94B}">
-              <ma14:wrappingTextBoxFlag xmlns:ma14="http://schemas.microsoft.com/office/mac/drawingml/2011/main" xmlns:a14="http://schemas.microsoft.com/office/drawing/2010/main" xmlns:m="http://schemas.openxmlformats.org/officeDocument/2006/math" xmlns="" val="1"/>
+              <ma14:wrappingTextBoxFlag xmlns="" xmlns:m="http://schemas.openxmlformats.org/officeDocument/2006/math" xmlns:a14="http://schemas.microsoft.com/office/drawing/2010/main" xmlns:ma14="http://schemas.microsoft.com/office/mac/drawingml/2011/main" val="1"/>
             </a:ext>
           </a:extLst>
         </p:spPr>
@@ -7255,7 +7255,7 @@
           </a:ln>
           <a:extLst>
             <a:ext uri="{C572A759-6A51-4108-AA02-DFA0A04FC94B}">
-              <ma14:wrappingTextBoxFlag xmlns:ma14="http://schemas.microsoft.com/office/mac/drawingml/2011/main" xmlns:a14="http://schemas.microsoft.com/office/drawing/2010/main" xmlns:m="http://schemas.openxmlformats.org/officeDocument/2006/math" xmlns="" val="1"/>
+              <ma14:wrappingTextBoxFlag xmlns="" xmlns:m="http://schemas.openxmlformats.org/officeDocument/2006/math" xmlns:a14="http://schemas.microsoft.com/office/drawing/2010/main" xmlns:ma14="http://schemas.microsoft.com/office/mac/drawingml/2011/main" val="1"/>
             </a:ext>
           </a:extLst>
         </p:spPr>
@@ -28642,7 +28642,7 @@
           </a:prstGeom>
           <a:extLst>
             <a:ext uri="{C572A759-6A51-4108-AA02-DFA0A04FC94B}">
-              <ma14:wrappingTextBoxFlag xmlns:ma14="http://schemas.microsoft.com/office/mac/drawingml/2011/main" xmlns:a14="http://schemas.microsoft.com/office/drawing/2010/main" xmlns:m="http://schemas.openxmlformats.org/officeDocument/2006/math" xmlns="" val="1"/>
+              <ma14:wrappingTextBoxFlag xmlns="" xmlns:m="http://schemas.openxmlformats.org/officeDocument/2006/math" xmlns:a14="http://schemas.microsoft.com/office/drawing/2010/main" xmlns:ma14="http://schemas.microsoft.com/office/mac/drawingml/2011/main" val="1"/>
             </a:ext>
           </a:extLst>
         </p:spPr>
@@ -28683,7 +28683,7 @@
           </a:ln>
           <a:extLst>
             <a:ext uri="{C572A759-6A51-4108-AA02-DFA0A04FC94B}">
-              <ma14:wrappingTextBoxFlag xmlns:ma14="http://schemas.microsoft.com/office/mac/drawingml/2011/main" xmlns:a14="http://schemas.microsoft.com/office/drawing/2010/main" xmlns:m="http://schemas.openxmlformats.org/officeDocument/2006/math" xmlns="" val="1"/>
+              <ma14:wrappingTextBoxFlag xmlns="" xmlns:m="http://schemas.openxmlformats.org/officeDocument/2006/math" xmlns:a14="http://schemas.microsoft.com/office/drawing/2010/main" xmlns:ma14="http://schemas.microsoft.com/office/mac/drawingml/2011/main" val="1"/>
             </a:ext>
           </a:extLst>
         </p:spPr>
@@ -28973,7 +28973,7 @@
             <a:effectLst/>
             <a:extLst>
               <a:ext uri="{C572A759-6A51-4108-AA02-DFA0A04FC94B}">
-                <ma14:wrappingTextBoxFlag xmlns:ma14="http://schemas.microsoft.com/office/mac/drawingml/2011/main" xmlns:a14="http://schemas.microsoft.com/office/drawing/2010/main" xmlns:m="http://schemas.openxmlformats.org/officeDocument/2006/math" xmlns="" val="1"/>
+                <ma14:wrappingTextBoxFlag xmlns="" xmlns:m="http://schemas.openxmlformats.org/officeDocument/2006/math" xmlns:a14="http://schemas.microsoft.com/office/drawing/2010/main" xmlns:ma14="http://schemas.microsoft.com/office/mac/drawingml/2011/main" val="1"/>
               </a:ext>
             </a:extLst>
           </p:spPr>
@@ -29200,7 +29200,7 @@
           </a:prstGeom>
           <a:extLst>
             <a:ext uri="{C572A759-6A51-4108-AA02-DFA0A04FC94B}">
-              <ma14:wrappingTextBoxFlag xmlns:ma14="http://schemas.microsoft.com/office/mac/drawingml/2011/main" xmlns:a14="http://schemas.microsoft.com/office/drawing/2010/main" xmlns:m="http://schemas.openxmlformats.org/officeDocument/2006/math" xmlns="" val="1"/>
+              <ma14:wrappingTextBoxFlag xmlns="" xmlns:m="http://schemas.openxmlformats.org/officeDocument/2006/math" xmlns:a14="http://schemas.microsoft.com/office/drawing/2010/main" xmlns:ma14="http://schemas.microsoft.com/office/mac/drawingml/2011/main" val="1"/>
             </a:ext>
           </a:extLst>
         </p:spPr>
@@ -29959,7 +29959,7 @@
           </a:ln>
           <a:extLst>
             <a:ext uri="{C572A759-6A51-4108-AA02-DFA0A04FC94B}">
-              <ma14:wrappingTextBoxFlag xmlns:ma14="http://schemas.microsoft.com/office/mac/drawingml/2011/main" xmlns:a14="http://schemas.microsoft.com/office/drawing/2010/main" xmlns:m="http://schemas.openxmlformats.org/officeDocument/2006/math" xmlns="" val="1"/>
+              <ma14:wrappingTextBoxFlag xmlns="" xmlns:m="http://schemas.openxmlformats.org/officeDocument/2006/math" xmlns:a14="http://schemas.microsoft.com/office/drawing/2010/main" xmlns:ma14="http://schemas.microsoft.com/office/mac/drawingml/2011/main" val="1"/>
             </a:ext>
           </a:extLst>
         </p:spPr>
@@ -30421,7 +30421,7 @@
 </file>
 
 <file path=ppt/slides/slide35.xml><?xml version="1.0" encoding="utf-8"?>
-<p:sld xmlns:a="http://schemas.openxmlformats.org/drawingml/2006/main" xmlns:r="http://schemas.openxmlformats.org/officeDocument/2006/relationships" xmlns:p="http://schemas.openxmlformats.org/presentationml/2006/main">
+<p:sld xmlns:a="http://schemas.openxmlformats.org/drawingml/2006/main" xmlns:r="http://schemas.openxmlformats.org/officeDocument/2006/relationships" xmlns:p="http://schemas.openxmlformats.org/presentationml/2006/main" show="0">
   <p:cSld>
     <p:spTree>
       <p:nvGrpSpPr>
@@ -31773,7 +31773,7 @@
 </file>
 
 <file path=ppt/slides/slide36.xml><?xml version="1.0" encoding="utf-8"?>
-<p:sld xmlns:a="http://schemas.openxmlformats.org/drawingml/2006/main" xmlns:r="http://schemas.openxmlformats.org/officeDocument/2006/relationships" xmlns:p="http://schemas.openxmlformats.org/presentationml/2006/main">
+<p:sld xmlns:a="http://schemas.openxmlformats.org/drawingml/2006/main" xmlns:r="http://schemas.openxmlformats.org/officeDocument/2006/relationships" xmlns:p="http://schemas.openxmlformats.org/presentationml/2006/main" show="0">
   <p:cSld>
     <p:spTree>
       <p:nvGrpSpPr>
@@ -36362,7 +36362,7 @@
           </a:prstGeom>
           <a:extLst>
             <a:ext uri="{C572A759-6A51-4108-AA02-DFA0A04FC94B}">
-              <ma14:wrappingTextBoxFlag xmlns="" xmlns:m="http://schemas.openxmlformats.org/officeDocument/2006/math" xmlns:a14="http://schemas.microsoft.com/office/drawing/2010/main" xmlns:ma14="http://schemas.microsoft.com/office/mac/drawingml/2011/main" val="1"/>
+              <ma14:wrappingTextBoxFlag xmlns:ma14="http://schemas.microsoft.com/office/mac/drawingml/2011/main" xmlns:a14="http://schemas.microsoft.com/office/drawing/2010/main" xmlns:m="http://schemas.openxmlformats.org/officeDocument/2006/math" xmlns="" val="1"/>
             </a:ext>
           </a:extLst>
         </p:spPr>

--- a/Slides/Module 06 React Hook Patterns.pptx
+++ b/Slides/Module 06 React Hook Patterns.pptx
@@ -361,21 +361,12 @@
 </p:presentation>
 </file>
 
-<file path=ppt/revisionInfo.xml><?xml version="1.0" encoding="utf-8"?>
-<p1510:revInfo xmlns:a="http://schemas.openxmlformats.org/drawingml/2006/main" xmlns:r="http://schemas.openxmlformats.org/officeDocument/2006/relationships" xmlns:p1510="http://schemas.microsoft.com/office/powerpoint/2015/10/main">
-  <p1510:revLst>
-    <p1510:client id="{D3C33F09-918A-4894-B5A7-A18AE278568D}" v="4" dt="2026-09-20T17:21:33.290"/>
-    <p1510:client id="{D93C61A9-D69A-4A79-AD92-8D941EE6A321}" v="1" dt="2026-09-19T19:07:03.945"/>
-  </p1510:revLst>
-</p1510:revInfo>
-</file>
-
 <file path=ppt/changesInfos/changesInfo1.xml><?xml version="1.0" encoding="utf-8"?>
 <pc:chgInfo xmlns:a="http://schemas.openxmlformats.org/drawingml/2006/main" xmlns:r="http://schemas.openxmlformats.org/officeDocument/2006/relationships" xmlns:ac="http://schemas.microsoft.com/office/drawing/2013/main/command" xmlns:pc="http://schemas.microsoft.com/office/powerpoint/2013/main/command">
   <pc:docChgLst>
     <pc:chgData name="Mitchell Wand" userId="de9b44c55c049659" providerId="LiveId" clId="{7A9D5940-B2CC-47DD-AF5E-71219F1A1E26}"/>
     <pc:docChg chg="undo custSel addSld delSld modSld">
-      <pc:chgData name="Mitchell Wand" userId="de9b44c55c049659" providerId="LiveId" clId="{7A9D5940-B2CC-47DD-AF5E-71219F1A1E26}" dt="2026-09-20T17:21:33.290" v="646"/>
+      <pc:chgData name="Mitchell Wand" userId="de9b44c55c049659" providerId="LiveId" clId="{7A9D5940-B2CC-47DD-AF5E-71219F1A1E26}" dt="2026-09-25T23:40:01.247" v="677" actId="20577"/>
       <pc:docMkLst>
         <pc:docMk/>
       </pc:docMkLst>
@@ -385,14 +376,6 @@
           <pc:docMk/>
           <pc:sldMk cId="3886866829" sldId="424"/>
         </pc:sldMkLst>
-        <pc:spChg chg="del mod">
-          <ac:chgData name="Mitchell Wand" userId="de9b44c55c049659" providerId="LiveId" clId="{7A9D5940-B2CC-47DD-AF5E-71219F1A1E26}" dt="2026-09-20T14:38:40.092" v="571"/>
-          <ac:spMkLst>
-            <pc:docMk/>
-            <pc:sldMk cId="3886866829" sldId="424"/>
-            <ac:spMk id="4" creationId="{9C19FF8C-A42C-CC34-EA75-79137BA17575}"/>
-          </ac:spMkLst>
-        </pc:spChg>
         <pc:spChg chg="mod">
           <ac:chgData name="Mitchell Wand" userId="de9b44c55c049659" providerId="LiveId" clId="{7A9D5940-B2CC-47DD-AF5E-71219F1A1E26}" dt="2026-09-20T14:50:54.593" v="641" actId="6549"/>
           <ac:spMkLst>
@@ -460,22 +443,6 @@
             <pc:docMk/>
             <pc:sldMk cId="1941355569" sldId="437"/>
             <ac:picMk id="5" creationId="{FDC161F5-9355-5C32-07A8-05AD79375F18}"/>
-          </ac:picMkLst>
-        </pc:picChg>
-        <pc:picChg chg="del">
-          <ac:chgData name="Mitchell Wand" userId="de9b44c55c049659" providerId="LiveId" clId="{7A9D5940-B2CC-47DD-AF5E-71219F1A1E26}" dt="2026-09-20T13:59:18.126" v="536" actId="478"/>
-          <ac:picMkLst>
-            <pc:docMk/>
-            <pc:sldMk cId="1941355569" sldId="437"/>
-            <ac:picMk id="12" creationId="{E4A5DC3F-DA64-F3F4-C259-D31E218E9593}"/>
-          </ac:picMkLst>
-        </pc:picChg>
-        <pc:picChg chg="del">
-          <ac:chgData name="Mitchell Wand" userId="de9b44c55c049659" providerId="LiveId" clId="{7A9D5940-B2CC-47DD-AF5E-71219F1A1E26}" dt="2026-09-20T13:59:10.382" v="535" actId="478"/>
-          <ac:picMkLst>
-            <pc:docMk/>
-            <pc:sldMk cId="1941355569" sldId="437"/>
-            <ac:picMk id="14" creationId="{F547D154-4707-10B5-D8F5-17477BA742A7}"/>
           </ac:picMkLst>
         </pc:picChg>
       </pc:sldChg>
@@ -620,14 +587,6 @@
           <pc:docMk/>
           <pc:sldMk cId="2880220246" sldId="553"/>
         </pc:sldMkLst>
-        <pc:spChg chg="del">
-          <ac:chgData name="Mitchell Wand" userId="de9b44c55c049659" providerId="LiveId" clId="{7A9D5940-B2CC-47DD-AF5E-71219F1A1E26}" dt="2026-09-19T20:32:02.920" v="440" actId="478"/>
-          <ac:spMkLst>
-            <pc:docMk/>
-            <pc:sldMk cId="2880220246" sldId="553"/>
-            <ac:spMk id="2" creationId="{D9AE3514-1C8A-A1E1-A312-57C9EAF0B9E8}"/>
-          </ac:spMkLst>
-        </pc:spChg>
       </pc:sldChg>
       <pc:sldChg chg="modSp mod">
         <pc:chgData name="Mitchell Wand" userId="de9b44c55c049659" providerId="LiveId" clId="{7A9D5940-B2CC-47DD-AF5E-71219F1A1E26}" dt="2026-09-19T19:46:42.389" v="438" actId="20577"/>
@@ -666,6 +625,21 @@
           <pc:docMk/>
           <pc:sldMk cId="1926389287" sldId="557"/>
         </pc:sldMkLst>
+      </pc:sldChg>
+      <pc:sldChg chg="addSp modSp mod">
+        <pc:chgData name="Mitchell Wand" userId="de9b44c55c049659" providerId="LiveId" clId="{7A9D5940-B2CC-47DD-AF5E-71219F1A1E26}" dt="2026-09-25T23:40:01.247" v="677" actId="20577"/>
+        <pc:sldMkLst>
+          <pc:docMk/>
+          <pc:sldMk cId="3556445762" sldId="561"/>
+        </pc:sldMkLst>
+        <pc:spChg chg="add mod">
+          <ac:chgData name="Mitchell Wand" userId="de9b44c55c049659" providerId="LiveId" clId="{7A9D5940-B2CC-47DD-AF5E-71219F1A1E26}" dt="2026-09-25T23:40:01.247" v="677" actId="20577"/>
+          <ac:spMkLst>
+            <pc:docMk/>
+            <pc:sldMk cId="3556445762" sldId="561"/>
+            <ac:spMk id="6" creationId="{F7942C21-7C6F-D75E-27FC-69E811B88B96}"/>
+          </ac:spMkLst>
+        </pc:spChg>
       </pc:sldChg>
     </pc:docChg>
   </pc:docChgLst>
@@ -4758,7 +4732,7 @@
           <a:p>
             <a:fld id="{07C7BFD4-467E-4EDE-93EA-052F5B39A4E5}" type="datetime1">
               <a:rPr lang="en-US" smtClean="0"/>
-              <a:t>9/20/2026</a:t>
+              <a:t>9/25/2026</a:t>
             </a:fld>
             <a:endParaRPr lang="en-US"/>
           </a:p>
@@ -6218,7 +6192,7 @@
           </a:ln>
           <a:extLst>
             <a:ext uri="{C572A759-6A51-4108-AA02-DFA0A04FC94B}">
-              <ma14:wrappingTextBoxFlag xmlns="" xmlns:m="http://schemas.openxmlformats.org/officeDocument/2006/math" xmlns:a14="http://schemas.microsoft.com/office/drawing/2010/main" xmlns:ma14="http://schemas.microsoft.com/office/mac/drawingml/2011/main" val="1"/>
+              <ma14:wrappingTextBoxFlag xmlns:ma14="http://schemas.microsoft.com/office/mac/drawingml/2011/main" xmlns:a14="http://schemas.microsoft.com/office/drawing/2010/main" xmlns:m="http://schemas.openxmlformats.org/officeDocument/2006/math" xmlns="" val="1"/>
             </a:ext>
           </a:extLst>
         </p:spPr>
@@ -6329,7 +6303,7 @@
           </a:ln>
           <a:extLst>
             <a:ext uri="{C572A759-6A51-4108-AA02-DFA0A04FC94B}">
-              <ma14:wrappingTextBoxFlag xmlns="" xmlns:m="http://schemas.openxmlformats.org/officeDocument/2006/math" xmlns:a14="http://schemas.microsoft.com/office/drawing/2010/main" xmlns:ma14="http://schemas.microsoft.com/office/mac/drawingml/2011/main" val="1"/>
+              <ma14:wrappingTextBoxFlag xmlns:ma14="http://schemas.microsoft.com/office/mac/drawingml/2011/main" xmlns:a14="http://schemas.microsoft.com/office/drawing/2010/main" xmlns:m="http://schemas.openxmlformats.org/officeDocument/2006/math" xmlns="" val="1"/>
             </a:ext>
           </a:extLst>
         </p:spPr>
@@ -7220,7 +7194,7 @@
           </a:prstGeom>
           <a:extLst>
             <a:ext uri="{C572A759-6A51-4108-AA02-DFA0A04FC94B}">
-              <ma14:wrappingTextBoxFlag xmlns="" xmlns:m="http://schemas.openxmlformats.org/officeDocument/2006/math" xmlns:a14="http://schemas.microsoft.com/office/drawing/2010/main" xmlns:ma14="http://schemas.microsoft.com/office/mac/drawingml/2011/main" val="1"/>
+              <ma14:wrappingTextBoxFlag xmlns:ma14="http://schemas.microsoft.com/office/mac/drawingml/2011/main" xmlns:a14="http://schemas.microsoft.com/office/drawing/2010/main" xmlns:m="http://schemas.openxmlformats.org/officeDocument/2006/math" xmlns="" val="1"/>
             </a:ext>
           </a:extLst>
         </p:spPr>
@@ -7255,7 +7229,7 @@
           </a:ln>
           <a:extLst>
             <a:ext uri="{C572A759-6A51-4108-AA02-DFA0A04FC94B}">
-              <ma14:wrappingTextBoxFlag xmlns="" xmlns:m="http://schemas.openxmlformats.org/officeDocument/2006/math" xmlns:a14="http://schemas.microsoft.com/office/drawing/2010/main" xmlns:ma14="http://schemas.microsoft.com/office/mac/drawingml/2011/main" val="1"/>
+              <ma14:wrappingTextBoxFlag xmlns:ma14="http://schemas.microsoft.com/office/mac/drawingml/2011/main" xmlns:a14="http://schemas.microsoft.com/office/drawing/2010/main" xmlns:m="http://schemas.openxmlformats.org/officeDocument/2006/math" xmlns="" val="1"/>
             </a:ext>
           </a:extLst>
         </p:spPr>
@@ -8361,6 +8335,107 @@
               </a:rPr>
               <a:t>}</a:t>
             </a:r>
+          </a:p>
+        </p:txBody>
+      </p:sp>
+      <p:sp>
+        <p:nvSpPr>
+          <p:cNvPr id="6" name="Rectangle: Rounded Corners 5">
+            <a:extLst>
+              <a:ext uri="{FF2B5EF4-FFF2-40B4-BE49-F238E27FC236}">
+                <a16:creationId xmlns:a16="http://schemas.microsoft.com/office/drawing/2014/main" id="{F7942C21-7C6F-D75E-27FC-69E811B88B96}"/>
+              </a:ext>
+            </a:extLst>
+          </p:cNvPr>
+          <p:cNvSpPr/>
+          <p:nvPr/>
+        </p:nvSpPr>
+        <p:spPr>
+          <a:xfrm>
+            <a:off x="6772054" y="474493"/>
+            <a:ext cx="5419945" cy="601981"/>
+          </a:xfrm>
+          <a:prstGeom prst="roundRect">
+            <a:avLst/>
+          </a:prstGeom>
+          <a:solidFill>
+            <a:schemeClr val="accent6">
+              <a:lumMod val="20000"/>
+              <a:lumOff val="80000"/>
+            </a:schemeClr>
+          </a:solidFill>
+          <a:ln>
+            <a:solidFill>
+              <a:srgbClr val="0070C0"/>
+            </a:solidFill>
+          </a:ln>
+        </p:spPr>
+        <p:style>
+          <a:lnRef idx="2">
+            <a:schemeClr val="accent1">
+              <a:shade val="50000"/>
+            </a:schemeClr>
+          </a:lnRef>
+          <a:fillRef idx="1">
+            <a:schemeClr val="accent1"/>
+          </a:fillRef>
+          <a:effectRef idx="0">
+            <a:schemeClr val="accent1"/>
+          </a:effectRef>
+          <a:fontRef idx="minor">
+            <a:schemeClr val="lt1"/>
+          </a:fontRef>
+        </p:style>
+        <p:txBody>
+          <a:bodyPr rtlCol="0" anchor="ctr"/>
+          <a:lstStyle/>
+          <a:p>
+            <a:pPr algn="ctr"/>
+            <a:r>
+              <a:rPr lang="en-US" sz="2400" dirty="0" err="1">
+                <a:solidFill>
+                  <a:schemeClr val="tx1"/>
+                </a:solidFill>
+              </a:rPr>
+              <a:t>src</a:t>
+            </a:r>
+            <a:r>
+              <a:rPr lang="en-US" sz="2400" dirty="0">
+                <a:solidFill>
+                  <a:schemeClr val="tx1"/>
+                </a:solidFill>
+              </a:rPr>
+              <a:t>/Examples/</a:t>
+            </a:r>
+            <a:r>
+              <a:rPr lang="en-US" sz="2400" dirty="0" err="1">
+                <a:solidFill>
+                  <a:schemeClr val="tx1"/>
+                </a:solidFill>
+              </a:rPr>
+              <a:t>SimpleClock</a:t>
+            </a:r>
+            <a:r>
+              <a:rPr lang="en-US" sz="2400" dirty="0">
+                <a:solidFill>
+                  <a:schemeClr val="tx1"/>
+                </a:solidFill>
+              </a:rPr>
+              <a:t>/</a:t>
+            </a:r>
+            <a:r>
+              <a:rPr lang="en-US" sz="2400" dirty="0" err="1">
+                <a:solidFill>
+                  <a:schemeClr val="tx1"/>
+                </a:solidFill>
+              </a:rPr>
+              <a:t>App.tsx</a:t>
+            </a:r>
+            <a:endParaRPr lang="en-US" sz="2400" dirty="0">
+              <a:solidFill>
+                <a:schemeClr val="tx1"/>
+              </a:solidFill>
+            </a:endParaRPr>
           </a:p>
         </p:txBody>
       </p:sp>
@@ -28642,7 +28717,7 @@
           </a:prstGeom>
           <a:extLst>
             <a:ext uri="{C572A759-6A51-4108-AA02-DFA0A04FC94B}">
-              <ma14:wrappingTextBoxFlag xmlns="" xmlns:m="http://schemas.openxmlformats.org/officeDocument/2006/math" xmlns:a14="http://schemas.microsoft.com/office/drawing/2010/main" xmlns:ma14="http://schemas.microsoft.com/office/mac/drawingml/2011/main" val="1"/>
+              <ma14:wrappingTextBoxFlag xmlns:ma14="http://schemas.microsoft.com/office/mac/drawingml/2011/main" xmlns:a14="http://schemas.microsoft.com/office/drawing/2010/main" xmlns:m="http://schemas.openxmlformats.org/officeDocument/2006/math" xmlns="" val="1"/>
             </a:ext>
           </a:extLst>
         </p:spPr>
@@ -28683,7 +28758,7 @@
           </a:ln>
           <a:extLst>
             <a:ext uri="{C572A759-6A51-4108-AA02-DFA0A04FC94B}">
-              <ma14:wrappingTextBoxFlag xmlns="" xmlns:m="http://schemas.openxmlformats.org/officeDocument/2006/math" xmlns:a14="http://schemas.microsoft.com/office/drawing/2010/main" xmlns:ma14="http://schemas.microsoft.com/office/mac/drawingml/2011/main" val="1"/>
+              <ma14:wrappingTextBoxFlag xmlns:ma14="http://schemas.microsoft.com/office/mac/drawingml/2011/main" xmlns:a14="http://schemas.microsoft.com/office/drawing/2010/main" xmlns:m="http://schemas.openxmlformats.org/officeDocument/2006/math" xmlns="" val="1"/>
             </a:ext>
           </a:extLst>
         </p:spPr>
@@ -28973,7 +29048,7 @@
             <a:effectLst/>
             <a:extLst>
               <a:ext uri="{C572A759-6A51-4108-AA02-DFA0A04FC94B}">
-                <ma14:wrappingTextBoxFlag xmlns="" xmlns:m="http://schemas.openxmlformats.org/officeDocument/2006/math" xmlns:a14="http://schemas.microsoft.com/office/drawing/2010/main" xmlns:ma14="http://schemas.microsoft.com/office/mac/drawingml/2011/main" val="1"/>
+                <ma14:wrappingTextBoxFlag xmlns:ma14="http://schemas.microsoft.com/office/mac/drawingml/2011/main" xmlns:a14="http://schemas.microsoft.com/office/drawing/2010/main" xmlns:m="http://schemas.openxmlformats.org/officeDocument/2006/math" xmlns="" val="1"/>
               </a:ext>
             </a:extLst>
           </p:spPr>
@@ -29200,7 +29275,7 @@
           </a:prstGeom>
           <a:extLst>
             <a:ext uri="{C572A759-6A51-4108-AA02-DFA0A04FC94B}">
-              <ma14:wrappingTextBoxFlag xmlns="" xmlns:m="http://schemas.openxmlformats.org/officeDocument/2006/math" xmlns:a14="http://schemas.microsoft.com/office/drawing/2010/main" xmlns:ma14="http://schemas.microsoft.com/office/mac/drawingml/2011/main" val="1"/>
+              <ma14:wrappingTextBoxFlag xmlns:ma14="http://schemas.microsoft.com/office/mac/drawingml/2011/main" xmlns:a14="http://schemas.microsoft.com/office/drawing/2010/main" xmlns:m="http://schemas.openxmlformats.org/officeDocument/2006/math" xmlns="" val="1"/>
             </a:ext>
           </a:extLst>
         </p:spPr>
@@ -29959,7 +30034,7 @@
           </a:ln>
           <a:extLst>
             <a:ext uri="{C572A759-6A51-4108-AA02-DFA0A04FC94B}">
-              <ma14:wrappingTextBoxFlag xmlns="" xmlns:m="http://schemas.openxmlformats.org/officeDocument/2006/math" xmlns:a14="http://schemas.microsoft.com/office/drawing/2010/main" xmlns:ma14="http://schemas.microsoft.com/office/mac/drawingml/2011/main" val="1"/>
+              <ma14:wrappingTextBoxFlag xmlns:ma14="http://schemas.microsoft.com/office/mac/drawingml/2011/main" xmlns:a14="http://schemas.microsoft.com/office/drawing/2010/main" xmlns:m="http://schemas.openxmlformats.org/officeDocument/2006/math" xmlns="" val="1"/>
             </a:ext>
           </a:extLst>
         </p:spPr>
@@ -36362,7 +36437,7 @@
           </a:prstGeom>
           <a:extLst>
             <a:ext uri="{C572A759-6A51-4108-AA02-DFA0A04FC94B}">
-              <ma14:wrappingTextBoxFlag xmlns:ma14="http://schemas.microsoft.com/office/mac/drawingml/2011/main" xmlns:a14="http://schemas.microsoft.com/office/drawing/2010/main" xmlns:m="http://schemas.openxmlformats.org/officeDocument/2006/math" xmlns="" val="1"/>
+              <ma14:wrappingTextBoxFlag xmlns="" xmlns:m="http://schemas.openxmlformats.org/officeDocument/2006/math" xmlns:a14="http://schemas.microsoft.com/office/drawing/2010/main" xmlns:ma14="http://schemas.microsoft.com/office/mac/drawingml/2011/main" val="1"/>
             </a:ext>
           </a:extLst>
         </p:spPr>
